--- a/Documentation/Prezentācija.pptx
+++ b/Documentation/Prezentācija.pptx
@@ -5,13 +5,14 @@
     <p:sldMasterId id="2147483648" r:id="rId4"/>
   </p:sldMasterIdLst>
   <p:notesMasterIdLst>
-    <p:notesMasterId r:id="rId6"/>
+    <p:notesMasterId r:id="rId7"/>
   </p:notesMasterIdLst>
   <p:handoutMasterIdLst>
-    <p:handoutMasterId r:id="rId7"/>
+    <p:handoutMasterId r:id="rId8"/>
   </p:handoutMasterIdLst>
   <p:sldIdLst>
     <p:sldId id="256" r:id="rId5"/>
+    <p:sldId id="257" r:id="rId6"/>
   </p:sldIdLst>
   <p:sldSz cx="12192000" cy="6858000"/>
   <p:notesSz cx="6858000" cy="9144000"/>
@@ -9226,7 +9227,7 @@
         </p:nvSpPr>
         <p:spPr>
           <a:xfrm>
-            <a:off x="838200" y="2465970"/>
+            <a:off x="838200" y="568159"/>
             <a:ext cx="5739882" cy="2387600"/>
           </a:xfrm>
         </p:spPr>
@@ -9236,10 +9237,16 @@
           <a:p>
             <a:pPr rtl="0"/>
             <a:r>
-              <a:rPr lang="lv-LV" dirty="0" err="1"/>
-              <a:t>asasa</a:t>
-            </a:r>
-            <a:endParaRPr lang="lv-LV" dirty="0"/>
+              <a:rPr lang="lv-LV" dirty="0"/>
+              <a:t>2D datorspēle</a:t>
+            </a:r>
+            <a:br>
+              <a:rPr lang="lv-LV" dirty="0"/>
+            </a:br>
+            <a:r>
+              <a:rPr lang="lv-LV" dirty="0"/>
+              <a:t>«Drumstalotājs»</a:t>
+            </a:r>
           </a:p>
         </p:txBody>
       </p:sp>
@@ -9261,21 +9268,41 @@
         </p:nvSpPr>
         <p:spPr>
           <a:xfrm>
-            <a:off x="838200" y="5159827"/>
-            <a:ext cx="5739882" cy="783773"/>
+            <a:off x="838200" y="3717985"/>
+            <a:ext cx="5739882" cy="2303253"/>
           </a:xfrm>
         </p:spPr>
         <p:txBody>
           <a:bodyPr rtlCol="0">
-            <a:normAutofit fontScale="92500" lnSpcReduction="10000"/>
+            <a:normAutofit/>
           </a:bodyPr>
           <a:lstStyle/>
           <a:p>
             <a:pPr rtl="0"/>
             <a:r>
               <a:rPr lang="lv-LV" dirty="0"/>
-              <a:t>Leons Pīgoznis, 4PT</a:t>
-            </a:r>
+              <a:t>Darba autors: Leons Pīgoznis, 4PT</a:t>
+            </a:r>
+          </a:p>
+          <a:p>
+            <a:pPr rtl="0"/>
+            <a:r>
+              <a:rPr lang="lv-LV" dirty="0"/>
+              <a:t>Darba vadītājs: Kristaps </a:t>
+            </a:r>
+            <a:r>
+              <a:rPr lang="lv-LV" dirty="0" err="1"/>
+              <a:t>Rāvalds</a:t>
+            </a:r>
+            <a:endParaRPr lang="lv-LV" dirty="0"/>
+          </a:p>
+          <a:p>
+            <a:pPr rtl="0"/>
+            <a:endParaRPr lang="lv-LV" dirty="0"/>
+          </a:p>
+          <a:p>
+            <a:pPr rtl="0"/>
+            <a:endParaRPr lang="lv-LV" dirty="0"/>
           </a:p>
           <a:p>
             <a:r>
@@ -9285,10 +9312,235 @@
           </a:p>
         </p:txBody>
       </p:sp>
+      <p:pic>
+        <p:nvPicPr>
+          <p:cNvPr id="5" name="Attēls 4">
+            <a:extLst>
+              <a:ext uri="{FF2B5EF4-FFF2-40B4-BE49-F238E27FC236}">
+                <a16:creationId xmlns:a16="http://schemas.microsoft.com/office/drawing/2014/main" id="{4034DE9C-EA9C-1DA3-933F-562C49372070}"/>
+              </a:ext>
+            </a:extLst>
+          </p:cNvPr>
+          <p:cNvPicPr>
+            <a:picLocks noChangeAspect="1"/>
+          </p:cNvPicPr>
+          <p:nvPr/>
+        </p:nvPicPr>
+        <p:blipFill>
+          <a:blip r:embed="rId3"/>
+          <a:stretch>
+            <a:fillRect/>
+          </a:stretch>
+        </p:blipFill>
+        <p:spPr>
+          <a:xfrm>
+            <a:off x="9058195" y="3717985"/>
+            <a:ext cx="2785873" cy="2785873"/>
+          </a:xfrm>
+          <a:prstGeom prst="rect">
+            <a:avLst/>
+          </a:prstGeom>
+        </p:spPr>
+      </p:pic>
+      <p:pic>
+        <p:nvPicPr>
+          <p:cNvPr id="9" name="Attēls 8">
+            <a:extLst>
+              <a:ext uri="{FF2B5EF4-FFF2-40B4-BE49-F238E27FC236}">
+                <a16:creationId xmlns:a16="http://schemas.microsoft.com/office/drawing/2014/main" id="{FAF11D17-8E59-0F4E-3573-B7437C0E28A3}"/>
+              </a:ext>
+            </a:extLst>
+          </p:cNvPr>
+          <p:cNvPicPr>
+            <a:picLocks noChangeAspect="1"/>
+          </p:cNvPicPr>
+          <p:nvPr/>
+        </p:nvPicPr>
+        <p:blipFill>
+          <a:blip r:embed="rId4"/>
+          <a:stretch>
+            <a:fillRect/>
+          </a:stretch>
+        </p:blipFill>
+        <p:spPr>
+          <a:xfrm>
+            <a:off x="8618199" y="-1"/>
+            <a:ext cx="3573801" cy="3502325"/>
+          </a:xfrm>
+          <a:prstGeom prst="rect">
+            <a:avLst/>
+          </a:prstGeom>
+        </p:spPr>
+      </p:pic>
     </p:spTree>
     <p:extLst>
       <p:ext uri="{BB962C8B-B14F-4D97-AF65-F5344CB8AC3E}">
         <p14:creationId xmlns:p14="http://schemas.microsoft.com/office/powerpoint/2010/main" val="1642425379"/>
+      </p:ext>
+    </p:extLst>
+  </p:cSld>
+  <p:clrMapOvr>
+    <a:masterClrMapping/>
+  </p:clrMapOvr>
+</p:sld>
+</file>
+
+<file path=ppt/slides/slide2.xml><?xml version="1.0" encoding="utf-8"?>
+<p:sld xmlns:a="http://schemas.openxmlformats.org/drawingml/2006/main" xmlns:r="http://schemas.openxmlformats.org/officeDocument/2006/relationships" xmlns:p="http://schemas.openxmlformats.org/presentationml/2006/main">
+  <p:cSld>
+    <p:spTree>
+      <p:nvGrpSpPr>
+        <p:cNvPr id="1" name=""/>
+        <p:cNvGrpSpPr/>
+        <p:nvPr/>
+      </p:nvGrpSpPr>
+      <p:grpSpPr>
+        <a:xfrm>
+          <a:off x="0" y="0"/>
+          <a:ext cx="0" cy="0"/>
+          <a:chOff x="0" y="0"/>
+          <a:chExt cx="0" cy="0"/>
+        </a:xfrm>
+      </p:grpSpPr>
+      <p:sp>
+        <p:nvSpPr>
+          <p:cNvPr id="2" name="Virsraksts 1">
+            <a:extLst>
+              <a:ext uri="{FF2B5EF4-FFF2-40B4-BE49-F238E27FC236}">
+                <a16:creationId xmlns:a16="http://schemas.microsoft.com/office/drawing/2014/main" id="{250554FD-FA69-CCB3-A56B-C51FA0D6A5BA}"/>
+              </a:ext>
+            </a:extLst>
+          </p:cNvPr>
+          <p:cNvSpPr>
+            <a:spLocks noGrp="1"/>
+          </p:cNvSpPr>
+          <p:nvPr>
+            <p:ph type="title"/>
+          </p:nvPr>
+        </p:nvSpPr>
+        <p:spPr/>
+        <p:txBody>
+          <a:bodyPr/>
+          <a:lstStyle/>
+          <a:p>
+            <a:r>
+              <a:rPr lang="lv-LV" dirty="0"/>
+              <a:t>Ievads</a:t>
+            </a:r>
+          </a:p>
+        </p:txBody>
+      </p:sp>
+      <p:sp>
+        <p:nvSpPr>
+          <p:cNvPr id="11" name="Teksta vietturis 10">
+            <a:extLst>
+              <a:ext uri="{FF2B5EF4-FFF2-40B4-BE49-F238E27FC236}">
+                <a16:creationId xmlns:a16="http://schemas.microsoft.com/office/drawing/2014/main" id="{F442220C-BE25-702A-DD4C-442BBE97F672}"/>
+              </a:ext>
+            </a:extLst>
+          </p:cNvPr>
+          <p:cNvSpPr>
+            <a:spLocks noGrp="1"/>
+          </p:cNvSpPr>
+          <p:nvPr>
+            <p:ph type="body" sz="quarter" idx="52"/>
+          </p:nvPr>
+        </p:nvSpPr>
+        <p:spPr>
+          <a:xfrm>
+            <a:off x="5314949" y="365125"/>
+            <a:ext cx="6600825" cy="5740400"/>
+          </a:xfrm>
+        </p:spPr>
+        <p:txBody>
+          <a:bodyPr>
+            <a:normAutofit/>
+          </a:bodyPr>
+          <a:lstStyle/>
+          <a:p>
+            <a:pPr marL="457200" indent="-457200">
+              <a:buFont typeface="Arial" panose="020B0604020202020204" pitchFamily="34" charset="0"/>
+              <a:buChar char="•"/>
+            </a:pPr>
+            <a:r>
+              <a:rPr lang="lv-LV" sz="2800" dirty="0"/>
+              <a:t>Liels </a:t>
+            </a:r>
+            <a:r>
+              <a:rPr lang="lv-LV" sz="2800"/>
+              <a:t>klāsts simulāciju;</a:t>
+            </a:r>
+          </a:p>
+          <a:p>
+            <a:pPr marL="457200" indent="-457200">
+              <a:buFont typeface="Arial" panose="020B0604020202020204" pitchFamily="34" charset="0"/>
+              <a:buChar char="•"/>
+            </a:pPr>
+            <a:endParaRPr lang="lv-LV" sz="2800" dirty="0"/>
+          </a:p>
+        </p:txBody>
+      </p:sp>
+      <p:sp>
+        <p:nvSpPr>
+          <p:cNvPr id="16" name="Teksta vietturis 15">
+            <a:extLst>
+              <a:ext uri="{FF2B5EF4-FFF2-40B4-BE49-F238E27FC236}">
+                <a16:creationId xmlns:a16="http://schemas.microsoft.com/office/drawing/2014/main" id="{67296821-B182-FD8A-8B92-715EA944DE04}"/>
+              </a:ext>
+            </a:extLst>
+          </p:cNvPr>
+          <p:cNvSpPr>
+            <a:spLocks noGrp="1"/>
+          </p:cNvSpPr>
+          <p:nvPr>
+            <p:ph type="body" sz="quarter" idx="57"/>
+          </p:nvPr>
+        </p:nvSpPr>
+        <p:spPr/>
+        <p:txBody>
+          <a:bodyPr>
+            <a:normAutofit/>
+          </a:bodyPr>
+          <a:lstStyle/>
+          <a:p>
+            <a:endParaRPr lang="lv-LV" sz="2000" dirty="0"/>
+          </a:p>
+        </p:txBody>
+      </p:sp>
+      <p:sp>
+        <p:nvSpPr>
+          <p:cNvPr id="19" name="Slaida numura vietturis 18">
+            <a:extLst>
+              <a:ext uri="{FF2B5EF4-FFF2-40B4-BE49-F238E27FC236}">
+                <a16:creationId xmlns:a16="http://schemas.microsoft.com/office/drawing/2014/main" id="{48203B82-43EA-B57C-93AF-406D3B68E23C}"/>
+              </a:ext>
+            </a:extLst>
+          </p:cNvPr>
+          <p:cNvSpPr>
+            <a:spLocks noGrp="1"/>
+          </p:cNvSpPr>
+          <p:nvPr>
+            <p:ph type="sldNum" sz="quarter" idx="12"/>
+          </p:nvPr>
+        </p:nvSpPr>
+        <p:spPr/>
+        <p:txBody>
+          <a:bodyPr/>
+          <a:lstStyle/>
+          <a:p>
+            <a:fld id="{B5CEABB6-07DC-46E8-9B57-56EC44A396E5}" type="slidenum">
+              <a:rPr lang="lv-LV" noProof="0" smtClean="0"/>
+              <a:pPr/>
+              <a:t>2</a:t>
+            </a:fld>
+            <a:endParaRPr lang="lv-LV" noProof="0"/>
+          </a:p>
+        </p:txBody>
+      </p:sp>
+    </p:spTree>
+    <p:extLst>
+      <p:ext uri="{BB962C8B-B14F-4D97-AF65-F5344CB8AC3E}">
+        <p14:creationId xmlns:p14="http://schemas.microsoft.com/office/powerpoint/2010/main" val="737429254"/>
       </p:ext>
     </p:extLst>
   </p:cSld>

--- a/Documentation/Prezentācija.pptx
+++ b/Documentation/Prezentācija.pptx
@@ -5,14 +5,20 @@
     <p:sldMasterId id="2147483648" r:id="rId4"/>
   </p:sldMasterIdLst>
   <p:notesMasterIdLst>
-    <p:notesMasterId r:id="rId7"/>
+    <p:notesMasterId r:id="rId13"/>
   </p:notesMasterIdLst>
   <p:handoutMasterIdLst>
-    <p:handoutMasterId r:id="rId8"/>
+    <p:handoutMasterId r:id="rId14"/>
   </p:handoutMasterIdLst>
   <p:sldIdLst>
     <p:sldId id="256" r:id="rId5"/>
     <p:sldId id="257" r:id="rId6"/>
+    <p:sldId id="258" r:id="rId7"/>
+    <p:sldId id="259" r:id="rId8"/>
+    <p:sldId id="260" r:id="rId9"/>
+    <p:sldId id="261" r:id="rId10"/>
+    <p:sldId id="262" r:id="rId11"/>
+    <p:sldId id="263" r:id="rId12"/>
   </p:sldIdLst>
   <p:sldSz cx="12192000" cy="6858000"/>
   <p:notesSz cx="6858000" cy="9144000"/>
@@ -230,7 +236,7 @@
             <a:pPr rtl="0"/>
             <a:fld id="{2340BE89-99F8-4DEA-A196-98AA103604A9}" type="datetime1">
               <a:rPr lang="lv-LV" smtClean="0"/>
-              <a:t>09.06.2026</a:t>
+              <a:t>12.06.2026</a:t>
             </a:fld>
             <a:endParaRPr lang="lv-LV"/>
           </a:p>
@@ -412,7 +418,7 @@
             <a:pPr rtl="0"/>
             <a:fld id="{0AA59361-939B-4603-8A5C-F5C08C81B8CD}" type="datetime1">
               <a:rPr lang="lv-LV" noProof="0" smtClean="0"/>
-              <a:t>09.06.2026</a:t>
+              <a:t>12.06.2026</a:t>
             </a:fld>
             <a:endParaRPr lang="lv-LV" noProof="0"/>
           </a:p>
@@ -1659,143 +1665,6 @@
           </a:fontRef>
         </p:style>
       </p:cxnSp>
-      <p:sp>
-        <p:nvSpPr>
-          <p:cNvPr id="41" name="Datuma vietturis 4">
-            <a:extLst>
-              <a:ext uri="{FF2B5EF4-FFF2-40B4-BE49-F238E27FC236}">
-                <a16:creationId xmlns:a16="http://schemas.microsoft.com/office/drawing/2014/main" id="{BA4BCF05-CDFF-42C0-A406-D762B747C799}"/>
-              </a:ext>
-            </a:extLst>
-          </p:cNvPr>
-          <p:cNvSpPr>
-            <a:spLocks noGrp="1"/>
-          </p:cNvSpPr>
-          <p:nvPr>
-            <p:ph type="dt" sz="half" idx="10"/>
-          </p:nvPr>
-        </p:nvSpPr>
-        <p:spPr>
-          <a:xfrm>
-            <a:off x="838200" y="6356350"/>
-            <a:ext cx="2743200" cy="365125"/>
-          </a:xfrm>
-        </p:spPr>
-        <p:txBody>
-          <a:bodyPr rtlCol="0"/>
-          <a:lstStyle>
-            <a:lvl1pPr>
-              <a:defRPr sz="900">
-                <a:solidFill>
-                  <a:schemeClr val="accent5">
-                    <a:lumMod val="75000"/>
-                  </a:schemeClr>
-                </a:solidFill>
-                <a:latin typeface="Calibri" panose="020F0502020204030204" pitchFamily="34" charset="0"/>
-                <a:cs typeface="Calibri" panose="020F0502020204030204" pitchFamily="34" charset="0"/>
-              </a:defRPr>
-            </a:lvl1pPr>
-          </a:lstStyle>
-          <a:p>
-            <a:r>
-              <a:rPr lang="lv-LV" noProof="0"/>
-              <a:t>7/29/20XX</a:t>
-            </a:r>
-          </a:p>
-        </p:txBody>
-      </p:sp>
-      <p:sp>
-        <p:nvSpPr>
-          <p:cNvPr id="42" name="Kājenes vietturis 5">
-            <a:extLst>
-              <a:ext uri="{FF2B5EF4-FFF2-40B4-BE49-F238E27FC236}">
-                <a16:creationId xmlns:a16="http://schemas.microsoft.com/office/drawing/2014/main" id="{FE043986-6365-4919-A13C-B1086DCFF1BD}"/>
-              </a:ext>
-            </a:extLst>
-          </p:cNvPr>
-          <p:cNvSpPr>
-            <a:spLocks noGrp="1"/>
-          </p:cNvSpPr>
-          <p:nvPr>
-            <p:ph type="ftr" sz="quarter" idx="11"/>
-          </p:nvPr>
-        </p:nvSpPr>
-        <p:spPr>
-          <a:xfrm>
-            <a:off x="4038600" y="6356350"/>
-            <a:ext cx="4114800" cy="365125"/>
-          </a:xfrm>
-        </p:spPr>
-        <p:txBody>
-          <a:bodyPr rtlCol="0"/>
-          <a:lstStyle>
-            <a:lvl1pPr>
-              <a:defRPr sz="900">
-                <a:solidFill>
-                  <a:schemeClr val="accent5">
-                    <a:lumMod val="75000"/>
-                  </a:schemeClr>
-                </a:solidFill>
-                <a:latin typeface="Calibri" panose="020F0502020204030204" pitchFamily="34" charset="0"/>
-                <a:cs typeface="Calibri" panose="020F0502020204030204" pitchFamily="34" charset="0"/>
-              </a:defRPr>
-            </a:lvl1pPr>
-          </a:lstStyle>
-          <a:p>
-            <a:r>
-              <a:rPr lang="lv-LV" noProof="0"/>
-              <a:t>Darbinieku orientācija</a:t>
-            </a:r>
-          </a:p>
-        </p:txBody>
-      </p:sp>
-      <p:sp>
-        <p:nvSpPr>
-          <p:cNvPr id="43" name="Slaida numura vietturis 6">
-            <a:extLst>
-              <a:ext uri="{FF2B5EF4-FFF2-40B4-BE49-F238E27FC236}">
-                <a16:creationId xmlns:a16="http://schemas.microsoft.com/office/drawing/2014/main" id="{4FD22B22-DA9C-4B3F-A67F-D07291278BE6}"/>
-              </a:ext>
-            </a:extLst>
-          </p:cNvPr>
-          <p:cNvSpPr>
-            <a:spLocks noGrp="1"/>
-          </p:cNvSpPr>
-          <p:nvPr>
-            <p:ph type="sldNum" sz="quarter" idx="12"/>
-          </p:nvPr>
-        </p:nvSpPr>
-        <p:spPr>
-          <a:xfrm>
-            <a:off x="8610600" y="6356350"/>
-            <a:ext cx="2743200" cy="365125"/>
-          </a:xfrm>
-        </p:spPr>
-        <p:txBody>
-          <a:bodyPr rtlCol="0"/>
-          <a:lstStyle>
-            <a:lvl1pPr>
-              <a:defRPr sz="900">
-                <a:solidFill>
-                  <a:schemeClr val="accent5">
-                    <a:lumMod val="75000"/>
-                  </a:schemeClr>
-                </a:solidFill>
-                <a:latin typeface="Calibri" panose="020F0502020204030204" pitchFamily="34" charset="0"/>
-                <a:cs typeface="Calibri" panose="020F0502020204030204" pitchFamily="34" charset="0"/>
-              </a:defRPr>
-            </a:lvl1pPr>
-          </a:lstStyle>
-          <a:p>
-            <a:fld id="{B5CEABB6-07DC-46E8-9B57-56EC44A396E5}" type="slidenum">
-              <a:rPr lang="lv-LV" noProof="0" smtClean="0"/>
-              <a:pPr/>
-              <a:t>‹#›</a:t>
-            </a:fld>
-            <a:endParaRPr lang="lv-LV" noProof="0"/>
-          </a:p>
-        </p:txBody>
-      </p:sp>
       <p:cxnSp>
         <p:nvCxnSpPr>
           <p:cNvPr id="47" name="Taisns savienotājs 46">
@@ -2011,6 +1880,57 @@
           </a:fontRef>
         </p:style>
       </p:cxnSp>
+      <p:sp>
+        <p:nvSpPr>
+          <p:cNvPr id="3" name="Slaida numura vietturis 6">
+            <a:extLst>
+              <a:ext uri="{FF2B5EF4-FFF2-40B4-BE49-F238E27FC236}">
+                <a16:creationId xmlns:a16="http://schemas.microsoft.com/office/drawing/2014/main" id="{7B0634AA-605E-B925-50DC-2D1F08B61245}"/>
+              </a:ext>
+            </a:extLst>
+          </p:cNvPr>
+          <p:cNvSpPr>
+            <a:spLocks noGrp="1"/>
+          </p:cNvSpPr>
+          <p:nvPr>
+            <p:ph type="sldNum" sz="quarter" idx="12"/>
+          </p:nvPr>
+        </p:nvSpPr>
+        <p:spPr>
+          <a:xfrm>
+            <a:off x="8610600" y="6224270"/>
+            <a:ext cx="2743200" cy="497205"/>
+          </a:xfrm>
+          <a:prstGeom prst="rect">
+            <a:avLst/>
+          </a:prstGeom>
+        </p:spPr>
+        <p:txBody>
+          <a:bodyPr rtlCol="0"/>
+          <a:lstStyle>
+            <a:lvl1pPr>
+              <a:defRPr sz="2800">
+                <a:solidFill>
+                  <a:schemeClr val="accent4">
+                    <a:lumMod val="40000"/>
+                    <a:lumOff val="60000"/>
+                  </a:schemeClr>
+                </a:solidFill>
+                <a:latin typeface="Calibri" panose="020F0502020204030204" pitchFamily="34" charset="0"/>
+                <a:cs typeface="Calibri" panose="020F0502020204030204" pitchFamily="34" charset="0"/>
+              </a:defRPr>
+            </a:lvl1pPr>
+          </a:lstStyle>
+          <a:p>
+            <a:fld id="{B5CEABB6-07DC-46E8-9B57-56EC44A396E5}" type="slidenum">
+              <a:rPr lang="lv-LV" smtClean="0"/>
+              <a:pPr/>
+              <a:t>‹#›</a:t>
+            </a:fld>
+            <a:endParaRPr lang="lv-LV" dirty="0"/>
+          </a:p>
+        </p:txBody>
+      </p:sp>
     </p:spTree>
     <p:extLst>
       <p:ext uri="{BB962C8B-B14F-4D97-AF65-F5344CB8AC3E}">
@@ -2271,76 +2191,34 @@
       </p:sp>
       <p:sp>
         <p:nvSpPr>
-          <p:cNvPr id="7" name="Datuma vietturis 4">
-            <a:extLst>
-              <a:ext uri="{FF2B5EF4-FFF2-40B4-BE49-F238E27FC236}">
-                <a16:creationId xmlns:a16="http://schemas.microsoft.com/office/drawing/2014/main" id="{9ECA7294-D791-453A-AEDA-C7BC2C83BACB}"/>
-              </a:ext>
-            </a:extLst>
-          </p:cNvPr>
-          <p:cNvSpPr>
-            <a:spLocks noGrp="1"/>
-          </p:cNvSpPr>
-          <p:nvPr>
-            <p:ph type="dt" sz="half" idx="10"/>
-          </p:nvPr>
-        </p:nvSpPr>
-        <p:spPr>
-          <a:xfrm>
-            <a:off x="838200" y="6356350"/>
-            <a:ext cx="2743200" cy="365125"/>
-          </a:xfrm>
+          <p:cNvPr id="4" name="Slaida numura vietturis 6">
+            <a:extLst>
+              <a:ext uri="{FF2B5EF4-FFF2-40B4-BE49-F238E27FC236}">
+                <a16:creationId xmlns:a16="http://schemas.microsoft.com/office/drawing/2014/main" id="{DA1CED08-BABA-FDA7-62BB-96493856B4D0}"/>
+              </a:ext>
+            </a:extLst>
+          </p:cNvPr>
+          <p:cNvSpPr>
+            <a:spLocks noGrp="1"/>
+          </p:cNvSpPr>
+          <p:nvPr>
+            <p:ph type="sldNum" sz="quarter" idx="12"/>
+          </p:nvPr>
+        </p:nvSpPr>
+        <p:spPr>
+          <a:xfrm>
+            <a:off x="8610600" y="6224270"/>
+            <a:ext cx="2743200" cy="497205"/>
+          </a:xfrm>
+          <a:prstGeom prst="rect">
+            <a:avLst/>
+          </a:prstGeom>
         </p:spPr>
         <p:txBody>
           <a:bodyPr rtlCol="0"/>
           <a:lstStyle>
             <a:lvl1pPr>
-              <a:defRPr sz="900">
-                <a:solidFill>
-                  <a:schemeClr val="accent3">
-                    <a:lumMod val="75000"/>
-                  </a:schemeClr>
-                </a:solidFill>
-                <a:latin typeface="Calibri" panose="020F0502020204030204" pitchFamily="34" charset="0"/>
-                <a:cs typeface="Calibri" panose="020F0502020204030204" pitchFamily="34" charset="0"/>
-              </a:defRPr>
-            </a:lvl1pPr>
-          </a:lstStyle>
-          <a:p>
-            <a:r>
-              <a:rPr lang="lv-LV" noProof="0"/>
-              <a:t>7/29/20XX</a:t>
-            </a:r>
-          </a:p>
-        </p:txBody>
-      </p:sp>
-      <p:sp>
-        <p:nvSpPr>
-          <p:cNvPr id="8" name="Kājenes vietturis 5">
-            <a:extLst>
-              <a:ext uri="{FF2B5EF4-FFF2-40B4-BE49-F238E27FC236}">
-                <a16:creationId xmlns:a16="http://schemas.microsoft.com/office/drawing/2014/main" id="{E3F008A3-FE03-4B55-99DE-C66C7215F529}"/>
-              </a:ext>
-            </a:extLst>
-          </p:cNvPr>
-          <p:cNvSpPr>
-            <a:spLocks noGrp="1"/>
-          </p:cNvSpPr>
-          <p:nvPr>
-            <p:ph type="ftr" sz="quarter" idx="11"/>
-          </p:nvPr>
-        </p:nvSpPr>
-        <p:spPr>
-          <a:xfrm>
-            <a:off x="4038600" y="6356350"/>
-            <a:ext cx="4114800" cy="365125"/>
-          </a:xfrm>
-        </p:spPr>
-        <p:txBody>
-          <a:bodyPr rtlCol="0"/>
-          <a:lstStyle>
-            <a:lvl1pPr>
-              <a:defRPr sz="900">
+              <a:defRPr sz="2800">
                 <a:solidFill>
                   <a:schemeClr val="accent4">
                     <a:lumMod val="40000"/>
@@ -2353,58 +2231,12 @@
             </a:lvl1pPr>
           </a:lstStyle>
           <a:p>
-            <a:r>
-              <a:rPr lang="lv-LV" noProof="0"/>
-              <a:t>Darbinieku orientācija</a:t>
-            </a:r>
-          </a:p>
-        </p:txBody>
-      </p:sp>
-      <p:sp>
-        <p:nvSpPr>
-          <p:cNvPr id="10" name="Slaida numura vietturis 6">
-            <a:extLst>
-              <a:ext uri="{FF2B5EF4-FFF2-40B4-BE49-F238E27FC236}">
-                <a16:creationId xmlns:a16="http://schemas.microsoft.com/office/drawing/2014/main" id="{561AA2A7-90C9-48FA-A998-4CB16275ABA5}"/>
-              </a:ext>
-            </a:extLst>
-          </p:cNvPr>
-          <p:cNvSpPr>
-            <a:spLocks noGrp="1"/>
-          </p:cNvSpPr>
-          <p:nvPr>
-            <p:ph type="sldNum" sz="quarter" idx="12"/>
-          </p:nvPr>
-        </p:nvSpPr>
-        <p:spPr>
-          <a:xfrm>
-            <a:off x="8610600" y="6356350"/>
-            <a:ext cx="2743200" cy="365125"/>
-          </a:xfrm>
-        </p:spPr>
-        <p:txBody>
-          <a:bodyPr rtlCol="0"/>
-          <a:lstStyle>
-            <a:lvl1pPr>
-              <a:defRPr sz="900">
-                <a:solidFill>
-                  <a:schemeClr val="accent4">
-                    <a:lumMod val="40000"/>
-                    <a:lumOff val="60000"/>
-                  </a:schemeClr>
-                </a:solidFill>
-                <a:latin typeface="Calibri" panose="020F0502020204030204" pitchFamily="34" charset="0"/>
-                <a:cs typeface="Calibri" panose="020F0502020204030204" pitchFamily="34" charset="0"/>
-              </a:defRPr>
-            </a:lvl1pPr>
-          </a:lstStyle>
-          <a:p>
             <a:fld id="{B5CEABB6-07DC-46E8-9B57-56EC44A396E5}" type="slidenum">
-              <a:rPr lang="lv-LV" noProof="0" smtClean="0"/>
+              <a:rPr lang="lv-LV" smtClean="0"/>
               <a:pPr/>
               <a:t>‹#›</a:t>
             </a:fld>
-            <a:endParaRPr lang="lv-LV" noProof="0"/>
+            <a:endParaRPr lang="lv-LV" dirty="0"/>
           </a:p>
         </p:txBody>
       </p:sp>
@@ -2494,7 +2326,7 @@
           <a:lstStyle/>
           <a:p>
             <a:pPr algn="ctr" rtl="0"/>
-            <a:endParaRPr lang="lv-LV" noProof="0">
+            <a:endParaRPr lang="lv-LV" noProof="0" dirty="0">
               <a:latin typeface="Calibri" panose="020F0502020204030204" pitchFamily="34" charset="0"/>
               <a:cs typeface="Calibri" panose="020F0502020204030204" pitchFamily="34" charset="0"/>
             </a:endParaRPr>
@@ -2541,7 +2373,7 @@
           <a:p>
             <a:pPr rtl="0"/>
             <a:r>
-              <a:rPr lang="lv-LV" noProof="0"/>
+              <a:rPr lang="lv-LV" noProof="0" dirty="0"/>
               <a:t>Noklikšķiniet, lai rediģētu</a:t>
             </a:r>
           </a:p>
@@ -2628,35 +2460,36 @@
       </p:sp>
       <p:sp>
         <p:nvSpPr>
-          <p:cNvPr id="4" name="Datuma vietturis 3">
-            <a:extLst>
-              <a:ext uri="{FF2B5EF4-FFF2-40B4-BE49-F238E27FC236}">
-                <a16:creationId xmlns:a16="http://schemas.microsoft.com/office/drawing/2014/main" id="{74D64503-659B-472D-ABF8-01D077EB0D83}"/>
-              </a:ext>
-            </a:extLst>
-          </p:cNvPr>
-          <p:cNvSpPr>
-            <a:spLocks noGrp="1"/>
-          </p:cNvSpPr>
-          <p:nvPr>
-            <p:ph type="dt" sz="half" idx="10"/>
-          </p:nvPr>
-        </p:nvSpPr>
-        <p:spPr>
-          <a:xfrm>
-            <a:off x="838200" y="6356350"/>
-            <a:ext cx="1632857" cy="365125"/>
-          </a:xfrm>
+          <p:cNvPr id="8" name="Slaida numura vietturis 6">
+            <a:extLst>
+              <a:ext uri="{FF2B5EF4-FFF2-40B4-BE49-F238E27FC236}">
+                <a16:creationId xmlns:a16="http://schemas.microsoft.com/office/drawing/2014/main" id="{A9A1FAB7-1F83-C249-8FC4-BA7580BD1459}"/>
+              </a:ext>
+            </a:extLst>
+          </p:cNvPr>
+          <p:cNvSpPr>
+            <a:spLocks noGrp="1"/>
+          </p:cNvSpPr>
+          <p:nvPr>
+            <p:ph type="sldNum" sz="quarter" idx="12"/>
+          </p:nvPr>
+        </p:nvSpPr>
+        <p:spPr>
+          <a:xfrm>
+            <a:off x="8610600" y="6224270"/>
+            <a:ext cx="2743200" cy="497205"/>
+          </a:xfrm>
+          <a:prstGeom prst="rect">
+            <a:avLst/>
+          </a:prstGeom>
         </p:spPr>
         <p:txBody>
           <a:bodyPr rtlCol="0"/>
           <a:lstStyle>
             <a:lvl1pPr>
-              <a:defRPr sz="900">
-                <a:solidFill>
-                  <a:schemeClr val="accent5">
-                    <a:lumMod val="75000"/>
-                  </a:schemeClr>
+              <a:defRPr sz="2800">
+                <a:solidFill>
+                  <a:schemeClr val="bg1"/>
                 </a:solidFill>
                 <a:latin typeface="Calibri" panose="020F0502020204030204" pitchFamily="34" charset="0"/>
                 <a:cs typeface="Calibri" panose="020F0502020204030204" pitchFamily="34" charset="0"/>
@@ -2664,98 +2497,16 @@
             </a:lvl1pPr>
           </a:lstStyle>
           <a:p>
-            <a:r>
-              <a:rPr lang="lv-LV" noProof="0"/>
-              <a:t>7/29/20XX</a:t>
-            </a:r>
-          </a:p>
-        </p:txBody>
-      </p:sp>
-      <p:sp>
-        <p:nvSpPr>
-          <p:cNvPr id="5" name="Kājenes vietturis 4">
-            <a:extLst>
-              <a:ext uri="{FF2B5EF4-FFF2-40B4-BE49-F238E27FC236}">
-                <a16:creationId xmlns:a16="http://schemas.microsoft.com/office/drawing/2014/main" id="{FE209C12-0CED-4CD5-B463-885A793CC25E}"/>
-              </a:ext>
-            </a:extLst>
-          </p:cNvPr>
-          <p:cNvSpPr>
-            <a:spLocks noGrp="1"/>
-          </p:cNvSpPr>
-          <p:nvPr>
-            <p:ph type="ftr" sz="quarter" idx="11"/>
-          </p:nvPr>
-        </p:nvSpPr>
-        <p:spPr>
-          <a:xfrm>
-            <a:off x="2743200" y="6356350"/>
-            <a:ext cx="2514600" cy="365125"/>
-          </a:xfrm>
-        </p:spPr>
-        <p:txBody>
-          <a:bodyPr rtlCol="0"/>
-          <a:lstStyle>
-            <a:lvl1pPr algn="r">
-              <a:defRPr sz="900">
-                <a:solidFill>
-                  <a:schemeClr val="accent5">
-                    <a:lumMod val="75000"/>
-                  </a:schemeClr>
-                </a:solidFill>
-                <a:latin typeface="Calibri" panose="020F0502020204030204" pitchFamily="34" charset="0"/>
-                <a:cs typeface="Calibri" panose="020F0502020204030204" pitchFamily="34" charset="0"/>
-              </a:defRPr>
-            </a:lvl1pPr>
-          </a:lstStyle>
-          <a:p>
-            <a:r>
-              <a:rPr lang="lv-LV" noProof="0"/>
-              <a:t>Darbinieku orientācija</a:t>
-            </a:r>
-          </a:p>
-        </p:txBody>
-      </p:sp>
-      <p:sp>
-        <p:nvSpPr>
-          <p:cNvPr id="6" name="Slaida numura vietturis 5">
-            <a:extLst>
-              <a:ext uri="{FF2B5EF4-FFF2-40B4-BE49-F238E27FC236}">
-                <a16:creationId xmlns:a16="http://schemas.microsoft.com/office/drawing/2014/main" id="{1A8F03DA-3AA9-44AC-8E2B-D53B8EBEA402}"/>
-              </a:ext>
-            </a:extLst>
-          </p:cNvPr>
-          <p:cNvSpPr>
-            <a:spLocks noGrp="1"/>
-          </p:cNvSpPr>
-          <p:nvPr>
-            <p:ph type="sldNum" sz="quarter" idx="12"/>
-          </p:nvPr>
-        </p:nvSpPr>
-        <p:spPr/>
-        <p:txBody>
-          <a:bodyPr rtlCol="0"/>
-          <a:lstStyle>
-            <a:lvl1pPr>
-              <a:defRPr sz="900">
-                <a:solidFill>
-                  <a:schemeClr val="accent1">
-                    <a:lumMod val="40000"/>
-                    <a:lumOff val="60000"/>
-                  </a:schemeClr>
-                </a:solidFill>
-                <a:latin typeface="Calibri" panose="020F0502020204030204" pitchFamily="34" charset="0"/>
-                <a:cs typeface="Calibri" panose="020F0502020204030204" pitchFamily="34" charset="0"/>
-              </a:defRPr>
-            </a:lvl1pPr>
-          </a:lstStyle>
-          <a:p>
             <a:fld id="{B5CEABB6-07DC-46E8-9B57-56EC44A396E5}" type="slidenum">
-              <a:rPr lang="lv-LV" noProof="0" smtClean="0"/>
+              <a:rPr lang="lv-LV" smtClean="0"/>
               <a:pPr/>
               <a:t>‹#›</a:t>
             </a:fld>
-            <a:endParaRPr lang="lv-LV" noProof="0"/>
+            <a:endParaRPr lang="lv-LV" dirty="0">
+              <a:solidFill>
+                <a:schemeClr val="bg1"/>
+              </a:solidFill>
+            </a:endParaRPr>
           </a:p>
         </p:txBody>
       </p:sp>
@@ -3704,138 +3455,134 @@
       </p:sp>
       <p:sp>
         <p:nvSpPr>
-          <p:cNvPr id="24" name="Datuma vietturis 4">
-            <a:extLst>
-              <a:ext uri="{FF2B5EF4-FFF2-40B4-BE49-F238E27FC236}">
-                <a16:creationId xmlns:a16="http://schemas.microsoft.com/office/drawing/2014/main" id="{AD0AC7DB-F500-41DA-8326-3ED61B33F924}"/>
-              </a:ext>
-            </a:extLst>
-          </p:cNvPr>
-          <p:cNvSpPr>
-            <a:spLocks noGrp="1"/>
-          </p:cNvSpPr>
-          <p:nvPr>
-            <p:ph type="dt" sz="half" idx="10"/>
-          </p:nvPr>
-        </p:nvSpPr>
-        <p:spPr>
-          <a:xfrm>
-            <a:off x="838200" y="6356350"/>
-            <a:ext cx="2743200" cy="365125"/>
-          </a:xfrm>
-        </p:spPr>
-        <p:txBody>
-          <a:bodyPr rtlCol="0"/>
+          <p:cNvPr id="3" name="Slaida numura vietturis 6">
+            <a:extLst>
+              <a:ext uri="{FF2B5EF4-FFF2-40B4-BE49-F238E27FC236}">
+                <a16:creationId xmlns:a16="http://schemas.microsoft.com/office/drawing/2014/main" id="{FF925D13-6BA3-E432-413E-9BCA16FAF483}"/>
+              </a:ext>
+            </a:extLst>
+          </p:cNvPr>
+          <p:cNvSpPr txBox="1">
+            <a:spLocks/>
+          </p:cNvSpPr>
+          <p:nvPr userDrawn="1"/>
+        </p:nvSpPr>
+        <p:spPr>
+          <a:xfrm>
+            <a:off x="8610600" y="6224270"/>
+            <a:ext cx="2743200" cy="497205"/>
+          </a:xfrm>
+          <a:prstGeom prst="rect">
+            <a:avLst/>
+          </a:prstGeom>
+        </p:spPr>
+        <p:txBody>
+          <a:bodyPr vert="horz" lIns="91440" tIns="45720" rIns="91440" bIns="45720" rtlCol="0" anchor="ctr"/>
           <a:lstStyle>
-            <a:lvl1pPr>
-              <a:defRPr sz="900">
-                <a:solidFill>
-                  <a:schemeClr val="accent5">
-                    <a:lumMod val="75000"/>
+            <a:defPPr rtl="0">
+              <a:defRPr lang="lv-LV"/>
+            </a:defPPr>
+            <a:lvl1pPr marL="0" algn="r" defTabSz="914400" rtl="0" eaLnBrk="1" latinLnBrk="0" hangingPunct="1">
+              <a:defRPr sz="2800" kern="1200">
+                <a:solidFill>
+                  <a:schemeClr val="accent4">
+                    <a:lumMod val="40000"/>
+                    <a:lumOff val="60000"/>
                   </a:schemeClr>
                 </a:solidFill>
                 <a:latin typeface="Calibri" panose="020F0502020204030204" pitchFamily="34" charset="0"/>
+                <a:ea typeface="+mn-ea"/>
                 <a:cs typeface="Calibri" panose="020F0502020204030204" pitchFamily="34" charset="0"/>
               </a:defRPr>
             </a:lvl1pPr>
+            <a:lvl2pPr marL="457200" algn="l" defTabSz="914400" rtl="0" eaLnBrk="1" latinLnBrk="0" hangingPunct="1">
+              <a:defRPr sz="1800" kern="1200">
+                <a:solidFill>
+                  <a:schemeClr val="tx1"/>
+                </a:solidFill>
+                <a:latin typeface="+mn-lt"/>
+                <a:ea typeface="+mn-ea"/>
+                <a:cs typeface="+mn-cs"/>
+              </a:defRPr>
+            </a:lvl2pPr>
+            <a:lvl3pPr marL="914400" algn="l" defTabSz="914400" rtl="0" eaLnBrk="1" latinLnBrk="0" hangingPunct="1">
+              <a:defRPr sz="1800" kern="1200">
+                <a:solidFill>
+                  <a:schemeClr val="tx1"/>
+                </a:solidFill>
+                <a:latin typeface="+mn-lt"/>
+                <a:ea typeface="+mn-ea"/>
+                <a:cs typeface="+mn-cs"/>
+              </a:defRPr>
+            </a:lvl3pPr>
+            <a:lvl4pPr marL="1371600" algn="l" defTabSz="914400" rtl="0" eaLnBrk="1" latinLnBrk="0" hangingPunct="1">
+              <a:defRPr sz="1800" kern="1200">
+                <a:solidFill>
+                  <a:schemeClr val="tx1"/>
+                </a:solidFill>
+                <a:latin typeface="+mn-lt"/>
+                <a:ea typeface="+mn-ea"/>
+                <a:cs typeface="+mn-cs"/>
+              </a:defRPr>
+            </a:lvl4pPr>
+            <a:lvl5pPr marL="1828800" algn="l" defTabSz="914400" rtl="0" eaLnBrk="1" latinLnBrk="0" hangingPunct="1">
+              <a:defRPr sz="1800" kern="1200">
+                <a:solidFill>
+                  <a:schemeClr val="tx1"/>
+                </a:solidFill>
+                <a:latin typeface="+mn-lt"/>
+                <a:ea typeface="+mn-ea"/>
+                <a:cs typeface="+mn-cs"/>
+              </a:defRPr>
+            </a:lvl5pPr>
+            <a:lvl6pPr marL="2286000" algn="l" defTabSz="914400" rtl="0" eaLnBrk="1" latinLnBrk="0" hangingPunct="1">
+              <a:defRPr sz="1800" kern="1200">
+                <a:solidFill>
+                  <a:schemeClr val="tx1"/>
+                </a:solidFill>
+                <a:latin typeface="+mn-lt"/>
+                <a:ea typeface="+mn-ea"/>
+                <a:cs typeface="+mn-cs"/>
+              </a:defRPr>
+            </a:lvl6pPr>
+            <a:lvl7pPr marL="2743200" algn="l" defTabSz="914400" rtl="0" eaLnBrk="1" latinLnBrk="0" hangingPunct="1">
+              <a:defRPr sz="1800" kern="1200">
+                <a:solidFill>
+                  <a:schemeClr val="tx1"/>
+                </a:solidFill>
+                <a:latin typeface="+mn-lt"/>
+                <a:ea typeface="+mn-ea"/>
+                <a:cs typeface="+mn-cs"/>
+              </a:defRPr>
+            </a:lvl7pPr>
+            <a:lvl8pPr marL="3200400" algn="l" defTabSz="914400" rtl="0" eaLnBrk="1" latinLnBrk="0" hangingPunct="1">
+              <a:defRPr sz="1800" kern="1200">
+                <a:solidFill>
+                  <a:schemeClr val="tx1"/>
+                </a:solidFill>
+                <a:latin typeface="+mn-lt"/>
+                <a:ea typeface="+mn-ea"/>
+                <a:cs typeface="+mn-cs"/>
+              </a:defRPr>
+            </a:lvl8pPr>
+            <a:lvl9pPr marL="3657600" algn="l" defTabSz="914400" rtl="0" eaLnBrk="1" latinLnBrk="0" hangingPunct="1">
+              <a:defRPr sz="1800" kern="1200">
+                <a:solidFill>
+                  <a:schemeClr val="tx1"/>
+                </a:solidFill>
+                <a:latin typeface="+mn-lt"/>
+                <a:ea typeface="+mn-ea"/>
+                <a:cs typeface="+mn-cs"/>
+              </a:defRPr>
+            </a:lvl9pPr>
           </a:lstStyle>
           <a:p>
-            <a:r>
-              <a:rPr lang="lv-LV" noProof="0"/>
-              <a:t>7/29/20XX</a:t>
-            </a:r>
-          </a:p>
-        </p:txBody>
-      </p:sp>
-      <p:sp>
-        <p:nvSpPr>
-          <p:cNvPr id="25" name="Kājenes vietturis 5">
-            <a:extLst>
-              <a:ext uri="{FF2B5EF4-FFF2-40B4-BE49-F238E27FC236}">
-                <a16:creationId xmlns:a16="http://schemas.microsoft.com/office/drawing/2014/main" id="{798612DF-528A-42D7-8634-25EFF61598DF}"/>
-              </a:ext>
-            </a:extLst>
-          </p:cNvPr>
-          <p:cNvSpPr>
-            <a:spLocks noGrp="1"/>
-          </p:cNvSpPr>
-          <p:nvPr>
-            <p:ph type="ftr" sz="quarter" idx="11"/>
-          </p:nvPr>
-        </p:nvSpPr>
-        <p:spPr>
-          <a:xfrm>
-            <a:off x="4038600" y="6356350"/>
-            <a:ext cx="4114800" cy="365125"/>
-          </a:xfrm>
-        </p:spPr>
-        <p:txBody>
-          <a:bodyPr rtlCol="0"/>
-          <a:lstStyle>
-            <a:lvl1pPr>
-              <a:defRPr sz="900">
-                <a:solidFill>
-                  <a:schemeClr val="accent5">
-                    <a:lumMod val="75000"/>
-                  </a:schemeClr>
-                </a:solidFill>
-                <a:latin typeface="Calibri" panose="020F0502020204030204" pitchFamily="34" charset="0"/>
-                <a:cs typeface="Calibri" panose="020F0502020204030204" pitchFamily="34" charset="0"/>
-              </a:defRPr>
-            </a:lvl1pPr>
-          </a:lstStyle>
-          <a:p>
-            <a:r>
-              <a:rPr lang="lv-LV" noProof="0"/>
-              <a:t>Darbinieku orientācija</a:t>
-            </a:r>
-          </a:p>
-        </p:txBody>
-      </p:sp>
-      <p:sp>
-        <p:nvSpPr>
-          <p:cNvPr id="26" name="Slaida numura vietturis 6">
-            <a:extLst>
-              <a:ext uri="{FF2B5EF4-FFF2-40B4-BE49-F238E27FC236}">
-                <a16:creationId xmlns:a16="http://schemas.microsoft.com/office/drawing/2014/main" id="{1E3817B4-A707-4ACC-9CAC-E32B5E0A4F0B}"/>
-              </a:ext>
-            </a:extLst>
-          </p:cNvPr>
-          <p:cNvSpPr>
-            <a:spLocks noGrp="1"/>
-          </p:cNvSpPr>
-          <p:nvPr>
-            <p:ph type="sldNum" sz="quarter" idx="12"/>
-          </p:nvPr>
-        </p:nvSpPr>
-        <p:spPr>
-          <a:xfrm>
-            <a:off x="8610600" y="6356350"/>
-            <a:ext cx="2743200" cy="365125"/>
-          </a:xfrm>
-        </p:spPr>
-        <p:txBody>
-          <a:bodyPr rtlCol="0"/>
-          <a:lstStyle>
-            <a:lvl1pPr>
-              <a:defRPr sz="900">
-                <a:solidFill>
-                  <a:schemeClr val="accent5">
-                    <a:lumMod val="75000"/>
-                  </a:schemeClr>
-                </a:solidFill>
-                <a:latin typeface="Calibri" panose="020F0502020204030204" pitchFamily="34" charset="0"/>
-                <a:cs typeface="Calibri" panose="020F0502020204030204" pitchFamily="34" charset="0"/>
-              </a:defRPr>
-            </a:lvl1pPr>
-          </a:lstStyle>
-          <a:p>
             <a:fld id="{B5CEABB6-07DC-46E8-9B57-56EC44A396E5}" type="slidenum">
-              <a:rPr lang="lv-LV" noProof="0" smtClean="0"/>
+              <a:rPr lang="lv-LV" smtClean="0"/>
               <a:pPr/>
               <a:t>‹#›</a:t>
             </a:fld>
-            <a:endParaRPr lang="lv-LV" noProof="0"/>
+            <a:endParaRPr lang="lv-LV" dirty="0"/>
           </a:p>
         </p:txBody>
       </p:sp>
@@ -4154,76 +3901,34 @@
       </p:sp>
       <p:sp>
         <p:nvSpPr>
-          <p:cNvPr id="21" name="Datuma vietturis 4">
-            <a:extLst>
-              <a:ext uri="{FF2B5EF4-FFF2-40B4-BE49-F238E27FC236}">
-                <a16:creationId xmlns:a16="http://schemas.microsoft.com/office/drawing/2014/main" id="{2FF674D8-A0B1-4D60-AB18-A733984F7044}"/>
-              </a:ext>
-            </a:extLst>
-          </p:cNvPr>
-          <p:cNvSpPr>
-            <a:spLocks noGrp="1"/>
-          </p:cNvSpPr>
-          <p:nvPr>
-            <p:ph type="dt" sz="half" idx="10"/>
-          </p:nvPr>
-        </p:nvSpPr>
-        <p:spPr>
-          <a:xfrm>
-            <a:off x="838200" y="6356350"/>
-            <a:ext cx="2743200" cy="365125"/>
-          </a:xfrm>
+          <p:cNvPr id="23" name="Slaida numura vietturis 6">
+            <a:extLst>
+              <a:ext uri="{FF2B5EF4-FFF2-40B4-BE49-F238E27FC236}">
+                <a16:creationId xmlns:a16="http://schemas.microsoft.com/office/drawing/2014/main" id="{0D2AF818-9E4C-485A-8EA3-3BD5917D5233}"/>
+              </a:ext>
+            </a:extLst>
+          </p:cNvPr>
+          <p:cNvSpPr>
+            <a:spLocks noGrp="1"/>
+          </p:cNvSpPr>
+          <p:nvPr>
+            <p:ph type="sldNum" sz="quarter" idx="12"/>
+          </p:nvPr>
+        </p:nvSpPr>
+        <p:spPr>
+          <a:xfrm>
+            <a:off x="8610600" y="6224270"/>
+            <a:ext cx="2743200" cy="497205"/>
+          </a:xfrm>
+          <a:prstGeom prst="rect">
+            <a:avLst/>
+          </a:prstGeom>
         </p:spPr>
         <p:txBody>
           <a:bodyPr rtlCol="0"/>
           <a:lstStyle>
             <a:lvl1pPr>
-              <a:defRPr sz="900">
-                <a:solidFill>
-                  <a:schemeClr val="accent2">
-                    <a:lumMod val="75000"/>
-                  </a:schemeClr>
-                </a:solidFill>
-                <a:latin typeface="Calibri" panose="020F0502020204030204" pitchFamily="34" charset="0"/>
-                <a:cs typeface="Calibri" panose="020F0502020204030204" pitchFamily="34" charset="0"/>
-              </a:defRPr>
-            </a:lvl1pPr>
-          </a:lstStyle>
-          <a:p>
-            <a:r>
-              <a:rPr lang="lv-LV" noProof="0"/>
-              <a:t>7/29/20XX</a:t>
-            </a:r>
-          </a:p>
-        </p:txBody>
-      </p:sp>
-      <p:sp>
-        <p:nvSpPr>
-          <p:cNvPr id="22" name="Kājenes vietturis 5">
-            <a:extLst>
-              <a:ext uri="{FF2B5EF4-FFF2-40B4-BE49-F238E27FC236}">
-                <a16:creationId xmlns:a16="http://schemas.microsoft.com/office/drawing/2014/main" id="{7E0AFFFB-7406-40B3-B2D5-18288BEA52C6}"/>
-              </a:ext>
-            </a:extLst>
-          </p:cNvPr>
-          <p:cNvSpPr>
-            <a:spLocks noGrp="1"/>
-          </p:cNvSpPr>
-          <p:nvPr>
-            <p:ph type="ftr" sz="quarter" idx="11"/>
-          </p:nvPr>
-        </p:nvSpPr>
-        <p:spPr>
-          <a:xfrm>
-            <a:off x="4038600" y="6356350"/>
-            <a:ext cx="4114800" cy="365125"/>
-          </a:xfrm>
-        </p:spPr>
-        <p:txBody>
-          <a:bodyPr rtlCol="0"/>
-          <a:lstStyle>
-            <a:lvl1pPr>
-              <a:defRPr sz="900">
+              <a:defRPr sz="2800">
                 <a:solidFill>
                   <a:schemeClr val="accent4">
                     <a:lumMod val="40000"/>
@@ -4236,58 +3941,12 @@
             </a:lvl1pPr>
           </a:lstStyle>
           <a:p>
-            <a:r>
-              <a:rPr lang="lv-LV" noProof="0"/>
-              <a:t>Darbinieku orientācija</a:t>
-            </a:r>
-          </a:p>
-        </p:txBody>
-      </p:sp>
-      <p:sp>
-        <p:nvSpPr>
-          <p:cNvPr id="23" name="Slaida numura vietturis 6">
-            <a:extLst>
-              <a:ext uri="{FF2B5EF4-FFF2-40B4-BE49-F238E27FC236}">
-                <a16:creationId xmlns:a16="http://schemas.microsoft.com/office/drawing/2014/main" id="{0D2AF818-9E4C-485A-8EA3-3BD5917D5233}"/>
-              </a:ext>
-            </a:extLst>
-          </p:cNvPr>
-          <p:cNvSpPr>
-            <a:spLocks noGrp="1"/>
-          </p:cNvSpPr>
-          <p:nvPr>
-            <p:ph type="sldNum" sz="quarter" idx="12"/>
-          </p:nvPr>
-        </p:nvSpPr>
-        <p:spPr>
-          <a:xfrm>
-            <a:off x="8610600" y="6356350"/>
-            <a:ext cx="2743200" cy="365125"/>
-          </a:xfrm>
-        </p:spPr>
-        <p:txBody>
-          <a:bodyPr rtlCol="0"/>
-          <a:lstStyle>
-            <a:lvl1pPr>
-              <a:defRPr sz="900">
-                <a:solidFill>
-                  <a:schemeClr val="accent4">
-                    <a:lumMod val="40000"/>
-                    <a:lumOff val="60000"/>
-                  </a:schemeClr>
-                </a:solidFill>
-                <a:latin typeface="Calibri" panose="020F0502020204030204" pitchFamily="34" charset="0"/>
-                <a:cs typeface="Calibri" panose="020F0502020204030204" pitchFamily="34" charset="0"/>
-              </a:defRPr>
-            </a:lvl1pPr>
-          </a:lstStyle>
-          <a:p>
             <a:fld id="{B5CEABB6-07DC-46E8-9B57-56EC44A396E5}" type="slidenum">
-              <a:rPr lang="lv-LV" noProof="0" smtClean="0"/>
+              <a:rPr lang="lv-LV" smtClean="0"/>
               <a:pPr/>
               <a:t>‹#›</a:t>
             </a:fld>
-            <a:endParaRPr lang="lv-LV" noProof="0"/>
+            <a:endParaRPr lang="lv-LV" dirty="0"/>
           </a:p>
         </p:txBody>
       </p:sp>
@@ -4543,7 +4202,7 @@
           <a:lstStyle/>
           <a:p>
             <a:pPr algn="ctr" rtl="0"/>
-            <a:endParaRPr lang="lv-LV" noProof="0">
+            <a:endParaRPr lang="lv-LV" noProof="0" dirty="0">
               <a:latin typeface="Calibri" panose="020F0502020204030204" pitchFamily="34" charset="0"/>
               <a:cs typeface="Calibri" panose="020F0502020204030204" pitchFamily="34" charset="0"/>
             </a:endParaRPr>
@@ -4817,31 +4476,35 @@
       </p:sp>
       <p:sp>
         <p:nvSpPr>
-          <p:cNvPr id="14" name="Datuma vietturis 4">
-            <a:extLst>
-              <a:ext uri="{FF2B5EF4-FFF2-40B4-BE49-F238E27FC236}">
-                <a16:creationId xmlns:a16="http://schemas.microsoft.com/office/drawing/2014/main" id="{8BC6F0B0-7E88-4658-BED0-B126DDE797A0}"/>
-              </a:ext>
-            </a:extLst>
-          </p:cNvPr>
-          <p:cNvSpPr>
-            <a:spLocks noGrp="1"/>
-          </p:cNvSpPr>
-          <p:nvPr>
-            <p:ph type="dt" sz="half" idx="13"/>
-          </p:nvPr>
-        </p:nvSpPr>
-        <p:spPr>
-          <a:xfrm>
-            <a:off x="838200" y="6356350"/>
-            <a:ext cx="2743200" cy="365125"/>
-          </a:xfrm>
-        </p:spPr>
-        <p:txBody>
-          <a:bodyPr rtlCol="0"/>
+          <p:cNvPr id="4" name="Slaida numura vietturis 6">
+            <a:extLst>
+              <a:ext uri="{FF2B5EF4-FFF2-40B4-BE49-F238E27FC236}">
+                <a16:creationId xmlns:a16="http://schemas.microsoft.com/office/drawing/2014/main" id="{56CF1EF3-47EB-0FC8-C471-9E4606A593A5}"/>
+              </a:ext>
+            </a:extLst>
+          </p:cNvPr>
+          <p:cNvSpPr txBox="1">
+            <a:spLocks/>
+          </p:cNvSpPr>
+          <p:nvPr userDrawn="1"/>
+        </p:nvSpPr>
+        <p:spPr>
+          <a:xfrm>
+            <a:off x="8610600" y="6224270"/>
+            <a:ext cx="2743200" cy="497205"/>
+          </a:xfrm>
+          <a:prstGeom prst="rect">
+            <a:avLst/>
+          </a:prstGeom>
+        </p:spPr>
+        <p:txBody>
+          <a:bodyPr vert="horz" lIns="91440" tIns="45720" rIns="91440" bIns="45720" rtlCol="0" anchor="ctr"/>
           <a:lstStyle>
-            <a:lvl1pPr>
-              <a:defRPr sz="900">
+            <a:defPPr rtl="0">
+              <a:defRPr lang="lv-LV"/>
+            </a:defPPr>
+            <a:lvl1pPr marL="0" algn="r" defTabSz="914400" rtl="0" eaLnBrk="1" latinLnBrk="0" hangingPunct="1">
+              <a:defRPr sz="2800" kern="1200">
                 <a:solidFill>
                   <a:schemeClr val="accent4">
                     <a:lumMod val="40000"/>
@@ -4849,106 +4512,106 @@
                   </a:schemeClr>
                 </a:solidFill>
                 <a:latin typeface="Calibri" panose="020F0502020204030204" pitchFamily="34" charset="0"/>
+                <a:ea typeface="+mn-ea"/>
                 <a:cs typeface="Calibri" panose="020F0502020204030204" pitchFamily="34" charset="0"/>
               </a:defRPr>
             </a:lvl1pPr>
+            <a:lvl2pPr marL="457200" algn="l" defTabSz="914400" rtl="0" eaLnBrk="1" latinLnBrk="0" hangingPunct="1">
+              <a:defRPr sz="1800" kern="1200">
+                <a:solidFill>
+                  <a:schemeClr val="tx1"/>
+                </a:solidFill>
+                <a:latin typeface="+mn-lt"/>
+                <a:ea typeface="+mn-ea"/>
+                <a:cs typeface="+mn-cs"/>
+              </a:defRPr>
+            </a:lvl2pPr>
+            <a:lvl3pPr marL="914400" algn="l" defTabSz="914400" rtl="0" eaLnBrk="1" latinLnBrk="0" hangingPunct="1">
+              <a:defRPr sz="1800" kern="1200">
+                <a:solidFill>
+                  <a:schemeClr val="tx1"/>
+                </a:solidFill>
+                <a:latin typeface="+mn-lt"/>
+                <a:ea typeface="+mn-ea"/>
+                <a:cs typeface="+mn-cs"/>
+              </a:defRPr>
+            </a:lvl3pPr>
+            <a:lvl4pPr marL="1371600" algn="l" defTabSz="914400" rtl="0" eaLnBrk="1" latinLnBrk="0" hangingPunct="1">
+              <a:defRPr sz="1800" kern="1200">
+                <a:solidFill>
+                  <a:schemeClr val="tx1"/>
+                </a:solidFill>
+                <a:latin typeface="+mn-lt"/>
+                <a:ea typeface="+mn-ea"/>
+                <a:cs typeface="+mn-cs"/>
+              </a:defRPr>
+            </a:lvl4pPr>
+            <a:lvl5pPr marL="1828800" algn="l" defTabSz="914400" rtl="0" eaLnBrk="1" latinLnBrk="0" hangingPunct="1">
+              <a:defRPr sz="1800" kern="1200">
+                <a:solidFill>
+                  <a:schemeClr val="tx1"/>
+                </a:solidFill>
+                <a:latin typeface="+mn-lt"/>
+                <a:ea typeface="+mn-ea"/>
+                <a:cs typeface="+mn-cs"/>
+              </a:defRPr>
+            </a:lvl5pPr>
+            <a:lvl6pPr marL="2286000" algn="l" defTabSz="914400" rtl="0" eaLnBrk="1" latinLnBrk="0" hangingPunct="1">
+              <a:defRPr sz="1800" kern="1200">
+                <a:solidFill>
+                  <a:schemeClr val="tx1"/>
+                </a:solidFill>
+                <a:latin typeface="+mn-lt"/>
+                <a:ea typeface="+mn-ea"/>
+                <a:cs typeface="+mn-cs"/>
+              </a:defRPr>
+            </a:lvl6pPr>
+            <a:lvl7pPr marL="2743200" algn="l" defTabSz="914400" rtl="0" eaLnBrk="1" latinLnBrk="0" hangingPunct="1">
+              <a:defRPr sz="1800" kern="1200">
+                <a:solidFill>
+                  <a:schemeClr val="tx1"/>
+                </a:solidFill>
+                <a:latin typeface="+mn-lt"/>
+                <a:ea typeface="+mn-ea"/>
+                <a:cs typeface="+mn-cs"/>
+              </a:defRPr>
+            </a:lvl7pPr>
+            <a:lvl8pPr marL="3200400" algn="l" defTabSz="914400" rtl="0" eaLnBrk="1" latinLnBrk="0" hangingPunct="1">
+              <a:defRPr sz="1800" kern="1200">
+                <a:solidFill>
+                  <a:schemeClr val="tx1"/>
+                </a:solidFill>
+                <a:latin typeface="+mn-lt"/>
+                <a:ea typeface="+mn-ea"/>
+                <a:cs typeface="+mn-cs"/>
+              </a:defRPr>
+            </a:lvl8pPr>
+            <a:lvl9pPr marL="3657600" algn="l" defTabSz="914400" rtl="0" eaLnBrk="1" latinLnBrk="0" hangingPunct="1">
+              <a:defRPr sz="1800" kern="1200">
+                <a:solidFill>
+                  <a:schemeClr val="tx1"/>
+                </a:solidFill>
+                <a:latin typeface="+mn-lt"/>
+                <a:ea typeface="+mn-ea"/>
+                <a:cs typeface="+mn-cs"/>
+              </a:defRPr>
+            </a:lvl9pPr>
           </a:lstStyle>
           <a:p>
-            <a:r>
-              <a:rPr lang="lv-LV" noProof="0"/>
-              <a:t>7/29/20XX</a:t>
-            </a:r>
-          </a:p>
-        </p:txBody>
-      </p:sp>
-      <p:sp>
-        <p:nvSpPr>
-          <p:cNvPr id="15" name="Kājenes vietturis 5">
-            <a:extLst>
-              <a:ext uri="{FF2B5EF4-FFF2-40B4-BE49-F238E27FC236}">
-                <a16:creationId xmlns:a16="http://schemas.microsoft.com/office/drawing/2014/main" id="{1B454B68-B7BD-4197-BF00-63964D76348E}"/>
-              </a:ext>
-            </a:extLst>
-          </p:cNvPr>
-          <p:cNvSpPr>
-            <a:spLocks noGrp="1"/>
-          </p:cNvSpPr>
-          <p:nvPr>
-            <p:ph type="ftr" sz="quarter" idx="14"/>
-          </p:nvPr>
-        </p:nvSpPr>
-        <p:spPr>
-          <a:xfrm>
-            <a:off x="4038600" y="6356350"/>
-            <a:ext cx="4114800" cy="365125"/>
-          </a:xfrm>
-        </p:spPr>
-        <p:txBody>
-          <a:bodyPr rtlCol="0"/>
-          <a:lstStyle>
-            <a:lvl1pPr>
-              <a:defRPr sz="900">
-                <a:solidFill>
-                  <a:schemeClr val="accent4">
-                    <a:lumMod val="40000"/>
-                    <a:lumOff val="60000"/>
-                  </a:schemeClr>
-                </a:solidFill>
-                <a:latin typeface="Calibri" panose="020F0502020204030204" pitchFamily="34" charset="0"/>
-                <a:cs typeface="Calibri" panose="020F0502020204030204" pitchFamily="34" charset="0"/>
-              </a:defRPr>
-            </a:lvl1pPr>
-          </a:lstStyle>
-          <a:p>
-            <a:r>
-              <a:rPr lang="lv-LV" noProof="0"/>
-              <a:t>Darbinieku orientācija</a:t>
-            </a:r>
-          </a:p>
-        </p:txBody>
-      </p:sp>
-      <p:sp>
-        <p:nvSpPr>
-          <p:cNvPr id="16" name="Slaida numura vietturis 6">
-            <a:extLst>
-              <a:ext uri="{FF2B5EF4-FFF2-40B4-BE49-F238E27FC236}">
-                <a16:creationId xmlns:a16="http://schemas.microsoft.com/office/drawing/2014/main" id="{BAA42605-D696-484D-B611-62CB3140EAC3}"/>
-              </a:ext>
-            </a:extLst>
-          </p:cNvPr>
-          <p:cNvSpPr>
-            <a:spLocks noGrp="1"/>
-          </p:cNvSpPr>
-          <p:nvPr>
-            <p:ph type="sldNum" sz="quarter" idx="15"/>
-          </p:nvPr>
-        </p:nvSpPr>
-        <p:spPr>
-          <a:xfrm>
-            <a:off x="8610600" y="6356350"/>
-            <a:ext cx="2743200" cy="365125"/>
-          </a:xfrm>
-        </p:spPr>
-        <p:txBody>
-          <a:bodyPr rtlCol="0"/>
-          <a:lstStyle>
-            <a:lvl1pPr>
-              <a:defRPr sz="900">
-                <a:solidFill>
-                  <a:schemeClr val="accent5"/>
-                </a:solidFill>
-                <a:latin typeface="Calibri" panose="020F0502020204030204" pitchFamily="34" charset="0"/>
-                <a:cs typeface="Calibri" panose="020F0502020204030204" pitchFamily="34" charset="0"/>
-              </a:defRPr>
-            </a:lvl1pPr>
-          </a:lstStyle>
-          <a:p>
             <a:fld id="{B5CEABB6-07DC-46E8-9B57-56EC44A396E5}" type="slidenum">
-              <a:rPr lang="lv-LV" noProof="0" smtClean="0"/>
+              <a:rPr lang="lv-LV" smtClean="0">
+                <a:solidFill>
+                  <a:schemeClr val="bg1"/>
+                </a:solidFill>
+              </a:rPr>
               <a:pPr/>
               <a:t>‹#›</a:t>
             </a:fld>
-            <a:endParaRPr lang="lv-LV" noProof="0"/>
+            <a:endParaRPr lang="lv-LV" dirty="0">
+              <a:solidFill>
+                <a:schemeClr val="bg1"/>
+              </a:solidFill>
+            </a:endParaRPr>
           </a:p>
         </p:txBody>
       </p:sp>
@@ -5678,31 +5341,35 @@
       </p:sp>
       <p:sp>
         <p:nvSpPr>
-          <p:cNvPr id="21" name="Datuma vietturis 4">
-            <a:extLst>
-              <a:ext uri="{FF2B5EF4-FFF2-40B4-BE49-F238E27FC236}">
-                <a16:creationId xmlns:a16="http://schemas.microsoft.com/office/drawing/2014/main" id="{5413A312-123E-4C7A-864E-C120568D6037}"/>
-              </a:ext>
-            </a:extLst>
-          </p:cNvPr>
-          <p:cNvSpPr>
-            <a:spLocks noGrp="1"/>
-          </p:cNvSpPr>
-          <p:nvPr>
-            <p:ph type="dt" sz="half" idx="17"/>
-          </p:nvPr>
-        </p:nvSpPr>
-        <p:spPr>
-          <a:xfrm>
-            <a:off x="2024740" y="6356350"/>
-            <a:ext cx="1556659" cy="365125"/>
-          </a:xfrm>
-        </p:spPr>
-        <p:txBody>
-          <a:bodyPr rtlCol="0"/>
+          <p:cNvPr id="2" name="Slaida numura vietturis 6">
+            <a:extLst>
+              <a:ext uri="{FF2B5EF4-FFF2-40B4-BE49-F238E27FC236}">
+                <a16:creationId xmlns:a16="http://schemas.microsoft.com/office/drawing/2014/main" id="{89F224E0-CA88-860E-5908-E4AA40DFBCA8}"/>
+              </a:ext>
+            </a:extLst>
+          </p:cNvPr>
+          <p:cNvSpPr txBox="1">
+            <a:spLocks/>
+          </p:cNvSpPr>
+          <p:nvPr userDrawn="1"/>
+        </p:nvSpPr>
+        <p:spPr>
+          <a:xfrm>
+            <a:off x="8610600" y="6224270"/>
+            <a:ext cx="2743200" cy="497205"/>
+          </a:xfrm>
+          <a:prstGeom prst="rect">
+            <a:avLst/>
+          </a:prstGeom>
+        </p:spPr>
+        <p:txBody>
+          <a:bodyPr vert="horz" lIns="91440" tIns="45720" rIns="91440" bIns="45720" rtlCol="0" anchor="ctr"/>
           <a:lstStyle>
-            <a:lvl1pPr>
-              <a:defRPr sz="900">
+            <a:defPPr rtl="0">
+              <a:defRPr lang="lv-LV"/>
+            </a:defPPr>
+            <a:lvl1pPr marL="0" algn="r" defTabSz="914400" rtl="0" eaLnBrk="1" latinLnBrk="0" hangingPunct="1">
+              <a:defRPr sz="2800" kern="1200">
                 <a:solidFill>
                   <a:schemeClr val="accent4">
                     <a:lumMod val="40000"/>
@@ -5710,109 +5377,98 @@
                   </a:schemeClr>
                 </a:solidFill>
                 <a:latin typeface="Calibri" panose="020F0502020204030204" pitchFamily="34" charset="0"/>
+                <a:ea typeface="+mn-ea"/>
                 <a:cs typeface="Calibri" panose="020F0502020204030204" pitchFamily="34" charset="0"/>
               </a:defRPr>
             </a:lvl1pPr>
+            <a:lvl2pPr marL="457200" algn="l" defTabSz="914400" rtl="0" eaLnBrk="1" latinLnBrk="0" hangingPunct="1">
+              <a:defRPr sz="1800" kern="1200">
+                <a:solidFill>
+                  <a:schemeClr val="tx1"/>
+                </a:solidFill>
+                <a:latin typeface="+mn-lt"/>
+                <a:ea typeface="+mn-ea"/>
+                <a:cs typeface="+mn-cs"/>
+              </a:defRPr>
+            </a:lvl2pPr>
+            <a:lvl3pPr marL="914400" algn="l" defTabSz="914400" rtl="0" eaLnBrk="1" latinLnBrk="0" hangingPunct="1">
+              <a:defRPr sz="1800" kern="1200">
+                <a:solidFill>
+                  <a:schemeClr val="tx1"/>
+                </a:solidFill>
+                <a:latin typeface="+mn-lt"/>
+                <a:ea typeface="+mn-ea"/>
+                <a:cs typeface="+mn-cs"/>
+              </a:defRPr>
+            </a:lvl3pPr>
+            <a:lvl4pPr marL="1371600" algn="l" defTabSz="914400" rtl="0" eaLnBrk="1" latinLnBrk="0" hangingPunct="1">
+              <a:defRPr sz="1800" kern="1200">
+                <a:solidFill>
+                  <a:schemeClr val="tx1"/>
+                </a:solidFill>
+                <a:latin typeface="+mn-lt"/>
+                <a:ea typeface="+mn-ea"/>
+                <a:cs typeface="+mn-cs"/>
+              </a:defRPr>
+            </a:lvl4pPr>
+            <a:lvl5pPr marL="1828800" algn="l" defTabSz="914400" rtl="0" eaLnBrk="1" latinLnBrk="0" hangingPunct="1">
+              <a:defRPr sz="1800" kern="1200">
+                <a:solidFill>
+                  <a:schemeClr val="tx1"/>
+                </a:solidFill>
+                <a:latin typeface="+mn-lt"/>
+                <a:ea typeface="+mn-ea"/>
+                <a:cs typeface="+mn-cs"/>
+              </a:defRPr>
+            </a:lvl5pPr>
+            <a:lvl6pPr marL="2286000" algn="l" defTabSz="914400" rtl="0" eaLnBrk="1" latinLnBrk="0" hangingPunct="1">
+              <a:defRPr sz="1800" kern="1200">
+                <a:solidFill>
+                  <a:schemeClr val="tx1"/>
+                </a:solidFill>
+                <a:latin typeface="+mn-lt"/>
+                <a:ea typeface="+mn-ea"/>
+                <a:cs typeface="+mn-cs"/>
+              </a:defRPr>
+            </a:lvl6pPr>
+            <a:lvl7pPr marL="2743200" algn="l" defTabSz="914400" rtl="0" eaLnBrk="1" latinLnBrk="0" hangingPunct="1">
+              <a:defRPr sz="1800" kern="1200">
+                <a:solidFill>
+                  <a:schemeClr val="tx1"/>
+                </a:solidFill>
+                <a:latin typeface="+mn-lt"/>
+                <a:ea typeface="+mn-ea"/>
+                <a:cs typeface="+mn-cs"/>
+              </a:defRPr>
+            </a:lvl7pPr>
+            <a:lvl8pPr marL="3200400" algn="l" defTabSz="914400" rtl="0" eaLnBrk="1" latinLnBrk="0" hangingPunct="1">
+              <a:defRPr sz="1800" kern="1200">
+                <a:solidFill>
+                  <a:schemeClr val="tx1"/>
+                </a:solidFill>
+                <a:latin typeface="+mn-lt"/>
+                <a:ea typeface="+mn-ea"/>
+                <a:cs typeface="+mn-cs"/>
+              </a:defRPr>
+            </a:lvl8pPr>
+            <a:lvl9pPr marL="3657600" algn="l" defTabSz="914400" rtl="0" eaLnBrk="1" latinLnBrk="0" hangingPunct="1">
+              <a:defRPr sz="1800" kern="1200">
+                <a:solidFill>
+                  <a:schemeClr val="tx1"/>
+                </a:solidFill>
+                <a:latin typeface="+mn-lt"/>
+                <a:ea typeface="+mn-ea"/>
+                <a:cs typeface="+mn-cs"/>
+              </a:defRPr>
+            </a:lvl9pPr>
           </a:lstStyle>
           <a:p>
-            <a:r>
-              <a:rPr lang="lv-LV" noProof="0"/>
-              <a:t>7/29/20XX</a:t>
-            </a:r>
-          </a:p>
-        </p:txBody>
-      </p:sp>
-      <p:sp>
-        <p:nvSpPr>
-          <p:cNvPr id="22" name="Kājenes vietturis 5">
-            <a:extLst>
-              <a:ext uri="{FF2B5EF4-FFF2-40B4-BE49-F238E27FC236}">
-                <a16:creationId xmlns:a16="http://schemas.microsoft.com/office/drawing/2014/main" id="{F3306EE3-B07E-48BA-A4EE-EAFE9A458C38}"/>
-              </a:ext>
-            </a:extLst>
-          </p:cNvPr>
-          <p:cNvSpPr>
-            <a:spLocks noGrp="1"/>
-          </p:cNvSpPr>
-          <p:nvPr>
-            <p:ph type="ftr" sz="quarter" idx="18"/>
-          </p:nvPr>
-        </p:nvSpPr>
-        <p:spPr>
-          <a:xfrm>
-            <a:off x="4038600" y="6356350"/>
-            <a:ext cx="5268686" cy="365125"/>
-          </a:xfrm>
-        </p:spPr>
-        <p:txBody>
-          <a:bodyPr rtlCol="0"/>
-          <a:lstStyle>
-            <a:lvl1pPr>
-              <a:defRPr sz="900">
-                <a:solidFill>
-                  <a:schemeClr val="accent4">
-                    <a:lumMod val="40000"/>
-                    <a:lumOff val="60000"/>
-                  </a:schemeClr>
-                </a:solidFill>
-                <a:latin typeface="Calibri" panose="020F0502020204030204" pitchFamily="34" charset="0"/>
-                <a:cs typeface="Calibri" panose="020F0502020204030204" pitchFamily="34" charset="0"/>
-              </a:defRPr>
-            </a:lvl1pPr>
-          </a:lstStyle>
-          <a:p>
-            <a:r>
-              <a:rPr lang="lv-LV" noProof="0"/>
-              <a:t>Darbinieku orientācija</a:t>
-            </a:r>
-          </a:p>
-        </p:txBody>
-      </p:sp>
-      <p:sp>
-        <p:nvSpPr>
-          <p:cNvPr id="23" name="Slaida numura vietturis 6">
-            <a:extLst>
-              <a:ext uri="{FF2B5EF4-FFF2-40B4-BE49-F238E27FC236}">
-                <a16:creationId xmlns:a16="http://schemas.microsoft.com/office/drawing/2014/main" id="{6A049DF0-5C6A-4542-841D-C03F62304820}"/>
-              </a:ext>
-            </a:extLst>
-          </p:cNvPr>
-          <p:cNvSpPr>
-            <a:spLocks noGrp="1"/>
-          </p:cNvSpPr>
-          <p:nvPr>
-            <p:ph type="sldNum" sz="quarter" idx="19"/>
-          </p:nvPr>
-        </p:nvSpPr>
-        <p:spPr>
-          <a:xfrm>
-            <a:off x="9764486" y="6356350"/>
-            <a:ext cx="1589314" cy="365125"/>
-          </a:xfrm>
-        </p:spPr>
-        <p:txBody>
-          <a:bodyPr rtlCol="0"/>
-          <a:lstStyle>
-            <a:lvl1pPr>
-              <a:defRPr sz="900">
-                <a:solidFill>
-                  <a:schemeClr val="accent4">
-                    <a:lumMod val="40000"/>
-                    <a:lumOff val="60000"/>
-                  </a:schemeClr>
-                </a:solidFill>
-                <a:latin typeface="Calibri" panose="020F0502020204030204" pitchFamily="34" charset="0"/>
-                <a:cs typeface="Calibri" panose="020F0502020204030204" pitchFamily="34" charset="0"/>
-              </a:defRPr>
-            </a:lvl1pPr>
-          </a:lstStyle>
-          <a:p>
             <a:fld id="{B5CEABB6-07DC-46E8-9B57-56EC44A396E5}" type="slidenum">
-              <a:rPr lang="lv-LV" noProof="0" smtClean="0"/>
+              <a:rPr lang="lv-LV" smtClean="0"/>
               <a:pPr/>
               <a:t>‹#›</a:t>
             </a:fld>
-            <a:endParaRPr lang="lv-LV" noProof="0"/>
+            <a:endParaRPr lang="lv-LV" dirty="0"/>
           </a:p>
         </p:txBody>
       </p:sp>
@@ -6076,52 +5732,6 @@
       </p:sp>
       <p:sp>
         <p:nvSpPr>
-          <p:cNvPr id="14" name="Datuma vietturis 4">
-            <a:extLst>
-              <a:ext uri="{FF2B5EF4-FFF2-40B4-BE49-F238E27FC236}">
-                <a16:creationId xmlns:a16="http://schemas.microsoft.com/office/drawing/2014/main" id="{38ABA718-1AEF-413D-964E-FA9CA8EDD8A2}"/>
-              </a:ext>
-            </a:extLst>
-          </p:cNvPr>
-          <p:cNvSpPr>
-            <a:spLocks noGrp="1"/>
-          </p:cNvSpPr>
-          <p:nvPr>
-            <p:ph type="dt" sz="half" idx="10"/>
-          </p:nvPr>
-        </p:nvSpPr>
-        <p:spPr>
-          <a:xfrm>
-            <a:off x="838200" y="6356350"/>
-            <a:ext cx="2743200" cy="365125"/>
-          </a:xfrm>
-        </p:spPr>
-        <p:txBody>
-          <a:bodyPr rtlCol="0"/>
-          <a:lstStyle>
-            <a:lvl1pPr>
-              <a:defRPr sz="900">
-                <a:solidFill>
-                  <a:schemeClr val="accent4">
-                    <a:lumMod val="40000"/>
-                    <a:lumOff val="60000"/>
-                  </a:schemeClr>
-                </a:solidFill>
-                <a:latin typeface="Calibri" panose="020F0502020204030204" pitchFamily="34" charset="0"/>
-                <a:cs typeface="Calibri" panose="020F0502020204030204" pitchFamily="34" charset="0"/>
-              </a:defRPr>
-            </a:lvl1pPr>
-          </a:lstStyle>
-          <a:p>
-            <a:r>
-              <a:rPr lang="lv-LV" noProof="0"/>
-              <a:t>7/29/20XX</a:t>
-            </a:r>
-          </a:p>
-        </p:txBody>
-      </p:sp>
-      <p:sp>
-        <p:nvSpPr>
           <p:cNvPr id="9" name="Taisnstūris 8">
             <a:extLst>
               <a:ext uri="{FF2B5EF4-FFF2-40B4-BE49-F238E27FC236}">
@@ -6174,36 +5784,36 @@
       </p:sp>
       <p:sp>
         <p:nvSpPr>
-          <p:cNvPr id="15" name="Kājenes vietturis 5">
-            <a:extLst>
-              <a:ext uri="{FF2B5EF4-FFF2-40B4-BE49-F238E27FC236}">
-                <a16:creationId xmlns:a16="http://schemas.microsoft.com/office/drawing/2014/main" id="{BCCB3A69-6840-43C8-94EB-C3EF41DBCE74}"/>
-              </a:ext>
-            </a:extLst>
-          </p:cNvPr>
-          <p:cNvSpPr>
-            <a:spLocks noGrp="1"/>
-          </p:cNvSpPr>
-          <p:nvPr>
-            <p:ph type="ftr" sz="quarter" idx="11"/>
-          </p:nvPr>
-        </p:nvSpPr>
-        <p:spPr>
-          <a:xfrm>
-            <a:off x="4038600" y="6356350"/>
-            <a:ext cx="4114800" cy="365125"/>
-          </a:xfrm>
+          <p:cNvPr id="3" name="Slaida numura vietturis 6">
+            <a:extLst>
+              <a:ext uri="{FF2B5EF4-FFF2-40B4-BE49-F238E27FC236}">
+                <a16:creationId xmlns:a16="http://schemas.microsoft.com/office/drawing/2014/main" id="{024AE987-AB2C-B9A0-CE42-5B273FAEE353}"/>
+              </a:ext>
+            </a:extLst>
+          </p:cNvPr>
+          <p:cNvSpPr>
+            <a:spLocks noGrp="1"/>
+          </p:cNvSpPr>
+          <p:nvPr>
+            <p:ph type="sldNum" sz="quarter" idx="12"/>
+          </p:nvPr>
+        </p:nvSpPr>
+        <p:spPr>
+          <a:xfrm>
+            <a:off x="8610600" y="6224270"/>
+            <a:ext cx="2743200" cy="497205"/>
+          </a:xfrm>
+          <a:prstGeom prst="rect">
+            <a:avLst/>
+          </a:prstGeom>
         </p:spPr>
         <p:txBody>
           <a:bodyPr rtlCol="0"/>
           <a:lstStyle>
             <a:lvl1pPr>
-              <a:defRPr sz="900">
-                <a:solidFill>
-                  <a:schemeClr val="accent4">
-                    <a:lumMod val="40000"/>
-                    <a:lumOff val="60000"/>
-                  </a:schemeClr>
+              <a:defRPr sz="2800">
+                <a:solidFill>
+                  <a:schemeClr val="bg1"/>
                 </a:solidFill>
                 <a:latin typeface="Calibri" panose="020F0502020204030204" pitchFamily="34" charset="0"/>
                 <a:cs typeface="Calibri" panose="020F0502020204030204" pitchFamily="34" charset="0"/>
@@ -6211,57 +5821,16 @@
             </a:lvl1pPr>
           </a:lstStyle>
           <a:p>
-            <a:r>
-              <a:rPr lang="lv-LV" noProof="0"/>
-              <a:t>Darbinieku orientācija</a:t>
-            </a:r>
-          </a:p>
-        </p:txBody>
-      </p:sp>
-      <p:sp>
-        <p:nvSpPr>
-          <p:cNvPr id="16" name="Slaida numura vietturis 6">
-            <a:extLst>
-              <a:ext uri="{FF2B5EF4-FFF2-40B4-BE49-F238E27FC236}">
-                <a16:creationId xmlns:a16="http://schemas.microsoft.com/office/drawing/2014/main" id="{B374594B-C272-477C-B1DB-A1E214CEDA46}"/>
-              </a:ext>
-            </a:extLst>
-          </p:cNvPr>
-          <p:cNvSpPr>
-            <a:spLocks noGrp="1"/>
-          </p:cNvSpPr>
-          <p:nvPr>
-            <p:ph type="sldNum" sz="quarter" idx="12"/>
-          </p:nvPr>
-        </p:nvSpPr>
-        <p:spPr>
-          <a:xfrm>
-            <a:off x="8610600" y="6356350"/>
-            <a:ext cx="2743200" cy="365125"/>
-          </a:xfrm>
-        </p:spPr>
-        <p:txBody>
-          <a:bodyPr rtlCol="0"/>
-          <a:lstStyle>
-            <a:lvl1pPr>
-              <a:defRPr sz="900">
-                <a:solidFill>
-                  <a:schemeClr val="accent2">
-                    <a:lumMod val="50000"/>
-                  </a:schemeClr>
-                </a:solidFill>
-                <a:latin typeface="Calibri" panose="020F0502020204030204" pitchFamily="34" charset="0"/>
-                <a:cs typeface="Calibri" panose="020F0502020204030204" pitchFamily="34" charset="0"/>
-              </a:defRPr>
-            </a:lvl1pPr>
-          </a:lstStyle>
-          <a:p>
             <a:fld id="{B5CEABB6-07DC-46E8-9B57-56EC44A396E5}" type="slidenum">
-              <a:rPr lang="lv-LV" noProof="0" smtClean="0"/>
+              <a:rPr lang="lv-LV" smtClean="0"/>
               <a:pPr/>
               <a:t>‹#›</a:t>
             </a:fld>
-            <a:endParaRPr lang="lv-LV" noProof="0"/>
+            <a:endParaRPr lang="lv-LV" dirty="0">
+              <a:solidFill>
+                <a:schemeClr val="bg1"/>
+              </a:solidFill>
+            </a:endParaRPr>
           </a:p>
         </p:txBody>
       </p:sp>
@@ -6470,29 +6039,38 @@
       </p:sp>
       <p:sp>
         <p:nvSpPr>
-          <p:cNvPr id="5" name="Datuma vietturis 4">
-            <a:extLst>
-              <a:ext uri="{FF2B5EF4-FFF2-40B4-BE49-F238E27FC236}">
-                <a16:creationId xmlns:a16="http://schemas.microsoft.com/office/drawing/2014/main" id="{4F525B7F-8292-4AE6-B9B3-F6C0621F1161}"/>
-              </a:ext>
-            </a:extLst>
-          </p:cNvPr>
-          <p:cNvSpPr>
-            <a:spLocks noGrp="1"/>
-          </p:cNvSpPr>
-          <p:nvPr>
-            <p:ph type="dt" sz="half" idx="10"/>
-          </p:nvPr>
-        </p:nvSpPr>
-        <p:spPr/>
+          <p:cNvPr id="8" name="Slaida numura vietturis 6">
+            <a:extLst>
+              <a:ext uri="{FF2B5EF4-FFF2-40B4-BE49-F238E27FC236}">
+                <a16:creationId xmlns:a16="http://schemas.microsoft.com/office/drawing/2014/main" id="{C1DD352D-4AF8-3AAB-893E-15EC13B48329}"/>
+              </a:ext>
+            </a:extLst>
+          </p:cNvPr>
+          <p:cNvSpPr>
+            <a:spLocks noGrp="1"/>
+          </p:cNvSpPr>
+          <p:nvPr>
+            <p:ph type="sldNum" sz="quarter" idx="12"/>
+          </p:nvPr>
+        </p:nvSpPr>
+        <p:spPr>
+          <a:xfrm>
+            <a:off x="8610600" y="6224270"/>
+            <a:ext cx="2743200" cy="497205"/>
+          </a:xfrm>
+          <a:prstGeom prst="rect">
+            <a:avLst/>
+          </a:prstGeom>
+        </p:spPr>
         <p:txBody>
           <a:bodyPr rtlCol="0"/>
           <a:lstStyle>
             <a:lvl1pPr>
-              <a:defRPr sz="900">
-                <a:solidFill>
-                  <a:schemeClr val="accent5">
-                    <a:lumMod val="75000"/>
+              <a:defRPr sz="2800">
+                <a:solidFill>
+                  <a:schemeClr val="accent4">
+                    <a:lumMod val="40000"/>
+                    <a:lumOff val="60000"/>
                   </a:schemeClr>
                 </a:solidFill>
                 <a:latin typeface="Calibri" panose="020F0502020204030204" pitchFamily="34" charset="0"/>
@@ -6501,92 +6079,12 @@
             </a:lvl1pPr>
           </a:lstStyle>
           <a:p>
-            <a:r>
-              <a:rPr lang="lv-LV" noProof="0"/>
-              <a:t>7/29/20XX</a:t>
-            </a:r>
-          </a:p>
-        </p:txBody>
-      </p:sp>
-      <p:sp>
-        <p:nvSpPr>
-          <p:cNvPr id="6" name="Kājenes vietturis 5">
-            <a:extLst>
-              <a:ext uri="{FF2B5EF4-FFF2-40B4-BE49-F238E27FC236}">
-                <a16:creationId xmlns:a16="http://schemas.microsoft.com/office/drawing/2014/main" id="{E3E86D52-9DFB-4D69-BF39-2C163B3946ED}"/>
-              </a:ext>
-            </a:extLst>
-          </p:cNvPr>
-          <p:cNvSpPr>
-            <a:spLocks noGrp="1"/>
-          </p:cNvSpPr>
-          <p:nvPr>
-            <p:ph type="ftr" sz="quarter" idx="11"/>
-          </p:nvPr>
-        </p:nvSpPr>
-        <p:spPr/>
-        <p:txBody>
-          <a:bodyPr rtlCol="0"/>
-          <a:lstStyle>
-            <a:lvl1pPr>
-              <a:defRPr sz="900">
-                <a:solidFill>
-                  <a:schemeClr val="accent5">
-                    <a:lumMod val="75000"/>
-                  </a:schemeClr>
-                </a:solidFill>
-                <a:latin typeface="Calibri" panose="020F0502020204030204" pitchFamily="34" charset="0"/>
-                <a:cs typeface="Calibri" panose="020F0502020204030204" pitchFamily="34" charset="0"/>
-              </a:defRPr>
-            </a:lvl1pPr>
-          </a:lstStyle>
-          <a:p>
-            <a:r>
-              <a:rPr lang="lv-LV" noProof="0"/>
-              <a:t>Darbinieku orientācija</a:t>
-            </a:r>
-          </a:p>
-        </p:txBody>
-      </p:sp>
-      <p:sp>
-        <p:nvSpPr>
-          <p:cNvPr id="7" name="Slaida numura vietturis 6">
-            <a:extLst>
-              <a:ext uri="{FF2B5EF4-FFF2-40B4-BE49-F238E27FC236}">
-                <a16:creationId xmlns:a16="http://schemas.microsoft.com/office/drawing/2014/main" id="{A0B91A39-D816-4317-AA23-55510F9D35DE}"/>
-              </a:ext>
-            </a:extLst>
-          </p:cNvPr>
-          <p:cNvSpPr>
-            <a:spLocks noGrp="1"/>
-          </p:cNvSpPr>
-          <p:nvPr>
-            <p:ph type="sldNum" sz="quarter" idx="12"/>
-          </p:nvPr>
-        </p:nvSpPr>
-        <p:spPr/>
-        <p:txBody>
-          <a:bodyPr rtlCol="0"/>
-          <a:lstStyle>
-            <a:lvl1pPr>
-              <a:defRPr sz="900">
-                <a:solidFill>
-                  <a:schemeClr val="accent5">
-                    <a:lumMod val="75000"/>
-                  </a:schemeClr>
-                </a:solidFill>
-                <a:latin typeface="Calibri" panose="020F0502020204030204" pitchFamily="34" charset="0"/>
-                <a:cs typeface="Calibri" panose="020F0502020204030204" pitchFamily="34" charset="0"/>
-              </a:defRPr>
-            </a:lvl1pPr>
-          </a:lstStyle>
-          <a:p>
             <a:fld id="{B5CEABB6-07DC-46E8-9B57-56EC44A396E5}" type="slidenum">
-              <a:rPr lang="lv-LV" noProof="0" smtClean="0"/>
+              <a:rPr lang="lv-LV" smtClean="0"/>
               <a:pPr/>
               <a:t>‹#›</a:t>
             </a:fld>
-            <a:endParaRPr lang="lv-LV" noProof="0"/>
+            <a:endParaRPr lang="lv-LV" dirty="0"/>
           </a:p>
         </p:txBody>
       </p:sp>
@@ -6850,33 +6348,36 @@
       </p:sp>
       <p:sp>
         <p:nvSpPr>
-          <p:cNvPr id="8" name="Datuma vietturis 4">
-            <a:extLst>
-              <a:ext uri="{FF2B5EF4-FFF2-40B4-BE49-F238E27FC236}">
-                <a16:creationId xmlns:a16="http://schemas.microsoft.com/office/drawing/2014/main" id="{E57E5351-59BE-4BC8-83D8-BABF23172D89}"/>
-              </a:ext>
-            </a:extLst>
-          </p:cNvPr>
-          <p:cNvSpPr>
-            <a:spLocks noGrp="1"/>
-          </p:cNvSpPr>
-          <p:nvPr>
-            <p:ph type="dt" sz="half" idx="10"/>
-          </p:nvPr>
-        </p:nvSpPr>
-        <p:spPr>
-          <a:xfrm>
-            <a:off x="838200" y="6356350"/>
-            <a:ext cx="2743200" cy="365125"/>
-          </a:xfrm>
+          <p:cNvPr id="4" name="Slaida numura vietturis 6">
+            <a:extLst>
+              <a:ext uri="{FF2B5EF4-FFF2-40B4-BE49-F238E27FC236}">
+                <a16:creationId xmlns:a16="http://schemas.microsoft.com/office/drawing/2014/main" id="{64FF2452-A8E8-117D-F41A-A5F808B30909}"/>
+              </a:ext>
+            </a:extLst>
+          </p:cNvPr>
+          <p:cNvSpPr>
+            <a:spLocks noGrp="1"/>
+          </p:cNvSpPr>
+          <p:nvPr>
+            <p:ph type="sldNum" sz="quarter" idx="12"/>
+          </p:nvPr>
+        </p:nvSpPr>
+        <p:spPr>
+          <a:xfrm>
+            <a:off x="8610600" y="6224270"/>
+            <a:ext cx="2743200" cy="497205"/>
+          </a:xfrm>
+          <a:prstGeom prst="rect">
+            <a:avLst/>
+          </a:prstGeom>
         </p:spPr>
         <p:txBody>
           <a:bodyPr rtlCol="0"/>
           <a:lstStyle>
             <a:lvl1pPr>
-              <a:defRPr sz="900">
-                <a:solidFill>
-                  <a:schemeClr val="accent5"/>
+              <a:defRPr sz="2800">
+                <a:solidFill>
+                  <a:schemeClr val="bg1"/>
                 </a:solidFill>
                 <a:latin typeface="Calibri" panose="020F0502020204030204" pitchFamily="34" charset="0"/>
                 <a:cs typeface="Calibri" panose="020F0502020204030204" pitchFamily="34" charset="0"/>
@@ -6884,100 +6385,16 @@
             </a:lvl1pPr>
           </a:lstStyle>
           <a:p>
-            <a:r>
-              <a:rPr lang="lv-LV" noProof="0"/>
-              <a:t>7/29/20XX</a:t>
-            </a:r>
-          </a:p>
-        </p:txBody>
-      </p:sp>
-      <p:sp>
-        <p:nvSpPr>
-          <p:cNvPr id="9" name="Kājenes vietturis 5">
-            <a:extLst>
-              <a:ext uri="{FF2B5EF4-FFF2-40B4-BE49-F238E27FC236}">
-                <a16:creationId xmlns:a16="http://schemas.microsoft.com/office/drawing/2014/main" id="{7F2C600D-D61A-47D7-88A2-66D269DCB3A3}"/>
-              </a:ext>
-            </a:extLst>
-          </p:cNvPr>
-          <p:cNvSpPr>
-            <a:spLocks noGrp="1"/>
-          </p:cNvSpPr>
-          <p:nvPr>
-            <p:ph type="ftr" sz="quarter" idx="11"/>
-          </p:nvPr>
-        </p:nvSpPr>
-        <p:spPr>
-          <a:xfrm>
-            <a:off x="4038600" y="6356350"/>
-            <a:ext cx="4114800" cy="365125"/>
-          </a:xfrm>
-        </p:spPr>
-        <p:txBody>
-          <a:bodyPr rtlCol="0"/>
-          <a:lstStyle>
-            <a:lvl1pPr>
-              <a:defRPr sz="900">
-                <a:solidFill>
-                  <a:schemeClr val="accent5">
-                    <a:lumMod val="75000"/>
-                  </a:schemeClr>
-                </a:solidFill>
-                <a:latin typeface="Calibri" panose="020F0502020204030204" pitchFamily="34" charset="0"/>
-                <a:cs typeface="Calibri" panose="020F0502020204030204" pitchFamily="34" charset="0"/>
-              </a:defRPr>
-            </a:lvl1pPr>
-          </a:lstStyle>
-          <a:p>
-            <a:r>
-              <a:rPr lang="lv-LV" noProof="0"/>
-              <a:t>Darbinieku orientācija</a:t>
-            </a:r>
-          </a:p>
-        </p:txBody>
-      </p:sp>
-      <p:sp>
-        <p:nvSpPr>
-          <p:cNvPr id="10" name="Slaida numura vietturis 6">
-            <a:extLst>
-              <a:ext uri="{FF2B5EF4-FFF2-40B4-BE49-F238E27FC236}">
-                <a16:creationId xmlns:a16="http://schemas.microsoft.com/office/drawing/2014/main" id="{E257B2EA-F7F2-4B84-A989-76BF9D0F8636}"/>
-              </a:ext>
-            </a:extLst>
-          </p:cNvPr>
-          <p:cNvSpPr>
-            <a:spLocks noGrp="1"/>
-          </p:cNvSpPr>
-          <p:nvPr>
-            <p:ph type="sldNum" sz="quarter" idx="12"/>
-          </p:nvPr>
-        </p:nvSpPr>
-        <p:spPr>
-          <a:xfrm>
-            <a:off x="8610600" y="6356350"/>
-            <a:ext cx="2743200" cy="365125"/>
-          </a:xfrm>
-        </p:spPr>
-        <p:txBody>
-          <a:bodyPr rtlCol="0"/>
-          <a:lstStyle>
-            <a:lvl1pPr>
-              <a:defRPr sz="900">
-                <a:solidFill>
-                  <a:schemeClr val="accent5"/>
-                </a:solidFill>
-                <a:latin typeface="Calibri" panose="020F0502020204030204" pitchFamily="34" charset="0"/>
-                <a:cs typeface="Calibri" panose="020F0502020204030204" pitchFamily="34" charset="0"/>
-              </a:defRPr>
-            </a:lvl1pPr>
-          </a:lstStyle>
-          <a:p>
             <a:fld id="{B5CEABB6-07DC-46E8-9B57-56EC44A396E5}" type="slidenum">
-              <a:rPr lang="lv-LV" noProof="0" smtClean="0"/>
+              <a:rPr lang="lv-LV" smtClean="0"/>
               <a:pPr/>
               <a:t>‹#›</a:t>
             </a:fld>
-            <a:endParaRPr lang="lv-LV" noProof="0"/>
+            <a:endParaRPr lang="lv-LV" dirty="0">
+              <a:solidFill>
+                <a:schemeClr val="bg1"/>
+              </a:solidFill>
+            </a:endParaRPr>
           </a:p>
         </p:txBody>
       </p:sp>
@@ -7468,138 +6885,134 @@
       </p:sp>
       <p:sp>
         <p:nvSpPr>
-          <p:cNvPr id="25" name="Datuma vietturis 4">
-            <a:extLst>
-              <a:ext uri="{FF2B5EF4-FFF2-40B4-BE49-F238E27FC236}">
-                <a16:creationId xmlns:a16="http://schemas.microsoft.com/office/drawing/2014/main" id="{8B2D064B-EC57-4EA9-96ED-918E61BFD5F4}"/>
-              </a:ext>
-            </a:extLst>
-          </p:cNvPr>
-          <p:cNvSpPr>
-            <a:spLocks noGrp="1"/>
-          </p:cNvSpPr>
-          <p:nvPr>
-            <p:ph type="dt" sz="half" idx="10"/>
-          </p:nvPr>
-        </p:nvSpPr>
-        <p:spPr>
-          <a:xfrm>
-            <a:off x="838200" y="6356350"/>
-            <a:ext cx="2743200" cy="365125"/>
-          </a:xfrm>
-        </p:spPr>
-        <p:txBody>
-          <a:bodyPr rtlCol="0"/>
+          <p:cNvPr id="4" name="Slaida numura vietturis 6">
+            <a:extLst>
+              <a:ext uri="{FF2B5EF4-FFF2-40B4-BE49-F238E27FC236}">
+                <a16:creationId xmlns:a16="http://schemas.microsoft.com/office/drawing/2014/main" id="{5327FEC8-DAA6-D144-4544-A767ECF5CA3C}"/>
+              </a:ext>
+            </a:extLst>
+          </p:cNvPr>
+          <p:cNvSpPr txBox="1">
+            <a:spLocks/>
+          </p:cNvSpPr>
+          <p:nvPr userDrawn="1"/>
+        </p:nvSpPr>
+        <p:spPr>
+          <a:xfrm>
+            <a:off x="8610600" y="6224270"/>
+            <a:ext cx="2743200" cy="497205"/>
+          </a:xfrm>
+          <a:prstGeom prst="rect">
+            <a:avLst/>
+          </a:prstGeom>
+        </p:spPr>
+        <p:txBody>
+          <a:bodyPr vert="horz" lIns="91440" tIns="45720" rIns="91440" bIns="45720" rtlCol="0" anchor="ctr"/>
           <a:lstStyle>
-            <a:lvl1pPr>
-              <a:defRPr sz="900">
-                <a:solidFill>
-                  <a:schemeClr val="accent5">
-                    <a:lumMod val="75000"/>
+            <a:defPPr rtl="0">
+              <a:defRPr lang="lv-LV"/>
+            </a:defPPr>
+            <a:lvl1pPr marL="0" algn="r" defTabSz="914400" rtl="0" eaLnBrk="1" latinLnBrk="0" hangingPunct="1">
+              <a:defRPr sz="2800" kern="1200">
+                <a:solidFill>
+                  <a:schemeClr val="accent4">
+                    <a:lumMod val="40000"/>
+                    <a:lumOff val="60000"/>
                   </a:schemeClr>
                 </a:solidFill>
                 <a:latin typeface="Calibri" panose="020F0502020204030204" pitchFamily="34" charset="0"/>
+                <a:ea typeface="+mn-ea"/>
                 <a:cs typeface="Calibri" panose="020F0502020204030204" pitchFamily="34" charset="0"/>
               </a:defRPr>
             </a:lvl1pPr>
+            <a:lvl2pPr marL="457200" algn="l" defTabSz="914400" rtl="0" eaLnBrk="1" latinLnBrk="0" hangingPunct="1">
+              <a:defRPr sz="1800" kern="1200">
+                <a:solidFill>
+                  <a:schemeClr val="tx1"/>
+                </a:solidFill>
+                <a:latin typeface="+mn-lt"/>
+                <a:ea typeface="+mn-ea"/>
+                <a:cs typeface="+mn-cs"/>
+              </a:defRPr>
+            </a:lvl2pPr>
+            <a:lvl3pPr marL="914400" algn="l" defTabSz="914400" rtl="0" eaLnBrk="1" latinLnBrk="0" hangingPunct="1">
+              <a:defRPr sz="1800" kern="1200">
+                <a:solidFill>
+                  <a:schemeClr val="tx1"/>
+                </a:solidFill>
+                <a:latin typeface="+mn-lt"/>
+                <a:ea typeface="+mn-ea"/>
+                <a:cs typeface="+mn-cs"/>
+              </a:defRPr>
+            </a:lvl3pPr>
+            <a:lvl4pPr marL="1371600" algn="l" defTabSz="914400" rtl="0" eaLnBrk="1" latinLnBrk="0" hangingPunct="1">
+              <a:defRPr sz="1800" kern="1200">
+                <a:solidFill>
+                  <a:schemeClr val="tx1"/>
+                </a:solidFill>
+                <a:latin typeface="+mn-lt"/>
+                <a:ea typeface="+mn-ea"/>
+                <a:cs typeface="+mn-cs"/>
+              </a:defRPr>
+            </a:lvl4pPr>
+            <a:lvl5pPr marL="1828800" algn="l" defTabSz="914400" rtl="0" eaLnBrk="1" latinLnBrk="0" hangingPunct="1">
+              <a:defRPr sz="1800" kern="1200">
+                <a:solidFill>
+                  <a:schemeClr val="tx1"/>
+                </a:solidFill>
+                <a:latin typeface="+mn-lt"/>
+                <a:ea typeface="+mn-ea"/>
+                <a:cs typeface="+mn-cs"/>
+              </a:defRPr>
+            </a:lvl5pPr>
+            <a:lvl6pPr marL="2286000" algn="l" defTabSz="914400" rtl="0" eaLnBrk="1" latinLnBrk="0" hangingPunct="1">
+              <a:defRPr sz="1800" kern="1200">
+                <a:solidFill>
+                  <a:schemeClr val="tx1"/>
+                </a:solidFill>
+                <a:latin typeface="+mn-lt"/>
+                <a:ea typeface="+mn-ea"/>
+                <a:cs typeface="+mn-cs"/>
+              </a:defRPr>
+            </a:lvl6pPr>
+            <a:lvl7pPr marL="2743200" algn="l" defTabSz="914400" rtl="0" eaLnBrk="1" latinLnBrk="0" hangingPunct="1">
+              <a:defRPr sz="1800" kern="1200">
+                <a:solidFill>
+                  <a:schemeClr val="tx1"/>
+                </a:solidFill>
+                <a:latin typeface="+mn-lt"/>
+                <a:ea typeface="+mn-ea"/>
+                <a:cs typeface="+mn-cs"/>
+              </a:defRPr>
+            </a:lvl7pPr>
+            <a:lvl8pPr marL="3200400" algn="l" defTabSz="914400" rtl="0" eaLnBrk="1" latinLnBrk="0" hangingPunct="1">
+              <a:defRPr sz="1800" kern="1200">
+                <a:solidFill>
+                  <a:schemeClr val="tx1"/>
+                </a:solidFill>
+                <a:latin typeface="+mn-lt"/>
+                <a:ea typeface="+mn-ea"/>
+                <a:cs typeface="+mn-cs"/>
+              </a:defRPr>
+            </a:lvl8pPr>
+            <a:lvl9pPr marL="3657600" algn="l" defTabSz="914400" rtl="0" eaLnBrk="1" latinLnBrk="0" hangingPunct="1">
+              <a:defRPr sz="1800" kern="1200">
+                <a:solidFill>
+                  <a:schemeClr val="tx1"/>
+                </a:solidFill>
+                <a:latin typeface="+mn-lt"/>
+                <a:ea typeface="+mn-ea"/>
+                <a:cs typeface="+mn-cs"/>
+              </a:defRPr>
+            </a:lvl9pPr>
           </a:lstStyle>
           <a:p>
-            <a:r>
-              <a:rPr lang="lv-LV" noProof="0"/>
-              <a:t>7/29/20XX</a:t>
-            </a:r>
-          </a:p>
-        </p:txBody>
-      </p:sp>
-      <p:sp>
-        <p:nvSpPr>
-          <p:cNvPr id="26" name="Kājenes vietturis 5">
-            <a:extLst>
-              <a:ext uri="{FF2B5EF4-FFF2-40B4-BE49-F238E27FC236}">
-                <a16:creationId xmlns:a16="http://schemas.microsoft.com/office/drawing/2014/main" id="{B2A70FF9-0C32-4443-A788-56E40DD780D1}"/>
-              </a:ext>
-            </a:extLst>
-          </p:cNvPr>
-          <p:cNvSpPr>
-            <a:spLocks noGrp="1"/>
-          </p:cNvSpPr>
-          <p:nvPr>
-            <p:ph type="ftr" sz="quarter" idx="11"/>
-          </p:nvPr>
-        </p:nvSpPr>
-        <p:spPr>
-          <a:xfrm>
-            <a:off x="4038600" y="6356350"/>
-            <a:ext cx="4114800" cy="365125"/>
-          </a:xfrm>
-        </p:spPr>
-        <p:txBody>
-          <a:bodyPr rtlCol="0"/>
-          <a:lstStyle>
-            <a:lvl1pPr>
-              <a:defRPr sz="900">
-                <a:solidFill>
-                  <a:schemeClr val="accent5">
-                    <a:lumMod val="75000"/>
-                  </a:schemeClr>
-                </a:solidFill>
-                <a:latin typeface="Calibri" panose="020F0502020204030204" pitchFamily="34" charset="0"/>
-                <a:cs typeface="Calibri" panose="020F0502020204030204" pitchFamily="34" charset="0"/>
-              </a:defRPr>
-            </a:lvl1pPr>
-          </a:lstStyle>
-          <a:p>
-            <a:r>
-              <a:rPr lang="lv-LV" noProof="0"/>
-              <a:t>Darbinieku orientācija</a:t>
-            </a:r>
-          </a:p>
-        </p:txBody>
-      </p:sp>
-      <p:sp>
-        <p:nvSpPr>
-          <p:cNvPr id="27" name="Slaida numura vietturis 6">
-            <a:extLst>
-              <a:ext uri="{FF2B5EF4-FFF2-40B4-BE49-F238E27FC236}">
-                <a16:creationId xmlns:a16="http://schemas.microsoft.com/office/drawing/2014/main" id="{D51176E4-E898-4497-ACF7-72CFF75FED25}"/>
-              </a:ext>
-            </a:extLst>
-          </p:cNvPr>
-          <p:cNvSpPr>
-            <a:spLocks noGrp="1"/>
-          </p:cNvSpPr>
-          <p:nvPr>
-            <p:ph type="sldNum" sz="quarter" idx="12"/>
-          </p:nvPr>
-        </p:nvSpPr>
-        <p:spPr>
-          <a:xfrm>
-            <a:off x="8610600" y="6356350"/>
-            <a:ext cx="2743200" cy="365125"/>
-          </a:xfrm>
-        </p:spPr>
-        <p:txBody>
-          <a:bodyPr rtlCol="0"/>
-          <a:lstStyle>
-            <a:lvl1pPr>
-              <a:defRPr sz="900">
-                <a:solidFill>
-                  <a:schemeClr val="accent5">
-                    <a:lumMod val="75000"/>
-                  </a:schemeClr>
-                </a:solidFill>
-                <a:latin typeface="Calibri" panose="020F0502020204030204" pitchFamily="34" charset="0"/>
-                <a:cs typeface="Calibri" panose="020F0502020204030204" pitchFamily="34" charset="0"/>
-              </a:defRPr>
-            </a:lvl1pPr>
-          </a:lstStyle>
-          <a:p>
             <a:fld id="{B5CEABB6-07DC-46E8-9B57-56EC44A396E5}" type="slidenum">
-              <a:rPr lang="lv-LV" noProof="0" smtClean="0"/>
+              <a:rPr lang="lv-LV" smtClean="0"/>
               <a:pPr/>
               <a:t>‹#›</a:t>
             </a:fld>
-            <a:endParaRPr lang="lv-LV" noProof="0"/>
+            <a:endParaRPr lang="lv-LV" dirty="0"/>
           </a:p>
         </p:txBody>
       </p:sp>
@@ -8437,77 +7850,35 @@
       </p:sp>
       <p:sp>
         <p:nvSpPr>
-          <p:cNvPr id="30" name="Datuma vietturis 4">
-            <a:extLst>
-              <a:ext uri="{FF2B5EF4-FFF2-40B4-BE49-F238E27FC236}">
-                <a16:creationId xmlns:a16="http://schemas.microsoft.com/office/drawing/2014/main" id="{5EBE65FE-7980-4861-93F3-178D1931E7AF}"/>
-              </a:ext>
-            </a:extLst>
-          </p:cNvPr>
-          <p:cNvSpPr>
-            <a:spLocks noGrp="1"/>
-          </p:cNvSpPr>
-          <p:nvPr>
-            <p:ph type="dt" sz="half" idx="10"/>
-          </p:nvPr>
-        </p:nvSpPr>
-        <p:spPr>
-          <a:xfrm>
-            <a:off x="838200" y="6356350"/>
-            <a:ext cx="2743200" cy="365125"/>
-          </a:xfrm>
-        </p:spPr>
-        <p:txBody>
-          <a:bodyPr rtlCol="0"/>
+          <p:cNvPr id="4" name="Slaida numura vietturis 6">
+            <a:extLst>
+              <a:ext uri="{FF2B5EF4-FFF2-40B4-BE49-F238E27FC236}">
+                <a16:creationId xmlns:a16="http://schemas.microsoft.com/office/drawing/2014/main" id="{2F156D44-9356-92BC-1A9C-9B5977F17E3C}"/>
+              </a:ext>
+            </a:extLst>
+          </p:cNvPr>
+          <p:cNvSpPr txBox="1">
+            <a:spLocks/>
+          </p:cNvSpPr>
+          <p:nvPr userDrawn="1"/>
+        </p:nvSpPr>
+        <p:spPr>
+          <a:xfrm>
+            <a:off x="8610600" y="6224270"/>
+            <a:ext cx="2743200" cy="497205"/>
+          </a:xfrm>
+          <a:prstGeom prst="rect">
+            <a:avLst/>
+          </a:prstGeom>
+        </p:spPr>
+        <p:txBody>
+          <a:bodyPr vert="horz" lIns="91440" tIns="45720" rIns="91440" bIns="45720" rtlCol="0" anchor="ctr"/>
           <a:lstStyle>
-            <a:lvl1pPr>
-              <a:defRPr sz="900">
-                <a:solidFill>
-                  <a:schemeClr val="accent1">
-                    <a:lumMod val="40000"/>
-                    <a:lumOff val="60000"/>
-                  </a:schemeClr>
-                </a:solidFill>
-                <a:latin typeface="Calibri" panose="020F0502020204030204" pitchFamily="34" charset="0"/>
-                <a:cs typeface="Calibri" panose="020F0502020204030204" pitchFamily="34" charset="0"/>
-              </a:defRPr>
-            </a:lvl1pPr>
-          </a:lstStyle>
-          <a:p>
-            <a:r>
-              <a:rPr lang="lv-LV" noProof="0"/>
-              <a:t>7/29/20XX</a:t>
-            </a:r>
-          </a:p>
-        </p:txBody>
-      </p:sp>
-      <p:sp>
-        <p:nvSpPr>
-          <p:cNvPr id="31" name="Kājenes vietturis 5">
-            <a:extLst>
-              <a:ext uri="{FF2B5EF4-FFF2-40B4-BE49-F238E27FC236}">
-                <a16:creationId xmlns:a16="http://schemas.microsoft.com/office/drawing/2014/main" id="{5941D839-A1FC-4620-8485-F69D66D599E0}"/>
-              </a:ext>
-            </a:extLst>
-          </p:cNvPr>
-          <p:cNvSpPr>
-            <a:spLocks noGrp="1"/>
-          </p:cNvSpPr>
-          <p:nvPr>
-            <p:ph type="ftr" sz="quarter" idx="11"/>
-          </p:nvPr>
-        </p:nvSpPr>
-        <p:spPr>
-          <a:xfrm>
-            <a:off x="4038600" y="6356350"/>
-            <a:ext cx="4114800" cy="365125"/>
-          </a:xfrm>
-        </p:spPr>
-        <p:txBody>
-          <a:bodyPr rtlCol="0"/>
-          <a:lstStyle>
-            <a:lvl1pPr>
-              <a:defRPr sz="900">
+            <a:defPPr rtl="0">
+              <a:defRPr lang="lv-LV"/>
+            </a:defPPr>
+            <a:lvl1pPr marL="0" algn="r" defTabSz="914400" rtl="0" eaLnBrk="1" latinLnBrk="0" hangingPunct="1">
+              <a:defRPr sz="2800" kern="1200">
                 <a:solidFill>
                   <a:schemeClr val="accent4">
                     <a:lumMod val="40000"/>
@@ -8515,63 +7886,98 @@
                   </a:schemeClr>
                 </a:solidFill>
                 <a:latin typeface="Calibri" panose="020F0502020204030204" pitchFamily="34" charset="0"/>
+                <a:ea typeface="+mn-ea"/>
                 <a:cs typeface="Calibri" panose="020F0502020204030204" pitchFamily="34" charset="0"/>
               </a:defRPr>
             </a:lvl1pPr>
+            <a:lvl2pPr marL="457200" algn="l" defTabSz="914400" rtl="0" eaLnBrk="1" latinLnBrk="0" hangingPunct="1">
+              <a:defRPr sz="1800" kern="1200">
+                <a:solidFill>
+                  <a:schemeClr val="tx1"/>
+                </a:solidFill>
+                <a:latin typeface="+mn-lt"/>
+                <a:ea typeface="+mn-ea"/>
+                <a:cs typeface="+mn-cs"/>
+              </a:defRPr>
+            </a:lvl2pPr>
+            <a:lvl3pPr marL="914400" algn="l" defTabSz="914400" rtl="0" eaLnBrk="1" latinLnBrk="0" hangingPunct="1">
+              <a:defRPr sz="1800" kern="1200">
+                <a:solidFill>
+                  <a:schemeClr val="tx1"/>
+                </a:solidFill>
+                <a:latin typeface="+mn-lt"/>
+                <a:ea typeface="+mn-ea"/>
+                <a:cs typeface="+mn-cs"/>
+              </a:defRPr>
+            </a:lvl3pPr>
+            <a:lvl4pPr marL="1371600" algn="l" defTabSz="914400" rtl="0" eaLnBrk="1" latinLnBrk="0" hangingPunct="1">
+              <a:defRPr sz="1800" kern="1200">
+                <a:solidFill>
+                  <a:schemeClr val="tx1"/>
+                </a:solidFill>
+                <a:latin typeface="+mn-lt"/>
+                <a:ea typeface="+mn-ea"/>
+                <a:cs typeface="+mn-cs"/>
+              </a:defRPr>
+            </a:lvl4pPr>
+            <a:lvl5pPr marL="1828800" algn="l" defTabSz="914400" rtl="0" eaLnBrk="1" latinLnBrk="0" hangingPunct="1">
+              <a:defRPr sz="1800" kern="1200">
+                <a:solidFill>
+                  <a:schemeClr val="tx1"/>
+                </a:solidFill>
+                <a:latin typeface="+mn-lt"/>
+                <a:ea typeface="+mn-ea"/>
+                <a:cs typeface="+mn-cs"/>
+              </a:defRPr>
+            </a:lvl5pPr>
+            <a:lvl6pPr marL="2286000" algn="l" defTabSz="914400" rtl="0" eaLnBrk="1" latinLnBrk="0" hangingPunct="1">
+              <a:defRPr sz="1800" kern="1200">
+                <a:solidFill>
+                  <a:schemeClr val="tx1"/>
+                </a:solidFill>
+                <a:latin typeface="+mn-lt"/>
+                <a:ea typeface="+mn-ea"/>
+                <a:cs typeface="+mn-cs"/>
+              </a:defRPr>
+            </a:lvl6pPr>
+            <a:lvl7pPr marL="2743200" algn="l" defTabSz="914400" rtl="0" eaLnBrk="1" latinLnBrk="0" hangingPunct="1">
+              <a:defRPr sz="1800" kern="1200">
+                <a:solidFill>
+                  <a:schemeClr val="tx1"/>
+                </a:solidFill>
+                <a:latin typeface="+mn-lt"/>
+                <a:ea typeface="+mn-ea"/>
+                <a:cs typeface="+mn-cs"/>
+              </a:defRPr>
+            </a:lvl7pPr>
+            <a:lvl8pPr marL="3200400" algn="l" defTabSz="914400" rtl="0" eaLnBrk="1" latinLnBrk="0" hangingPunct="1">
+              <a:defRPr sz="1800" kern="1200">
+                <a:solidFill>
+                  <a:schemeClr val="tx1"/>
+                </a:solidFill>
+                <a:latin typeface="+mn-lt"/>
+                <a:ea typeface="+mn-ea"/>
+                <a:cs typeface="+mn-cs"/>
+              </a:defRPr>
+            </a:lvl8pPr>
+            <a:lvl9pPr marL="3657600" algn="l" defTabSz="914400" rtl="0" eaLnBrk="1" latinLnBrk="0" hangingPunct="1">
+              <a:defRPr sz="1800" kern="1200">
+                <a:solidFill>
+                  <a:schemeClr val="tx1"/>
+                </a:solidFill>
+                <a:latin typeface="+mn-lt"/>
+                <a:ea typeface="+mn-ea"/>
+                <a:cs typeface="+mn-cs"/>
+              </a:defRPr>
+            </a:lvl9pPr>
           </a:lstStyle>
           <a:p>
-            <a:r>
-              <a:rPr lang="lv-LV" noProof="0"/>
-              <a:t>Darbinieku orientācija</a:t>
-            </a:r>
-          </a:p>
-        </p:txBody>
-      </p:sp>
-      <p:sp>
-        <p:nvSpPr>
-          <p:cNvPr id="32" name="Slaida numura vietturis 6">
-            <a:extLst>
-              <a:ext uri="{FF2B5EF4-FFF2-40B4-BE49-F238E27FC236}">
-                <a16:creationId xmlns:a16="http://schemas.microsoft.com/office/drawing/2014/main" id="{B3B8613F-19BE-4CDB-BC4C-C321B4B8F2CF}"/>
-              </a:ext>
-            </a:extLst>
-          </p:cNvPr>
-          <p:cNvSpPr>
-            <a:spLocks noGrp="1"/>
-          </p:cNvSpPr>
-          <p:nvPr>
-            <p:ph type="sldNum" sz="quarter" idx="12"/>
-          </p:nvPr>
-        </p:nvSpPr>
-        <p:spPr>
-          <a:xfrm>
-            <a:off x="8610600" y="6356350"/>
-            <a:ext cx="2743200" cy="365125"/>
-          </a:xfrm>
-        </p:spPr>
-        <p:txBody>
-          <a:bodyPr rtlCol="0"/>
-          <a:lstStyle>
-            <a:lvl1pPr>
-              <a:defRPr sz="900">
-                <a:solidFill>
-                  <a:schemeClr val="accent4">
-                    <a:lumMod val="40000"/>
-                    <a:lumOff val="60000"/>
-                  </a:schemeClr>
-                </a:solidFill>
-                <a:latin typeface="Calibri" panose="020F0502020204030204" pitchFamily="34" charset="0"/>
-                <a:cs typeface="Calibri" panose="020F0502020204030204" pitchFamily="34" charset="0"/>
-              </a:defRPr>
-            </a:lvl1pPr>
-          </a:lstStyle>
-          <a:p>
             <a:fld id="{B5CEABB6-07DC-46E8-9B57-56EC44A396E5}" type="slidenum">
-              <a:rPr lang="lv-LV" noProof="0" smtClean="0"/>
+              <a:rPr lang="lv-LV" smtClean="0"/>
               <a:pPr/>
               <a:t>‹#›</a:t>
             </a:fld>
-            <a:endParaRPr lang="lv-LV" noProof="0"/>
+            <a:endParaRPr lang="lv-LV" dirty="0"/>
           </a:p>
         </p:txBody>
       </p:sp>
@@ -8729,38 +8135,36 @@
       </p:sp>
       <p:sp>
         <p:nvSpPr>
-          <p:cNvPr id="4" name="Datuma vietturis 3">
-            <a:extLst>
-              <a:ext uri="{FF2B5EF4-FFF2-40B4-BE49-F238E27FC236}">
-                <a16:creationId xmlns:a16="http://schemas.microsoft.com/office/drawing/2014/main" id="{001917CC-671D-47EA-B065-51E87EC27B53}"/>
-              </a:ext>
-            </a:extLst>
-          </p:cNvPr>
-          <p:cNvSpPr>
-            <a:spLocks noGrp="1"/>
-          </p:cNvSpPr>
-          <p:nvPr>
-            <p:ph type="dt" sz="half" idx="2"/>
-          </p:nvPr>
-        </p:nvSpPr>
-        <p:spPr>
-          <a:xfrm>
-            <a:off x="838200" y="6356350"/>
-            <a:ext cx="2743200" cy="365125"/>
+          <p:cNvPr id="8" name="Slaida numura vietturis 6">
+            <a:extLst>
+              <a:ext uri="{FF2B5EF4-FFF2-40B4-BE49-F238E27FC236}">
+                <a16:creationId xmlns:a16="http://schemas.microsoft.com/office/drawing/2014/main" id="{FE0DD214-AD46-D071-80A6-E6427772025E}"/>
+              </a:ext>
+            </a:extLst>
+          </p:cNvPr>
+          <p:cNvSpPr>
+            <a:spLocks noGrp="1"/>
+          </p:cNvSpPr>
+          <p:nvPr>
+            <p:ph type="sldNum" sz="quarter" idx="4"/>
+          </p:nvPr>
+        </p:nvSpPr>
+        <p:spPr>
+          <a:xfrm>
+            <a:off x="8610600" y="6224270"/>
+            <a:ext cx="2743200" cy="497205"/>
           </a:xfrm>
           <a:prstGeom prst="rect">
             <a:avLst/>
           </a:prstGeom>
         </p:spPr>
         <p:txBody>
-          <a:bodyPr vert="horz" lIns="91440" tIns="45720" rIns="91440" bIns="45720" rtlCol="0" anchor="ctr"/>
+          <a:bodyPr rtlCol="0"/>
           <a:lstStyle>
-            <a:lvl1pPr algn="l">
-              <a:defRPr sz="1200">
-                <a:solidFill>
-                  <a:schemeClr val="tx1">
-                    <a:tint val="75000"/>
-                  </a:schemeClr>
+            <a:lvl1pPr algn="r">
+              <a:defRPr sz="2800">
+                <a:solidFill>
+                  <a:schemeClr val="tx1"/>
                 </a:solidFill>
                 <a:latin typeface="Calibri" panose="020F0502020204030204" pitchFamily="34" charset="0"/>
                 <a:cs typeface="Calibri" panose="020F0502020204030204" pitchFamily="34" charset="0"/>
@@ -8768,118 +8172,15 @@
             </a:lvl1pPr>
           </a:lstStyle>
           <a:p>
-            <a:r>
-              <a:rPr lang="lv-LV" noProof="0"/>
-              <a:t>7/29/20XX</a:t>
-            </a:r>
-            <a:endParaRPr lang="lv-LV" noProof="0">
-              <a:latin typeface="Calibri" panose="020F0502020204030204" pitchFamily="34" charset="0"/>
-              <a:cs typeface="Calibri" panose="020F0502020204030204" pitchFamily="34" charset="0"/>
-            </a:endParaRPr>
-          </a:p>
-        </p:txBody>
-      </p:sp>
-      <p:sp>
-        <p:nvSpPr>
-          <p:cNvPr id="5" name="Kājenes vietturis 4">
-            <a:extLst>
-              <a:ext uri="{FF2B5EF4-FFF2-40B4-BE49-F238E27FC236}">
-                <a16:creationId xmlns:a16="http://schemas.microsoft.com/office/drawing/2014/main" id="{3F2D0B54-5D87-4D1B-9C6E-5A7B87C833A0}"/>
-              </a:ext>
-            </a:extLst>
-          </p:cNvPr>
-          <p:cNvSpPr>
-            <a:spLocks noGrp="1"/>
-          </p:cNvSpPr>
-          <p:nvPr>
-            <p:ph type="ftr" sz="quarter" idx="3"/>
-          </p:nvPr>
-        </p:nvSpPr>
-        <p:spPr>
-          <a:xfrm>
-            <a:off x="4038600" y="6356350"/>
-            <a:ext cx="4114800" cy="365125"/>
-          </a:xfrm>
-          <a:prstGeom prst="rect">
-            <a:avLst/>
-          </a:prstGeom>
-        </p:spPr>
-        <p:txBody>
-          <a:bodyPr vert="horz" lIns="91440" tIns="45720" rIns="91440" bIns="45720" rtlCol="0" anchor="ctr"/>
-          <a:lstStyle>
-            <a:lvl1pPr algn="ctr">
-              <a:defRPr sz="1200">
-                <a:solidFill>
-                  <a:schemeClr val="tx1">
-                    <a:tint val="75000"/>
-                  </a:schemeClr>
-                </a:solidFill>
-                <a:latin typeface="Calibri" panose="020F0502020204030204" pitchFamily="34" charset="0"/>
-                <a:cs typeface="Calibri" panose="020F0502020204030204" pitchFamily="34" charset="0"/>
-              </a:defRPr>
-            </a:lvl1pPr>
-          </a:lstStyle>
-          <a:p>
-            <a:r>
-              <a:rPr lang="lv-LV" noProof="0"/>
-              <a:t>Darbinieku orientācija</a:t>
-            </a:r>
-            <a:endParaRPr lang="lv-LV" noProof="0">
-              <a:latin typeface="Calibri" panose="020F0502020204030204" pitchFamily="34" charset="0"/>
-              <a:cs typeface="Calibri" panose="020F0502020204030204" pitchFamily="34" charset="0"/>
-            </a:endParaRPr>
-          </a:p>
-        </p:txBody>
-      </p:sp>
-      <p:sp>
-        <p:nvSpPr>
-          <p:cNvPr id="6" name="Slaida numura vietturis 5">
-            <a:extLst>
-              <a:ext uri="{FF2B5EF4-FFF2-40B4-BE49-F238E27FC236}">
-                <a16:creationId xmlns:a16="http://schemas.microsoft.com/office/drawing/2014/main" id="{C5CADFFD-0FF7-4DDC-8879-918576F63EA6}"/>
-              </a:ext>
-            </a:extLst>
-          </p:cNvPr>
-          <p:cNvSpPr>
-            <a:spLocks noGrp="1"/>
-          </p:cNvSpPr>
-          <p:nvPr>
-            <p:ph type="sldNum" sz="quarter" idx="4"/>
-          </p:nvPr>
-        </p:nvSpPr>
-        <p:spPr>
-          <a:xfrm>
-            <a:off x="8610600" y="6356350"/>
-            <a:ext cx="2743200" cy="365125"/>
-          </a:xfrm>
-          <a:prstGeom prst="rect">
-            <a:avLst/>
-          </a:prstGeom>
-        </p:spPr>
-        <p:txBody>
-          <a:bodyPr vert="horz" lIns="91440" tIns="45720" rIns="91440" bIns="45720" rtlCol="0" anchor="ctr"/>
-          <a:lstStyle>
-            <a:lvl1pPr algn="r">
-              <a:defRPr sz="1200">
-                <a:solidFill>
-                  <a:schemeClr val="tx1">
-                    <a:tint val="75000"/>
-                  </a:schemeClr>
-                </a:solidFill>
-                <a:latin typeface="Calibri" panose="020F0502020204030204" pitchFamily="34" charset="0"/>
-                <a:cs typeface="Calibri" panose="020F0502020204030204" pitchFamily="34" charset="0"/>
-              </a:defRPr>
-            </a:lvl1pPr>
-          </a:lstStyle>
-          <a:p>
             <a:fld id="{B5CEABB6-07DC-46E8-9B57-56EC44A396E5}" type="slidenum">
-              <a:rPr lang="lv-LV" noProof="0" smtClean="0"/>
+              <a:rPr lang="lv-LV" smtClean="0"/>
               <a:pPr/>
               <a:t>‹#›</a:t>
             </a:fld>
-            <a:endParaRPr lang="lv-LV" noProof="0">
-              <a:latin typeface="Calibri" panose="020F0502020204030204" pitchFamily="34" charset="0"/>
-              <a:cs typeface="Calibri" panose="020F0502020204030204" pitchFamily="34" charset="0"/>
+            <a:endParaRPr lang="lv-LV" dirty="0">
+              <a:solidFill>
+                <a:schemeClr val="tx1"/>
+              </a:solidFill>
             </a:endParaRPr>
           </a:p>
         </p:txBody>
@@ -9453,56 +8754,134 @@
           </a:xfrm>
         </p:spPr>
         <p:txBody>
+          <a:bodyPr anchor="ctr">
+            <a:normAutofit/>
+          </a:bodyPr>
+          <a:lstStyle/>
+          <a:p>
+            <a:pPr marL="457200" indent="-457200">
+              <a:buFont typeface="Arial" panose="020B0604020202020204" pitchFamily="34" charset="0"/>
+              <a:buChar char="•"/>
+            </a:pPr>
+            <a:r>
+              <a:rPr lang="lv-LV" sz="2800" dirty="0"/>
+              <a:t>Liels klāsts projektu, simulāciju un spēļu;</a:t>
+            </a:r>
+          </a:p>
+          <a:p>
+            <a:pPr marL="457200" indent="-457200">
+              <a:buFont typeface="Arial" panose="020B0604020202020204" pitchFamily="34" charset="0"/>
+              <a:buChar char="•"/>
+            </a:pPr>
+            <a:r>
+              <a:rPr lang="lv-LV" sz="2800" dirty="0"/>
+              <a:t>Tās saista militārās prasmes vai tās daļas;</a:t>
+            </a:r>
+          </a:p>
+          <a:p>
+            <a:pPr marL="457200" indent="-457200">
+              <a:buFont typeface="Arial" panose="020B0604020202020204" pitchFamily="34" charset="0"/>
+              <a:buChar char="•"/>
+            </a:pPr>
+            <a:r>
+              <a:rPr lang="lv-LV" sz="2800" dirty="0"/>
+              <a:t>Būtiska daļa šiem projektiem:</a:t>
+            </a:r>
+          </a:p>
+          <a:p>
+            <a:pPr marL="1143000" lvl="1" indent="-457200"/>
+            <a:r>
+              <a:rPr lang="lv-LV" sz="2800" dirty="0">
+                <a:solidFill>
+                  <a:schemeClr val="bg1"/>
+                </a:solidFill>
+              </a:rPr>
+              <a:t>Nepieciešama augstas veiktspējas datorsistēmas;</a:t>
+            </a:r>
+          </a:p>
+          <a:p>
+            <a:pPr marL="1143000" lvl="1" indent="-457200"/>
+            <a:r>
+              <a:rPr lang="lv-LV" sz="2800" dirty="0">
+                <a:solidFill>
+                  <a:schemeClr val="bg1"/>
+                </a:solidFill>
+              </a:rPr>
+              <a:t>Lielas izmaksas;</a:t>
+            </a:r>
+          </a:p>
+          <a:p>
+            <a:pPr marL="1143000" lvl="1" indent="-457200"/>
+            <a:r>
+              <a:rPr lang="lv-LV" sz="2800" dirty="0">
+                <a:solidFill>
+                  <a:schemeClr val="bg1"/>
+                </a:solidFill>
+              </a:rPr>
+              <a:t>Ierobežojoša licencēšana.</a:t>
+            </a:r>
+          </a:p>
+          <a:p>
+            <a:pPr marL="457200" indent="-457200">
+              <a:buFont typeface="Arial" panose="020B0604020202020204" pitchFamily="34" charset="0"/>
+              <a:buChar char="•"/>
+            </a:pPr>
+            <a:r>
+              <a:rPr lang="lv-LV" sz="2800" dirty="0">
+                <a:solidFill>
+                  <a:schemeClr val="bg1"/>
+                </a:solidFill>
+              </a:rPr>
+              <a:t>Mērķis:</a:t>
+            </a:r>
+          </a:p>
+          <a:p>
+            <a:pPr marL="1143000" lvl="1" indent="-457200"/>
+            <a:r>
+              <a:rPr lang="lv-LV" sz="2800" dirty="0">
+                <a:solidFill>
+                  <a:schemeClr val="bg1"/>
+                </a:solidFill>
+              </a:rPr>
+              <a:t>Izstrādāt plaši pieejamu projektu;</a:t>
+            </a:r>
+          </a:p>
+          <a:p>
+            <a:pPr marL="1143000" lvl="1" indent="-457200"/>
+            <a:r>
+              <a:rPr lang="lv-LV" sz="2800" dirty="0">
+                <a:solidFill>
+                  <a:schemeClr val="bg1"/>
+                </a:solidFill>
+              </a:rPr>
+              <a:t>Datorspēle saistot militārās prasmes.</a:t>
+            </a:r>
+          </a:p>
+        </p:txBody>
+      </p:sp>
+      <p:sp>
+        <p:nvSpPr>
+          <p:cNvPr id="16" name="Teksta vietturis 15">
+            <a:extLst>
+              <a:ext uri="{FF2B5EF4-FFF2-40B4-BE49-F238E27FC236}">
+                <a16:creationId xmlns:a16="http://schemas.microsoft.com/office/drawing/2014/main" id="{67296821-B182-FD8A-8B92-715EA944DE04}"/>
+              </a:ext>
+            </a:extLst>
+          </p:cNvPr>
+          <p:cNvSpPr>
+            <a:spLocks noGrp="1"/>
+          </p:cNvSpPr>
+          <p:nvPr>
+            <p:ph type="body" sz="quarter" idx="57"/>
+          </p:nvPr>
+        </p:nvSpPr>
+        <p:spPr/>
+        <p:txBody>
           <a:bodyPr>
             <a:normAutofit/>
           </a:bodyPr>
           <a:lstStyle/>
           <a:p>
-            <a:pPr marL="457200" indent="-457200">
-              <a:buFont typeface="Arial" panose="020B0604020202020204" pitchFamily="34" charset="0"/>
-              <a:buChar char="•"/>
-            </a:pPr>
-            <a:r>
-              <a:rPr lang="lv-LV" sz="2800" dirty="0"/>
-              <a:t>Liels </a:t>
-            </a:r>
-            <a:r>
-              <a:rPr lang="lv-LV" sz="2800"/>
-              <a:t>klāsts simulāciju;</a:t>
-            </a:r>
-          </a:p>
-          <a:p>
-            <a:pPr marL="457200" indent="-457200">
-              <a:buFont typeface="Arial" panose="020B0604020202020204" pitchFamily="34" charset="0"/>
-              <a:buChar char="•"/>
-            </a:pPr>
-            <a:endParaRPr lang="lv-LV" sz="2800" dirty="0"/>
-          </a:p>
-        </p:txBody>
-      </p:sp>
-      <p:sp>
-        <p:nvSpPr>
-          <p:cNvPr id="16" name="Teksta vietturis 15">
-            <a:extLst>
-              <a:ext uri="{FF2B5EF4-FFF2-40B4-BE49-F238E27FC236}">
-                <a16:creationId xmlns:a16="http://schemas.microsoft.com/office/drawing/2014/main" id="{67296821-B182-FD8A-8B92-715EA944DE04}"/>
-              </a:ext>
-            </a:extLst>
-          </p:cNvPr>
-          <p:cNvSpPr>
-            <a:spLocks noGrp="1"/>
-          </p:cNvSpPr>
-          <p:nvPr>
-            <p:ph type="body" sz="quarter" idx="57"/>
-          </p:nvPr>
-        </p:nvSpPr>
-        <p:spPr/>
-        <p:txBody>
-          <a:bodyPr>
-            <a:normAutofit/>
-          </a:bodyPr>
-          <a:lstStyle/>
-          <a:p>
             <a:endParaRPr lang="lv-LV" sz="2000" dirty="0"/>
           </a:p>
         </p:txBody>
@@ -9520,10 +8899,18 @@
             <a:spLocks noGrp="1"/>
           </p:cNvSpPr>
           <p:nvPr>
-            <p:ph type="sldNum" sz="quarter" idx="12"/>
-          </p:nvPr>
-        </p:nvSpPr>
-        <p:spPr/>
+            <p:ph type="sldNum" sz="quarter" idx="4294967295"/>
+          </p:nvPr>
+        </p:nvSpPr>
+        <p:spPr>
+          <a:xfrm>
+            <a:off x="8610600" y="6356350"/>
+            <a:ext cx="2743200" cy="365125"/>
+          </a:xfrm>
+          <a:prstGeom prst="rect">
+            <a:avLst/>
+          </a:prstGeom>
+        </p:spPr>
         <p:txBody>
           <a:bodyPr/>
           <a:lstStyle/>
@@ -9541,6 +8928,1005 @@
     <p:extLst>
       <p:ext uri="{BB962C8B-B14F-4D97-AF65-F5344CB8AC3E}">
         <p14:creationId xmlns:p14="http://schemas.microsoft.com/office/powerpoint/2010/main" val="737429254"/>
+      </p:ext>
+    </p:extLst>
+  </p:cSld>
+  <p:clrMapOvr>
+    <a:masterClrMapping/>
+  </p:clrMapOvr>
+</p:sld>
+</file>
+
+<file path=ppt/slides/slide3.xml><?xml version="1.0" encoding="utf-8"?>
+<p:sld xmlns:a="http://schemas.openxmlformats.org/drawingml/2006/main" xmlns:r="http://schemas.openxmlformats.org/officeDocument/2006/relationships" xmlns:p="http://schemas.openxmlformats.org/presentationml/2006/main">
+  <p:cSld>
+    <p:spTree>
+      <p:nvGrpSpPr>
+        <p:cNvPr id="1" name="">
+          <a:extLst>
+            <a:ext uri="{FF2B5EF4-FFF2-40B4-BE49-F238E27FC236}">
+              <a16:creationId xmlns:a16="http://schemas.microsoft.com/office/drawing/2014/main" id="{0D5ED9D7-9B35-5E6F-6BAF-C164B3E2847B}"/>
+            </a:ext>
+          </a:extLst>
+        </p:cNvPr>
+        <p:cNvGrpSpPr/>
+        <p:nvPr/>
+      </p:nvGrpSpPr>
+      <p:grpSpPr>
+        <a:xfrm>
+          <a:off x="0" y="0"/>
+          <a:ext cx="0" cy="0"/>
+          <a:chOff x="0" y="0"/>
+          <a:chExt cx="0" cy="0"/>
+        </a:xfrm>
+      </p:grpSpPr>
+      <p:sp>
+        <p:nvSpPr>
+          <p:cNvPr id="2" name="Virsraksts 1">
+            <a:extLst>
+              <a:ext uri="{FF2B5EF4-FFF2-40B4-BE49-F238E27FC236}">
+                <a16:creationId xmlns:a16="http://schemas.microsoft.com/office/drawing/2014/main" id="{88DD900D-FFE9-FCEB-E6D4-CF95AC7EFD23}"/>
+              </a:ext>
+            </a:extLst>
+          </p:cNvPr>
+          <p:cNvSpPr>
+            <a:spLocks noGrp="1"/>
+          </p:cNvSpPr>
+          <p:nvPr>
+            <p:ph type="title"/>
+          </p:nvPr>
+        </p:nvSpPr>
+        <p:spPr/>
+        <p:txBody>
+          <a:bodyPr/>
+          <a:lstStyle/>
+          <a:p>
+            <a:r>
+              <a:rPr lang="lv-LV" dirty="0"/>
+              <a:t>Izstrādes soļi</a:t>
+            </a:r>
+          </a:p>
+        </p:txBody>
+      </p:sp>
+      <p:sp>
+        <p:nvSpPr>
+          <p:cNvPr id="11" name="Teksta vietturis 10">
+            <a:extLst>
+              <a:ext uri="{FF2B5EF4-FFF2-40B4-BE49-F238E27FC236}">
+                <a16:creationId xmlns:a16="http://schemas.microsoft.com/office/drawing/2014/main" id="{2A9B32B0-C563-7297-6443-7DF8DE24B263}"/>
+              </a:ext>
+            </a:extLst>
+          </p:cNvPr>
+          <p:cNvSpPr>
+            <a:spLocks noGrp="1"/>
+          </p:cNvSpPr>
+          <p:nvPr>
+            <p:ph type="body" sz="quarter" idx="52"/>
+          </p:nvPr>
+        </p:nvSpPr>
+        <p:spPr>
+          <a:xfrm>
+            <a:off x="5314949" y="365125"/>
+            <a:ext cx="6600825" cy="5740400"/>
+          </a:xfrm>
+        </p:spPr>
+        <p:txBody>
+          <a:bodyPr anchor="ctr">
+            <a:normAutofit/>
+          </a:bodyPr>
+          <a:lstStyle/>
+          <a:p>
+            <a:pPr marL="457200" indent="-457200">
+              <a:buFont typeface="Arial" panose="020B0604020202020204" pitchFamily="34" charset="0"/>
+              <a:buChar char="•"/>
+            </a:pPr>
+            <a:r>
+              <a:rPr lang="lv-LV" sz="2800" dirty="0"/>
+              <a:t>Projekta tēma pētīšana;</a:t>
+            </a:r>
+          </a:p>
+          <a:p>
+            <a:pPr marL="457200" indent="-457200">
+              <a:buFont typeface="Arial" panose="020B0604020202020204" pitchFamily="34" charset="0"/>
+              <a:buChar char="•"/>
+            </a:pPr>
+            <a:r>
+              <a:rPr lang="lv-LV" sz="2800" dirty="0"/>
+              <a:t>Datu un tās klašu modelēšana;</a:t>
+            </a:r>
+          </a:p>
+          <a:p>
+            <a:pPr marL="457200" indent="-457200">
+              <a:buFont typeface="Arial" panose="020B0604020202020204" pitchFamily="34" charset="0"/>
+              <a:buChar char="•"/>
+            </a:pPr>
+            <a:r>
+              <a:rPr lang="lv-LV" sz="2800" dirty="0"/>
+              <a:t>Darbības gaita un algoritma modelēšana;</a:t>
+            </a:r>
+          </a:p>
+          <a:p>
+            <a:pPr marL="457200" indent="-457200">
+              <a:buFont typeface="Arial" panose="020B0604020202020204" pitchFamily="34" charset="0"/>
+              <a:buChar char="•"/>
+            </a:pPr>
+            <a:r>
+              <a:rPr lang="lv-LV" sz="2800" dirty="0"/>
+              <a:t>Kodu rakstīšana un testēšana no modeļiem;</a:t>
+            </a:r>
+          </a:p>
+          <a:p>
+            <a:pPr marL="457200" indent="-457200">
+              <a:buFont typeface="Arial" panose="020B0604020202020204" pitchFamily="34" charset="0"/>
+              <a:buChar char="•"/>
+            </a:pPr>
+            <a:r>
+              <a:rPr lang="lv-LV" sz="2800" dirty="0"/>
+              <a:t>Vizuālās grafikas un skaņas efektu izveide.</a:t>
+            </a:r>
+          </a:p>
+        </p:txBody>
+      </p:sp>
+      <p:sp>
+        <p:nvSpPr>
+          <p:cNvPr id="16" name="Teksta vietturis 15">
+            <a:extLst>
+              <a:ext uri="{FF2B5EF4-FFF2-40B4-BE49-F238E27FC236}">
+                <a16:creationId xmlns:a16="http://schemas.microsoft.com/office/drawing/2014/main" id="{9D4D7A6B-327A-DF54-25DC-4E9AA55D3062}"/>
+              </a:ext>
+            </a:extLst>
+          </p:cNvPr>
+          <p:cNvSpPr>
+            <a:spLocks noGrp="1"/>
+          </p:cNvSpPr>
+          <p:nvPr>
+            <p:ph type="body" sz="quarter" idx="57"/>
+          </p:nvPr>
+        </p:nvSpPr>
+        <p:spPr/>
+        <p:txBody>
+          <a:bodyPr>
+            <a:normAutofit/>
+          </a:bodyPr>
+          <a:lstStyle/>
+          <a:p>
+            <a:endParaRPr lang="lv-LV" sz="2000" dirty="0"/>
+          </a:p>
+        </p:txBody>
+      </p:sp>
+      <p:sp>
+        <p:nvSpPr>
+          <p:cNvPr id="19" name="Slaida numura vietturis 18">
+            <a:extLst>
+              <a:ext uri="{FF2B5EF4-FFF2-40B4-BE49-F238E27FC236}">
+                <a16:creationId xmlns:a16="http://schemas.microsoft.com/office/drawing/2014/main" id="{3ECFBE4E-41D6-5965-A9E2-EECAE1D50282}"/>
+              </a:ext>
+            </a:extLst>
+          </p:cNvPr>
+          <p:cNvSpPr>
+            <a:spLocks noGrp="1"/>
+          </p:cNvSpPr>
+          <p:nvPr>
+            <p:ph type="sldNum" sz="quarter" idx="4294967295"/>
+          </p:nvPr>
+        </p:nvSpPr>
+        <p:spPr>
+          <a:xfrm>
+            <a:off x="8610600" y="6356350"/>
+            <a:ext cx="2743200" cy="365125"/>
+          </a:xfrm>
+          <a:prstGeom prst="rect">
+            <a:avLst/>
+          </a:prstGeom>
+        </p:spPr>
+        <p:txBody>
+          <a:bodyPr/>
+          <a:lstStyle/>
+          <a:p>
+            <a:fld id="{B5CEABB6-07DC-46E8-9B57-56EC44A396E5}" type="slidenum">
+              <a:rPr lang="lv-LV" noProof="0" smtClean="0"/>
+              <a:pPr/>
+              <a:t>3</a:t>
+            </a:fld>
+            <a:endParaRPr lang="lv-LV" noProof="0"/>
+          </a:p>
+        </p:txBody>
+      </p:sp>
+    </p:spTree>
+    <p:extLst>
+      <p:ext uri="{BB962C8B-B14F-4D97-AF65-F5344CB8AC3E}">
+        <p14:creationId xmlns:p14="http://schemas.microsoft.com/office/powerpoint/2010/main" val="1484961422"/>
+      </p:ext>
+    </p:extLst>
+  </p:cSld>
+  <p:clrMapOvr>
+    <a:masterClrMapping/>
+  </p:clrMapOvr>
+</p:sld>
+</file>
+
+<file path=ppt/slides/slide4.xml><?xml version="1.0" encoding="utf-8"?>
+<p:sld xmlns:a="http://schemas.openxmlformats.org/drawingml/2006/main" xmlns:r="http://schemas.openxmlformats.org/officeDocument/2006/relationships" xmlns:p="http://schemas.openxmlformats.org/presentationml/2006/main">
+  <p:cSld>
+    <p:spTree>
+      <p:nvGrpSpPr>
+        <p:cNvPr id="1" name="">
+          <a:extLst>
+            <a:ext uri="{FF2B5EF4-FFF2-40B4-BE49-F238E27FC236}">
+              <a16:creationId xmlns:a16="http://schemas.microsoft.com/office/drawing/2014/main" id="{15402B09-4FB7-CFF7-57CC-3FF4A0C2CB97}"/>
+            </a:ext>
+          </a:extLst>
+        </p:cNvPr>
+        <p:cNvGrpSpPr/>
+        <p:nvPr/>
+      </p:nvGrpSpPr>
+      <p:grpSpPr>
+        <a:xfrm>
+          <a:off x="0" y="0"/>
+          <a:ext cx="0" cy="0"/>
+          <a:chOff x="0" y="0"/>
+          <a:chExt cx="0" cy="0"/>
+        </a:xfrm>
+      </p:grpSpPr>
+      <p:sp>
+        <p:nvSpPr>
+          <p:cNvPr id="2" name="Virsraksts 1">
+            <a:extLst>
+              <a:ext uri="{FF2B5EF4-FFF2-40B4-BE49-F238E27FC236}">
+                <a16:creationId xmlns:a16="http://schemas.microsoft.com/office/drawing/2014/main" id="{FE5BCC89-505E-A2C0-55C9-37D9DD7D0710}"/>
+              </a:ext>
+            </a:extLst>
+          </p:cNvPr>
+          <p:cNvSpPr>
+            <a:spLocks noGrp="1"/>
+          </p:cNvSpPr>
+          <p:nvPr>
+            <p:ph type="title"/>
+          </p:nvPr>
+        </p:nvSpPr>
+        <p:spPr/>
+        <p:txBody>
+          <a:bodyPr/>
+          <a:lstStyle/>
+          <a:p>
+            <a:r>
+              <a:rPr lang="lv-LV" dirty="0"/>
+              <a:t>Ainas</a:t>
+            </a:r>
+          </a:p>
+        </p:txBody>
+      </p:sp>
+      <p:sp>
+        <p:nvSpPr>
+          <p:cNvPr id="11" name="Teksta vietturis 10">
+            <a:extLst>
+              <a:ext uri="{FF2B5EF4-FFF2-40B4-BE49-F238E27FC236}">
+                <a16:creationId xmlns:a16="http://schemas.microsoft.com/office/drawing/2014/main" id="{E72A984C-6066-6495-4499-534985E0777D}"/>
+              </a:ext>
+            </a:extLst>
+          </p:cNvPr>
+          <p:cNvSpPr>
+            <a:spLocks noGrp="1"/>
+          </p:cNvSpPr>
+          <p:nvPr>
+            <p:ph type="body" sz="quarter" idx="52"/>
+          </p:nvPr>
+        </p:nvSpPr>
+        <p:spPr>
+          <a:xfrm>
+            <a:off x="5314949" y="365125"/>
+            <a:ext cx="6600825" cy="5740400"/>
+          </a:xfrm>
+        </p:spPr>
+        <p:txBody>
+          <a:bodyPr anchor="ctr">
+            <a:normAutofit/>
+          </a:bodyPr>
+          <a:lstStyle/>
+          <a:p>
+            <a:pPr marL="457200" indent="-457200">
+              <a:buFont typeface="Arial" panose="020B0604020202020204" pitchFamily="34" charset="0"/>
+              <a:buChar char="•"/>
+            </a:pPr>
+            <a:r>
+              <a:rPr lang="lv-LV" sz="2800" dirty="0"/>
+              <a:t>Sākuma aina:</a:t>
+            </a:r>
+          </a:p>
+          <a:p>
+            <a:pPr marL="1143000" lvl="1" indent="-457200"/>
+            <a:r>
+              <a:rPr lang="lv-LV" sz="2800" dirty="0">
+                <a:solidFill>
+                  <a:schemeClr val="bg1"/>
+                </a:solidFill>
+              </a:rPr>
+              <a:t>Iestatījumi;</a:t>
+            </a:r>
+          </a:p>
+          <a:p>
+            <a:pPr marL="1143000" lvl="1" indent="-457200"/>
+            <a:r>
+              <a:rPr lang="lv-LV" sz="2800" dirty="0">
+                <a:solidFill>
+                  <a:schemeClr val="bg1"/>
+                </a:solidFill>
+              </a:rPr>
+              <a:t>Anotācija;</a:t>
+            </a:r>
+          </a:p>
+          <a:p>
+            <a:pPr marL="1143000" lvl="1" indent="-457200"/>
+            <a:r>
+              <a:rPr lang="lv-LV" sz="2800" dirty="0">
+                <a:solidFill>
+                  <a:schemeClr val="bg1"/>
+                </a:solidFill>
+              </a:rPr>
+              <a:t>Pieejamās ierīces.</a:t>
+            </a:r>
+          </a:p>
+          <a:p>
+            <a:pPr marL="457200" indent="-457200">
+              <a:buFont typeface="Arial" panose="020B0604020202020204" pitchFamily="34" charset="0"/>
+              <a:buChar char="•"/>
+            </a:pPr>
+            <a:r>
+              <a:rPr lang="lv-LV" sz="2800" dirty="0"/>
+              <a:t>Līmeņu atlases aina;</a:t>
+            </a:r>
+          </a:p>
+          <a:p>
+            <a:pPr marL="1143000" lvl="1" indent="-457200"/>
+            <a:r>
+              <a:rPr lang="lv-LV" sz="2800" dirty="0">
+                <a:solidFill>
+                  <a:schemeClr val="bg1"/>
+                </a:solidFill>
+              </a:rPr>
+              <a:t>Līmeņa informācija.</a:t>
+            </a:r>
+            <a:endParaRPr lang="lv-LV" sz="3600" dirty="0"/>
+          </a:p>
+          <a:p>
+            <a:pPr marL="457200" indent="-457200">
+              <a:buFont typeface="Arial" panose="020B0604020202020204" pitchFamily="34" charset="0"/>
+              <a:buChar char="•"/>
+            </a:pPr>
+            <a:r>
+              <a:rPr lang="lv-LV" sz="2800" dirty="0"/>
+              <a:t>Spēles laukuma aina:</a:t>
+            </a:r>
+          </a:p>
+          <a:p>
+            <a:pPr marL="1143000" lvl="1" indent="-457200"/>
+            <a:r>
+              <a:rPr lang="lv-LV" sz="2800" dirty="0">
+                <a:solidFill>
+                  <a:schemeClr val="bg1"/>
+                </a:solidFill>
+              </a:rPr>
+              <a:t>Kartes laukums;</a:t>
+            </a:r>
+          </a:p>
+          <a:p>
+            <a:pPr marL="1143000" lvl="1" indent="-457200"/>
+            <a:r>
+              <a:rPr lang="lv-LV" sz="2800" dirty="0">
+                <a:solidFill>
+                  <a:schemeClr val="bg1"/>
+                </a:solidFill>
+              </a:rPr>
+              <a:t>Mērķu iznīcināšana.</a:t>
+            </a:r>
+            <a:endParaRPr lang="lv-LV" sz="2800" dirty="0"/>
+          </a:p>
+          <a:p>
+            <a:pPr marL="457200" indent="-457200">
+              <a:buFont typeface="Arial" panose="020B0604020202020204" pitchFamily="34" charset="0"/>
+              <a:buChar char="•"/>
+            </a:pPr>
+            <a:endParaRPr lang="lv-LV" sz="2800" dirty="0"/>
+          </a:p>
+        </p:txBody>
+      </p:sp>
+      <p:sp>
+        <p:nvSpPr>
+          <p:cNvPr id="16" name="Teksta vietturis 15">
+            <a:extLst>
+              <a:ext uri="{FF2B5EF4-FFF2-40B4-BE49-F238E27FC236}">
+                <a16:creationId xmlns:a16="http://schemas.microsoft.com/office/drawing/2014/main" id="{51B1D8F9-1192-51C6-6589-2E86DD080D1E}"/>
+              </a:ext>
+            </a:extLst>
+          </p:cNvPr>
+          <p:cNvSpPr>
+            <a:spLocks noGrp="1"/>
+          </p:cNvSpPr>
+          <p:nvPr>
+            <p:ph type="body" sz="quarter" idx="57"/>
+          </p:nvPr>
+        </p:nvSpPr>
+        <p:spPr/>
+        <p:txBody>
+          <a:bodyPr>
+            <a:normAutofit/>
+          </a:bodyPr>
+          <a:lstStyle/>
+          <a:p>
+            <a:endParaRPr lang="lv-LV" sz="2000" dirty="0"/>
+          </a:p>
+        </p:txBody>
+      </p:sp>
+      <p:sp>
+        <p:nvSpPr>
+          <p:cNvPr id="19" name="Slaida numura vietturis 18">
+            <a:extLst>
+              <a:ext uri="{FF2B5EF4-FFF2-40B4-BE49-F238E27FC236}">
+                <a16:creationId xmlns:a16="http://schemas.microsoft.com/office/drawing/2014/main" id="{E5FDA097-BB2F-78D1-3F4E-D3BE14683279}"/>
+              </a:ext>
+            </a:extLst>
+          </p:cNvPr>
+          <p:cNvSpPr>
+            <a:spLocks noGrp="1"/>
+          </p:cNvSpPr>
+          <p:nvPr>
+            <p:ph type="sldNum" sz="quarter" idx="4294967295"/>
+          </p:nvPr>
+        </p:nvSpPr>
+        <p:spPr>
+          <a:xfrm>
+            <a:off x="8610600" y="6356350"/>
+            <a:ext cx="2743200" cy="365125"/>
+          </a:xfrm>
+          <a:prstGeom prst="rect">
+            <a:avLst/>
+          </a:prstGeom>
+        </p:spPr>
+        <p:txBody>
+          <a:bodyPr/>
+          <a:lstStyle/>
+          <a:p>
+            <a:fld id="{B5CEABB6-07DC-46E8-9B57-56EC44A396E5}" type="slidenum">
+              <a:rPr lang="lv-LV" noProof="0" smtClean="0"/>
+              <a:pPr/>
+              <a:t>4</a:t>
+            </a:fld>
+            <a:endParaRPr lang="lv-LV" noProof="0"/>
+          </a:p>
+        </p:txBody>
+      </p:sp>
+    </p:spTree>
+    <p:extLst>
+      <p:ext uri="{BB962C8B-B14F-4D97-AF65-F5344CB8AC3E}">
+        <p14:creationId xmlns:p14="http://schemas.microsoft.com/office/powerpoint/2010/main" val="427165182"/>
+      </p:ext>
+    </p:extLst>
+  </p:cSld>
+  <p:clrMapOvr>
+    <a:masterClrMapping/>
+  </p:clrMapOvr>
+</p:sld>
+</file>
+
+<file path=ppt/slides/slide5.xml><?xml version="1.0" encoding="utf-8"?>
+<p:sld xmlns:a="http://schemas.openxmlformats.org/drawingml/2006/main" xmlns:r="http://schemas.openxmlformats.org/officeDocument/2006/relationships" xmlns:p="http://schemas.openxmlformats.org/presentationml/2006/main">
+  <p:cSld>
+    <p:spTree>
+      <p:nvGrpSpPr>
+        <p:cNvPr id="1" name="">
+          <a:extLst>
+            <a:ext uri="{FF2B5EF4-FFF2-40B4-BE49-F238E27FC236}">
+              <a16:creationId xmlns:a16="http://schemas.microsoft.com/office/drawing/2014/main" id="{801774AF-5D1D-E498-2A18-FECD350B8303}"/>
+            </a:ext>
+          </a:extLst>
+        </p:cNvPr>
+        <p:cNvGrpSpPr/>
+        <p:nvPr/>
+      </p:nvGrpSpPr>
+      <p:grpSpPr>
+        <a:xfrm>
+          <a:off x="0" y="0"/>
+          <a:ext cx="0" cy="0"/>
+          <a:chOff x="0" y="0"/>
+          <a:chExt cx="0" cy="0"/>
+        </a:xfrm>
+      </p:grpSpPr>
+      <p:sp>
+        <p:nvSpPr>
+          <p:cNvPr id="2" name="Virsraksts 1">
+            <a:extLst>
+              <a:ext uri="{FF2B5EF4-FFF2-40B4-BE49-F238E27FC236}">
+                <a16:creationId xmlns:a16="http://schemas.microsoft.com/office/drawing/2014/main" id="{FB6E7469-6DC6-B4D6-2081-4B2190F9C437}"/>
+              </a:ext>
+            </a:extLst>
+          </p:cNvPr>
+          <p:cNvSpPr>
+            <a:spLocks noGrp="1"/>
+          </p:cNvSpPr>
+          <p:nvPr>
+            <p:ph type="title"/>
+          </p:nvPr>
+        </p:nvSpPr>
+        <p:spPr/>
+        <p:txBody>
+          <a:bodyPr/>
+          <a:lstStyle/>
+          <a:p>
+            <a:r>
+              <a:rPr lang="lv-LV" dirty="0"/>
+              <a:t>Ainas – Sākuma aina</a:t>
+            </a:r>
+          </a:p>
+        </p:txBody>
+      </p:sp>
+      <p:sp>
+        <p:nvSpPr>
+          <p:cNvPr id="19" name="Slaida numura vietturis 18">
+            <a:extLst>
+              <a:ext uri="{FF2B5EF4-FFF2-40B4-BE49-F238E27FC236}">
+                <a16:creationId xmlns:a16="http://schemas.microsoft.com/office/drawing/2014/main" id="{BEC85D28-766D-FC3C-4109-461C3BCA8DB5}"/>
+              </a:ext>
+            </a:extLst>
+          </p:cNvPr>
+          <p:cNvSpPr>
+            <a:spLocks noGrp="1"/>
+          </p:cNvSpPr>
+          <p:nvPr>
+            <p:ph type="sldNum" sz="quarter" idx="4294967295"/>
+          </p:nvPr>
+        </p:nvSpPr>
+        <p:spPr>
+          <a:xfrm>
+            <a:off x="8610600" y="6356350"/>
+            <a:ext cx="2743200" cy="365125"/>
+          </a:xfrm>
+          <a:prstGeom prst="rect">
+            <a:avLst/>
+          </a:prstGeom>
+        </p:spPr>
+        <p:txBody>
+          <a:bodyPr/>
+          <a:lstStyle/>
+          <a:p>
+            <a:fld id="{B5CEABB6-07DC-46E8-9B57-56EC44A396E5}" type="slidenum">
+              <a:rPr lang="lv-LV" noProof="0" smtClean="0"/>
+              <a:pPr/>
+              <a:t>5</a:t>
+            </a:fld>
+            <a:endParaRPr lang="lv-LV" noProof="0"/>
+          </a:p>
+        </p:txBody>
+      </p:sp>
+      <p:pic>
+        <p:nvPicPr>
+          <p:cNvPr id="8" name="Attēls 7">
+            <a:extLst>
+              <a:ext uri="{FF2B5EF4-FFF2-40B4-BE49-F238E27FC236}">
+                <a16:creationId xmlns:a16="http://schemas.microsoft.com/office/drawing/2014/main" id="{0D3D0DE5-AEE1-422D-7607-653DDF0849A2}"/>
+              </a:ext>
+            </a:extLst>
+          </p:cNvPr>
+          <p:cNvPicPr>
+            <a:picLocks noChangeAspect="1"/>
+          </p:cNvPicPr>
+          <p:nvPr/>
+        </p:nvPicPr>
+        <p:blipFill>
+          <a:blip r:embed="rId2"/>
+          <a:stretch>
+            <a:fillRect/>
+          </a:stretch>
+        </p:blipFill>
+        <p:spPr>
+          <a:xfrm>
+            <a:off x="5255670" y="0"/>
+            <a:ext cx="6709860" cy="6858000"/>
+          </a:xfrm>
+          <a:prstGeom prst="rect">
+            <a:avLst/>
+          </a:prstGeom>
+        </p:spPr>
+      </p:pic>
+    </p:spTree>
+    <p:extLst>
+      <p:ext uri="{BB962C8B-B14F-4D97-AF65-F5344CB8AC3E}">
+        <p14:creationId xmlns:p14="http://schemas.microsoft.com/office/powerpoint/2010/main" val="2847124736"/>
+      </p:ext>
+    </p:extLst>
+  </p:cSld>
+  <p:clrMapOvr>
+    <a:masterClrMapping/>
+  </p:clrMapOvr>
+</p:sld>
+</file>
+
+<file path=ppt/slides/slide6.xml><?xml version="1.0" encoding="utf-8"?>
+<p:sld xmlns:a="http://schemas.openxmlformats.org/drawingml/2006/main" xmlns:r="http://schemas.openxmlformats.org/officeDocument/2006/relationships" xmlns:p="http://schemas.openxmlformats.org/presentationml/2006/main">
+  <p:cSld>
+    <p:spTree>
+      <p:nvGrpSpPr>
+        <p:cNvPr id="1" name="">
+          <a:extLst>
+            <a:ext uri="{FF2B5EF4-FFF2-40B4-BE49-F238E27FC236}">
+              <a16:creationId xmlns:a16="http://schemas.microsoft.com/office/drawing/2014/main" id="{3F145A0B-9A51-12B9-D9B5-E0E086D952FB}"/>
+            </a:ext>
+          </a:extLst>
+        </p:cNvPr>
+        <p:cNvGrpSpPr/>
+        <p:nvPr/>
+      </p:nvGrpSpPr>
+      <p:grpSpPr>
+        <a:xfrm>
+          <a:off x="0" y="0"/>
+          <a:ext cx="0" cy="0"/>
+          <a:chOff x="0" y="0"/>
+          <a:chExt cx="0" cy="0"/>
+        </a:xfrm>
+      </p:grpSpPr>
+      <p:sp>
+        <p:nvSpPr>
+          <p:cNvPr id="2" name="Virsraksts 1">
+            <a:extLst>
+              <a:ext uri="{FF2B5EF4-FFF2-40B4-BE49-F238E27FC236}">
+                <a16:creationId xmlns:a16="http://schemas.microsoft.com/office/drawing/2014/main" id="{9C18DDBE-C861-A2F8-03BB-2128D0E1FC92}"/>
+              </a:ext>
+            </a:extLst>
+          </p:cNvPr>
+          <p:cNvSpPr>
+            <a:spLocks noGrp="1"/>
+          </p:cNvSpPr>
+          <p:nvPr>
+            <p:ph type="title"/>
+          </p:nvPr>
+        </p:nvSpPr>
+        <p:spPr/>
+        <p:txBody>
+          <a:bodyPr/>
+          <a:lstStyle/>
+          <a:p>
+            <a:r>
+              <a:rPr lang="lv-LV" dirty="0"/>
+              <a:t>Ainas – Sākuma aina</a:t>
+            </a:r>
+          </a:p>
+        </p:txBody>
+      </p:sp>
+      <p:sp>
+        <p:nvSpPr>
+          <p:cNvPr id="19" name="Slaida numura vietturis 18">
+            <a:extLst>
+              <a:ext uri="{FF2B5EF4-FFF2-40B4-BE49-F238E27FC236}">
+                <a16:creationId xmlns:a16="http://schemas.microsoft.com/office/drawing/2014/main" id="{C6414E21-39A9-E77A-520D-9FB20309CAA3}"/>
+              </a:ext>
+            </a:extLst>
+          </p:cNvPr>
+          <p:cNvSpPr>
+            <a:spLocks noGrp="1"/>
+          </p:cNvSpPr>
+          <p:nvPr>
+            <p:ph type="sldNum" sz="quarter" idx="4294967295"/>
+          </p:nvPr>
+        </p:nvSpPr>
+        <p:spPr>
+          <a:xfrm>
+            <a:off x="8610600" y="6356350"/>
+            <a:ext cx="2743200" cy="365125"/>
+          </a:xfrm>
+          <a:prstGeom prst="rect">
+            <a:avLst/>
+          </a:prstGeom>
+        </p:spPr>
+        <p:txBody>
+          <a:bodyPr/>
+          <a:lstStyle/>
+          <a:p>
+            <a:fld id="{B5CEABB6-07DC-46E8-9B57-56EC44A396E5}" type="slidenum">
+              <a:rPr lang="lv-LV" noProof="0" smtClean="0"/>
+              <a:pPr/>
+              <a:t>6</a:t>
+            </a:fld>
+            <a:endParaRPr lang="lv-LV" noProof="0"/>
+          </a:p>
+        </p:txBody>
+      </p:sp>
+      <p:pic>
+        <p:nvPicPr>
+          <p:cNvPr id="4" name="Attēls 3">
+            <a:extLst>
+              <a:ext uri="{FF2B5EF4-FFF2-40B4-BE49-F238E27FC236}">
+                <a16:creationId xmlns:a16="http://schemas.microsoft.com/office/drawing/2014/main" id="{E8F7EBAE-EB24-0FCA-974E-1B305E8581A7}"/>
+              </a:ext>
+            </a:extLst>
+          </p:cNvPr>
+          <p:cNvPicPr>
+            <a:picLocks noChangeAspect="1"/>
+          </p:cNvPicPr>
+          <p:nvPr/>
+        </p:nvPicPr>
+        <p:blipFill>
+          <a:blip r:embed="rId2"/>
+          <a:stretch>
+            <a:fillRect/>
+          </a:stretch>
+        </p:blipFill>
+        <p:spPr>
+          <a:xfrm>
+            <a:off x="5255670" y="0"/>
+            <a:ext cx="6709860" cy="6858000"/>
+          </a:xfrm>
+          <a:prstGeom prst="rect">
+            <a:avLst/>
+          </a:prstGeom>
+        </p:spPr>
+      </p:pic>
+    </p:spTree>
+    <p:extLst>
+      <p:ext uri="{BB962C8B-B14F-4D97-AF65-F5344CB8AC3E}">
+        <p14:creationId xmlns:p14="http://schemas.microsoft.com/office/powerpoint/2010/main" val="4117976571"/>
+      </p:ext>
+    </p:extLst>
+  </p:cSld>
+  <p:clrMapOvr>
+    <a:masterClrMapping/>
+  </p:clrMapOvr>
+</p:sld>
+</file>
+
+<file path=ppt/slides/slide7.xml><?xml version="1.0" encoding="utf-8"?>
+<p:sld xmlns:a="http://schemas.openxmlformats.org/drawingml/2006/main" xmlns:r="http://schemas.openxmlformats.org/officeDocument/2006/relationships" xmlns:p="http://schemas.openxmlformats.org/presentationml/2006/main">
+  <p:cSld>
+    <p:spTree>
+      <p:nvGrpSpPr>
+        <p:cNvPr id="1" name="">
+          <a:extLst>
+            <a:ext uri="{FF2B5EF4-FFF2-40B4-BE49-F238E27FC236}">
+              <a16:creationId xmlns:a16="http://schemas.microsoft.com/office/drawing/2014/main" id="{6D7C42F0-D368-6CC8-9A76-7E9B20FA8B4B}"/>
+            </a:ext>
+          </a:extLst>
+        </p:cNvPr>
+        <p:cNvGrpSpPr/>
+        <p:nvPr/>
+      </p:nvGrpSpPr>
+      <p:grpSpPr>
+        <a:xfrm>
+          <a:off x="0" y="0"/>
+          <a:ext cx="0" cy="0"/>
+          <a:chOff x="0" y="0"/>
+          <a:chExt cx="0" cy="0"/>
+        </a:xfrm>
+      </p:grpSpPr>
+      <p:sp>
+        <p:nvSpPr>
+          <p:cNvPr id="2" name="Virsraksts 1">
+            <a:extLst>
+              <a:ext uri="{FF2B5EF4-FFF2-40B4-BE49-F238E27FC236}">
+                <a16:creationId xmlns:a16="http://schemas.microsoft.com/office/drawing/2014/main" id="{A47B8655-7050-54D1-AC90-376EF048EC26}"/>
+              </a:ext>
+            </a:extLst>
+          </p:cNvPr>
+          <p:cNvSpPr>
+            <a:spLocks noGrp="1"/>
+          </p:cNvSpPr>
+          <p:nvPr>
+            <p:ph type="title"/>
+          </p:nvPr>
+        </p:nvSpPr>
+        <p:spPr/>
+        <p:txBody>
+          <a:bodyPr/>
+          <a:lstStyle/>
+          <a:p>
+            <a:r>
+              <a:rPr lang="lv-LV" dirty="0"/>
+              <a:t>Ainas – Sākuma aina</a:t>
+            </a:r>
+          </a:p>
+        </p:txBody>
+      </p:sp>
+      <p:sp>
+        <p:nvSpPr>
+          <p:cNvPr id="19" name="Slaida numura vietturis 18">
+            <a:extLst>
+              <a:ext uri="{FF2B5EF4-FFF2-40B4-BE49-F238E27FC236}">
+                <a16:creationId xmlns:a16="http://schemas.microsoft.com/office/drawing/2014/main" id="{F69006FE-74BB-EBDE-F2BB-E3E559A0965A}"/>
+              </a:ext>
+            </a:extLst>
+          </p:cNvPr>
+          <p:cNvSpPr>
+            <a:spLocks noGrp="1"/>
+          </p:cNvSpPr>
+          <p:nvPr>
+            <p:ph type="sldNum" sz="quarter" idx="4294967295"/>
+          </p:nvPr>
+        </p:nvSpPr>
+        <p:spPr>
+          <a:xfrm>
+            <a:off x="8610600" y="6356350"/>
+            <a:ext cx="2743200" cy="365125"/>
+          </a:xfrm>
+          <a:prstGeom prst="rect">
+            <a:avLst/>
+          </a:prstGeom>
+        </p:spPr>
+        <p:txBody>
+          <a:bodyPr/>
+          <a:lstStyle/>
+          <a:p>
+            <a:fld id="{B5CEABB6-07DC-46E8-9B57-56EC44A396E5}" type="slidenum">
+              <a:rPr lang="lv-LV" noProof="0" smtClean="0"/>
+              <a:pPr/>
+              <a:t>7</a:t>
+            </a:fld>
+            <a:endParaRPr lang="lv-LV" noProof="0"/>
+          </a:p>
+        </p:txBody>
+      </p:sp>
+      <p:pic>
+        <p:nvPicPr>
+          <p:cNvPr id="5" name="Attēls 4">
+            <a:extLst>
+              <a:ext uri="{FF2B5EF4-FFF2-40B4-BE49-F238E27FC236}">
+                <a16:creationId xmlns:a16="http://schemas.microsoft.com/office/drawing/2014/main" id="{7E19D00C-2F20-3EF9-7490-2563BA7F7EA0}"/>
+              </a:ext>
+            </a:extLst>
+          </p:cNvPr>
+          <p:cNvPicPr>
+            <a:picLocks noChangeAspect="1"/>
+          </p:cNvPicPr>
+          <p:nvPr/>
+        </p:nvPicPr>
+        <p:blipFill>
+          <a:blip r:embed="rId2"/>
+          <a:stretch>
+            <a:fillRect/>
+          </a:stretch>
+        </p:blipFill>
+        <p:spPr>
+          <a:xfrm>
+            <a:off x="5255670" y="0"/>
+            <a:ext cx="6709860" cy="6858000"/>
+          </a:xfrm>
+          <a:prstGeom prst="rect">
+            <a:avLst/>
+          </a:prstGeom>
+        </p:spPr>
+      </p:pic>
+    </p:spTree>
+    <p:extLst>
+      <p:ext uri="{BB962C8B-B14F-4D97-AF65-F5344CB8AC3E}">
+        <p14:creationId xmlns:p14="http://schemas.microsoft.com/office/powerpoint/2010/main" val="3989984821"/>
+      </p:ext>
+    </p:extLst>
+  </p:cSld>
+  <p:clrMapOvr>
+    <a:masterClrMapping/>
+  </p:clrMapOvr>
+</p:sld>
+</file>
+
+<file path=ppt/slides/slide8.xml><?xml version="1.0" encoding="utf-8"?>
+<p:sld xmlns:a="http://schemas.openxmlformats.org/drawingml/2006/main" xmlns:r="http://schemas.openxmlformats.org/officeDocument/2006/relationships" xmlns:p="http://schemas.openxmlformats.org/presentationml/2006/main">
+  <p:cSld>
+    <p:spTree>
+      <p:nvGrpSpPr>
+        <p:cNvPr id="1" name="">
+          <a:extLst>
+            <a:ext uri="{FF2B5EF4-FFF2-40B4-BE49-F238E27FC236}">
+              <a16:creationId xmlns:a16="http://schemas.microsoft.com/office/drawing/2014/main" id="{7701B820-A59F-503B-C14F-8B2CB23CAB1B}"/>
+            </a:ext>
+          </a:extLst>
+        </p:cNvPr>
+        <p:cNvGrpSpPr/>
+        <p:nvPr/>
+      </p:nvGrpSpPr>
+      <p:grpSpPr>
+        <a:xfrm>
+          <a:off x="0" y="0"/>
+          <a:ext cx="0" cy="0"/>
+          <a:chOff x="0" y="0"/>
+          <a:chExt cx="0" cy="0"/>
+        </a:xfrm>
+      </p:grpSpPr>
+      <p:sp>
+        <p:nvSpPr>
+          <p:cNvPr id="2" name="Virsraksts 1">
+            <a:extLst>
+              <a:ext uri="{FF2B5EF4-FFF2-40B4-BE49-F238E27FC236}">
+                <a16:creationId xmlns:a16="http://schemas.microsoft.com/office/drawing/2014/main" id="{3D76A3B0-B3F8-1208-3353-6BA9BBF39577}"/>
+              </a:ext>
+            </a:extLst>
+          </p:cNvPr>
+          <p:cNvSpPr>
+            <a:spLocks noGrp="1"/>
+          </p:cNvSpPr>
+          <p:nvPr>
+            <p:ph type="title"/>
+          </p:nvPr>
+        </p:nvSpPr>
+        <p:spPr/>
+        <p:txBody>
+          <a:bodyPr/>
+          <a:lstStyle/>
+          <a:p>
+            <a:r>
+              <a:rPr lang="lv-LV" dirty="0"/>
+              <a:t>Ainas – Sākuma aina</a:t>
+            </a:r>
+          </a:p>
+        </p:txBody>
+      </p:sp>
+      <p:sp>
+        <p:nvSpPr>
+          <p:cNvPr id="19" name="Slaida numura vietturis 18">
+            <a:extLst>
+              <a:ext uri="{FF2B5EF4-FFF2-40B4-BE49-F238E27FC236}">
+                <a16:creationId xmlns:a16="http://schemas.microsoft.com/office/drawing/2014/main" id="{DC592A00-CDE2-E9F9-E915-13DBFA3B0495}"/>
+              </a:ext>
+            </a:extLst>
+          </p:cNvPr>
+          <p:cNvSpPr>
+            <a:spLocks noGrp="1"/>
+          </p:cNvSpPr>
+          <p:nvPr>
+            <p:ph type="sldNum" sz="quarter" idx="4294967295"/>
+          </p:nvPr>
+        </p:nvSpPr>
+        <p:spPr>
+          <a:xfrm>
+            <a:off x="8610600" y="6356350"/>
+            <a:ext cx="2743200" cy="365125"/>
+          </a:xfrm>
+          <a:prstGeom prst="rect">
+            <a:avLst/>
+          </a:prstGeom>
+        </p:spPr>
+        <p:txBody>
+          <a:bodyPr/>
+          <a:lstStyle/>
+          <a:p>
+            <a:fld id="{B5CEABB6-07DC-46E8-9B57-56EC44A396E5}" type="slidenum">
+              <a:rPr lang="lv-LV" noProof="0" smtClean="0"/>
+              <a:pPr/>
+              <a:t>8</a:t>
+            </a:fld>
+            <a:endParaRPr lang="lv-LV" noProof="0"/>
+          </a:p>
+        </p:txBody>
+      </p:sp>
+      <p:pic>
+        <p:nvPicPr>
+          <p:cNvPr id="5" name="Attēls 4">
+            <a:extLst>
+              <a:ext uri="{FF2B5EF4-FFF2-40B4-BE49-F238E27FC236}">
+                <a16:creationId xmlns:a16="http://schemas.microsoft.com/office/drawing/2014/main" id="{685F543C-8962-A424-D493-A2F35CD301E3}"/>
+              </a:ext>
+            </a:extLst>
+          </p:cNvPr>
+          <p:cNvPicPr>
+            <a:picLocks noChangeAspect="1"/>
+          </p:cNvPicPr>
+          <p:nvPr/>
+        </p:nvPicPr>
+        <p:blipFill>
+          <a:blip r:embed="rId2"/>
+          <a:stretch>
+            <a:fillRect/>
+          </a:stretch>
+        </p:blipFill>
+        <p:spPr>
+          <a:xfrm>
+            <a:off x="5255670" y="0"/>
+            <a:ext cx="6709860" cy="6858000"/>
+          </a:xfrm>
+          <a:prstGeom prst="rect">
+            <a:avLst/>
+          </a:prstGeom>
+        </p:spPr>
+      </p:pic>
+    </p:spTree>
+    <p:extLst>
+      <p:ext uri="{BB962C8B-B14F-4D97-AF65-F5344CB8AC3E}">
+        <p14:creationId xmlns:p14="http://schemas.microsoft.com/office/powerpoint/2010/main" val="2000448290"/>
       </p:ext>
     </p:extLst>
   </p:cSld>
@@ -10361,15 +10747,6 @@
 </file>
 
 <file path=customXml/item2.xml><?xml version="1.0" encoding="utf-8"?>
-<?mso-contentType ?>
-<FormTemplates xmlns="http://schemas.microsoft.com/sharepoint/v3/contenttype/forms">
-  <Display>DocumentLibraryForm</Display>
-  <Edit>DocumentLibraryForm</Edit>
-  <New>DocumentLibraryForm</New>
-</FormTemplates>
-</file>
-
-<file path=customXml/item3.xml><?xml version="1.0" encoding="utf-8"?>
 <ct:contentTypeSchema xmlns:ct="http://schemas.microsoft.com/office/2006/metadata/contentType" xmlns:ma="http://schemas.microsoft.com/office/2006/metadata/properties/metaAttributes" ct:_="" ma:_="" ma:contentTypeName="Document" ma:contentTypeID="0x01010079F111ED35F8CC479449609E8A0923A6" ma:contentTypeVersion="21" ma:contentTypeDescription="Create a new document." ma:contentTypeScope="" ma:versionID="64dfb1555687e0874b4304b796b5b0c7">
   <xsd:schema xmlns:xsd="http://www.w3.org/2001/XMLSchema" xmlns:xs="http://www.w3.org/2001/XMLSchema" xmlns:p="http://schemas.microsoft.com/office/2006/metadata/properties" xmlns:ns1="http://schemas.microsoft.com/sharepoint/v3" xmlns:ns2="71af3243-3dd4-4a8d-8c0d-dd76da1f02a5" xmlns:ns3="16c05727-aa75-4e4a-9b5f-8a80a1165891" xmlns:ns4="230e9df3-be65-4c73-a93b-d1236ebd677e" targetNamespace="http://schemas.microsoft.com/office/2006/metadata/properties" ma:root="true" ma:fieldsID="e6e4c555b5e194d05b7203de9c4567b3" ns1:_="" ns2:_="" ns3:_="" ns4:_="">
     <xsd:import namespace="http://schemas.microsoft.com/sharepoint/v3"/>
@@ -10651,6 +11028,15 @@
 </ct:contentTypeSchema>
 </file>
 
+<file path=customXml/item3.xml><?xml version="1.0" encoding="utf-8"?>
+<?mso-contentType ?>
+<FormTemplates xmlns="http://schemas.microsoft.com/sharepoint/v3/contenttype/forms">
+  <Display>DocumentLibraryForm</Display>
+  <Edit>DocumentLibraryForm</Edit>
+  <New>DocumentLibraryForm</New>
+</FormTemplates>
+</file>
+
 <file path=customXml/itemProps1.xml><?xml version="1.0" encoding="utf-8"?>
 <ds:datastoreItem xmlns:ds="http://schemas.openxmlformats.org/officeDocument/2006/customXml" ds:itemID="{CA4F7154-AFAC-4BE7-8A74-7F4B6FC2743C}">
   <ds:schemaRefs>
@@ -10664,14 +11050,6 @@
 </file>
 
 <file path=customXml/itemProps2.xml><?xml version="1.0" encoding="utf-8"?>
-<ds:datastoreItem xmlns:ds="http://schemas.openxmlformats.org/officeDocument/2006/customXml" ds:itemID="{E618C13B-9D83-4AF4-B64D-33362D5133F8}">
-  <ds:schemaRefs>
-    <ds:schemaRef ds:uri="http://schemas.microsoft.com/sharepoint/v3/contenttype/forms"/>
-  </ds:schemaRefs>
-</ds:datastoreItem>
-</file>
-
-<file path=customXml/itemProps3.xml><?xml version="1.0" encoding="utf-8"?>
 <ds:datastoreItem xmlns:ds="http://schemas.openxmlformats.org/officeDocument/2006/customXml" ds:itemID="{67ACD96E-49A0-4DA4-A7BB-AC2D8874213F}">
   <ds:schemaRefs>
     <ds:schemaRef ds:uri="http://schemas.microsoft.com/office/2006/metadata/contentType"/>
@@ -10692,6 +11070,14 @@
 </ds:datastoreItem>
 </file>
 
+<file path=customXml/itemProps3.xml><?xml version="1.0" encoding="utf-8"?>
+<ds:datastoreItem xmlns:ds="http://schemas.openxmlformats.org/officeDocument/2006/customXml" ds:itemID="{E618C13B-9D83-4AF4-B64D-33362D5133F8}">
+  <ds:schemaRefs>
+    <ds:schemaRef ds:uri="http://schemas.microsoft.com/sharepoint/v3/contenttype/forms"/>
+  </ds:schemaRefs>
+</ds:datastoreItem>
+</file>
+
 <file path=docMetadata/LabelInfo.xml><?xml version="1.0" encoding="utf-8"?>
 <clbl:labelList xmlns:clbl="http://schemas.microsoft.com/office/2020/mipLabelMetadata">
   <clbl:label id="{f42aa342-8706-4288-bd11-ebb85995028c}" enabled="1" method="Standard" siteId="{72f988bf-86f1-41af-91ab-2d7cd011db47}" removed="0"/>

--- a/Documentation/Prezentācija.pptx
+++ b/Documentation/Prezentācija.pptx
@@ -5,10 +5,10 @@
     <p:sldMasterId id="2147483648" r:id="rId4"/>
   </p:sldMasterIdLst>
   <p:notesMasterIdLst>
-    <p:notesMasterId r:id="rId13"/>
+    <p:notesMasterId r:id="rId34"/>
   </p:notesMasterIdLst>
   <p:handoutMasterIdLst>
-    <p:handoutMasterId r:id="rId14"/>
+    <p:handoutMasterId r:id="rId35"/>
   </p:handoutMasterIdLst>
   <p:sldIdLst>
     <p:sldId id="256" r:id="rId5"/>
@@ -19,6 +19,27 @@
     <p:sldId id="261" r:id="rId10"/>
     <p:sldId id="262" r:id="rId11"/>
     <p:sldId id="263" r:id="rId12"/>
+    <p:sldId id="264" r:id="rId13"/>
+    <p:sldId id="265" r:id="rId14"/>
+    <p:sldId id="266" r:id="rId15"/>
+    <p:sldId id="267" r:id="rId16"/>
+    <p:sldId id="268" r:id="rId17"/>
+    <p:sldId id="269" r:id="rId18"/>
+    <p:sldId id="270" r:id="rId19"/>
+    <p:sldId id="271" r:id="rId20"/>
+    <p:sldId id="272" r:id="rId21"/>
+    <p:sldId id="273" r:id="rId22"/>
+    <p:sldId id="274" r:id="rId23"/>
+    <p:sldId id="275" r:id="rId24"/>
+    <p:sldId id="276" r:id="rId25"/>
+    <p:sldId id="277" r:id="rId26"/>
+    <p:sldId id="278" r:id="rId27"/>
+    <p:sldId id="279" r:id="rId28"/>
+    <p:sldId id="280" r:id="rId29"/>
+    <p:sldId id="281" r:id="rId30"/>
+    <p:sldId id="282" r:id="rId31"/>
+    <p:sldId id="283" r:id="rId32"/>
+    <p:sldId id="284" r:id="rId33"/>
   </p:sldIdLst>
   <p:sldSz cx="12192000" cy="6858000"/>
   <p:notesSz cx="6858000" cy="9144000"/>
@@ -8686,6 +8707,2936 @@
 </p:sld>
 </file>
 
+<file path=ppt/slides/slide10.xml><?xml version="1.0" encoding="utf-8"?>
+<p:sld xmlns:a="http://schemas.openxmlformats.org/drawingml/2006/main" xmlns:r="http://schemas.openxmlformats.org/officeDocument/2006/relationships" xmlns:p="http://schemas.openxmlformats.org/presentationml/2006/main">
+  <p:cSld>
+    <p:spTree>
+      <p:nvGrpSpPr>
+        <p:cNvPr id="1" name="">
+          <a:extLst>
+            <a:ext uri="{FF2B5EF4-FFF2-40B4-BE49-F238E27FC236}">
+              <a16:creationId xmlns:a16="http://schemas.microsoft.com/office/drawing/2014/main" id="{E28CA875-4B4A-FFB8-D59C-253806E9017B}"/>
+            </a:ext>
+          </a:extLst>
+        </p:cNvPr>
+        <p:cNvGrpSpPr/>
+        <p:nvPr/>
+      </p:nvGrpSpPr>
+      <p:grpSpPr>
+        <a:xfrm>
+          <a:off x="0" y="0"/>
+          <a:ext cx="0" cy="0"/>
+          <a:chOff x="0" y="0"/>
+          <a:chExt cx="0" cy="0"/>
+        </a:xfrm>
+      </p:grpSpPr>
+      <p:sp>
+        <p:nvSpPr>
+          <p:cNvPr id="2" name="Virsraksts 1">
+            <a:extLst>
+              <a:ext uri="{FF2B5EF4-FFF2-40B4-BE49-F238E27FC236}">
+                <a16:creationId xmlns:a16="http://schemas.microsoft.com/office/drawing/2014/main" id="{06C6FDA6-A975-4169-2F7F-4E08370D7FA9}"/>
+              </a:ext>
+            </a:extLst>
+          </p:cNvPr>
+          <p:cNvSpPr>
+            <a:spLocks noGrp="1"/>
+          </p:cNvSpPr>
+          <p:nvPr>
+            <p:ph type="title"/>
+          </p:nvPr>
+        </p:nvSpPr>
+        <p:spPr/>
+        <p:txBody>
+          <a:bodyPr/>
+          <a:lstStyle/>
+          <a:p>
+            <a:r>
+              <a:rPr lang="lv-LV" dirty="0"/>
+              <a:t>Ainas – Līmeņu atlase</a:t>
+            </a:r>
+          </a:p>
+        </p:txBody>
+      </p:sp>
+      <p:sp>
+        <p:nvSpPr>
+          <p:cNvPr id="7" name="Teksta vietturis 15">
+            <a:extLst>
+              <a:ext uri="{FF2B5EF4-FFF2-40B4-BE49-F238E27FC236}">
+                <a16:creationId xmlns:a16="http://schemas.microsoft.com/office/drawing/2014/main" id="{AF618116-A200-1D20-2F89-AFFEE4EA961D}"/>
+              </a:ext>
+            </a:extLst>
+          </p:cNvPr>
+          <p:cNvSpPr txBox="1">
+            <a:spLocks/>
+          </p:cNvSpPr>
+          <p:nvPr/>
+        </p:nvSpPr>
+        <p:spPr>
+          <a:xfrm>
+            <a:off x="838199" y="3871737"/>
+            <a:ext cx="3716548" cy="844707"/>
+          </a:xfrm>
+          <a:prstGeom prst="rect">
+            <a:avLst/>
+          </a:prstGeom>
+        </p:spPr>
+        <p:txBody>
+          <a:bodyPr vert="horz" lIns="91440" tIns="45720" rIns="91440" bIns="45720" rtlCol="0" anchor="t">
+            <a:noAutofit/>
+          </a:bodyPr>
+          <a:lstStyle>
+            <a:lvl1pPr marL="0" indent="0" algn="l" defTabSz="914400" rtl="0" eaLnBrk="1" latinLnBrk="0" hangingPunct="1">
+              <a:lnSpc>
+                <a:spcPct val="100000"/>
+              </a:lnSpc>
+              <a:spcBef>
+                <a:spcPts val="1000"/>
+              </a:spcBef>
+              <a:buFont typeface="Arial" panose="020B0604020202020204" pitchFamily="34" charset="0"/>
+              <a:buNone/>
+              <a:defRPr sz="1200" kern="1200">
+                <a:solidFill>
+                  <a:schemeClr val="bg1"/>
+                </a:solidFill>
+                <a:latin typeface="Calibri" panose="020F0502020204030204" pitchFamily="34" charset="0"/>
+                <a:ea typeface="+mn-ea"/>
+                <a:cs typeface="Calibri" panose="020F0502020204030204" pitchFamily="34" charset="0"/>
+              </a:defRPr>
+            </a:lvl1pPr>
+            <a:lvl2pPr marL="685800" indent="-228600" algn="l" defTabSz="914400" rtl="0" eaLnBrk="1" latinLnBrk="0" hangingPunct="1">
+              <a:lnSpc>
+                <a:spcPct val="90000"/>
+              </a:lnSpc>
+              <a:spcBef>
+                <a:spcPts val="500"/>
+              </a:spcBef>
+              <a:buFont typeface="Arial" panose="020B0604020202020204" pitchFamily="34" charset="0"/>
+              <a:buChar char="•"/>
+              <a:defRPr sz="2400" kern="1200">
+                <a:solidFill>
+                  <a:schemeClr val="tx1"/>
+                </a:solidFill>
+                <a:latin typeface="Calibri" panose="020F0502020204030204" pitchFamily="34" charset="0"/>
+                <a:ea typeface="+mn-ea"/>
+                <a:cs typeface="Calibri" panose="020F0502020204030204" pitchFamily="34" charset="0"/>
+              </a:defRPr>
+            </a:lvl2pPr>
+            <a:lvl3pPr marL="1143000" indent="-228600" algn="l" defTabSz="914400" rtl="0" eaLnBrk="1" latinLnBrk="0" hangingPunct="1">
+              <a:lnSpc>
+                <a:spcPct val="90000"/>
+              </a:lnSpc>
+              <a:spcBef>
+                <a:spcPts val="500"/>
+              </a:spcBef>
+              <a:buFont typeface="Arial" panose="020B0604020202020204" pitchFamily="34" charset="0"/>
+              <a:buChar char="•"/>
+              <a:defRPr sz="2000" kern="1200">
+                <a:solidFill>
+                  <a:schemeClr val="tx1"/>
+                </a:solidFill>
+                <a:latin typeface="Calibri" panose="020F0502020204030204" pitchFamily="34" charset="0"/>
+                <a:ea typeface="+mn-ea"/>
+                <a:cs typeface="Calibri" panose="020F0502020204030204" pitchFamily="34" charset="0"/>
+              </a:defRPr>
+            </a:lvl3pPr>
+            <a:lvl4pPr marL="1600200" indent="-228600" algn="l" defTabSz="914400" rtl="0" eaLnBrk="1" latinLnBrk="0" hangingPunct="1">
+              <a:lnSpc>
+                <a:spcPct val="90000"/>
+              </a:lnSpc>
+              <a:spcBef>
+                <a:spcPts val="500"/>
+              </a:spcBef>
+              <a:buFont typeface="Arial" panose="020B0604020202020204" pitchFamily="34" charset="0"/>
+              <a:buChar char="•"/>
+              <a:defRPr sz="1800" kern="1200">
+                <a:solidFill>
+                  <a:schemeClr val="tx1"/>
+                </a:solidFill>
+                <a:latin typeface="Calibri" panose="020F0502020204030204" pitchFamily="34" charset="0"/>
+                <a:ea typeface="+mn-ea"/>
+                <a:cs typeface="Calibri" panose="020F0502020204030204" pitchFamily="34" charset="0"/>
+              </a:defRPr>
+            </a:lvl4pPr>
+            <a:lvl5pPr marL="2057400" indent="-228600" algn="l" defTabSz="914400" rtl="0" eaLnBrk="1" latinLnBrk="0" hangingPunct="1">
+              <a:lnSpc>
+                <a:spcPct val="90000"/>
+              </a:lnSpc>
+              <a:spcBef>
+                <a:spcPts val="500"/>
+              </a:spcBef>
+              <a:buFont typeface="Arial" panose="020B0604020202020204" pitchFamily="34" charset="0"/>
+              <a:buChar char="•"/>
+              <a:defRPr sz="1800" kern="1200">
+                <a:solidFill>
+                  <a:schemeClr val="tx1"/>
+                </a:solidFill>
+                <a:latin typeface="Calibri" panose="020F0502020204030204" pitchFamily="34" charset="0"/>
+                <a:ea typeface="+mn-ea"/>
+                <a:cs typeface="Calibri" panose="020F0502020204030204" pitchFamily="34" charset="0"/>
+              </a:defRPr>
+            </a:lvl5pPr>
+            <a:lvl6pPr marL="2514600" indent="-228600" algn="l" defTabSz="914400" rtl="0" eaLnBrk="1" latinLnBrk="0" hangingPunct="1">
+              <a:lnSpc>
+                <a:spcPct val="90000"/>
+              </a:lnSpc>
+              <a:spcBef>
+                <a:spcPts val="500"/>
+              </a:spcBef>
+              <a:buFont typeface="Arial" panose="020B0604020202020204" pitchFamily="34" charset="0"/>
+              <a:buChar char="•"/>
+              <a:defRPr sz="1800" kern="1200">
+                <a:solidFill>
+                  <a:schemeClr val="tx1"/>
+                </a:solidFill>
+                <a:latin typeface="+mn-lt"/>
+                <a:ea typeface="+mn-ea"/>
+                <a:cs typeface="+mn-cs"/>
+              </a:defRPr>
+            </a:lvl6pPr>
+            <a:lvl7pPr marL="2971800" indent="-228600" algn="l" defTabSz="914400" rtl="0" eaLnBrk="1" latinLnBrk="0" hangingPunct="1">
+              <a:lnSpc>
+                <a:spcPct val="90000"/>
+              </a:lnSpc>
+              <a:spcBef>
+                <a:spcPts val="500"/>
+              </a:spcBef>
+              <a:buFont typeface="Arial" panose="020B0604020202020204" pitchFamily="34" charset="0"/>
+              <a:buChar char="•"/>
+              <a:defRPr sz="1800" kern="1200">
+                <a:solidFill>
+                  <a:schemeClr val="tx1"/>
+                </a:solidFill>
+                <a:latin typeface="+mn-lt"/>
+                <a:ea typeface="+mn-ea"/>
+                <a:cs typeface="+mn-cs"/>
+              </a:defRPr>
+            </a:lvl7pPr>
+            <a:lvl8pPr marL="3429000" indent="-228600" algn="l" defTabSz="914400" rtl="0" eaLnBrk="1" latinLnBrk="0" hangingPunct="1">
+              <a:lnSpc>
+                <a:spcPct val="90000"/>
+              </a:lnSpc>
+              <a:spcBef>
+                <a:spcPts val="500"/>
+              </a:spcBef>
+              <a:buFont typeface="Arial" panose="020B0604020202020204" pitchFamily="34" charset="0"/>
+              <a:buChar char="•"/>
+              <a:defRPr sz="1800" kern="1200">
+                <a:solidFill>
+                  <a:schemeClr val="tx1"/>
+                </a:solidFill>
+                <a:latin typeface="+mn-lt"/>
+                <a:ea typeface="+mn-ea"/>
+                <a:cs typeface="+mn-cs"/>
+              </a:defRPr>
+            </a:lvl8pPr>
+            <a:lvl9pPr marL="3886200" indent="-228600" algn="l" defTabSz="914400" rtl="0" eaLnBrk="1" latinLnBrk="0" hangingPunct="1">
+              <a:lnSpc>
+                <a:spcPct val="90000"/>
+              </a:lnSpc>
+              <a:spcBef>
+                <a:spcPts val="500"/>
+              </a:spcBef>
+              <a:buFont typeface="Arial" panose="020B0604020202020204" pitchFamily="34" charset="0"/>
+              <a:buChar char="•"/>
+              <a:defRPr sz="1800" kern="1200">
+                <a:solidFill>
+                  <a:schemeClr val="tx1"/>
+                </a:solidFill>
+                <a:latin typeface="+mn-lt"/>
+                <a:ea typeface="+mn-ea"/>
+                <a:cs typeface="+mn-cs"/>
+              </a:defRPr>
+            </a:lvl9pPr>
+          </a:lstStyle>
+          <a:p>
+            <a:r>
+              <a:rPr lang="lv-LV" sz="2800" dirty="0"/>
+              <a:t>Atlases aina</a:t>
+            </a:r>
+          </a:p>
+        </p:txBody>
+      </p:sp>
+      <p:pic>
+        <p:nvPicPr>
+          <p:cNvPr id="5" name="Attēls 4">
+            <a:extLst>
+              <a:ext uri="{FF2B5EF4-FFF2-40B4-BE49-F238E27FC236}">
+                <a16:creationId xmlns:a16="http://schemas.microsoft.com/office/drawing/2014/main" id="{FF8535F0-E1FB-E55A-B644-927F6CE817D7}"/>
+              </a:ext>
+            </a:extLst>
+          </p:cNvPr>
+          <p:cNvPicPr>
+            <a:picLocks noChangeAspect="1"/>
+          </p:cNvPicPr>
+          <p:nvPr/>
+        </p:nvPicPr>
+        <p:blipFill>
+          <a:blip r:embed="rId2"/>
+          <a:stretch>
+            <a:fillRect/>
+          </a:stretch>
+        </p:blipFill>
+        <p:spPr>
+          <a:xfrm>
+            <a:off x="5234104" y="0"/>
+            <a:ext cx="6709860" cy="6858000"/>
+          </a:xfrm>
+          <a:prstGeom prst="rect">
+            <a:avLst/>
+          </a:prstGeom>
+        </p:spPr>
+      </p:pic>
+    </p:spTree>
+    <p:extLst>
+      <p:ext uri="{BB962C8B-B14F-4D97-AF65-F5344CB8AC3E}">
+        <p14:creationId xmlns:p14="http://schemas.microsoft.com/office/powerpoint/2010/main" val="3671620014"/>
+      </p:ext>
+    </p:extLst>
+  </p:cSld>
+  <p:clrMapOvr>
+    <a:masterClrMapping/>
+  </p:clrMapOvr>
+</p:sld>
+</file>
+
+<file path=ppt/slides/slide11.xml><?xml version="1.0" encoding="utf-8"?>
+<p:sld xmlns:a="http://schemas.openxmlformats.org/drawingml/2006/main" xmlns:r="http://schemas.openxmlformats.org/officeDocument/2006/relationships" xmlns:p="http://schemas.openxmlformats.org/presentationml/2006/main">
+  <p:cSld>
+    <p:spTree>
+      <p:nvGrpSpPr>
+        <p:cNvPr id="1" name="">
+          <a:extLst>
+            <a:ext uri="{FF2B5EF4-FFF2-40B4-BE49-F238E27FC236}">
+              <a16:creationId xmlns:a16="http://schemas.microsoft.com/office/drawing/2014/main" id="{FC2768DD-17FA-5054-3445-799A51A68A0A}"/>
+            </a:ext>
+          </a:extLst>
+        </p:cNvPr>
+        <p:cNvGrpSpPr/>
+        <p:nvPr/>
+      </p:nvGrpSpPr>
+      <p:grpSpPr>
+        <a:xfrm>
+          <a:off x="0" y="0"/>
+          <a:ext cx="0" cy="0"/>
+          <a:chOff x="0" y="0"/>
+          <a:chExt cx="0" cy="0"/>
+        </a:xfrm>
+      </p:grpSpPr>
+      <p:sp>
+        <p:nvSpPr>
+          <p:cNvPr id="2" name="Virsraksts 1">
+            <a:extLst>
+              <a:ext uri="{FF2B5EF4-FFF2-40B4-BE49-F238E27FC236}">
+                <a16:creationId xmlns:a16="http://schemas.microsoft.com/office/drawing/2014/main" id="{E9DFDE5D-EFAE-C140-F4B5-199B8AF0B947}"/>
+              </a:ext>
+            </a:extLst>
+          </p:cNvPr>
+          <p:cNvSpPr>
+            <a:spLocks noGrp="1"/>
+          </p:cNvSpPr>
+          <p:nvPr>
+            <p:ph type="title"/>
+          </p:nvPr>
+        </p:nvSpPr>
+        <p:spPr/>
+        <p:txBody>
+          <a:bodyPr/>
+          <a:lstStyle/>
+          <a:p>
+            <a:r>
+              <a:rPr lang="lv-LV" dirty="0"/>
+              <a:t>Ainas – Līmeņu atlase</a:t>
+            </a:r>
+          </a:p>
+        </p:txBody>
+      </p:sp>
+      <p:sp>
+        <p:nvSpPr>
+          <p:cNvPr id="7" name="Teksta vietturis 15">
+            <a:extLst>
+              <a:ext uri="{FF2B5EF4-FFF2-40B4-BE49-F238E27FC236}">
+                <a16:creationId xmlns:a16="http://schemas.microsoft.com/office/drawing/2014/main" id="{249D0FA5-D1BA-96C7-BCF4-3A89103FF5C4}"/>
+              </a:ext>
+            </a:extLst>
+          </p:cNvPr>
+          <p:cNvSpPr txBox="1">
+            <a:spLocks/>
+          </p:cNvSpPr>
+          <p:nvPr/>
+        </p:nvSpPr>
+        <p:spPr>
+          <a:xfrm>
+            <a:off x="838199" y="3871737"/>
+            <a:ext cx="3716548" cy="844707"/>
+          </a:xfrm>
+          <a:prstGeom prst="rect">
+            <a:avLst/>
+          </a:prstGeom>
+        </p:spPr>
+        <p:txBody>
+          <a:bodyPr vert="horz" lIns="91440" tIns="45720" rIns="91440" bIns="45720" rtlCol="0" anchor="t">
+            <a:noAutofit/>
+          </a:bodyPr>
+          <a:lstStyle>
+            <a:lvl1pPr marL="0" indent="0" algn="l" defTabSz="914400" rtl="0" eaLnBrk="1" latinLnBrk="0" hangingPunct="1">
+              <a:lnSpc>
+                <a:spcPct val="100000"/>
+              </a:lnSpc>
+              <a:spcBef>
+                <a:spcPts val="1000"/>
+              </a:spcBef>
+              <a:buFont typeface="Arial" panose="020B0604020202020204" pitchFamily="34" charset="0"/>
+              <a:buNone/>
+              <a:defRPr sz="1200" kern="1200">
+                <a:solidFill>
+                  <a:schemeClr val="bg1"/>
+                </a:solidFill>
+                <a:latin typeface="Calibri" panose="020F0502020204030204" pitchFamily="34" charset="0"/>
+                <a:ea typeface="+mn-ea"/>
+                <a:cs typeface="Calibri" panose="020F0502020204030204" pitchFamily="34" charset="0"/>
+              </a:defRPr>
+            </a:lvl1pPr>
+            <a:lvl2pPr marL="685800" indent="-228600" algn="l" defTabSz="914400" rtl="0" eaLnBrk="1" latinLnBrk="0" hangingPunct="1">
+              <a:lnSpc>
+                <a:spcPct val="90000"/>
+              </a:lnSpc>
+              <a:spcBef>
+                <a:spcPts val="500"/>
+              </a:spcBef>
+              <a:buFont typeface="Arial" panose="020B0604020202020204" pitchFamily="34" charset="0"/>
+              <a:buChar char="•"/>
+              <a:defRPr sz="2400" kern="1200">
+                <a:solidFill>
+                  <a:schemeClr val="tx1"/>
+                </a:solidFill>
+                <a:latin typeface="Calibri" panose="020F0502020204030204" pitchFamily="34" charset="0"/>
+                <a:ea typeface="+mn-ea"/>
+                <a:cs typeface="Calibri" panose="020F0502020204030204" pitchFamily="34" charset="0"/>
+              </a:defRPr>
+            </a:lvl2pPr>
+            <a:lvl3pPr marL="1143000" indent="-228600" algn="l" defTabSz="914400" rtl="0" eaLnBrk="1" latinLnBrk="0" hangingPunct="1">
+              <a:lnSpc>
+                <a:spcPct val="90000"/>
+              </a:lnSpc>
+              <a:spcBef>
+                <a:spcPts val="500"/>
+              </a:spcBef>
+              <a:buFont typeface="Arial" panose="020B0604020202020204" pitchFamily="34" charset="0"/>
+              <a:buChar char="•"/>
+              <a:defRPr sz="2000" kern="1200">
+                <a:solidFill>
+                  <a:schemeClr val="tx1"/>
+                </a:solidFill>
+                <a:latin typeface="Calibri" panose="020F0502020204030204" pitchFamily="34" charset="0"/>
+                <a:ea typeface="+mn-ea"/>
+                <a:cs typeface="Calibri" panose="020F0502020204030204" pitchFamily="34" charset="0"/>
+              </a:defRPr>
+            </a:lvl3pPr>
+            <a:lvl4pPr marL="1600200" indent="-228600" algn="l" defTabSz="914400" rtl="0" eaLnBrk="1" latinLnBrk="0" hangingPunct="1">
+              <a:lnSpc>
+                <a:spcPct val="90000"/>
+              </a:lnSpc>
+              <a:spcBef>
+                <a:spcPts val="500"/>
+              </a:spcBef>
+              <a:buFont typeface="Arial" panose="020B0604020202020204" pitchFamily="34" charset="0"/>
+              <a:buChar char="•"/>
+              <a:defRPr sz="1800" kern="1200">
+                <a:solidFill>
+                  <a:schemeClr val="tx1"/>
+                </a:solidFill>
+                <a:latin typeface="Calibri" panose="020F0502020204030204" pitchFamily="34" charset="0"/>
+                <a:ea typeface="+mn-ea"/>
+                <a:cs typeface="Calibri" panose="020F0502020204030204" pitchFamily="34" charset="0"/>
+              </a:defRPr>
+            </a:lvl4pPr>
+            <a:lvl5pPr marL="2057400" indent="-228600" algn="l" defTabSz="914400" rtl="0" eaLnBrk="1" latinLnBrk="0" hangingPunct="1">
+              <a:lnSpc>
+                <a:spcPct val="90000"/>
+              </a:lnSpc>
+              <a:spcBef>
+                <a:spcPts val="500"/>
+              </a:spcBef>
+              <a:buFont typeface="Arial" panose="020B0604020202020204" pitchFamily="34" charset="0"/>
+              <a:buChar char="•"/>
+              <a:defRPr sz="1800" kern="1200">
+                <a:solidFill>
+                  <a:schemeClr val="tx1"/>
+                </a:solidFill>
+                <a:latin typeface="Calibri" panose="020F0502020204030204" pitchFamily="34" charset="0"/>
+                <a:ea typeface="+mn-ea"/>
+                <a:cs typeface="Calibri" panose="020F0502020204030204" pitchFamily="34" charset="0"/>
+              </a:defRPr>
+            </a:lvl5pPr>
+            <a:lvl6pPr marL="2514600" indent="-228600" algn="l" defTabSz="914400" rtl="0" eaLnBrk="1" latinLnBrk="0" hangingPunct="1">
+              <a:lnSpc>
+                <a:spcPct val="90000"/>
+              </a:lnSpc>
+              <a:spcBef>
+                <a:spcPts val="500"/>
+              </a:spcBef>
+              <a:buFont typeface="Arial" panose="020B0604020202020204" pitchFamily="34" charset="0"/>
+              <a:buChar char="•"/>
+              <a:defRPr sz="1800" kern="1200">
+                <a:solidFill>
+                  <a:schemeClr val="tx1"/>
+                </a:solidFill>
+                <a:latin typeface="+mn-lt"/>
+                <a:ea typeface="+mn-ea"/>
+                <a:cs typeface="+mn-cs"/>
+              </a:defRPr>
+            </a:lvl6pPr>
+            <a:lvl7pPr marL="2971800" indent="-228600" algn="l" defTabSz="914400" rtl="0" eaLnBrk="1" latinLnBrk="0" hangingPunct="1">
+              <a:lnSpc>
+                <a:spcPct val="90000"/>
+              </a:lnSpc>
+              <a:spcBef>
+                <a:spcPts val="500"/>
+              </a:spcBef>
+              <a:buFont typeface="Arial" panose="020B0604020202020204" pitchFamily="34" charset="0"/>
+              <a:buChar char="•"/>
+              <a:defRPr sz="1800" kern="1200">
+                <a:solidFill>
+                  <a:schemeClr val="tx1"/>
+                </a:solidFill>
+                <a:latin typeface="+mn-lt"/>
+                <a:ea typeface="+mn-ea"/>
+                <a:cs typeface="+mn-cs"/>
+              </a:defRPr>
+            </a:lvl7pPr>
+            <a:lvl8pPr marL="3429000" indent="-228600" algn="l" defTabSz="914400" rtl="0" eaLnBrk="1" latinLnBrk="0" hangingPunct="1">
+              <a:lnSpc>
+                <a:spcPct val="90000"/>
+              </a:lnSpc>
+              <a:spcBef>
+                <a:spcPts val="500"/>
+              </a:spcBef>
+              <a:buFont typeface="Arial" panose="020B0604020202020204" pitchFamily="34" charset="0"/>
+              <a:buChar char="•"/>
+              <a:defRPr sz="1800" kern="1200">
+                <a:solidFill>
+                  <a:schemeClr val="tx1"/>
+                </a:solidFill>
+                <a:latin typeface="+mn-lt"/>
+                <a:ea typeface="+mn-ea"/>
+                <a:cs typeface="+mn-cs"/>
+              </a:defRPr>
+            </a:lvl8pPr>
+            <a:lvl9pPr marL="3886200" indent="-228600" algn="l" defTabSz="914400" rtl="0" eaLnBrk="1" latinLnBrk="0" hangingPunct="1">
+              <a:lnSpc>
+                <a:spcPct val="90000"/>
+              </a:lnSpc>
+              <a:spcBef>
+                <a:spcPts val="500"/>
+              </a:spcBef>
+              <a:buFont typeface="Arial" panose="020B0604020202020204" pitchFamily="34" charset="0"/>
+              <a:buChar char="•"/>
+              <a:defRPr sz="1800" kern="1200">
+                <a:solidFill>
+                  <a:schemeClr val="tx1"/>
+                </a:solidFill>
+                <a:latin typeface="+mn-lt"/>
+                <a:ea typeface="+mn-ea"/>
+                <a:cs typeface="+mn-cs"/>
+              </a:defRPr>
+            </a:lvl9pPr>
+          </a:lstStyle>
+          <a:p>
+            <a:r>
+              <a:rPr lang="lv-LV" sz="2800" dirty="0"/>
+              <a:t>Pieejamā līmeņa informācija</a:t>
+            </a:r>
+          </a:p>
+        </p:txBody>
+      </p:sp>
+      <p:pic>
+        <p:nvPicPr>
+          <p:cNvPr id="4" name="Attēls 3">
+            <a:extLst>
+              <a:ext uri="{FF2B5EF4-FFF2-40B4-BE49-F238E27FC236}">
+                <a16:creationId xmlns:a16="http://schemas.microsoft.com/office/drawing/2014/main" id="{42119739-2AFD-AE3C-A4B9-06382F64255C}"/>
+              </a:ext>
+            </a:extLst>
+          </p:cNvPr>
+          <p:cNvPicPr>
+            <a:picLocks noChangeAspect="1"/>
+          </p:cNvPicPr>
+          <p:nvPr/>
+        </p:nvPicPr>
+        <p:blipFill>
+          <a:blip r:embed="rId2"/>
+          <a:stretch>
+            <a:fillRect/>
+          </a:stretch>
+        </p:blipFill>
+        <p:spPr>
+          <a:xfrm>
+            <a:off x="5199598" y="0"/>
+            <a:ext cx="6709860" cy="6858000"/>
+          </a:xfrm>
+          <a:prstGeom prst="rect">
+            <a:avLst/>
+          </a:prstGeom>
+        </p:spPr>
+      </p:pic>
+    </p:spTree>
+    <p:extLst>
+      <p:ext uri="{BB962C8B-B14F-4D97-AF65-F5344CB8AC3E}">
+        <p14:creationId xmlns:p14="http://schemas.microsoft.com/office/powerpoint/2010/main" val="2151029909"/>
+      </p:ext>
+    </p:extLst>
+  </p:cSld>
+  <p:clrMapOvr>
+    <a:masterClrMapping/>
+  </p:clrMapOvr>
+</p:sld>
+</file>
+
+<file path=ppt/slides/slide12.xml><?xml version="1.0" encoding="utf-8"?>
+<p:sld xmlns:a="http://schemas.openxmlformats.org/drawingml/2006/main" xmlns:r="http://schemas.openxmlformats.org/officeDocument/2006/relationships" xmlns:p="http://schemas.openxmlformats.org/presentationml/2006/main">
+  <p:cSld>
+    <p:spTree>
+      <p:nvGrpSpPr>
+        <p:cNvPr id="1" name="">
+          <a:extLst>
+            <a:ext uri="{FF2B5EF4-FFF2-40B4-BE49-F238E27FC236}">
+              <a16:creationId xmlns:a16="http://schemas.microsoft.com/office/drawing/2014/main" id="{DC3CB434-9254-34CE-D83B-25DE4116A9CA}"/>
+            </a:ext>
+          </a:extLst>
+        </p:cNvPr>
+        <p:cNvGrpSpPr/>
+        <p:nvPr/>
+      </p:nvGrpSpPr>
+      <p:grpSpPr>
+        <a:xfrm>
+          <a:off x="0" y="0"/>
+          <a:ext cx="0" cy="0"/>
+          <a:chOff x="0" y="0"/>
+          <a:chExt cx="0" cy="0"/>
+        </a:xfrm>
+      </p:grpSpPr>
+      <p:sp>
+        <p:nvSpPr>
+          <p:cNvPr id="2" name="Virsraksts 1">
+            <a:extLst>
+              <a:ext uri="{FF2B5EF4-FFF2-40B4-BE49-F238E27FC236}">
+                <a16:creationId xmlns:a16="http://schemas.microsoft.com/office/drawing/2014/main" id="{75F2413E-72AF-1C28-5BF5-99F6168D8A0D}"/>
+              </a:ext>
+            </a:extLst>
+          </p:cNvPr>
+          <p:cNvSpPr>
+            <a:spLocks noGrp="1"/>
+          </p:cNvSpPr>
+          <p:nvPr>
+            <p:ph type="title"/>
+          </p:nvPr>
+        </p:nvSpPr>
+        <p:spPr/>
+        <p:txBody>
+          <a:bodyPr/>
+          <a:lstStyle/>
+          <a:p>
+            <a:r>
+              <a:rPr lang="lv-LV" dirty="0"/>
+              <a:t>Ainas – Līmeņu atlase</a:t>
+            </a:r>
+          </a:p>
+        </p:txBody>
+      </p:sp>
+      <p:sp>
+        <p:nvSpPr>
+          <p:cNvPr id="7" name="Teksta vietturis 15">
+            <a:extLst>
+              <a:ext uri="{FF2B5EF4-FFF2-40B4-BE49-F238E27FC236}">
+                <a16:creationId xmlns:a16="http://schemas.microsoft.com/office/drawing/2014/main" id="{2E441715-BA5B-1950-F907-9A73F21212F0}"/>
+              </a:ext>
+            </a:extLst>
+          </p:cNvPr>
+          <p:cNvSpPr txBox="1">
+            <a:spLocks/>
+          </p:cNvSpPr>
+          <p:nvPr/>
+        </p:nvSpPr>
+        <p:spPr>
+          <a:xfrm>
+            <a:off x="838199" y="3871737"/>
+            <a:ext cx="3716548" cy="844707"/>
+          </a:xfrm>
+          <a:prstGeom prst="rect">
+            <a:avLst/>
+          </a:prstGeom>
+        </p:spPr>
+        <p:txBody>
+          <a:bodyPr vert="horz" lIns="91440" tIns="45720" rIns="91440" bIns="45720" rtlCol="0" anchor="t">
+            <a:noAutofit/>
+          </a:bodyPr>
+          <a:lstStyle>
+            <a:lvl1pPr marL="0" indent="0" algn="l" defTabSz="914400" rtl="0" eaLnBrk="1" latinLnBrk="0" hangingPunct="1">
+              <a:lnSpc>
+                <a:spcPct val="100000"/>
+              </a:lnSpc>
+              <a:spcBef>
+                <a:spcPts val="1000"/>
+              </a:spcBef>
+              <a:buFont typeface="Arial" panose="020B0604020202020204" pitchFamily="34" charset="0"/>
+              <a:buNone/>
+              <a:defRPr sz="1200" kern="1200">
+                <a:solidFill>
+                  <a:schemeClr val="bg1"/>
+                </a:solidFill>
+                <a:latin typeface="Calibri" panose="020F0502020204030204" pitchFamily="34" charset="0"/>
+                <a:ea typeface="+mn-ea"/>
+                <a:cs typeface="Calibri" panose="020F0502020204030204" pitchFamily="34" charset="0"/>
+              </a:defRPr>
+            </a:lvl1pPr>
+            <a:lvl2pPr marL="685800" indent="-228600" algn="l" defTabSz="914400" rtl="0" eaLnBrk="1" latinLnBrk="0" hangingPunct="1">
+              <a:lnSpc>
+                <a:spcPct val="90000"/>
+              </a:lnSpc>
+              <a:spcBef>
+                <a:spcPts val="500"/>
+              </a:spcBef>
+              <a:buFont typeface="Arial" panose="020B0604020202020204" pitchFamily="34" charset="0"/>
+              <a:buChar char="•"/>
+              <a:defRPr sz="2400" kern="1200">
+                <a:solidFill>
+                  <a:schemeClr val="tx1"/>
+                </a:solidFill>
+                <a:latin typeface="Calibri" panose="020F0502020204030204" pitchFamily="34" charset="0"/>
+                <a:ea typeface="+mn-ea"/>
+                <a:cs typeface="Calibri" panose="020F0502020204030204" pitchFamily="34" charset="0"/>
+              </a:defRPr>
+            </a:lvl2pPr>
+            <a:lvl3pPr marL="1143000" indent="-228600" algn="l" defTabSz="914400" rtl="0" eaLnBrk="1" latinLnBrk="0" hangingPunct="1">
+              <a:lnSpc>
+                <a:spcPct val="90000"/>
+              </a:lnSpc>
+              <a:spcBef>
+                <a:spcPts val="500"/>
+              </a:spcBef>
+              <a:buFont typeface="Arial" panose="020B0604020202020204" pitchFamily="34" charset="0"/>
+              <a:buChar char="•"/>
+              <a:defRPr sz="2000" kern="1200">
+                <a:solidFill>
+                  <a:schemeClr val="tx1"/>
+                </a:solidFill>
+                <a:latin typeface="Calibri" panose="020F0502020204030204" pitchFamily="34" charset="0"/>
+                <a:ea typeface="+mn-ea"/>
+                <a:cs typeface="Calibri" panose="020F0502020204030204" pitchFamily="34" charset="0"/>
+              </a:defRPr>
+            </a:lvl3pPr>
+            <a:lvl4pPr marL="1600200" indent="-228600" algn="l" defTabSz="914400" rtl="0" eaLnBrk="1" latinLnBrk="0" hangingPunct="1">
+              <a:lnSpc>
+                <a:spcPct val="90000"/>
+              </a:lnSpc>
+              <a:spcBef>
+                <a:spcPts val="500"/>
+              </a:spcBef>
+              <a:buFont typeface="Arial" panose="020B0604020202020204" pitchFamily="34" charset="0"/>
+              <a:buChar char="•"/>
+              <a:defRPr sz="1800" kern="1200">
+                <a:solidFill>
+                  <a:schemeClr val="tx1"/>
+                </a:solidFill>
+                <a:latin typeface="Calibri" panose="020F0502020204030204" pitchFamily="34" charset="0"/>
+                <a:ea typeface="+mn-ea"/>
+                <a:cs typeface="Calibri" panose="020F0502020204030204" pitchFamily="34" charset="0"/>
+              </a:defRPr>
+            </a:lvl4pPr>
+            <a:lvl5pPr marL="2057400" indent="-228600" algn="l" defTabSz="914400" rtl="0" eaLnBrk="1" latinLnBrk="0" hangingPunct="1">
+              <a:lnSpc>
+                <a:spcPct val="90000"/>
+              </a:lnSpc>
+              <a:spcBef>
+                <a:spcPts val="500"/>
+              </a:spcBef>
+              <a:buFont typeface="Arial" panose="020B0604020202020204" pitchFamily="34" charset="0"/>
+              <a:buChar char="•"/>
+              <a:defRPr sz="1800" kern="1200">
+                <a:solidFill>
+                  <a:schemeClr val="tx1"/>
+                </a:solidFill>
+                <a:latin typeface="Calibri" panose="020F0502020204030204" pitchFamily="34" charset="0"/>
+                <a:ea typeface="+mn-ea"/>
+                <a:cs typeface="Calibri" panose="020F0502020204030204" pitchFamily="34" charset="0"/>
+              </a:defRPr>
+            </a:lvl5pPr>
+            <a:lvl6pPr marL="2514600" indent="-228600" algn="l" defTabSz="914400" rtl="0" eaLnBrk="1" latinLnBrk="0" hangingPunct="1">
+              <a:lnSpc>
+                <a:spcPct val="90000"/>
+              </a:lnSpc>
+              <a:spcBef>
+                <a:spcPts val="500"/>
+              </a:spcBef>
+              <a:buFont typeface="Arial" panose="020B0604020202020204" pitchFamily="34" charset="0"/>
+              <a:buChar char="•"/>
+              <a:defRPr sz="1800" kern="1200">
+                <a:solidFill>
+                  <a:schemeClr val="tx1"/>
+                </a:solidFill>
+                <a:latin typeface="+mn-lt"/>
+                <a:ea typeface="+mn-ea"/>
+                <a:cs typeface="+mn-cs"/>
+              </a:defRPr>
+            </a:lvl6pPr>
+            <a:lvl7pPr marL="2971800" indent="-228600" algn="l" defTabSz="914400" rtl="0" eaLnBrk="1" latinLnBrk="0" hangingPunct="1">
+              <a:lnSpc>
+                <a:spcPct val="90000"/>
+              </a:lnSpc>
+              <a:spcBef>
+                <a:spcPts val="500"/>
+              </a:spcBef>
+              <a:buFont typeface="Arial" panose="020B0604020202020204" pitchFamily="34" charset="0"/>
+              <a:buChar char="•"/>
+              <a:defRPr sz="1800" kern="1200">
+                <a:solidFill>
+                  <a:schemeClr val="tx1"/>
+                </a:solidFill>
+                <a:latin typeface="+mn-lt"/>
+                <a:ea typeface="+mn-ea"/>
+                <a:cs typeface="+mn-cs"/>
+              </a:defRPr>
+            </a:lvl7pPr>
+            <a:lvl8pPr marL="3429000" indent="-228600" algn="l" defTabSz="914400" rtl="0" eaLnBrk="1" latinLnBrk="0" hangingPunct="1">
+              <a:lnSpc>
+                <a:spcPct val="90000"/>
+              </a:lnSpc>
+              <a:spcBef>
+                <a:spcPts val="500"/>
+              </a:spcBef>
+              <a:buFont typeface="Arial" panose="020B0604020202020204" pitchFamily="34" charset="0"/>
+              <a:buChar char="•"/>
+              <a:defRPr sz="1800" kern="1200">
+                <a:solidFill>
+                  <a:schemeClr val="tx1"/>
+                </a:solidFill>
+                <a:latin typeface="+mn-lt"/>
+                <a:ea typeface="+mn-ea"/>
+                <a:cs typeface="+mn-cs"/>
+              </a:defRPr>
+            </a:lvl8pPr>
+            <a:lvl9pPr marL="3886200" indent="-228600" algn="l" defTabSz="914400" rtl="0" eaLnBrk="1" latinLnBrk="0" hangingPunct="1">
+              <a:lnSpc>
+                <a:spcPct val="90000"/>
+              </a:lnSpc>
+              <a:spcBef>
+                <a:spcPts val="500"/>
+              </a:spcBef>
+              <a:buFont typeface="Arial" panose="020B0604020202020204" pitchFamily="34" charset="0"/>
+              <a:buChar char="•"/>
+              <a:defRPr sz="1800" kern="1200">
+                <a:solidFill>
+                  <a:schemeClr val="tx1"/>
+                </a:solidFill>
+                <a:latin typeface="+mn-lt"/>
+                <a:ea typeface="+mn-ea"/>
+                <a:cs typeface="+mn-cs"/>
+              </a:defRPr>
+            </a:lvl9pPr>
+          </a:lstStyle>
+          <a:p>
+            <a:r>
+              <a:rPr lang="lv-LV" sz="2800" dirty="0"/>
+              <a:t>Aizslēgtā līmeņa informācija</a:t>
+            </a:r>
+          </a:p>
+        </p:txBody>
+      </p:sp>
+      <p:pic>
+        <p:nvPicPr>
+          <p:cNvPr id="5" name="Attēls 4">
+            <a:extLst>
+              <a:ext uri="{FF2B5EF4-FFF2-40B4-BE49-F238E27FC236}">
+                <a16:creationId xmlns:a16="http://schemas.microsoft.com/office/drawing/2014/main" id="{E4A00BD9-7809-472B-D3E7-ECE580C80B12}"/>
+              </a:ext>
+            </a:extLst>
+          </p:cNvPr>
+          <p:cNvPicPr>
+            <a:picLocks noChangeAspect="1"/>
+          </p:cNvPicPr>
+          <p:nvPr/>
+        </p:nvPicPr>
+        <p:blipFill>
+          <a:blip r:embed="rId2"/>
+          <a:stretch>
+            <a:fillRect/>
+          </a:stretch>
+        </p:blipFill>
+        <p:spPr>
+          <a:xfrm>
+            <a:off x="5208224" y="0"/>
+            <a:ext cx="6709860" cy="6858000"/>
+          </a:xfrm>
+          <a:prstGeom prst="rect">
+            <a:avLst/>
+          </a:prstGeom>
+        </p:spPr>
+      </p:pic>
+    </p:spTree>
+    <p:extLst>
+      <p:ext uri="{BB962C8B-B14F-4D97-AF65-F5344CB8AC3E}">
+        <p14:creationId xmlns:p14="http://schemas.microsoft.com/office/powerpoint/2010/main" val="1087257161"/>
+      </p:ext>
+    </p:extLst>
+  </p:cSld>
+  <p:clrMapOvr>
+    <a:masterClrMapping/>
+  </p:clrMapOvr>
+</p:sld>
+</file>
+
+<file path=ppt/slides/slide13.xml><?xml version="1.0" encoding="utf-8"?>
+<p:sld xmlns:a="http://schemas.openxmlformats.org/drawingml/2006/main" xmlns:r="http://schemas.openxmlformats.org/officeDocument/2006/relationships" xmlns:p="http://schemas.openxmlformats.org/presentationml/2006/main">
+  <p:cSld>
+    <p:spTree>
+      <p:nvGrpSpPr>
+        <p:cNvPr id="1" name="">
+          <a:extLst>
+            <a:ext uri="{FF2B5EF4-FFF2-40B4-BE49-F238E27FC236}">
+              <a16:creationId xmlns:a16="http://schemas.microsoft.com/office/drawing/2014/main" id="{D290B8F3-FCB8-8904-C52E-93D5F768FB59}"/>
+            </a:ext>
+          </a:extLst>
+        </p:cNvPr>
+        <p:cNvGrpSpPr/>
+        <p:nvPr/>
+      </p:nvGrpSpPr>
+      <p:grpSpPr>
+        <a:xfrm>
+          <a:off x="0" y="0"/>
+          <a:ext cx="0" cy="0"/>
+          <a:chOff x="0" y="0"/>
+          <a:chExt cx="0" cy="0"/>
+        </a:xfrm>
+      </p:grpSpPr>
+      <p:sp>
+        <p:nvSpPr>
+          <p:cNvPr id="2" name="Virsraksts 1">
+            <a:extLst>
+              <a:ext uri="{FF2B5EF4-FFF2-40B4-BE49-F238E27FC236}">
+                <a16:creationId xmlns:a16="http://schemas.microsoft.com/office/drawing/2014/main" id="{4E156738-6C8B-AF77-2182-32F730FECF22}"/>
+              </a:ext>
+            </a:extLst>
+          </p:cNvPr>
+          <p:cNvSpPr>
+            <a:spLocks noGrp="1"/>
+          </p:cNvSpPr>
+          <p:nvPr>
+            <p:ph type="title"/>
+          </p:nvPr>
+        </p:nvSpPr>
+        <p:spPr/>
+        <p:txBody>
+          <a:bodyPr/>
+          <a:lstStyle/>
+          <a:p>
+            <a:r>
+              <a:rPr lang="lv-LV" dirty="0"/>
+              <a:t>Ainas – Spēles laukums</a:t>
+            </a:r>
+          </a:p>
+        </p:txBody>
+      </p:sp>
+      <p:sp>
+        <p:nvSpPr>
+          <p:cNvPr id="7" name="Teksta vietturis 15">
+            <a:extLst>
+              <a:ext uri="{FF2B5EF4-FFF2-40B4-BE49-F238E27FC236}">
+                <a16:creationId xmlns:a16="http://schemas.microsoft.com/office/drawing/2014/main" id="{7FD74B6B-ABD6-CC73-D2E4-904C98A7C600}"/>
+              </a:ext>
+            </a:extLst>
+          </p:cNvPr>
+          <p:cNvSpPr txBox="1">
+            <a:spLocks/>
+          </p:cNvSpPr>
+          <p:nvPr/>
+        </p:nvSpPr>
+        <p:spPr>
+          <a:xfrm>
+            <a:off x="838199" y="3871737"/>
+            <a:ext cx="3716548" cy="844707"/>
+          </a:xfrm>
+          <a:prstGeom prst="rect">
+            <a:avLst/>
+          </a:prstGeom>
+        </p:spPr>
+        <p:txBody>
+          <a:bodyPr vert="horz" lIns="91440" tIns="45720" rIns="91440" bIns="45720" rtlCol="0" anchor="t">
+            <a:noAutofit/>
+          </a:bodyPr>
+          <a:lstStyle>
+            <a:lvl1pPr marL="0" indent="0" algn="l" defTabSz="914400" rtl="0" eaLnBrk="1" latinLnBrk="0" hangingPunct="1">
+              <a:lnSpc>
+                <a:spcPct val="100000"/>
+              </a:lnSpc>
+              <a:spcBef>
+                <a:spcPts val="1000"/>
+              </a:spcBef>
+              <a:buFont typeface="Arial" panose="020B0604020202020204" pitchFamily="34" charset="0"/>
+              <a:buNone/>
+              <a:defRPr sz="1200" kern="1200">
+                <a:solidFill>
+                  <a:schemeClr val="bg1"/>
+                </a:solidFill>
+                <a:latin typeface="Calibri" panose="020F0502020204030204" pitchFamily="34" charset="0"/>
+                <a:ea typeface="+mn-ea"/>
+                <a:cs typeface="Calibri" panose="020F0502020204030204" pitchFamily="34" charset="0"/>
+              </a:defRPr>
+            </a:lvl1pPr>
+            <a:lvl2pPr marL="685800" indent="-228600" algn="l" defTabSz="914400" rtl="0" eaLnBrk="1" latinLnBrk="0" hangingPunct="1">
+              <a:lnSpc>
+                <a:spcPct val="90000"/>
+              </a:lnSpc>
+              <a:spcBef>
+                <a:spcPts val="500"/>
+              </a:spcBef>
+              <a:buFont typeface="Arial" panose="020B0604020202020204" pitchFamily="34" charset="0"/>
+              <a:buChar char="•"/>
+              <a:defRPr sz="2400" kern="1200">
+                <a:solidFill>
+                  <a:schemeClr val="tx1"/>
+                </a:solidFill>
+                <a:latin typeface="Calibri" panose="020F0502020204030204" pitchFamily="34" charset="0"/>
+                <a:ea typeface="+mn-ea"/>
+                <a:cs typeface="Calibri" panose="020F0502020204030204" pitchFamily="34" charset="0"/>
+              </a:defRPr>
+            </a:lvl2pPr>
+            <a:lvl3pPr marL="1143000" indent="-228600" algn="l" defTabSz="914400" rtl="0" eaLnBrk="1" latinLnBrk="0" hangingPunct="1">
+              <a:lnSpc>
+                <a:spcPct val="90000"/>
+              </a:lnSpc>
+              <a:spcBef>
+                <a:spcPts val="500"/>
+              </a:spcBef>
+              <a:buFont typeface="Arial" panose="020B0604020202020204" pitchFamily="34" charset="0"/>
+              <a:buChar char="•"/>
+              <a:defRPr sz="2000" kern="1200">
+                <a:solidFill>
+                  <a:schemeClr val="tx1"/>
+                </a:solidFill>
+                <a:latin typeface="Calibri" panose="020F0502020204030204" pitchFamily="34" charset="0"/>
+                <a:ea typeface="+mn-ea"/>
+                <a:cs typeface="Calibri" panose="020F0502020204030204" pitchFamily="34" charset="0"/>
+              </a:defRPr>
+            </a:lvl3pPr>
+            <a:lvl4pPr marL="1600200" indent="-228600" algn="l" defTabSz="914400" rtl="0" eaLnBrk="1" latinLnBrk="0" hangingPunct="1">
+              <a:lnSpc>
+                <a:spcPct val="90000"/>
+              </a:lnSpc>
+              <a:spcBef>
+                <a:spcPts val="500"/>
+              </a:spcBef>
+              <a:buFont typeface="Arial" panose="020B0604020202020204" pitchFamily="34" charset="0"/>
+              <a:buChar char="•"/>
+              <a:defRPr sz="1800" kern="1200">
+                <a:solidFill>
+                  <a:schemeClr val="tx1"/>
+                </a:solidFill>
+                <a:latin typeface="Calibri" panose="020F0502020204030204" pitchFamily="34" charset="0"/>
+                <a:ea typeface="+mn-ea"/>
+                <a:cs typeface="Calibri" panose="020F0502020204030204" pitchFamily="34" charset="0"/>
+              </a:defRPr>
+            </a:lvl4pPr>
+            <a:lvl5pPr marL="2057400" indent="-228600" algn="l" defTabSz="914400" rtl="0" eaLnBrk="1" latinLnBrk="0" hangingPunct="1">
+              <a:lnSpc>
+                <a:spcPct val="90000"/>
+              </a:lnSpc>
+              <a:spcBef>
+                <a:spcPts val="500"/>
+              </a:spcBef>
+              <a:buFont typeface="Arial" panose="020B0604020202020204" pitchFamily="34" charset="0"/>
+              <a:buChar char="•"/>
+              <a:defRPr sz="1800" kern="1200">
+                <a:solidFill>
+                  <a:schemeClr val="tx1"/>
+                </a:solidFill>
+                <a:latin typeface="Calibri" panose="020F0502020204030204" pitchFamily="34" charset="0"/>
+                <a:ea typeface="+mn-ea"/>
+                <a:cs typeface="Calibri" panose="020F0502020204030204" pitchFamily="34" charset="0"/>
+              </a:defRPr>
+            </a:lvl5pPr>
+            <a:lvl6pPr marL="2514600" indent="-228600" algn="l" defTabSz="914400" rtl="0" eaLnBrk="1" latinLnBrk="0" hangingPunct="1">
+              <a:lnSpc>
+                <a:spcPct val="90000"/>
+              </a:lnSpc>
+              <a:spcBef>
+                <a:spcPts val="500"/>
+              </a:spcBef>
+              <a:buFont typeface="Arial" panose="020B0604020202020204" pitchFamily="34" charset="0"/>
+              <a:buChar char="•"/>
+              <a:defRPr sz="1800" kern="1200">
+                <a:solidFill>
+                  <a:schemeClr val="tx1"/>
+                </a:solidFill>
+                <a:latin typeface="+mn-lt"/>
+                <a:ea typeface="+mn-ea"/>
+                <a:cs typeface="+mn-cs"/>
+              </a:defRPr>
+            </a:lvl6pPr>
+            <a:lvl7pPr marL="2971800" indent="-228600" algn="l" defTabSz="914400" rtl="0" eaLnBrk="1" latinLnBrk="0" hangingPunct="1">
+              <a:lnSpc>
+                <a:spcPct val="90000"/>
+              </a:lnSpc>
+              <a:spcBef>
+                <a:spcPts val="500"/>
+              </a:spcBef>
+              <a:buFont typeface="Arial" panose="020B0604020202020204" pitchFamily="34" charset="0"/>
+              <a:buChar char="•"/>
+              <a:defRPr sz="1800" kern="1200">
+                <a:solidFill>
+                  <a:schemeClr val="tx1"/>
+                </a:solidFill>
+                <a:latin typeface="+mn-lt"/>
+                <a:ea typeface="+mn-ea"/>
+                <a:cs typeface="+mn-cs"/>
+              </a:defRPr>
+            </a:lvl7pPr>
+            <a:lvl8pPr marL="3429000" indent="-228600" algn="l" defTabSz="914400" rtl="0" eaLnBrk="1" latinLnBrk="0" hangingPunct="1">
+              <a:lnSpc>
+                <a:spcPct val="90000"/>
+              </a:lnSpc>
+              <a:spcBef>
+                <a:spcPts val="500"/>
+              </a:spcBef>
+              <a:buFont typeface="Arial" panose="020B0604020202020204" pitchFamily="34" charset="0"/>
+              <a:buChar char="•"/>
+              <a:defRPr sz="1800" kern="1200">
+                <a:solidFill>
+                  <a:schemeClr val="tx1"/>
+                </a:solidFill>
+                <a:latin typeface="+mn-lt"/>
+                <a:ea typeface="+mn-ea"/>
+                <a:cs typeface="+mn-cs"/>
+              </a:defRPr>
+            </a:lvl8pPr>
+            <a:lvl9pPr marL="3886200" indent="-228600" algn="l" defTabSz="914400" rtl="0" eaLnBrk="1" latinLnBrk="0" hangingPunct="1">
+              <a:lnSpc>
+                <a:spcPct val="90000"/>
+              </a:lnSpc>
+              <a:spcBef>
+                <a:spcPts val="500"/>
+              </a:spcBef>
+              <a:buFont typeface="Arial" panose="020B0604020202020204" pitchFamily="34" charset="0"/>
+              <a:buChar char="•"/>
+              <a:defRPr sz="1800" kern="1200">
+                <a:solidFill>
+                  <a:schemeClr val="tx1"/>
+                </a:solidFill>
+                <a:latin typeface="+mn-lt"/>
+                <a:ea typeface="+mn-ea"/>
+                <a:cs typeface="+mn-cs"/>
+              </a:defRPr>
+            </a:lvl9pPr>
+          </a:lstStyle>
+          <a:p>
+            <a:r>
+              <a:rPr lang="lv-LV" sz="2800" dirty="0"/>
+              <a:t>Sākuma stadija pēc līmeņa atvēršanas</a:t>
+            </a:r>
+          </a:p>
+        </p:txBody>
+      </p:sp>
+      <p:pic>
+        <p:nvPicPr>
+          <p:cNvPr id="4" name="Attēls 3">
+            <a:extLst>
+              <a:ext uri="{FF2B5EF4-FFF2-40B4-BE49-F238E27FC236}">
+                <a16:creationId xmlns:a16="http://schemas.microsoft.com/office/drawing/2014/main" id="{14520E99-3EB8-90D6-C883-4A184EBE6CE0}"/>
+              </a:ext>
+            </a:extLst>
+          </p:cNvPr>
+          <p:cNvPicPr>
+            <a:picLocks noChangeAspect="1"/>
+          </p:cNvPicPr>
+          <p:nvPr/>
+        </p:nvPicPr>
+        <p:blipFill>
+          <a:blip r:embed="rId2"/>
+          <a:stretch>
+            <a:fillRect/>
+          </a:stretch>
+        </p:blipFill>
+        <p:spPr>
+          <a:xfrm>
+            <a:off x="5234104" y="0"/>
+            <a:ext cx="6709860" cy="6858000"/>
+          </a:xfrm>
+          <a:prstGeom prst="rect">
+            <a:avLst/>
+          </a:prstGeom>
+        </p:spPr>
+      </p:pic>
+    </p:spTree>
+    <p:extLst>
+      <p:ext uri="{BB962C8B-B14F-4D97-AF65-F5344CB8AC3E}">
+        <p14:creationId xmlns:p14="http://schemas.microsoft.com/office/powerpoint/2010/main" val="704287391"/>
+      </p:ext>
+    </p:extLst>
+  </p:cSld>
+  <p:clrMapOvr>
+    <a:masterClrMapping/>
+  </p:clrMapOvr>
+</p:sld>
+</file>
+
+<file path=ppt/slides/slide14.xml><?xml version="1.0" encoding="utf-8"?>
+<p:sld xmlns:a="http://schemas.openxmlformats.org/drawingml/2006/main" xmlns:r="http://schemas.openxmlformats.org/officeDocument/2006/relationships" xmlns:p="http://schemas.openxmlformats.org/presentationml/2006/main">
+  <p:cSld>
+    <p:spTree>
+      <p:nvGrpSpPr>
+        <p:cNvPr id="1" name="">
+          <a:extLst>
+            <a:ext uri="{FF2B5EF4-FFF2-40B4-BE49-F238E27FC236}">
+              <a16:creationId xmlns:a16="http://schemas.microsoft.com/office/drawing/2014/main" id="{4037A748-BAF3-FF46-A235-79EDB7A2F064}"/>
+            </a:ext>
+          </a:extLst>
+        </p:cNvPr>
+        <p:cNvGrpSpPr/>
+        <p:nvPr/>
+      </p:nvGrpSpPr>
+      <p:grpSpPr>
+        <a:xfrm>
+          <a:off x="0" y="0"/>
+          <a:ext cx="0" cy="0"/>
+          <a:chOff x="0" y="0"/>
+          <a:chExt cx="0" cy="0"/>
+        </a:xfrm>
+      </p:grpSpPr>
+      <p:sp>
+        <p:nvSpPr>
+          <p:cNvPr id="2" name="Virsraksts 1">
+            <a:extLst>
+              <a:ext uri="{FF2B5EF4-FFF2-40B4-BE49-F238E27FC236}">
+                <a16:creationId xmlns:a16="http://schemas.microsoft.com/office/drawing/2014/main" id="{9A9147F3-2052-D70A-12DD-A9F8294B91CC}"/>
+              </a:ext>
+            </a:extLst>
+          </p:cNvPr>
+          <p:cNvSpPr>
+            <a:spLocks noGrp="1"/>
+          </p:cNvSpPr>
+          <p:nvPr>
+            <p:ph type="title"/>
+          </p:nvPr>
+        </p:nvSpPr>
+        <p:spPr/>
+        <p:txBody>
+          <a:bodyPr/>
+          <a:lstStyle/>
+          <a:p>
+            <a:r>
+              <a:rPr lang="lv-LV" dirty="0"/>
+              <a:t>Ainas – Spēles laukums</a:t>
+            </a:r>
+          </a:p>
+        </p:txBody>
+      </p:sp>
+      <p:sp>
+        <p:nvSpPr>
+          <p:cNvPr id="7" name="Teksta vietturis 15">
+            <a:extLst>
+              <a:ext uri="{FF2B5EF4-FFF2-40B4-BE49-F238E27FC236}">
+                <a16:creationId xmlns:a16="http://schemas.microsoft.com/office/drawing/2014/main" id="{E1BD7DE2-FE5D-470D-BD87-317F74EE1356}"/>
+              </a:ext>
+            </a:extLst>
+          </p:cNvPr>
+          <p:cNvSpPr txBox="1">
+            <a:spLocks/>
+          </p:cNvSpPr>
+          <p:nvPr/>
+        </p:nvSpPr>
+        <p:spPr>
+          <a:xfrm>
+            <a:off x="838199" y="3871737"/>
+            <a:ext cx="3716548" cy="844707"/>
+          </a:xfrm>
+          <a:prstGeom prst="rect">
+            <a:avLst/>
+          </a:prstGeom>
+        </p:spPr>
+        <p:txBody>
+          <a:bodyPr vert="horz" lIns="91440" tIns="45720" rIns="91440" bIns="45720" rtlCol="0" anchor="t">
+            <a:noAutofit/>
+          </a:bodyPr>
+          <a:lstStyle>
+            <a:lvl1pPr marL="0" indent="0" algn="l" defTabSz="914400" rtl="0" eaLnBrk="1" latinLnBrk="0" hangingPunct="1">
+              <a:lnSpc>
+                <a:spcPct val="100000"/>
+              </a:lnSpc>
+              <a:spcBef>
+                <a:spcPts val="1000"/>
+              </a:spcBef>
+              <a:buFont typeface="Arial" panose="020B0604020202020204" pitchFamily="34" charset="0"/>
+              <a:buNone/>
+              <a:defRPr sz="1200" kern="1200">
+                <a:solidFill>
+                  <a:schemeClr val="bg1"/>
+                </a:solidFill>
+                <a:latin typeface="Calibri" panose="020F0502020204030204" pitchFamily="34" charset="0"/>
+                <a:ea typeface="+mn-ea"/>
+                <a:cs typeface="Calibri" panose="020F0502020204030204" pitchFamily="34" charset="0"/>
+              </a:defRPr>
+            </a:lvl1pPr>
+            <a:lvl2pPr marL="685800" indent="-228600" algn="l" defTabSz="914400" rtl="0" eaLnBrk="1" latinLnBrk="0" hangingPunct="1">
+              <a:lnSpc>
+                <a:spcPct val="90000"/>
+              </a:lnSpc>
+              <a:spcBef>
+                <a:spcPts val="500"/>
+              </a:spcBef>
+              <a:buFont typeface="Arial" panose="020B0604020202020204" pitchFamily="34" charset="0"/>
+              <a:buChar char="•"/>
+              <a:defRPr sz="2400" kern="1200">
+                <a:solidFill>
+                  <a:schemeClr val="tx1"/>
+                </a:solidFill>
+                <a:latin typeface="Calibri" panose="020F0502020204030204" pitchFamily="34" charset="0"/>
+                <a:ea typeface="+mn-ea"/>
+                <a:cs typeface="Calibri" panose="020F0502020204030204" pitchFamily="34" charset="0"/>
+              </a:defRPr>
+            </a:lvl2pPr>
+            <a:lvl3pPr marL="1143000" indent="-228600" algn="l" defTabSz="914400" rtl="0" eaLnBrk="1" latinLnBrk="0" hangingPunct="1">
+              <a:lnSpc>
+                <a:spcPct val="90000"/>
+              </a:lnSpc>
+              <a:spcBef>
+                <a:spcPts val="500"/>
+              </a:spcBef>
+              <a:buFont typeface="Arial" panose="020B0604020202020204" pitchFamily="34" charset="0"/>
+              <a:buChar char="•"/>
+              <a:defRPr sz="2000" kern="1200">
+                <a:solidFill>
+                  <a:schemeClr val="tx1"/>
+                </a:solidFill>
+                <a:latin typeface="Calibri" panose="020F0502020204030204" pitchFamily="34" charset="0"/>
+                <a:ea typeface="+mn-ea"/>
+                <a:cs typeface="Calibri" panose="020F0502020204030204" pitchFamily="34" charset="0"/>
+              </a:defRPr>
+            </a:lvl3pPr>
+            <a:lvl4pPr marL="1600200" indent="-228600" algn="l" defTabSz="914400" rtl="0" eaLnBrk="1" latinLnBrk="0" hangingPunct="1">
+              <a:lnSpc>
+                <a:spcPct val="90000"/>
+              </a:lnSpc>
+              <a:spcBef>
+                <a:spcPts val="500"/>
+              </a:spcBef>
+              <a:buFont typeface="Arial" panose="020B0604020202020204" pitchFamily="34" charset="0"/>
+              <a:buChar char="•"/>
+              <a:defRPr sz="1800" kern="1200">
+                <a:solidFill>
+                  <a:schemeClr val="tx1"/>
+                </a:solidFill>
+                <a:latin typeface="Calibri" panose="020F0502020204030204" pitchFamily="34" charset="0"/>
+                <a:ea typeface="+mn-ea"/>
+                <a:cs typeface="Calibri" panose="020F0502020204030204" pitchFamily="34" charset="0"/>
+              </a:defRPr>
+            </a:lvl4pPr>
+            <a:lvl5pPr marL="2057400" indent="-228600" algn="l" defTabSz="914400" rtl="0" eaLnBrk="1" latinLnBrk="0" hangingPunct="1">
+              <a:lnSpc>
+                <a:spcPct val="90000"/>
+              </a:lnSpc>
+              <a:spcBef>
+                <a:spcPts val="500"/>
+              </a:spcBef>
+              <a:buFont typeface="Arial" panose="020B0604020202020204" pitchFamily="34" charset="0"/>
+              <a:buChar char="•"/>
+              <a:defRPr sz="1800" kern="1200">
+                <a:solidFill>
+                  <a:schemeClr val="tx1"/>
+                </a:solidFill>
+                <a:latin typeface="Calibri" panose="020F0502020204030204" pitchFamily="34" charset="0"/>
+                <a:ea typeface="+mn-ea"/>
+                <a:cs typeface="Calibri" panose="020F0502020204030204" pitchFamily="34" charset="0"/>
+              </a:defRPr>
+            </a:lvl5pPr>
+            <a:lvl6pPr marL="2514600" indent="-228600" algn="l" defTabSz="914400" rtl="0" eaLnBrk="1" latinLnBrk="0" hangingPunct="1">
+              <a:lnSpc>
+                <a:spcPct val="90000"/>
+              </a:lnSpc>
+              <a:spcBef>
+                <a:spcPts val="500"/>
+              </a:spcBef>
+              <a:buFont typeface="Arial" panose="020B0604020202020204" pitchFamily="34" charset="0"/>
+              <a:buChar char="•"/>
+              <a:defRPr sz="1800" kern="1200">
+                <a:solidFill>
+                  <a:schemeClr val="tx1"/>
+                </a:solidFill>
+                <a:latin typeface="+mn-lt"/>
+                <a:ea typeface="+mn-ea"/>
+                <a:cs typeface="+mn-cs"/>
+              </a:defRPr>
+            </a:lvl6pPr>
+            <a:lvl7pPr marL="2971800" indent="-228600" algn="l" defTabSz="914400" rtl="0" eaLnBrk="1" latinLnBrk="0" hangingPunct="1">
+              <a:lnSpc>
+                <a:spcPct val="90000"/>
+              </a:lnSpc>
+              <a:spcBef>
+                <a:spcPts val="500"/>
+              </a:spcBef>
+              <a:buFont typeface="Arial" panose="020B0604020202020204" pitchFamily="34" charset="0"/>
+              <a:buChar char="•"/>
+              <a:defRPr sz="1800" kern="1200">
+                <a:solidFill>
+                  <a:schemeClr val="tx1"/>
+                </a:solidFill>
+                <a:latin typeface="+mn-lt"/>
+                <a:ea typeface="+mn-ea"/>
+                <a:cs typeface="+mn-cs"/>
+              </a:defRPr>
+            </a:lvl7pPr>
+            <a:lvl8pPr marL="3429000" indent="-228600" algn="l" defTabSz="914400" rtl="0" eaLnBrk="1" latinLnBrk="0" hangingPunct="1">
+              <a:lnSpc>
+                <a:spcPct val="90000"/>
+              </a:lnSpc>
+              <a:spcBef>
+                <a:spcPts val="500"/>
+              </a:spcBef>
+              <a:buFont typeface="Arial" panose="020B0604020202020204" pitchFamily="34" charset="0"/>
+              <a:buChar char="•"/>
+              <a:defRPr sz="1800" kern="1200">
+                <a:solidFill>
+                  <a:schemeClr val="tx1"/>
+                </a:solidFill>
+                <a:latin typeface="+mn-lt"/>
+                <a:ea typeface="+mn-ea"/>
+                <a:cs typeface="+mn-cs"/>
+              </a:defRPr>
+            </a:lvl8pPr>
+            <a:lvl9pPr marL="3886200" indent="-228600" algn="l" defTabSz="914400" rtl="0" eaLnBrk="1" latinLnBrk="0" hangingPunct="1">
+              <a:lnSpc>
+                <a:spcPct val="90000"/>
+              </a:lnSpc>
+              <a:spcBef>
+                <a:spcPts val="500"/>
+              </a:spcBef>
+              <a:buFont typeface="Arial" panose="020B0604020202020204" pitchFamily="34" charset="0"/>
+              <a:buChar char="•"/>
+              <a:defRPr sz="1800" kern="1200">
+                <a:solidFill>
+                  <a:schemeClr val="tx1"/>
+                </a:solidFill>
+                <a:latin typeface="+mn-lt"/>
+                <a:ea typeface="+mn-ea"/>
+                <a:cs typeface="+mn-cs"/>
+              </a:defRPr>
+            </a:lvl9pPr>
+          </a:lstStyle>
+          <a:p>
+            <a:r>
+              <a:rPr lang="lv-LV" sz="2800" dirty="0"/>
+              <a:t>Pēc vilkšanas skats – atzīmētie mērķi</a:t>
+            </a:r>
+          </a:p>
+        </p:txBody>
+      </p:sp>
+      <p:pic>
+        <p:nvPicPr>
+          <p:cNvPr id="5" name="Attēls 4">
+            <a:extLst>
+              <a:ext uri="{FF2B5EF4-FFF2-40B4-BE49-F238E27FC236}">
+                <a16:creationId xmlns:a16="http://schemas.microsoft.com/office/drawing/2014/main" id="{310047FB-CB3B-9602-1154-865162DDC4C0}"/>
+              </a:ext>
+            </a:extLst>
+          </p:cNvPr>
+          <p:cNvPicPr>
+            <a:picLocks noChangeAspect="1"/>
+          </p:cNvPicPr>
+          <p:nvPr/>
+        </p:nvPicPr>
+        <p:blipFill>
+          <a:blip r:embed="rId2"/>
+          <a:stretch>
+            <a:fillRect/>
+          </a:stretch>
+        </p:blipFill>
+        <p:spPr>
+          <a:xfrm>
+            <a:off x="5251357" y="0"/>
+            <a:ext cx="6709860" cy="6858000"/>
+          </a:xfrm>
+          <a:prstGeom prst="rect">
+            <a:avLst/>
+          </a:prstGeom>
+        </p:spPr>
+      </p:pic>
+    </p:spTree>
+    <p:extLst>
+      <p:ext uri="{BB962C8B-B14F-4D97-AF65-F5344CB8AC3E}">
+        <p14:creationId xmlns:p14="http://schemas.microsoft.com/office/powerpoint/2010/main" val="1343398992"/>
+      </p:ext>
+    </p:extLst>
+  </p:cSld>
+  <p:clrMapOvr>
+    <a:masterClrMapping/>
+  </p:clrMapOvr>
+</p:sld>
+</file>
+
+<file path=ppt/slides/slide15.xml><?xml version="1.0" encoding="utf-8"?>
+<p:sld xmlns:a="http://schemas.openxmlformats.org/drawingml/2006/main" xmlns:r="http://schemas.openxmlformats.org/officeDocument/2006/relationships" xmlns:p="http://schemas.openxmlformats.org/presentationml/2006/main">
+  <p:cSld>
+    <p:spTree>
+      <p:nvGrpSpPr>
+        <p:cNvPr id="1" name="">
+          <a:extLst>
+            <a:ext uri="{FF2B5EF4-FFF2-40B4-BE49-F238E27FC236}">
+              <a16:creationId xmlns:a16="http://schemas.microsoft.com/office/drawing/2014/main" id="{2F51CDEA-AE6A-561D-D71A-B2BC88AC4082}"/>
+            </a:ext>
+          </a:extLst>
+        </p:cNvPr>
+        <p:cNvGrpSpPr/>
+        <p:nvPr/>
+      </p:nvGrpSpPr>
+      <p:grpSpPr>
+        <a:xfrm>
+          <a:off x="0" y="0"/>
+          <a:ext cx="0" cy="0"/>
+          <a:chOff x="0" y="0"/>
+          <a:chExt cx="0" cy="0"/>
+        </a:xfrm>
+      </p:grpSpPr>
+      <p:sp>
+        <p:nvSpPr>
+          <p:cNvPr id="2" name="Virsraksts 1">
+            <a:extLst>
+              <a:ext uri="{FF2B5EF4-FFF2-40B4-BE49-F238E27FC236}">
+                <a16:creationId xmlns:a16="http://schemas.microsoft.com/office/drawing/2014/main" id="{FDE24F80-3D43-0B70-D5A1-95B518EC1587}"/>
+              </a:ext>
+            </a:extLst>
+          </p:cNvPr>
+          <p:cNvSpPr>
+            <a:spLocks noGrp="1"/>
+          </p:cNvSpPr>
+          <p:nvPr>
+            <p:ph type="title"/>
+          </p:nvPr>
+        </p:nvSpPr>
+        <p:spPr/>
+        <p:txBody>
+          <a:bodyPr/>
+          <a:lstStyle/>
+          <a:p>
+            <a:r>
+              <a:rPr lang="lv-LV" dirty="0"/>
+              <a:t>Ainas – Spēles laukums</a:t>
+            </a:r>
+          </a:p>
+        </p:txBody>
+      </p:sp>
+      <p:sp>
+        <p:nvSpPr>
+          <p:cNvPr id="7" name="Teksta vietturis 15">
+            <a:extLst>
+              <a:ext uri="{FF2B5EF4-FFF2-40B4-BE49-F238E27FC236}">
+                <a16:creationId xmlns:a16="http://schemas.microsoft.com/office/drawing/2014/main" id="{EDBDBDB0-38C6-727C-A1E8-FA2BFDE76CD9}"/>
+              </a:ext>
+            </a:extLst>
+          </p:cNvPr>
+          <p:cNvSpPr txBox="1">
+            <a:spLocks/>
+          </p:cNvSpPr>
+          <p:nvPr/>
+        </p:nvSpPr>
+        <p:spPr>
+          <a:xfrm>
+            <a:off x="838199" y="3871737"/>
+            <a:ext cx="3716548" cy="844707"/>
+          </a:xfrm>
+          <a:prstGeom prst="rect">
+            <a:avLst/>
+          </a:prstGeom>
+        </p:spPr>
+        <p:txBody>
+          <a:bodyPr vert="horz" lIns="91440" tIns="45720" rIns="91440" bIns="45720" rtlCol="0" anchor="t">
+            <a:noAutofit/>
+          </a:bodyPr>
+          <a:lstStyle>
+            <a:lvl1pPr marL="0" indent="0" algn="l" defTabSz="914400" rtl="0" eaLnBrk="1" latinLnBrk="0" hangingPunct="1">
+              <a:lnSpc>
+                <a:spcPct val="100000"/>
+              </a:lnSpc>
+              <a:spcBef>
+                <a:spcPts val="1000"/>
+              </a:spcBef>
+              <a:buFont typeface="Arial" panose="020B0604020202020204" pitchFamily="34" charset="0"/>
+              <a:buNone/>
+              <a:defRPr sz="1200" kern="1200">
+                <a:solidFill>
+                  <a:schemeClr val="bg1"/>
+                </a:solidFill>
+                <a:latin typeface="Calibri" panose="020F0502020204030204" pitchFamily="34" charset="0"/>
+                <a:ea typeface="+mn-ea"/>
+                <a:cs typeface="Calibri" panose="020F0502020204030204" pitchFamily="34" charset="0"/>
+              </a:defRPr>
+            </a:lvl1pPr>
+            <a:lvl2pPr marL="685800" indent="-228600" algn="l" defTabSz="914400" rtl="0" eaLnBrk="1" latinLnBrk="0" hangingPunct="1">
+              <a:lnSpc>
+                <a:spcPct val="90000"/>
+              </a:lnSpc>
+              <a:spcBef>
+                <a:spcPts val="500"/>
+              </a:spcBef>
+              <a:buFont typeface="Arial" panose="020B0604020202020204" pitchFamily="34" charset="0"/>
+              <a:buChar char="•"/>
+              <a:defRPr sz="2400" kern="1200">
+                <a:solidFill>
+                  <a:schemeClr val="tx1"/>
+                </a:solidFill>
+                <a:latin typeface="Calibri" panose="020F0502020204030204" pitchFamily="34" charset="0"/>
+                <a:ea typeface="+mn-ea"/>
+                <a:cs typeface="Calibri" panose="020F0502020204030204" pitchFamily="34" charset="0"/>
+              </a:defRPr>
+            </a:lvl2pPr>
+            <a:lvl3pPr marL="1143000" indent="-228600" algn="l" defTabSz="914400" rtl="0" eaLnBrk="1" latinLnBrk="0" hangingPunct="1">
+              <a:lnSpc>
+                <a:spcPct val="90000"/>
+              </a:lnSpc>
+              <a:spcBef>
+                <a:spcPts val="500"/>
+              </a:spcBef>
+              <a:buFont typeface="Arial" panose="020B0604020202020204" pitchFamily="34" charset="0"/>
+              <a:buChar char="•"/>
+              <a:defRPr sz="2000" kern="1200">
+                <a:solidFill>
+                  <a:schemeClr val="tx1"/>
+                </a:solidFill>
+                <a:latin typeface="Calibri" panose="020F0502020204030204" pitchFamily="34" charset="0"/>
+                <a:ea typeface="+mn-ea"/>
+                <a:cs typeface="Calibri" panose="020F0502020204030204" pitchFamily="34" charset="0"/>
+              </a:defRPr>
+            </a:lvl3pPr>
+            <a:lvl4pPr marL="1600200" indent="-228600" algn="l" defTabSz="914400" rtl="0" eaLnBrk="1" latinLnBrk="0" hangingPunct="1">
+              <a:lnSpc>
+                <a:spcPct val="90000"/>
+              </a:lnSpc>
+              <a:spcBef>
+                <a:spcPts val="500"/>
+              </a:spcBef>
+              <a:buFont typeface="Arial" panose="020B0604020202020204" pitchFamily="34" charset="0"/>
+              <a:buChar char="•"/>
+              <a:defRPr sz="1800" kern="1200">
+                <a:solidFill>
+                  <a:schemeClr val="tx1"/>
+                </a:solidFill>
+                <a:latin typeface="Calibri" panose="020F0502020204030204" pitchFamily="34" charset="0"/>
+                <a:ea typeface="+mn-ea"/>
+                <a:cs typeface="Calibri" panose="020F0502020204030204" pitchFamily="34" charset="0"/>
+              </a:defRPr>
+            </a:lvl4pPr>
+            <a:lvl5pPr marL="2057400" indent="-228600" algn="l" defTabSz="914400" rtl="0" eaLnBrk="1" latinLnBrk="0" hangingPunct="1">
+              <a:lnSpc>
+                <a:spcPct val="90000"/>
+              </a:lnSpc>
+              <a:spcBef>
+                <a:spcPts val="500"/>
+              </a:spcBef>
+              <a:buFont typeface="Arial" panose="020B0604020202020204" pitchFamily="34" charset="0"/>
+              <a:buChar char="•"/>
+              <a:defRPr sz="1800" kern="1200">
+                <a:solidFill>
+                  <a:schemeClr val="tx1"/>
+                </a:solidFill>
+                <a:latin typeface="Calibri" panose="020F0502020204030204" pitchFamily="34" charset="0"/>
+                <a:ea typeface="+mn-ea"/>
+                <a:cs typeface="Calibri" panose="020F0502020204030204" pitchFamily="34" charset="0"/>
+              </a:defRPr>
+            </a:lvl5pPr>
+            <a:lvl6pPr marL="2514600" indent="-228600" algn="l" defTabSz="914400" rtl="0" eaLnBrk="1" latinLnBrk="0" hangingPunct="1">
+              <a:lnSpc>
+                <a:spcPct val="90000"/>
+              </a:lnSpc>
+              <a:spcBef>
+                <a:spcPts val="500"/>
+              </a:spcBef>
+              <a:buFont typeface="Arial" panose="020B0604020202020204" pitchFamily="34" charset="0"/>
+              <a:buChar char="•"/>
+              <a:defRPr sz="1800" kern="1200">
+                <a:solidFill>
+                  <a:schemeClr val="tx1"/>
+                </a:solidFill>
+                <a:latin typeface="+mn-lt"/>
+                <a:ea typeface="+mn-ea"/>
+                <a:cs typeface="+mn-cs"/>
+              </a:defRPr>
+            </a:lvl6pPr>
+            <a:lvl7pPr marL="2971800" indent="-228600" algn="l" defTabSz="914400" rtl="0" eaLnBrk="1" latinLnBrk="0" hangingPunct="1">
+              <a:lnSpc>
+                <a:spcPct val="90000"/>
+              </a:lnSpc>
+              <a:spcBef>
+                <a:spcPts val="500"/>
+              </a:spcBef>
+              <a:buFont typeface="Arial" panose="020B0604020202020204" pitchFamily="34" charset="0"/>
+              <a:buChar char="•"/>
+              <a:defRPr sz="1800" kern="1200">
+                <a:solidFill>
+                  <a:schemeClr val="tx1"/>
+                </a:solidFill>
+                <a:latin typeface="+mn-lt"/>
+                <a:ea typeface="+mn-ea"/>
+                <a:cs typeface="+mn-cs"/>
+              </a:defRPr>
+            </a:lvl7pPr>
+            <a:lvl8pPr marL="3429000" indent="-228600" algn="l" defTabSz="914400" rtl="0" eaLnBrk="1" latinLnBrk="0" hangingPunct="1">
+              <a:lnSpc>
+                <a:spcPct val="90000"/>
+              </a:lnSpc>
+              <a:spcBef>
+                <a:spcPts val="500"/>
+              </a:spcBef>
+              <a:buFont typeface="Arial" panose="020B0604020202020204" pitchFamily="34" charset="0"/>
+              <a:buChar char="•"/>
+              <a:defRPr sz="1800" kern="1200">
+                <a:solidFill>
+                  <a:schemeClr val="tx1"/>
+                </a:solidFill>
+                <a:latin typeface="+mn-lt"/>
+                <a:ea typeface="+mn-ea"/>
+                <a:cs typeface="+mn-cs"/>
+              </a:defRPr>
+            </a:lvl8pPr>
+            <a:lvl9pPr marL="3886200" indent="-228600" algn="l" defTabSz="914400" rtl="0" eaLnBrk="1" latinLnBrk="0" hangingPunct="1">
+              <a:lnSpc>
+                <a:spcPct val="90000"/>
+              </a:lnSpc>
+              <a:spcBef>
+                <a:spcPts val="500"/>
+              </a:spcBef>
+              <a:buFont typeface="Arial" panose="020B0604020202020204" pitchFamily="34" charset="0"/>
+              <a:buChar char="•"/>
+              <a:defRPr sz="1800" kern="1200">
+                <a:solidFill>
+                  <a:schemeClr val="tx1"/>
+                </a:solidFill>
+                <a:latin typeface="+mn-lt"/>
+                <a:ea typeface="+mn-ea"/>
+                <a:cs typeface="+mn-cs"/>
+              </a:defRPr>
+            </a:lvl9pPr>
+          </a:lstStyle>
+          <a:p>
+            <a:r>
+              <a:rPr lang="lv-LV" sz="2800" dirty="0"/>
+              <a:t>Spēlētāja ierīces ievietošana</a:t>
+            </a:r>
+          </a:p>
+        </p:txBody>
+      </p:sp>
+      <p:pic>
+        <p:nvPicPr>
+          <p:cNvPr id="4" name="Attēls 3">
+            <a:extLst>
+              <a:ext uri="{FF2B5EF4-FFF2-40B4-BE49-F238E27FC236}">
+                <a16:creationId xmlns:a16="http://schemas.microsoft.com/office/drawing/2014/main" id="{65C6AB90-527B-473D-8FBB-57DEC5237D58}"/>
+              </a:ext>
+            </a:extLst>
+          </p:cNvPr>
+          <p:cNvPicPr>
+            <a:picLocks noChangeAspect="1"/>
+          </p:cNvPicPr>
+          <p:nvPr/>
+        </p:nvPicPr>
+        <p:blipFill>
+          <a:blip r:embed="rId2"/>
+          <a:stretch>
+            <a:fillRect/>
+          </a:stretch>
+        </p:blipFill>
+        <p:spPr>
+          <a:xfrm>
+            <a:off x="5130587" y="0"/>
+            <a:ext cx="6709860" cy="6858000"/>
+          </a:xfrm>
+          <a:prstGeom prst="rect">
+            <a:avLst/>
+          </a:prstGeom>
+        </p:spPr>
+      </p:pic>
+    </p:spTree>
+    <p:extLst>
+      <p:ext uri="{BB962C8B-B14F-4D97-AF65-F5344CB8AC3E}">
+        <p14:creationId xmlns:p14="http://schemas.microsoft.com/office/powerpoint/2010/main" val="3953808262"/>
+      </p:ext>
+    </p:extLst>
+  </p:cSld>
+  <p:clrMapOvr>
+    <a:masterClrMapping/>
+  </p:clrMapOvr>
+</p:sld>
+</file>
+
+<file path=ppt/slides/slide16.xml><?xml version="1.0" encoding="utf-8"?>
+<p:sld xmlns:a="http://schemas.openxmlformats.org/drawingml/2006/main" xmlns:r="http://schemas.openxmlformats.org/officeDocument/2006/relationships" xmlns:p="http://schemas.openxmlformats.org/presentationml/2006/main">
+  <p:cSld>
+    <p:spTree>
+      <p:nvGrpSpPr>
+        <p:cNvPr id="1" name="">
+          <a:extLst>
+            <a:ext uri="{FF2B5EF4-FFF2-40B4-BE49-F238E27FC236}">
+              <a16:creationId xmlns:a16="http://schemas.microsoft.com/office/drawing/2014/main" id="{0A8ED6C6-0F15-28DF-0BE7-52BE7C5B5C1D}"/>
+            </a:ext>
+          </a:extLst>
+        </p:cNvPr>
+        <p:cNvGrpSpPr/>
+        <p:nvPr/>
+      </p:nvGrpSpPr>
+      <p:grpSpPr>
+        <a:xfrm>
+          <a:off x="0" y="0"/>
+          <a:ext cx="0" cy="0"/>
+          <a:chOff x="0" y="0"/>
+          <a:chExt cx="0" cy="0"/>
+        </a:xfrm>
+      </p:grpSpPr>
+      <p:sp>
+        <p:nvSpPr>
+          <p:cNvPr id="2" name="Virsraksts 1">
+            <a:extLst>
+              <a:ext uri="{FF2B5EF4-FFF2-40B4-BE49-F238E27FC236}">
+                <a16:creationId xmlns:a16="http://schemas.microsoft.com/office/drawing/2014/main" id="{D3FD5F20-CC80-06AC-B003-B7ECF07944D2}"/>
+              </a:ext>
+            </a:extLst>
+          </p:cNvPr>
+          <p:cNvSpPr>
+            <a:spLocks noGrp="1"/>
+          </p:cNvSpPr>
+          <p:nvPr>
+            <p:ph type="title"/>
+          </p:nvPr>
+        </p:nvSpPr>
+        <p:spPr/>
+        <p:txBody>
+          <a:bodyPr/>
+          <a:lstStyle/>
+          <a:p>
+            <a:r>
+              <a:rPr lang="lv-LV" dirty="0"/>
+              <a:t>Ainas – Spēles laukums</a:t>
+            </a:r>
+          </a:p>
+        </p:txBody>
+      </p:sp>
+      <p:sp>
+        <p:nvSpPr>
+          <p:cNvPr id="7" name="Teksta vietturis 15">
+            <a:extLst>
+              <a:ext uri="{FF2B5EF4-FFF2-40B4-BE49-F238E27FC236}">
+                <a16:creationId xmlns:a16="http://schemas.microsoft.com/office/drawing/2014/main" id="{B31702F5-3ADA-426A-D25C-DE5FFC351389}"/>
+              </a:ext>
+            </a:extLst>
+          </p:cNvPr>
+          <p:cNvSpPr txBox="1">
+            <a:spLocks/>
+          </p:cNvSpPr>
+          <p:nvPr/>
+        </p:nvSpPr>
+        <p:spPr>
+          <a:xfrm>
+            <a:off x="838199" y="3871737"/>
+            <a:ext cx="3716548" cy="844707"/>
+          </a:xfrm>
+          <a:prstGeom prst="rect">
+            <a:avLst/>
+          </a:prstGeom>
+        </p:spPr>
+        <p:txBody>
+          <a:bodyPr vert="horz" lIns="91440" tIns="45720" rIns="91440" bIns="45720" rtlCol="0" anchor="t">
+            <a:noAutofit/>
+          </a:bodyPr>
+          <a:lstStyle>
+            <a:lvl1pPr marL="0" indent="0" algn="l" defTabSz="914400" rtl="0" eaLnBrk="1" latinLnBrk="0" hangingPunct="1">
+              <a:lnSpc>
+                <a:spcPct val="100000"/>
+              </a:lnSpc>
+              <a:spcBef>
+                <a:spcPts val="1000"/>
+              </a:spcBef>
+              <a:buFont typeface="Arial" panose="020B0604020202020204" pitchFamily="34" charset="0"/>
+              <a:buNone/>
+              <a:defRPr sz="1200" kern="1200">
+                <a:solidFill>
+                  <a:schemeClr val="bg1"/>
+                </a:solidFill>
+                <a:latin typeface="Calibri" panose="020F0502020204030204" pitchFamily="34" charset="0"/>
+                <a:ea typeface="+mn-ea"/>
+                <a:cs typeface="Calibri" panose="020F0502020204030204" pitchFamily="34" charset="0"/>
+              </a:defRPr>
+            </a:lvl1pPr>
+            <a:lvl2pPr marL="685800" indent="-228600" algn="l" defTabSz="914400" rtl="0" eaLnBrk="1" latinLnBrk="0" hangingPunct="1">
+              <a:lnSpc>
+                <a:spcPct val="90000"/>
+              </a:lnSpc>
+              <a:spcBef>
+                <a:spcPts val="500"/>
+              </a:spcBef>
+              <a:buFont typeface="Arial" panose="020B0604020202020204" pitchFamily="34" charset="0"/>
+              <a:buChar char="•"/>
+              <a:defRPr sz="2400" kern="1200">
+                <a:solidFill>
+                  <a:schemeClr val="tx1"/>
+                </a:solidFill>
+                <a:latin typeface="Calibri" panose="020F0502020204030204" pitchFamily="34" charset="0"/>
+                <a:ea typeface="+mn-ea"/>
+                <a:cs typeface="Calibri" panose="020F0502020204030204" pitchFamily="34" charset="0"/>
+              </a:defRPr>
+            </a:lvl2pPr>
+            <a:lvl3pPr marL="1143000" indent="-228600" algn="l" defTabSz="914400" rtl="0" eaLnBrk="1" latinLnBrk="0" hangingPunct="1">
+              <a:lnSpc>
+                <a:spcPct val="90000"/>
+              </a:lnSpc>
+              <a:spcBef>
+                <a:spcPts val="500"/>
+              </a:spcBef>
+              <a:buFont typeface="Arial" panose="020B0604020202020204" pitchFamily="34" charset="0"/>
+              <a:buChar char="•"/>
+              <a:defRPr sz="2000" kern="1200">
+                <a:solidFill>
+                  <a:schemeClr val="tx1"/>
+                </a:solidFill>
+                <a:latin typeface="Calibri" panose="020F0502020204030204" pitchFamily="34" charset="0"/>
+                <a:ea typeface="+mn-ea"/>
+                <a:cs typeface="Calibri" panose="020F0502020204030204" pitchFamily="34" charset="0"/>
+              </a:defRPr>
+            </a:lvl3pPr>
+            <a:lvl4pPr marL="1600200" indent="-228600" algn="l" defTabSz="914400" rtl="0" eaLnBrk="1" latinLnBrk="0" hangingPunct="1">
+              <a:lnSpc>
+                <a:spcPct val="90000"/>
+              </a:lnSpc>
+              <a:spcBef>
+                <a:spcPts val="500"/>
+              </a:spcBef>
+              <a:buFont typeface="Arial" panose="020B0604020202020204" pitchFamily="34" charset="0"/>
+              <a:buChar char="•"/>
+              <a:defRPr sz="1800" kern="1200">
+                <a:solidFill>
+                  <a:schemeClr val="tx1"/>
+                </a:solidFill>
+                <a:latin typeface="Calibri" panose="020F0502020204030204" pitchFamily="34" charset="0"/>
+                <a:ea typeface="+mn-ea"/>
+                <a:cs typeface="Calibri" panose="020F0502020204030204" pitchFamily="34" charset="0"/>
+              </a:defRPr>
+            </a:lvl4pPr>
+            <a:lvl5pPr marL="2057400" indent="-228600" algn="l" defTabSz="914400" rtl="0" eaLnBrk="1" latinLnBrk="0" hangingPunct="1">
+              <a:lnSpc>
+                <a:spcPct val="90000"/>
+              </a:lnSpc>
+              <a:spcBef>
+                <a:spcPts val="500"/>
+              </a:spcBef>
+              <a:buFont typeface="Arial" panose="020B0604020202020204" pitchFamily="34" charset="0"/>
+              <a:buChar char="•"/>
+              <a:defRPr sz="1800" kern="1200">
+                <a:solidFill>
+                  <a:schemeClr val="tx1"/>
+                </a:solidFill>
+                <a:latin typeface="Calibri" panose="020F0502020204030204" pitchFamily="34" charset="0"/>
+                <a:ea typeface="+mn-ea"/>
+                <a:cs typeface="Calibri" panose="020F0502020204030204" pitchFamily="34" charset="0"/>
+              </a:defRPr>
+            </a:lvl5pPr>
+            <a:lvl6pPr marL="2514600" indent="-228600" algn="l" defTabSz="914400" rtl="0" eaLnBrk="1" latinLnBrk="0" hangingPunct="1">
+              <a:lnSpc>
+                <a:spcPct val="90000"/>
+              </a:lnSpc>
+              <a:spcBef>
+                <a:spcPts val="500"/>
+              </a:spcBef>
+              <a:buFont typeface="Arial" panose="020B0604020202020204" pitchFamily="34" charset="0"/>
+              <a:buChar char="•"/>
+              <a:defRPr sz="1800" kern="1200">
+                <a:solidFill>
+                  <a:schemeClr val="tx1"/>
+                </a:solidFill>
+                <a:latin typeface="+mn-lt"/>
+                <a:ea typeface="+mn-ea"/>
+                <a:cs typeface="+mn-cs"/>
+              </a:defRPr>
+            </a:lvl6pPr>
+            <a:lvl7pPr marL="2971800" indent="-228600" algn="l" defTabSz="914400" rtl="0" eaLnBrk="1" latinLnBrk="0" hangingPunct="1">
+              <a:lnSpc>
+                <a:spcPct val="90000"/>
+              </a:lnSpc>
+              <a:spcBef>
+                <a:spcPts val="500"/>
+              </a:spcBef>
+              <a:buFont typeface="Arial" panose="020B0604020202020204" pitchFamily="34" charset="0"/>
+              <a:buChar char="•"/>
+              <a:defRPr sz="1800" kern="1200">
+                <a:solidFill>
+                  <a:schemeClr val="tx1"/>
+                </a:solidFill>
+                <a:latin typeface="+mn-lt"/>
+                <a:ea typeface="+mn-ea"/>
+                <a:cs typeface="+mn-cs"/>
+              </a:defRPr>
+            </a:lvl7pPr>
+            <a:lvl8pPr marL="3429000" indent="-228600" algn="l" defTabSz="914400" rtl="0" eaLnBrk="1" latinLnBrk="0" hangingPunct="1">
+              <a:lnSpc>
+                <a:spcPct val="90000"/>
+              </a:lnSpc>
+              <a:spcBef>
+                <a:spcPts val="500"/>
+              </a:spcBef>
+              <a:buFont typeface="Arial" panose="020B0604020202020204" pitchFamily="34" charset="0"/>
+              <a:buChar char="•"/>
+              <a:defRPr sz="1800" kern="1200">
+                <a:solidFill>
+                  <a:schemeClr val="tx1"/>
+                </a:solidFill>
+                <a:latin typeface="+mn-lt"/>
+                <a:ea typeface="+mn-ea"/>
+                <a:cs typeface="+mn-cs"/>
+              </a:defRPr>
+            </a:lvl8pPr>
+            <a:lvl9pPr marL="3886200" indent="-228600" algn="l" defTabSz="914400" rtl="0" eaLnBrk="1" latinLnBrk="0" hangingPunct="1">
+              <a:lnSpc>
+                <a:spcPct val="90000"/>
+              </a:lnSpc>
+              <a:spcBef>
+                <a:spcPts val="500"/>
+              </a:spcBef>
+              <a:buFont typeface="Arial" panose="020B0604020202020204" pitchFamily="34" charset="0"/>
+              <a:buChar char="•"/>
+              <a:defRPr sz="1800" kern="1200">
+                <a:solidFill>
+                  <a:schemeClr val="tx1"/>
+                </a:solidFill>
+                <a:latin typeface="+mn-lt"/>
+                <a:ea typeface="+mn-ea"/>
+                <a:cs typeface="+mn-cs"/>
+              </a:defRPr>
+            </a:lvl9pPr>
+          </a:lstStyle>
+          <a:p>
+            <a:r>
+              <a:rPr lang="lv-LV" sz="2800" dirty="0"/>
+              <a:t>Ierīču koriģēšanas stadija – aktivizēta mērīšanas rīks</a:t>
+            </a:r>
+          </a:p>
+        </p:txBody>
+      </p:sp>
+      <p:pic>
+        <p:nvPicPr>
+          <p:cNvPr id="5" name="Attēls 4">
+            <a:extLst>
+              <a:ext uri="{FF2B5EF4-FFF2-40B4-BE49-F238E27FC236}">
+                <a16:creationId xmlns:a16="http://schemas.microsoft.com/office/drawing/2014/main" id="{2400453F-7D22-D593-95B4-BAD2DD55A91F}"/>
+              </a:ext>
+            </a:extLst>
+          </p:cNvPr>
+          <p:cNvPicPr>
+            <a:picLocks noChangeAspect="1"/>
+          </p:cNvPicPr>
+          <p:nvPr/>
+        </p:nvPicPr>
+        <p:blipFill>
+          <a:blip r:embed="rId2"/>
+          <a:stretch>
+            <a:fillRect/>
+          </a:stretch>
+        </p:blipFill>
+        <p:spPr>
+          <a:xfrm>
+            <a:off x="5294489" y="0"/>
+            <a:ext cx="6709860" cy="6858000"/>
+          </a:xfrm>
+          <a:prstGeom prst="rect">
+            <a:avLst/>
+          </a:prstGeom>
+        </p:spPr>
+      </p:pic>
+    </p:spTree>
+    <p:extLst>
+      <p:ext uri="{BB962C8B-B14F-4D97-AF65-F5344CB8AC3E}">
+        <p14:creationId xmlns:p14="http://schemas.microsoft.com/office/powerpoint/2010/main" val="1501786140"/>
+      </p:ext>
+    </p:extLst>
+  </p:cSld>
+  <p:clrMapOvr>
+    <a:masterClrMapping/>
+  </p:clrMapOvr>
+</p:sld>
+</file>
+
+<file path=ppt/slides/slide17.xml><?xml version="1.0" encoding="utf-8"?>
+<p:sld xmlns:a="http://schemas.openxmlformats.org/drawingml/2006/main" xmlns:r="http://schemas.openxmlformats.org/officeDocument/2006/relationships" xmlns:p="http://schemas.openxmlformats.org/presentationml/2006/main">
+  <p:cSld>
+    <p:spTree>
+      <p:nvGrpSpPr>
+        <p:cNvPr id="1" name="">
+          <a:extLst>
+            <a:ext uri="{FF2B5EF4-FFF2-40B4-BE49-F238E27FC236}">
+              <a16:creationId xmlns:a16="http://schemas.microsoft.com/office/drawing/2014/main" id="{7417E9E1-F020-CB8B-CFC0-E2583FED9CD0}"/>
+            </a:ext>
+          </a:extLst>
+        </p:cNvPr>
+        <p:cNvGrpSpPr/>
+        <p:nvPr/>
+      </p:nvGrpSpPr>
+      <p:grpSpPr>
+        <a:xfrm>
+          <a:off x="0" y="0"/>
+          <a:ext cx="0" cy="0"/>
+          <a:chOff x="0" y="0"/>
+          <a:chExt cx="0" cy="0"/>
+        </a:xfrm>
+      </p:grpSpPr>
+      <p:sp>
+        <p:nvSpPr>
+          <p:cNvPr id="2" name="Virsraksts 1">
+            <a:extLst>
+              <a:ext uri="{FF2B5EF4-FFF2-40B4-BE49-F238E27FC236}">
+                <a16:creationId xmlns:a16="http://schemas.microsoft.com/office/drawing/2014/main" id="{80E1B584-F9D6-7627-DDA7-61BE68F31EA1}"/>
+              </a:ext>
+            </a:extLst>
+          </p:cNvPr>
+          <p:cNvSpPr>
+            <a:spLocks noGrp="1"/>
+          </p:cNvSpPr>
+          <p:nvPr>
+            <p:ph type="title"/>
+          </p:nvPr>
+        </p:nvSpPr>
+        <p:spPr/>
+        <p:txBody>
+          <a:bodyPr/>
+          <a:lstStyle/>
+          <a:p>
+            <a:r>
+              <a:rPr lang="lv-LV" dirty="0"/>
+              <a:t>Ainas – Spēles laukums</a:t>
+            </a:r>
+          </a:p>
+        </p:txBody>
+      </p:sp>
+      <p:sp>
+        <p:nvSpPr>
+          <p:cNvPr id="7" name="Teksta vietturis 15">
+            <a:extLst>
+              <a:ext uri="{FF2B5EF4-FFF2-40B4-BE49-F238E27FC236}">
+                <a16:creationId xmlns:a16="http://schemas.microsoft.com/office/drawing/2014/main" id="{BFA7A555-D434-8279-150D-9E14C3BF2A91}"/>
+              </a:ext>
+            </a:extLst>
+          </p:cNvPr>
+          <p:cNvSpPr txBox="1">
+            <a:spLocks/>
+          </p:cNvSpPr>
+          <p:nvPr/>
+        </p:nvSpPr>
+        <p:spPr>
+          <a:xfrm>
+            <a:off x="838199" y="3871737"/>
+            <a:ext cx="3716548" cy="844707"/>
+          </a:xfrm>
+          <a:prstGeom prst="rect">
+            <a:avLst/>
+          </a:prstGeom>
+        </p:spPr>
+        <p:txBody>
+          <a:bodyPr vert="horz" lIns="91440" tIns="45720" rIns="91440" bIns="45720" rtlCol="0" anchor="t">
+            <a:noAutofit/>
+          </a:bodyPr>
+          <a:lstStyle>
+            <a:lvl1pPr marL="0" indent="0" algn="l" defTabSz="914400" rtl="0" eaLnBrk="1" latinLnBrk="0" hangingPunct="1">
+              <a:lnSpc>
+                <a:spcPct val="100000"/>
+              </a:lnSpc>
+              <a:spcBef>
+                <a:spcPts val="1000"/>
+              </a:spcBef>
+              <a:buFont typeface="Arial" panose="020B0604020202020204" pitchFamily="34" charset="0"/>
+              <a:buNone/>
+              <a:defRPr sz="1200" kern="1200">
+                <a:solidFill>
+                  <a:schemeClr val="bg1"/>
+                </a:solidFill>
+                <a:latin typeface="Calibri" panose="020F0502020204030204" pitchFamily="34" charset="0"/>
+                <a:ea typeface="+mn-ea"/>
+                <a:cs typeface="Calibri" panose="020F0502020204030204" pitchFamily="34" charset="0"/>
+              </a:defRPr>
+            </a:lvl1pPr>
+            <a:lvl2pPr marL="685800" indent="-228600" algn="l" defTabSz="914400" rtl="0" eaLnBrk="1" latinLnBrk="0" hangingPunct="1">
+              <a:lnSpc>
+                <a:spcPct val="90000"/>
+              </a:lnSpc>
+              <a:spcBef>
+                <a:spcPts val="500"/>
+              </a:spcBef>
+              <a:buFont typeface="Arial" panose="020B0604020202020204" pitchFamily="34" charset="0"/>
+              <a:buChar char="•"/>
+              <a:defRPr sz="2400" kern="1200">
+                <a:solidFill>
+                  <a:schemeClr val="tx1"/>
+                </a:solidFill>
+                <a:latin typeface="Calibri" panose="020F0502020204030204" pitchFamily="34" charset="0"/>
+                <a:ea typeface="+mn-ea"/>
+                <a:cs typeface="Calibri" panose="020F0502020204030204" pitchFamily="34" charset="0"/>
+              </a:defRPr>
+            </a:lvl2pPr>
+            <a:lvl3pPr marL="1143000" indent="-228600" algn="l" defTabSz="914400" rtl="0" eaLnBrk="1" latinLnBrk="0" hangingPunct="1">
+              <a:lnSpc>
+                <a:spcPct val="90000"/>
+              </a:lnSpc>
+              <a:spcBef>
+                <a:spcPts val="500"/>
+              </a:spcBef>
+              <a:buFont typeface="Arial" panose="020B0604020202020204" pitchFamily="34" charset="0"/>
+              <a:buChar char="•"/>
+              <a:defRPr sz="2000" kern="1200">
+                <a:solidFill>
+                  <a:schemeClr val="tx1"/>
+                </a:solidFill>
+                <a:latin typeface="Calibri" panose="020F0502020204030204" pitchFamily="34" charset="0"/>
+                <a:ea typeface="+mn-ea"/>
+                <a:cs typeface="Calibri" panose="020F0502020204030204" pitchFamily="34" charset="0"/>
+              </a:defRPr>
+            </a:lvl3pPr>
+            <a:lvl4pPr marL="1600200" indent="-228600" algn="l" defTabSz="914400" rtl="0" eaLnBrk="1" latinLnBrk="0" hangingPunct="1">
+              <a:lnSpc>
+                <a:spcPct val="90000"/>
+              </a:lnSpc>
+              <a:spcBef>
+                <a:spcPts val="500"/>
+              </a:spcBef>
+              <a:buFont typeface="Arial" panose="020B0604020202020204" pitchFamily="34" charset="0"/>
+              <a:buChar char="•"/>
+              <a:defRPr sz="1800" kern="1200">
+                <a:solidFill>
+                  <a:schemeClr val="tx1"/>
+                </a:solidFill>
+                <a:latin typeface="Calibri" panose="020F0502020204030204" pitchFamily="34" charset="0"/>
+                <a:ea typeface="+mn-ea"/>
+                <a:cs typeface="Calibri" panose="020F0502020204030204" pitchFamily="34" charset="0"/>
+              </a:defRPr>
+            </a:lvl4pPr>
+            <a:lvl5pPr marL="2057400" indent="-228600" algn="l" defTabSz="914400" rtl="0" eaLnBrk="1" latinLnBrk="0" hangingPunct="1">
+              <a:lnSpc>
+                <a:spcPct val="90000"/>
+              </a:lnSpc>
+              <a:spcBef>
+                <a:spcPts val="500"/>
+              </a:spcBef>
+              <a:buFont typeface="Arial" panose="020B0604020202020204" pitchFamily="34" charset="0"/>
+              <a:buChar char="•"/>
+              <a:defRPr sz="1800" kern="1200">
+                <a:solidFill>
+                  <a:schemeClr val="tx1"/>
+                </a:solidFill>
+                <a:latin typeface="Calibri" panose="020F0502020204030204" pitchFamily="34" charset="0"/>
+                <a:ea typeface="+mn-ea"/>
+                <a:cs typeface="Calibri" panose="020F0502020204030204" pitchFamily="34" charset="0"/>
+              </a:defRPr>
+            </a:lvl5pPr>
+            <a:lvl6pPr marL="2514600" indent="-228600" algn="l" defTabSz="914400" rtl="0" eaLnBrk="1" latinLnBrk="0" hangingPunct="1">
+              <a:lnSpc>
+                <a:spcPct val="90000"/>
+              </a:lnSpc>
+              <a:spcBef>
+                <a:spcPts val="500"/>
+              </a:spcBef>
+              <a:buFont typeface="Arial" panose="020B0604020202020204" pitchFamily="34" charset="0"/>
+              <a:buChar char="•"/>
+              <a:defRPr sz="1800" kern="1200">
+                <a:solidFill>
+                  <a:schemeClr val="tx1"/>
+                </a:solidFill>
+                <a:latin typeface="+mn-lt"/>
+                <a:ea typeface="+mn-ea"/>
+                <a:cs typeface="+mn-cs"/>
+              </a:defRPr>
+            </a:lvl6pPr>
+            <a:lvl7pPr marL="2971800" indent="-228600" algn="l" defTabSz="914400" rtl="0" eaLnBrk="1" latinLnBrk="0" hangingPunct="1">
+              <a:lnSpc>
+                <a:spcPct val="90000"/>
+              </a:lnSpc>
+              <a:spcBef>
+                <a:spcPts val="500"/>
+              </a:spcBef>
+              <a:buFont typeface="Arial" panose="020B0604020202020204" pitchFamily="34" charset="0"/>
+              <a:buChar char="•"/>
+              <a:defRPr sz="1800" kern="1200">
+                <a:solidFill>
+                  <a:schemeClr val="tx1"/>
+                </a:solidFill>
+                <a:latin typeface="+mn-lt"/>
+                <a:ea typeface="+mn-ea"/>
+                <a:cs typeface="+mn-cs"/>
+              </a:defRPr>
+            </a:lvl7pPr>
+            <a:lvl8pPr marL="3429000" indent="-228600" algn="l" defTabSz="914400" rtl="0" eaLnBrk="1" latinLnBrk="0" hangingPunct="1">
+              <a:lnSpc>
+                <a:spcPct val="90000"/>
+              </a:lnSpc>
+              <a:spcBef>
+                <a:spcPts val="500"/>
+              </a:spcBef>
+              <a:buFont typeface="Arial" panose="020B0604020202020204" pitchFamily="34" charset="0"/>
+              <a:buChar char="•"/>
+              <a:defRPr sz="1800" kern="1200">
+                <a:solidFill>
+                  <a:schemeClr val="tx1"/>
+                </a:solidFill>
+                <a:latin typeface="+mn-lt"/>
+                <a:ea typeface="+mn-ea"/>
+                <a:cs typeface="+mn-cs"/>
+              </a:defRPr>
+            </a:lvl8pPr>
+            <a:lvl9pPr marL="3886200" indent="-228600" algn="l" defTabSz="914400" rtl="0" eaLnBrk="1" latinLnBrk="0" hangingPunct="1">
+              <a:lnSpc>
+                <a:spcPct val="90000"/>
+              </a:lnSpc>
+              <a:spcBef>
+                <a:spcPts val="500"/>
+              </a:spcBef>
+              <a:buFont typeface="Arial" panose="020B0604020202020204" pitchFamily="34" charset="0"/>
+              <a:buChar char="•"/>
+              <a:defRPr sz="1800" kern="1200">
+                <a:solidFill>
+                  <a:schemeClr val="tx1"/>
+                </a:solidFill>
+                <a:latin typeface="+mn-lt"/>
+                <a:ea typeface="+mn-ea"/>
+                <a:cs typeface="+mn-cs"/>
+              </a:defRPr>
+            </a:lvl9pPr>
+          </a:lstStyle>
+          <a:p>
+            <a:r>
+              <a:rPr lang="lv-LV" sz="2800" dirty="0"/>
+              <a:t>Mērījuma rīks – atzīmēts distances mērījums</a:t>
+            </a:r>
+          </a:p>
+        </p:txBody>
+      </p:sp>
+      <p:pic>
+        <p:nvPicPr>
+          <p:cNvPr id="4" name="Attēls 3">
+            <a:extLst>
+              <a:ext uri="{FF2B5EF4-FFF2-40B4-BE49-F238E27FC236}">
+                <a16:creationId xmlns:a16="http://schemas.microsoft.com/office/drawing/2014/main" id="{8ED706B9-344A-E22C-1682-CD6DA1C53E6B}"/>
+              </a:ext>
+            </a:extLst>
+          </p:cNvPr>
+          <p:cNvPicPr>
+            <a:picLocks noChangeAspect="1"/>
+          </p:cNvPicPr>
+          <p:nvPr/>
+        </p:nvPicPr>
+        <p:blipFill>
+          <a:blip r:embed="rId2"/>
+          <a:stretch>
+            <a:fillRect/>
+          </a:stretch>
+        </p:blipFill>
+        <p:spPr>
+          <a:xfrm>
+            <a:off x="5277236" y="0"/>
+            <a:ext cx="6709860" cy="6858000"/>
+          </a:xfrm>
+          <a:prstGeom prst="rect">
+            <a:avLst/>
+          </a:prstGeom>
+        </p:spPr>
+      </p:pic>
+    </p:spTree>
+    <p:extLst>
+      <p:ext uri="{BB962C8B-B14F-4D97-AF65-F5344CB8AC3E}">
+        <p14:creationId xmlns:p14="http://schemas.microsoft.com/office/powerpoint/2010/main" val="3345989819"/>
+      </p:ext>
+    </p:extLst>
+  </p:cSld>
+  <p:clrMapOvr>
+    <a:masterClrMapping/>
+  </p:clrMapOvr>
+</p:sld>
+</file>
+
+<file path=ppt/slides/slide18.xml><?xml version="1.0" encoding="utf-8"?>
+<p:sld xmlns:a="http://schemas.openxmlformats.org/drawingml/2006/main" xmlns:r="http://schemas.openxmlformats.org/officeDocument/2006/relationships" xmlns:p="http://schemas.openxmlformats.org/presentationml/2006/main">
+  <p:cSld>
+    <p:spTree>
+      <p:nvGrpSpPr>
+        <p:cNvPr id="1" name="">
+          <a:extLst>
+            <a:ext uri="{FF2B5EF4-FFF2-40B4-BE49-F238E27FC236}">
+              <a16:creationId xmlns:a16="http://schemas.microsoft.com/office/drawing/2014/main" id="{ED77C988-EF37-B00F-ADD2-75183D30735D}"/>
+            </a:ext>
+          </a:extLst>
+        </p:cNvPr>
+        <p:cNvGrpSpPr/>
+        <p:nvPr/>
+      </p:nvGrpSpPr>
+      <p:grpSpPr>
+        <a:xfrm>
+          <a:off x="0" y="0"/>
+          <a:ext cx="0" cy="0"/>
+          <a:chOff x="0" y="0"/>
+          <a:chExt cx="0" cy="0"/>
+        </a:xfrm>
+      </p:grpSpPr>
+      <p:sp>
+        <p:nvSpPr>
+          <p:cNvPr id="2" name="Virsraksts 1">
+            <a:extLst>
+              <a:ext uri="{FF2B5EF4-FFF2-40B4-BE49-F238E27FC236}">
+                <a16:creationId xmlns:a16="http://schemas.microsoft.com/office/drawing/2014/main" id="{B58B037D-E60B-3486-168E-1BE52AD3793A}"/>
+              </a:ext>
+            </a:extLst>
+          </p:cNvPr>
+          <p:cNvSpPr>
+            <a:spLocks noGrp="1"/>
+          </p:cNvSpPr>
+          <p:nvPr>
+            <p:ph type="title"/>
+          </p:nvPr>
+        </p:nvSpPr>
+        <p:spPr/>
+        <p:txBody>
+          <a:bodyPr/>
+          <a:lstStyle/>
+          <a:p>
+            <a:r>
+              <a:rPr lang="lv-LV" dirty="0"/>
+              <a:t>Ainas – Spēles laukums</a:t>
+            </a:r>
+          </a:p>
+        </p:txBody>
+      </p:sp>
+      <p:sp>
+        <p:nvSpPr>
+          <p:cNvPr id="7" name="Teksta vietturis 15">
+            <a:extLst>
+              <a:ext uri="{FF2B5EF4-FFF2-40B4-BE49-F238E27FC236}">
+                <a16:creationId xmlns:a16="http://schemas.microsoft.com/office/drawing/2014/main" id="{6A61ABBD-860E-FDCC-F163-B608CE51EE13}"/>
+              </a:ext>
+            </a:extLst>
+          </p:cNvPr>
+          <p:cNvSpPr txBox="1">
+            <a:spLocks/>
+          </p:cNvSpPr>
+          <p:nvPr/>
+        </p:nvSpPr>
+        <p:spPr>
+          <a:xfrm>
+            <a:off x="838199" y="3871737"/>
+            <a:ext cx="3716548" cy="844707"/>
+          </a:xfrm>
+          <a:prstGeom prst="rect">
+            <a:avLst/>
+          </a:prstGeom>
+        </p:spPr>
+        <p:txBody>
+          <a:bodyPr vert="horz" lIns="91440" tIns="45720" rIns="91440" bIns="45720" rtlCol="0" anchor="t">
+            <a:noAutofit/>
+          </a:bodyPr>
+          <a:lstStyle>
+            <a:lvl1pPr marL="0" indent="0" algn="l" defTabSz="914400" rtl="0" eaLnBrk="1" latinLnBrk="0" hangingPunct="1">
+              <a:lnSpc>
+                <a:spcPct val="100000"/>
+              </a:lnSpc>
+              <a:spcBef>
+                <a:spcPts val="1000"/>
+              </a:spcBef>
+              <a:buFont typeface="Arial" panose="020B0604020202020204" pitchFamily="34" charset="0"/>
+              <a:buNone/>
+              <a:defRPr sz="1200" kern="1200">
+                <a:solidFill>
+                  <a:schemeClr val="bg1"/>
+                </a:solidFill>
+                <a:latin typeface="Calibri" panose="020F0502020204030204" pitchFamily="34" charset="0"/>
+                <a:ea typeface="+mn-ea"/>
+                <a:cs typeface="Calibri" panose="020F0502020204030204" pitchFamily="34" charset="0"/>
+              </a:defRPr>
+            </a:lvl1pPr>
+            <a:lvl2pPr marL="685800" indent="-228600" algn="l" defTabSz="914400" rtl="0" eaLnBrk="1" latinLnBrk="0" hangingPunct="1">
+              <a:lnSpc>
+                <a:spcPct val="90000"/>
+              </a:lnSpc>
+              <a:spcBef>
+                <a:spcPts val="500"/>
+              </a:spcBef>
+              <a:buFont typeface="Arial" panose="020B0604020202020204" pitchFamily="34" charset="0"/>
+              <a:buChar char="•"/>
+              <a:defRPr sz="2400" kern="1200">
+                <a:solidFill>
+                  <a:schemeClr val="tx1"/>
+                </a:solidFill>
+                <a:latin typeface="Calibri" panose="020F0502020204030204" pitchFamily="34" charset="0"/>
+                <a:ea typeface="+mn-ea"/>
+                <a:cs typeface="Calibri" panose="020F0502020204030204" pitchFamily="34" charset="0"/>
+              </a:defRPr>
+            </a:lvl2pPr>
+            <a:lvl3pPr marL="1143000" indent="-228600" algn="l" defTabSz="914400" rtl="0" eaLnBrk="1" latinLnBrk="0" hangingPunct="1">
+              <a:lnSpc>
+                <a:spcPct val="90000"/>
+              </a:lnSpc>
+              <a:spcBef>
+                <a:spcPts val="500"/>
+              </a:spcBef>
+              <a:buFont typeface="Arial" panose="020B0604020202020204" pitchFamily="34" charset="0"/>
+              <a:buChar char="•"/>
+              <a:defRPr sz="2000" kern="1200">
+                <a:solidFill>
+                  <a:schemeClr val="tx1"/>
+                </a:solidFill>
+                <a:latin typeface="Calibri" panose="020F0502020204030204" pitchFamily="34" charset="0"/>
+                <a:ea typeface="+mn-ea"/>
+                <a:cs typeface="Calibri" panose="020F0502020204030204" pitchFamily="34" charset="0"/>
+              </a:defRPr>
+            </a:lvl3pPr>
+            <a:lvl4pPr marL="1600200" indent="-228600" algn="l" defTabSz="914400" rtl="0" eaLnBrk="1" latinLnBrk="0" hangingPunct="1">
+              <a:lnSpc>
+                <a:spcPct val="90000"/>
+              </a:lnSpc>
+              <a:spcBef>
+                <a:spcPts val="500"/>
+              </a:spcBef>
+              <a:buFont typeface="Arial" panose="020B0604020202020204" pitchFamily="34" charset="0"/>
+              <a:buChar char="•"/>
+              <a:defRPr sz="1800" kern="1200">
+                <a:solidFill>
+                  <a:schemeClr val="tx1"/>
+                </a:solidFill>
+                <a:latin typeface="Calibri" panose="020F0502020204030204" pitchFamily="34" charset="0"/>
+                <a:ea typeface="+mn-ea"/>
+                <a:cs typeface="Calibri" panose="020F0502020204030204" pitchFamily="34" charset="0"/>
+              </a:defRPr>
+            </a:lvl4pPr>
+            <a:lvl5pPr marL="2057400" indent="-228600" algn="l" defTabSz="914400" rtl="0" eaLnBrk="1" latinLnBrk="0" hangingPunct="1">
+              <a:lnSpc>
+                <a:spcPct val="90000"/>
+              </a:lnSpc>
+              <a:spcBef>
+                <a:spcPts val="500"/>
+              </a:spcBef>
+              <a:buFont typeface="Arial" panose="020B0604020202020204" pitchFamily="34" charset="0"/>
+              <a:buChar char="•"/>
+              <a:defRPr sz="1800" kern="1200">
+                <a:solidFill>
+                  <a:schemeClr val="tx1"/>
+                </a:solidFill>
+                <a:latin typeface="Calibri" panose="020F0502020204030204" pitchFamily="34" charset="0"/>
+                <a:ea typeface="+mn-ea"/>
+                <a:cs typeface="Calibri" panose="020F0502020204030204" pitchFamily="34" charset="0"/>
+              </a:defRPr>
+            </a:lvl5pPr>
+            <a:lvl6pPr marL="2514600" indent="-228600" algn="l" defTabSz="914400" rtl="0" eaLnBrk="1" latinLnBrk="0" hangingPunct="1">
+              <a:lnSpc>
+                <a:spcPct val="90000"/>
+              </a:lnSpc>
+              <a:spcBef>
+                <a:spcPts val="500"/>
+              </a:spcBef>
+              <a:buFont typeface="Arial" panose="020B0604020202020204" pitchFamily="34" charset="0"/>
+              <a:buChar char="•"/>
+              <a:defRPr sz="1800" kern="1200">
+                <a:solidFill>
+                  <a:schemeClr val="tx1"/>
+                </a:solidFill>
+                <a:latin typeface="+mn-lt"/>
+                <a:ea typeface="+mn-ea"/>
+                <a:cs typeface="+mn-cs"/>
+              </a:defRPr>
+            </a:lvl6pPr>
+            <a:lvl7pPr marL="2971800" indent="-228600" algn="l" defTabSz="914400" rtl="0" eaLnBrk="1" latinLnBrk="0" hangingPunct="1">
+              <a:lnSpc>
+                <a:spcPct val="90000"/>
+              </a:lnSpc>
+              <a:spcBef>
+                <a:spcPts val="500"/>
+              </a:spcBef>
+              <a:buFont typeface="Arial" panose="020B0604020202020204" pitchFamily="34" charset="0"/>
+              <a:buChar char="•"/>
+              <a:defRPr sz="1800" kern="1200">
+                <a:solidFill>
+                  <a:schemeClr val="tx1"/>
+                </a:solidFill>
+                <a:latin typeface="+mn-lt"/>
+                <a:ea typeface="+mn-ea"/>
+                <a:cs typeface="+mn-cs"/>
+              </a:defRPr>
+            </a:lvl7pPr>
+            <a:lvl8pPr marL="3429000" indent="-228600" algn="l" defTabSz="914400" rtl="0" eaLnBrk="1" latinLnBrk="0" hangingPunct="1">
+              <a:lnSpc>
+                <a:spcPct val="90000"/>
+              </a:lnSpc>
+              <a:spcBef>
+                <a:spcPts val="500"/>
+              </a:spcBef>
+              <a:buFont typeface="Arial" panose="020B0604020202020204" pitchFamily="34" charset="0"/>
+              <a:buChar char="•"/>
+              <a:defRPr sz="1800" kern="1200">
+                <a:solidFill>
+                  <a:schemeClr val="tx1"/>
+                </a:solidFill>
+                <a:latin typeface="+mn-lt"/>
+                <a:ea typeface="+mn-ea"/>
+                <a:cs typeface="+mn-cs"/>
+              </a:defRPr>
+            </a:lvl8pPr>
+            <a:lvl9pPr marL="3886200" indent="-228600" algn="l" defTabSz="914400" rtl="0" eaLnBrk="1" latinLnBrk="0" hangingPunct="1">
+              <a:lnSpc>
+                <a:spcPct val="90000"/>
+              </a:lnSpc>
+              <a:spcBef>
+                <a:spcPts val="500"/>
+              </a:spcBef>
+              <a:buFont typeface="Arial" panose="020B0604020202020204" pitchFamily="34" charset="0"/>
+              <a:buChar char="•"/>
+              <a:defRPr sz="1800" kern="1200">
+                <a:solidFill>
+                  <a:schemeClr val="tx1"/>
+                </a:solidFill>
+                <a:latin typeface="+mn-lt"/>
+                <a:ea typeface="+mn-ea"/>
+                <a:cs typeface="+mn-cs"/>
+              </a:defRPr>
+            </a:lvl9pPr>
+          </a:lstStyle>
+          <a:p>
+            <a:r>
+              <a:rPr lang="lv-LV" sz="2800" dirty="0"/>
+              <a:t>Ierīču koriģēšana – atlasīta spēlētāja ierīce</a:t>
+            </a:r>
+          </a:p>
+        </p:txBody>
+      </p:sp>
+      <p:pic>
+        <p:nvPicPr>
+          <p:cNvPr id="5" name="Attēls 4">
+            <a:extLst>
+              <a:ext uri="{FF2B5EF4-FFF2-40B4-BE49-F238E27FC236}">
+                <a16:creationId xmlns:a16="http://schemas.microsoft.com/office/drawing/2014/main" id="{BBD8FD00-11DE-269C-D468-4A2E18B69D3F}"/>
+              </a:ext>
+            </a:extLst>
+          </p:cNvPr>
+          <p:cNvPicPr>
+            <a:picLocks noChangeAspect="1"/>
+          </p:cNvPicPr>
+          <p:nvPr/>
+        </p:nvPicPr>
+        <p:blipFill>
+          <a:blip r:embed="rId2"/>
+          <a:stretch>
+            <a:fillRect/>
+          </a:stretch>
+        </p:blipFill>
+        <p:spPr>
+          <a:xfrm>
+            <a:off x="5130587" y="0"/>
+            <a:ext cx="6709860" cy="6858000"/>
+          </a:xfrm>
+          <a:prstGeom prst="rect">
+            <a:avLst/>
+          </a:prstGeom>
+        </p:spPr>
+      </p:pic>
+    </p:spTree>
+    <p:extLst>
+      <p:ext uri="{BB962C8B-B14F-4D97-AF65-F5344CB8AC3E}">
+        <p14:creationId xmlns:p14="http://schemas.microsoft.com/office/powerpoint/2010/main" val="1927197312"/>
+      </p:ext>
+    </p:extLst>
+  </p:cSld>
+  <p:clrMapOvr>
+    <a:masterClrMapping/>
+  </p:clrMapOvr>
+</p:sld>
+</file>
+
+<file path=ppt/slides/slide19.xml><?xml version="1.0" encoding="utf-8"?>
+<p:sld xmlns:a="http://schemas.openxmlformats.org/drawingml/2006/main" xmlns:r="http://schemas.openxmlformats.org/officeDocument/2006/relationships" xmlns:p="http://schemas.openxmlformats.org/presentationml/2006/main">
+  <p:cSld>
+    <p:spTree>
+      <p:nvGrpSpPr>
+        <p:cNvPr id="1" name="">
+          <a:extLst>
+            <a:ext uri="{FF2B5EF4-FFF2-40B4-BE49-F238E27FC236}">
+              <a16:creationId xmlns:a16="http://schemas.microsoft.com/office/drawing/2014/main" id="{6159C24A-1569-7445-1EC2-9BC47CE66A60}"/>
+            </a:ext>
+          </a:extLst>
+        </p:cNvPr>
+        <p:cNvGrpSpPr/>
+        <p:nvPr/>
+      </p:nvGrpSpPr>
+      <p:grpSpPr>
+        <a:xfrm>
+          <a:off x="0" y="0"/>
+          <a:ext cx="0" cy="0"/>
+          <a:chOff x="0" y="0"/>
+          <a:chExt cx="0" cy="0"/>
+        </a:xfrm>
+      </p:grpSpPr>
+      <p:sp>
+        <p:nvSpPr>
+          <p:cNvPr id="2" name="Virsraksts 1">
+            <a:extLst>
+              <a:ext uri="{FF2B5EF4-FFF2-40B4-BE49-F238E27FC236}">
+                <a16:creationId xmlns:a16="http://schemas.microsoft.com/office/drawing/2014/main" id="{7E7E274C-64A4-5306-F842-3B7B64F1EA3D}"/>
+              </a:ext>
+            </a:extLst>
+          </p:cNvPr>
+          <p:cNvSpPr>
+            <a:spLocks noGrp="1"/>
+          </p:cNvSpPr>
+          <p:nvPr>
+            <p:ph type="title"/>
+          </p:nvPr>
+        </p:nvSpPr>
+        <p:spPr/>
+        <p:txBody>
+          <a:bodyPr/>
+          <a:lstStyle/>
+          <a:p>
+            <a:r>
+              <a:rPr lang="lv-LV" dirty="0"/>
+              <a:t>Ainas – Spēles laukums</a:t>
+            </a:r>
+          </a:p>
+        </p:txBody>
+      </p:sp>
+      <p:sp>
+        <p:nvSpPr>
+          <p:cNvPr id="7" name="Teksta vietturis 15">
+            <a:extLst>
+              <a:ext uri="{FF2B5EF4-FFF2-40B4-BE49-F238E27FC236}">
+                <a16:creationId xmlns:a16="http://schemas.microsoft.com/office/drawing/2014/main" id="{9329250C-62DC-D4C8-B9CD-BD7DDB0E0A72}"/>
+              </a:ext>
+            </a:extLst>
+          </p:cNvPr>
+          <p:cNvSpPr txBox="1">
+            <a:spLocks/>
+          </p:cNvSpPr>
+          <p:nvPr/>
+        </p:nvSpPr>
+        <p:spPr>
+          <a:xfrm>
+            <a:off x="838199" y="3871737"/>
+            <a:ext cx="3716548" cy="844707"/>
+          </a:xfrm>
+          <a:prstGeom prst="rect">
+            <a:avLst/>
+          </a:prstGeom>
+        </p:spPr>
+        <p:txBody>
+          <a:bodyPr vert="horz" lIns="91440" tIns="45720" rIns="91440" bIns="45720" rtlCol="0" anchor="t">
+            <a:noAutofit/>
+          </a:bodyPr>
+          <a:lstStyle>
+            <a:lvl1pPr marL="0" indent="0" algn="l" defTabSz="914400" rtl="0" eaLnBrk="1" latinLnBrk="0" hangingPunct="1">
+              <a:lnSpc>
+                <a:spcPct val="100000"/>
+              </a:lnSpc>
+              <a:spcBef>
+                <a:spcPts val="1000"/>
+              </a:spcBef>
+              <a:buFont typeface="Arial" panose="020B0604020202020204" pitchFamily="34" charset="0"/>
+              <a:buNone/>
+              <a:defRPr sz="1200" kern="1200">
+                <a:solidFill>
+                  <a:schemeClr val="bg1"/>
+                </a:solidFill>
+                <a:latin typeface="Calibri" panose="020F0502020204030204" pitchFamily="34" charset="0"/>
+                <a:ea typeface="+mn-ea"/>
+                <a:cs typeface="Calibri" panose="020F0502020204030204" pitchFamily="34" charset="0"/>
+              </a:defRPr>
+            </a:lvl1pPr>
+            <a:lvl2pPr marL="685800" indent="-228600" algn="l" defTabSz="914400" rtl="0" eaLnBrk="1" latinLnBrk="0" hangingPunct="1">
+              <a:lnSpc>
+                <a:spcPct val="90000"/>
+              </a:lnSpc>
+              <a:spcBef>
+                <a:spcPts val="500"/>
+              </a:spcBef>
+              <a:buFont typeface="Arial" panose="020B0604020202020204" pitchFamily="34" charset="0"/>
+              <a:buChar char="•"/>
+              <a:defRPr sz="2400" kern="1200">
+                <a:solidFill>
+                  <a:schemeClr val="tx1"/>
+                </a:solidFill>
+                <a:latin typeface="Calibri" panose="020F0502020204030204" pitchFamily="34" charset="0"/>
+                <a:ea typeface="+mn-ea"/>
+                <a:cs typeface="Calibri" panose="020F0502020204030204" pitchFamily="34" charset="0"/>
+              </a:defRPr>
+            </a:lvl2pPr>
+            <a:lvl3pPr marL="1143000" indent="-228600" algn="l" defTabSz="914400" rtl="0" eaLnBrk="1" latinLnBrk="0" hangingPunct="1">
+              <a:lnSpc>
+                <a:spcPct val="90000"/>
+              </a:lnSpc>
+              <a:spcBef>
+                <a:spcPts val="500"/>
+              </a:spcBef>
+              <a:buFont typeface="Arial" panose="020B0604020202020204" pitchFamily="34" charset="0"/>
+              <a:buChar char="•"/>
+              <a:defRPr sz="2000" kern="1200">
+                <a:solidFill>
+                  <a:schemeClr val="tx1"/>
+                </a:solidFill>
+                <a:latin typeface="Calibri" panose="020F0502020204030204" pitchFamily="34" charset="0"/>
+                <a:ea typeface="+mn-ea"/>
+                <a:cs typeface="Calibri" panose="020F0502020204030204" pitchFamily="34" charset="0"/>
+              </a:defRPr>
+            </a:lvl3pPr>
+            <a:lvl4pPr marL="1600200" indent="-228600" algn="l" defTabSz="914400" rtl="0" eaLnBrk="1" latinLnBrk="0" hangingPunct="1">
+              <a:lnSpc>
+                <a:spcPct val="90000"/>
+              </a:lnSpc>
+              <a:spcBef>
+                <a:spcPts val="500"/>
+              </a:spcBef>
+              <a:buFont typeface="Arial" panose="020B0604020202020204" pitchFamily="34" charset="0"/>
+              <a:buChar char="•"/>
+              <a:defRPr sz="1800" kern="1200">
+                <a:solidFill>
+                  <a:schemeClr val="tx1"/>
+                </a:solidFill>
+                <a:latin typeface="Calibri" panose="020F0502020204030204" pitchFamily="34" charset="0"/>
+                <a:ea typeface="+mn-ea"/>
+                <a:cs typeface="Calibri" panose="020F0502020204030204" pitchFamily="34" charset="0"/>
+              </a:defRPr>
+            </a:lvl4pPr>
+            <a:lvl5pPr marL="2057400" indent="-228600" algn="l" defTabSz="914400" rtl="0" eaLnBrk="1" latinLnBrk="0" hangingPunct="1">
+              <a:lnSpc>
+                <a:spcPct val="90000"/>
+              </a:lnSpc>
+              <a:spcBef>
+                <a:spcPts val="500"/>
+              </a:spcBef>
+              <a:buFont typeface="Arial" panose="020B0604020202020204" pitchFamily="34" charset="0"/>
+              <a:buChar char="•"/>
+              <a:defRPr sz="1800" kern="1200">
+                <a:solidFill>
+                  <a:schemeClr val="tx1"/>
+                </a:solidFill>
+                <a:latin typeface="Calibri" panose="020F0502020204030204" pitchFamily="34" charset="0"/>
+                <a:ea typeface="+mn-ea"/>
+                <a:cs typeface="Calibri" panose="020F0502020204030204" pitchFamily="34" charset="0"/>
+              </a:defRPr>
+            </a:lvl5pPr>
+            <a:lvl6pPr marL="2514600" indent="-228600" algn="l" defTabSz="914400" rtl="0" eaLnBrk="1" latinLnBrk="0" hangingPunct="1">
+              <a:lnSpc>
+                <a:spcPct val="90000"/>
+              </a:lnSpc>
+              <a:spcBef>
+                <a:spcPts val="500"/>
+              </a:spcBef>
+              <a:buFont typeface="Arial" panose="020B0604020202020204" pitchFamily="34" charset="0"/>
+              <a:buChar char="•"/>
+              <a:defRPr sz="1800" kern="1200">
+                <a:solidFill>
+                  <a:schemeClr val="tx1"/>
+                </a:solidFill>
+                <a:latin typeface="+mn-lt"/>
+                <a:ea typeface="+mn-ea"/>
+                <a:cs typeface="+mn-cs"/>
+              </a:defRPr>
+            </a:lvl6pPr>
+            <a:lvl7pPr marL="2971800" indent="-228600" algn="l" defTabSz="914400" rtl="0" eaLnBrk="1" latinLnBrk="0" hangingPunct="1">
+              <a:lnSpc>
+                <a:spcPct val="90000"/>
+              </a:lnSpc>
+              <a:spcBef>
+                <a:spcPts val="500"/>
+              </a:spcBef>
+              <a:buFont typeface="Arial" panose="020B0604020202020204" pitchFamily="34" charset="0"/>
+              <a:buChar char="•"/>
+              <a:defRPr sz="1800" kern="1200">
+                <a:solidFill>
+                  <a:schemeClr val="tx1"/>
+                </a:solidFill>
+                <a:latin typeface="+mn-lt"/>
+                <a:ea typeface="+mn-ea"/>
+                <a:cs typeface="+mn-cs"/>
+              </a:defRPr>
+            </a:lvl7pPr>
+            <a:lvl8pPr marL="3429000" indent="-228600" algn="l" defTabSz="914400" rtl="0" eaLnBrk="1" latinLnBrk="0" hangingPunct="1">
+              <a:lnSpc>
+                <a:spcPct val="90000"/>
+              </a:lnSpc>
+              <a:spcBef>
+                <a:spcPts val="500"/>
+              </a:spcBef>
+              <a:buFont typeface="Arial" panose="020B0604020202020204" pitchFamily="34" charset="0"/>
+              <a:buChar char="•"/>
+              <a:defRPr sz="1800" kern="1200">
+                <a:solidFill>
+                  <a:schemeClr val="tx1"/>
+                </a:solidFill>
+                <a:latin typeface="+mn-lt"/>
+                <a:ea typeface="+mn-ea"/>
+                <a:cs typeface="+mn-cs"/>
+              </a:defRPr>
+            </a:lvl8pPr>
+            <a:lvl9pPr marL="3886200" indent="-228600" algn="l" defTabSz="914400" rtl="0" eaLnBrk="1" latinLnBrk="0" hangingPunct="1">
+              <a:lnSpc>
+                <a:spcPct val="90000"/>
+              </a:lnSpc>
+              <a:spcBef>
+                <a:spcPts val="500"/>
+              </a:spcBef>
+              <a:buFont typeface="Arial" panose="020B0604020202020204" pitchFamily="34" charset="0"/>
+              <a:buChar char="•"/>
+              <a:defRPr sz="1800" kern="1200">
+                <a:solidFill>
+                  <a:schemeClr val="tx1"/>
+                </a:solidFill>
+                <a:latin typeface="+mn-lt"/>
+                <a:ea typeface="+mn-ea"/>
+                <a:cs typeface="+mn-cs"/>
+              </a:defRPr>
+            </a:lvl9pPr>
+          </a:lstStyle>
+          <a:p>
+            <a:r>
+              <a:rPr lang="lv-LV" sz="2800" dirty="0"/>
+              <a:t>Atlasītās ierīces koriģēšana ar mērījumu rīku</a:t>
+            </a:r>
+          </a:p>
+        </p:txBody>
+      </p:sp>
+      <p:pic>
+        <p:nvPicPr>
+          <p:cNvPr id="4" name="Attēls 3">
+            <a:extLst>
+              <a:ext uri="{FF2B5EF4-FFF2-40B4-BE49-F238E27FC236}">
+                <a16:creationId xmlns:a16="http://schemas.microsoft.com/office/drawing/2014/main" id="{734F1283-E4F6-374D-D045-4AF218739C52}"/>
+              </a:ext>
+            </a:extLst>
+          </p:cNvPr>
+          <p:cNvPicPr>
+            <a:picLocks noChangeAspect="1"/>
+          </p:cNvPicPr>
+          <p:nvPr/>
+        </p:nvPicPr>
+        <p:blipFill>
+          <a:blip r:embed="rId2"/>
+          <a:stretch>
+            <a:fillRect/>
+          </a:stretch>
+        </p:blipFill>
+        <p:spPr>
+          <a:xfrm>
+            <a:off x="5168997" y="0"/>
+            <a:ext cx="6709860" cy="6858000"/>
+          </a:xfrm>
+          <a:prstGeom prst="rect">
+            <a:avLst/>
+          </a:prstGeom>
+        </p:spPr>
+      </p:pic>
+    </p:spTree>
+    <p:extLst>
+      <p:ext uri="{BB962C8B-B14F-4D97-AF65-F5344CB8AC3E}">
+        <p14:creationId xmlns:p14="http://schemas.microsoft.com/office/powerpoint/2010/main" val="1857171017"/>
+      </p:ext>
+    </p:extLst>
+  </p:cSld>
+  <p:clrMapOvr>
+    <a:masterClrMapping/>
+  </p:clrMapOvr>
+</p:sld>
+</file>
+
 <file path=ppt/slides/slide2.xml><?xml version="1.0" encoding="utf-8"?>
 <p:sld xmlns:a="http://schemas.openxmlformats.org/drawingml/2006/main" xmlns:r="http://schemas.openxmlformats.org/officeDocument/2006/relationships" xmlns:p="http://schemas.openxmlformats.org/presentationml/2006/main">
   <p:cSld>
@@ -8886,12 +11837,48 @@
           </a:p>
         </p:txBody>
       </p:sp>
-      <p:sp>
-        <p:nvSpPr>
-          <p:cNvPr id="19" name="Slaida numura vietturis 18">
-            <a:extLst>
-              <a:ext uri="{FF2B5EF4-FFF2-40B4-BE49-F238E27FC236}">
-                <a16:creationId xmlns:a16="http://schemas.microsoft.com/office/drawing/2014/main" id="{48203B82-43EA-B57C-93AF-406D3B68E23C}"/>
+    </p:spTree>
+    <p:extLst>
+      <p:ext uri="{BB962C8B-B14F-4D97-AF65-F5344CB8AC3E}">
+        <p14:creationId xmlns:p14="http://schemas.microsoft.com/office/powerpoint/2010/main" val="737429254"/>
+      </p:ext>
+    </p:extLst>
+  </p:cSld>
+  <p:clrMapOvr>
+    <a:masterClrMapping/>
+  </p:clrMapOvr>
+</p:sld>
+</file>
+
+<file path=ppt/slides/slide20.xml><?xml version="1.0" encoding="utf-8"?>
+<p:sld xmlns:a="http://schemas.openxmlformats.org/drawingml/2006/main" xmlns:r="http://schemas.openxmlformats.org/officeDocument/2006/relationships" xmlns:p="http://schemas.openxmlformats.org/presentationml/2006/main">
+  <p:cSld>
+    <p:spTree>
+      <p:nvGrpSpPr>
+        <p:cNvPr id="1" name="">
+          <a:extLst>
+            <a:ext uri="{FF2B5EF4-FFF2-40B4-BE49-F238E27FC236}">
+              <a16:creationId xmlns:a16="http://schemas.microsoft.com/office/drawing/2014/main" id="{28F9C3C4-DFB4-C86E-20BD-9616F8D0EB17}"/>
+            </a:ext>
+          </a:extLst>
+        </p:cNvPr>
+        <p:cNvGrpSpPr/>
+        <p:nvPr/>
+      </p:nvGrpSpPr>
+      <p:grpSpPr>
+        <a:xfrm>
+          <a:off x="0" y="0"/>
+          <a:ext cx="0" cy="0"/>
+          <a:chOff x="0" y="0"/>
+          <a:chExt cx="0" cy="0"/>
+        </a:xfrm>
+      </p:grpSpPr>
+      <p:sp>
+        <p:nvSpPr>
+          <p:cNvPr id="2" name="Virsraksts 1">
+            <a:extLst>
+              <a:ext uri="{FF2B5EF4-FFF2-40B4-BE49-F238E27FC236}">
+                <a16:creationId xmlns:a16="http://schemas.microsoft.com/office/drawing/2014/main" id="{BDB3203D-4132-9C06-9A1F-1D8033079EFA}"/>
               </a:ext>
             </a:extLst>
           </p:cNvPr>
@@ -8899,35 +11886,2903 @@
             <a:spLocks noGrp="1"/>
           </p:cNvSpPr>
           <p:nvPr>
-            <p:ph type="sldNum" sz="quarter" idx="4294967295"/>
+            <p:ph type="title"/>
           </p:nvPr>
         </p:nvSpPr>
+        <p:spPr/>
+        <p:txBody>
+          <a:bodyPr/>
+          <a:lstStyle/>
+          <a:p>
+            <a:r>
+              <a:rPr lang="lv-LV" dirty="0"/>
+              <a:t>Ainas – Spēles laukums</a:t>
+            </a:r>
+          </a:p>
+        </p:txBody>
+      </p:sp>
+      <p:sp>
+        <p:nvSpPr>
+          <p:cNvPr id="7" name="Teksta vietturis 15">
+            <a:extLst>
+              <a:ext uri="{FF2B5EF4-FFF2-40B4-BE49-F238E27FC236}">
+                <a16:creationId xmlns:a16="http://schemas.microsoft.com/office/drawing/2014/main" id="{DCA411D3-6942-7C5C-F08B-A16107ACBC5E}"/>
+              </a:ext>
+            </a:extLst>
+          </p:cNvPr>
+          <p:cNvSpPr txBox="1">
+            <a:spLocks/>
+          </p:cNvSpPr>
+          <p:nvPr/>
+        </p:nvSpPr>
         <p:spPr>
           <a:xfrm>
-            <a:off x="8610600" y="6356350"/>
-            <a:ext cx="2743200" cy="365125"/>
+            <a:off x="838199" y="3871737"/>
+            <a:ext cx="3716548" cy="844707"/>
           </a:xfrm>
           <a:prstGeom prst="rect">
             <a:avLst/>
           </a:prstGeom>
         </p:spPr>
         <p:txBody>
-          <a:bodyPr/>
-          <a:lstStyle/>
-          <a:p>
-            <a:fld id="{B5CEABB6-07DC-46E8-9B57-56EC44A396E5}" type="slidenum">
-              <a:rPr lang="lv-LV" noProof="0" smtClean="0"/>
-              <a:pPr/>
-              <a:t>2</a:t>
-            </a:fld>
-            <a:endParaRPr lang="lv-LV" noProof="0"/>
-          </a:p>
-        </p:txBody>
-      </p:sp>
+          <a:bodyPr vert="horz" lIns="91440" tIns="45720" rIns="91440" bIns="45720" rtlCol="0" anchor="t">
+            <a:noAutofit/>
+          </a:bodyPr>
+          <a:lstStyle>
+            <a:lvl1pPr marL="0" indent="0" algn="l" defTabSz="914400" rtl="0" eaLnBrk="1" latinLnBrk="0" hangingPunct="1">
+              <a:lnSpc>
+                <a:spcPct val="100000"/>
+              </a:lnSpc>
+              <a:spcBef>
+                <a:spcPts val="1000"/>
+              </a:spcBef>
+              <a:buFont typeface="Arial" panose="020B0604020202020204" pitchFamily="34" charset="0"/>
+              <a:buNone/>
+              <a:defRPr sz="1200" kern="1200">
+                <a:solidFill>
+                  <a:schemeClr val="bg1"/>
+                </a:solidFill>
+                <a:latin typeface="Calibri" panose="020F0502020204030204" pitchFamily="34" charset="0"/>
+                <a:ea typeface="+mn-ea"/>
+                <a:cs typeface="Calibri" panose="020F0502020204030204" pitchFamily="34" charset="0"/>
+              </a:defRPr>
+            </a:lvl1pPr>
+            <a:lvl2pPr marL="685800" indent="-228600" algn="l" defTabSz="914400" rtl="0" eaLnBrk="1" latinLnBrk="0" hangingPunct="1">
+              <a:lnSpc>
+                <a:spcPct val="90000"/>
+              </a:lnSpc>
+              <a:spcBef>
+                <a:spcPts val="500"/>
+              </a:spcBef>
+              <a:buFont typeface="Arial" panose="020B0604020202020204" pitchFamily="34" charset="0"/>
+              <a:buChar char="•"/>
+              <a:defRPr sz="2400" kern="1200">
+                <a:solidFill>
+                  <a:schemeClr val="tx1"/>
+                </a:solidFill>
+                <a:latin typeface="Calibri" panose="020F0502020204030204" pitchFamily="34" charset="0"/>
+                <a:ea typeface="+mn-ea"/>
+                <a:cs typeface="Calibri" panose="020F0502020204030204" pitchFamily="34" charset="0"/>
+              </a:defRPr>
+            </a:lvl2pPr>
+            <a:lvl3pPr marL="1143000" indent="-228600" algn="l" defTabSz="914400" rtl="0" eaLnBrk="1" latinLnBrk="0" hangingPunct="1">
+              <a:lnSpc>
+                <a:spcPct val="90000"/>
+              </a:lnSpc>
+              <a:spcBef>
+                <a:spcPts val="500"/>
+              </a:spcBef>
+              <a:buFont typeface="Arial" panose="020B0604020202020204" pitchFamily="34" charset="0"/>
+              <a:buChar char="•"/>
+              <a:defRPr sz="2000" kern="1200">
+                <a:solidFill>
+                  <a:schemeClr val="tx1"/>
+                </a:solidFill>
+                <a:latin typeface="Calibri" panose="020F0502020204030204" pitchFamily="34" charset="0"/>
+                <a:ea typeface="+mn-ea"/>
+                <a:cs typeface="Calibri" panose="020F0502020204030204" pitchFamily="34" charset="0"/>
+              </a:defRPr>
+            </a:lvl3pPr>
+            <a:lvl4pPr marL="1600200" indent="-228600" algn="l" defTabSz="914400" rtl="0" eaLnBrk="1" latinLnBrk="0" hangingPunct="1">
+              <a:lnSpc>
+                <a:spcPct val="90000"/>
+              </a:lnSpc>
+              <a:spcBef>
+                <a:spcPts val="500"/>
+              </a:spcBef>
+              <a:buFont typeface="Arial" panose="020B0604020202020204" pitchFamily="34" charset="0"/>
+              <a:buChar char="•"/>
+              <a:defRPr sz="1800" kern="1200">
+                <a:solidFill>
+                  <a:schemeClr val="tx1"/>
+                </a:solidFill>
+                <a:latin typeface="Calibri" panose="020F0502020204030204" pitchFamily="34" charset="0"/>
+                <a:ea typeface="+mn-ea"/>
+                <a:cs typeface="Calibri" panose="020F0502020204030204" pitchFamily="34" charset="0"/>
+              </a:defRPr>
+            </a:lvl4pPr>
+            <a:lvl5pPr marL="2057400" indent="-228600" algn="l" defTabSz="914400" rtl="0" eaLnBrk="1" latinLnBrk="0" hangingPunct="1">
+              <a:lnSpc>
+                <a:spcPct val="90000"/>
+              </a:lnSpc>
+              <a:spcBef>
+                <a:spcPts val="500"/>
+              </a:spcBef>
+              <a:buFont typeface="Arial" panose="020B0604020202020204" pitchFamily="34" charset="0"/>
+              <a:buChar char="•"/>
+              <a:defRPr sz="1800" kern="1200">
+                <a:solidFill>
+                  <a:schemeClr val="tx1"/>
+                </a:solidFill>
+                <a:latin typeface="Calibri" panose="020F0502020204030204" pitchFamily="34" charset="0"/>
+                <a:ea typeface="+mn-ea"/>
+                <a:cs typeface="Calibri" panose="020F0502020204030204" pitchFamily="34" charset="0"/>
+              </a:defRPr>
+            </a:lvl5pPr>
+            <a:lvl6pPr marL="2514600" indent="-228600" algn="l" defTabSz="914400" rtl="0" eaLnBrk="1" latinLnBrk="0" hangingPunct="1">
+              <a:lnSpc>
+                <a:spcPct val="90000"/>
+              </a:lnSpc>
+              <a:spcBef>
+                <a:spcPts val="500"/>
+              </a:spcBef>
+              <a:buFont typeface="Arial" panose="020B0604020202020204" pitchFamily="34" charset="0"/>
+              <a:buChar char="•"/>
+              <a:defRPr sz="1800" kern="1200">
+                <a:solidFill>
+                  <a:schemeClr val="tx1"/>
+                </a:solidFill>
+                <a:latin typeface="+mn-lt"/>
+                <a:ea typeface="+mn-ea"/>
+                <a:cs typeface="+mn-cs"/>
+              </a:defRPr>
+            </a:lvl6pPr>
+            <a:lvl7pPr marL="2971800" indent="-228600" algn="l" defTabSz="914400" rtl="0" eaLnBrk="1" latinLnBrk="0" hangingPunct="1">
+              <a:lnSpc>
+                <a:spcPct val="90000"/>
+              </a:lnSpc>
+              <a:spcBef>
+                <a:spcPts val="500"/>
+              </a:spcBef>
+              <a:buFont typeface="Arial" panose="020B0604020202020204" pitchFamily="34" charset="0"/>
+              <a:buChar char="•"/>
+              <a:defRPr sz="1800" kern="1200">
+                <a:solidFill>
+                  <a:schemeClr val="tx1"/>
+                </a:solidFill>
+                <a:latin typeface="+mn-lt"/>
+                <a:ea typeface="+mn-ea"/>
+                <a:cs typeface="+mn-cs"/>
+              </a:defRPr>
+            </a:lvl7pPr>
+            <a:lvl8pPr marL="3429000" indent="-228600" algn="l" defTabSz="914400" rtl="0" eaLnBrk="1" latinLnBrk="0" hangingPunct="1">
+              <a:lnSpc>
+                <a:spcPct val="90000"/>
+              </a:lnSpc>
+              <a:spcBef>
+                <a:spcPts val="500"/>
+              </a:spcBef>
+              <a:buFont typeface="Arial" panose="020B0604020202020204" pitchFamily="34" charset="0"/>
+              <a:buChar char="•"/>
+              <a:defRPr sz="1800" kern="1200">
+                <a:solidFill>
+                  <a:schemeClr val="tx1"/>
+                </a:solidFill>
+                <a:latin typeface="+mn-lt"/>
+                <a:ea typeface="+mn-ea"/>
+                <a:cs typeface="+mn-cs"/>
+              </a:defRPr>
+            </a:lvl8pPr>
+            <a:lvl9pPr marL="3886200" indent="-228600" algn="l" defTabSz="914400" rtl="0" eaLnBrk="1" latinLnBrk="0" hangingPunct="1">
+              <a:lnSpc>
+                <a:spcPct val="90000"/>
+              </a:lnSpc>
+              <a:spcBef>
+                <a:spcPts val="500"/>
+              </a:spcBef>
+              <a:buFont typeface="Arial" panose="020B0604020202020204" pitchFamily="34" charset="0"/>
+              <a:buChar char="•"/>
+              <a:defRPr sz="1800" kern="1200">
+                <a:solidFill>
+                  <a:schemeClr val="tx1"/>
+                </a:solidFill>
+                <a:latin typeface="+mn-lt"/>
+                <a:ea typeface="+mn-ea"/>
+                <a:cs typeface="+mn-cs"/>
+              </a:defRPr>
+            </a:lvl9pPr>
+          </a:lstStyle>
+          <a:p>
+            <a:r>
+              <a:rPr lang="lv-LV" sz="2800" dirty="0"/>
+              <a:t>Uguņošanas stadija – spēlētāja ierīces uguņošanas sekojumu logs un trāpītie lādiņi laukumā</a:t>
+            </a:r>
+          </a:p>
+        </p:txBody>
+      </p:sp>
+      <p:pic>
+        <p:nvPicPr>
+          <p:cNvPr id="5" name="Attēls 4">
+            <a:extLst>
+              <a:ext uri="{FF2B5EF4-FFF2-40B4-BE49-F238E27FC236}">
+                <a16:creationId xmlns:a16="http://schemas.microsoft.com/office/drawing/2014/main" id="{1FD8DCBE-8CC6-CEF3-63C1-8CDDCE92FE50}"/>
+              </a:ext>
+            </a:extLst>
+          </p:cNvPr>
+          <p:cNvPicPr>
+            <a:picLocks noChangeAspect="1"/>
+          </p:cNvPicPr>
+          <p:nvPr/>
+        </p:nvPicPr>
+        <p:blipFill>
+          <a:blip r:embed="rId2"/>
+          <a:stretch>
+            <a:fillRect/>
+          </a:stretch>
+        </p:blipFill>
+        <p:spPr>
+          <a:xfrm>
+            <a:off x="5096081" y="0"/>
+            <a:ext cx="6709860" cy="6858000"/>
+          </a:xfrm>
+          <a:prstGeom prst="rect">
+            <a:avLst/>
+          </a:prstGeom>
+        </p:spPr>
+      </p:pic>
     </p:spTree>
     <p:extLst>
       <p:ext uri="{BB962C8B-B14F-4D97-AF65-F5344CB8AC3E}">
-        <p14:creationId xmlns:p14="http://schemas.microsoft.com/office/powerpoint/2010/main" val="737429254"/>
+        <p14:creationId xmlns:p14="http://schemas.microsoft.com/office/powerpoint/2010/main" val="479023658"/>
+      </p:ext>
+    </p:extLst>
+  </p:cSld>
+  <p:clrMapOvr>
+    <a:masterClrMapping/>
+  </p:clrMapOvr>
+</p:sld>
+</file>
+
+<file path=ppt/slides/slide21.xml><?xml version="1.0" encoding="utf-8"?>
+<p:sld xmlns:a="http://schemas.openxmlformats.org/drawingml/2006/main" xmlns:r="http://schemas.openxmlformats.org/officeDocument/2006/relationships" xmlns:p="http://schemas.openxmlformats.org/presentationml/2006/main">
+  <p:cSld>
+    <p:spTree>
+      <p:nvGrpSpPr>
+        <p:cNvPr id="1" name="">
+          <a:extLst>
+            <a:ext uri="{FF2B5EF4-FFF2-40B4-BE49-F238E27FC236}">
+              <a16:creationId xmlns:a16="http://schemas.microsoft.com/office/drawing/2014/main" id="{F522B3A7-7962-457F-960E-4BED5394998B}"/>
+            </a:ext>
+          </a:extLst>
+        </p:cNvPr>
+        <p:cNvGrpSpPr/>
+        <p:nvPr/>
+      </p:nvGrpSpPr>
+      <p:grpSpPr>
+        <a:xfrm>
+          <a:off x="0" y="0"/>
+          <a:ext cx="0" cy="0"/>
+          <a:chOff x="0" y="0"/>
+          <a:chExt cx="0" cy="0"/>
+        </a:xfrm>
+      </p:grpSpPr>
+      <p:sp>
+        <p:nvSpPr>
+          <p:cNvPr id="2" name="Virsraksts 1">
+            <a:extLst>
+              <a:ext uri="{FF2B5EF4-FFF2-40B4-BE49-F238E27FC236}">
+                <a16:creationId xmlns:a16="http://schemas.microsoft.com/office/drawing/2014/main" id="{E3F4AB1A-3EB2-438D-E4B9-BFA8A4EA9833}"/>
+              </a:ext>
+            </a:extLst>
+          </p:cNvPr>
+          <p:cNvSpPr>
+            <a:spLocks noGrp="1"/>
+          </p:cNvSpPr>
+          <p:nvPr>
+            <p:ph type="title"/>
+          </p:nvPr>
+        </p:nvSpPr>
+        <p:spPr/>
+        <p:txBody>
+          <a:bodyPr/>
+          <a:lstStyle/>
+          <a:p>
+            <a:r>
+              <a:rPr lang="lv-LV" dirty="0"/>
+              <a:t>Ainas – Spēles laukums</a:t>
+            </a:r>
+          </a:p>
+        </p:txBody>
+      </p:sp>
+      <p:sp>
+        <p:nvSpPr>
+          <p:cNvPr id="7" name="Teksta vietturis 15">
+            <a:extLst>
+              <a:ext uri="{FF2B5EF4-FFF2-40B4-BE49-F238E27FC236}">
+                <a16:creationId xmlns:a16="http://schemas.microsoft.com/office/drawing/2014/main" id="{3DB00045-3876-4E2C-BA02-641A4E2C8D98}"/>
+              </a:ext>
+            </a:extLst>
+          </p:cNvPr>
+          <p:cNvSpPr txBox="1">
+            <a:spLocks/>
+          </p:cNvSpPr>
+          <p:nvPr/>
+        </p:nvSpPr>
+        <p:spPr>
+          <a:xfrm>
+            <a:off x="838199" y="3871737"/>
+            <a:ext cx="3716548" cy="844707"/>
+          </a:xfrm>
+          <a:prstGeom prst="rect">
+            <a:avLst/>
+          </a:prstGeom>
+        </p:spPr>
+        <p:txBody>
+          <a:bodyPr vert="horz" lIns="91440" tIns="45720" rIns="91440" bIns="45720" rtlCol="0" anchor="t">
+            <a:noAutofit/>
+          </a:bodyPr>
+          <a:lstStyle>
+            <a:lvl1pPr marL="0" indent="0" algn="l" defTabSz="914400" rtl="0" eaLnBrk="1" latinLnBrk="0" hangingPunct="1">
+              <a:lnSpc>
+                <a:spcPct val="100000"/>
+              </a:lnSpc>
+              <a:spcBef>
+                <a:spcPts val="1000"/>
+              </a:spcBef>
+              <a:buFont typeface="Arial" panose="020B0604020202020204" pitchFamily="34" charset="0"/>
+              <a:buNone/>
+              <a:defRPr sz="1200" kern="1200">
+                <a:solidFill>
+                  <a:schemeClr val="bg1"/>
+                </a:solidFill>
+                <a:latin typeface="Calibri" panose="020F0502020204030204" pitchFamily="34" charset="0"/>
+                <a:ea typeface="+mn-ea"/>
+                <a:cs typeface="Calibri" panose="020F0502020204030204" pitchFamily="34" charset="0"/>
+              </a:defRPr>
+            </a:lvl1pPr>
+            <a:lvl2pPr marL="685800" indent="-228600" algn="l" defTabSz="914400" rtl="0" eaLnBrk="1" latinLnBrk="0" hangingPunct="1">
+              <a:lnSpc>
+                <a:spcPct val="90000"/>
+              </a:lnSpc>
+              <a:spcBef>
+                <a:spcPts val="500"/>
+              </a:spcBef>
+              <a:buFont typeface="Arial" panose="020B0604020202020204" pitchFamily="34" charset="0"/>
+              <a:buChar char="•"/>
+              <a:defRPr sz="2400" kern="1200">
+                <a:solidFill>
+                  <a:schemeClr val="tx1"/>
+                </a:solidFill>
+                <a:latin typeface="Calibri" panose="020F0502020204030204" pitchFamily="34" charset="0"/>
+                <a:ea typeface="+mn-ea"/>
+                <a:cs typeface="Calibri" panose="020F0502020204030204" pitchFamily="34" charset="0"/>
+              </a:defRPr>
+            </a:lvl2pPr>
+            <a:lvl3pPr marL="1143000" indent="-228600" algn="l" defTabSz="914400" rtl="0" eaLnBrk="1" latinLnBrk="0" hangingPunct="1">
+              <a:lnSpc>
+                <a:spcPct val="90000"/>
+              </a:lnSpc>
+              <a:spcBef>
+                <a:spcPts val="500"/>
+              </a:spcBef>
+              <a:buFont typeface="Arial" panose="020B0604020202020204" pitchFamily="34" charset="0"/>
+              <a:buChar char="•"/>
+              <a:defRPr sz="2000" kern="1200">
+                <a:solidFill>
+                  <a:schemeClr val="tx1"/>
+                </a:solidFill>
+                <a:latin typeface="Calibri" panose="020F0502020204030204" pitchFamily="34" charset="0"/>
+                <a:ea typeface="+mn-ea"/>
+                <a:cs typeface="Calibri" panose="020F0502020204030204" pitchFamily="34" charset="0"/>
+              </a:defRPr>
+            </a:lvl3pPr>
+            <a:lvl4pPr marL="1600200" indent="-228600" algn="l" defTabSz="914400" rtl="0" eaLnBrk="1" latinLnBrk="0" hangingPunct="1">
+              <a:lnSpc>
+                <a:spcPct val="90000"/>
+              </a:lnSpc>
+              <a:spcBef>
+                <a:spcPts val="500"/>
+              </a:spcBef>
+              <a:buFont typeface="Arial" panose="020B0604020202020204" pitchFamily="34" charset="0"/>
+              <a:buChar char="•"/>
+              <a:defRPr sz="1800" kern="1200">
+                <a:solidFill>
+                  <a:schemeClr val="tx1"/>
+                </a:solidFill>
+                <a:latin typeface="Calibri" panose="020F0502020204030204" pitchFamily="34" charset="0"/>
+                <a:ea typeface="+mn-ea"/>
+                <a:cs typeface="Calibri" panose="020F0502020204030204" pitchFamily="34" charset="0"/>
+              </a:defRPr>
+            </a:lvl4pPr>
+            <a:lvl5pPr marL="2057400" indent="-228600" algn="l" defTabSz="914400" rtl="0" eaLnBrk="1" latinLnBrk="0" hangingPunct="1">
+              <a:lnSpc>
+                <a:spcPct val="90000"/>
+              </a:lnSpc>
+              <a:spcBef>
+                <a:spcPts val="500"/>
+              </a:spcBef>
+              <a:buFont typeface="Arial" panose="020B0604020202020204" pitchFamily="34" charset="0"/>
+              <a:buChar char="•"/>
+              <a:defRPr sz="1800" kern="1200">
+                <a:solidFill>
+                  <a:schemeClr val="tx1"/>
+                </a:solidFill>
+                <a:latin typeface="Calibri" panose="020F0502020204030204" pitchFamily="34" charset="0"/>
+                <a:ea typeface="+mn-ea"/>
+                <a:cs typeface="Calibri" panose="020F0502020204030204" pitchFamily="34" charset="0"/>
+              </a:defRPr>
+            </a:lvl5pPr>
+            <a:lvl6pPr marL="2514600" indent="-228600" algn="l" defTabSz="914400" rtl="0" eaLnBrk="1" latinLnBrk="0" hangingPunct="1">
+              <a:lnSpc>
+                <a:spcPct val="90000"/>
+              </a:lnSpc>
+              <a:spcBef>
+                <a:spcPts val="500"/>
+              </a:spcBef>
+              <a:buFont typeface="Arial" panose="020B0604020202020204" pitchFamily="34" charset="0"/>
+              <a:buChar char="•"/>
+              <a:defRPr sz="1800" kern="1200">
+                <a:solidFill>
+                  <a:schemeClr val="tx1"/>
+                </a:solidFill>
+                <a:latin typeface="+mn-lt"/>
+                <a:ea typeface="+mn-ea"/>
+                <a:cs typeface="+mn-cs"/>
+              </a:defRPr>
+            </a:lvl6pPr>
+            <a:lvl7pPr marL="2971800" indent="-228600" algn="l" defTabSz="914400" rtl="0" eaLnBrk="1" latinLnBrk="0" hangingPunct="1">
+              <a:lnSpc>
+                <a:spcPct val="90000"/>
+              </a:lnSpc>
+              <a:spcBef>
+                <a:spcPts val="500"/>
+              </a:spcBef>
+              <a:buFont typeface="Arial" panose="020B0604020202020204" pitchFamily="34" charset="0"/>
+              <a:buChar char="•"/>
+              <a:defRPr sz="1800" kern="1200">
+                <a:solidFill>
+                  <a:schemeClr val="tx1"/>
+                </a:solidFill>
+                <a:latin typeface="+mn-lt"/>
+                <a:ea typeface="+mn-ea"/>
+                <a:cs typeface="+mn-cs"/>
+              </a:defRPr>
+            </a:lvl7pPr>
+            <a:lvl8pPr marL="3429000" indent="-228600" algn="l" defTabSz="914400" rtl="0" eaLnBrk="1" latinLnBrk="0" hangingPunct="1">
+              <a:lnSpc>
+                <a:spcPct val="90000"/>
+              </a:lnSpc>
+              <a:spcBef>
+                <a:spcPts val="500"/>
+              </a:spcBef>
+              <a:buFont typeface="Arial" panose="020B0604020202020204" pitchFamily="34" charset="0"/>
+              <a:buChar char="•"/>
+              <a:defRPr sz="1800" kern="1200">
+                <a:solidFill>
+                  <a:schemeClr val="tx1"/>
+                </a:solidFill>
+                <a:latin typeface="+mn-lt"/>
+                <a:ea typeface="+mn-ea"/>
+                <a:cs typeface="+mn-cs"/>
+              </a:defRPr>
+            </a:lvl8pPr>
+            <a:lvl9pPr marL="3886200" indent="-228600" algn="l" defTabSz="914400" rtl="0" eaLnBrk="1" latinLnBrk="0" hangingPunct="1">
+              <a:lnSpc>
+                <a:spcPct val="90000"/>
+              </a:lnSpc>
+              <a:spcBef>
+                <a:spcPts val="500"/>
+              </a:spcBef>
+              <a:buFont typeface="Arial" panose="020B0604020202020204" pitchFamily="34" charset="0"/>
+              <a:buChar char="•"/>
+              <a:defRPr sz="1800" kern="1200">
+                <a:solidFill>
+                  <a:schemeClr val="tx1"/>
+                </a:solidFill>
+                <a:latin typeface="+mn-lt"/>
+                <a:ea typeface="+mn-ea"/>
+                <a:cs typeface="+mn-cs"/>
+              </a:defRPr>
+            </a:lvl9pPr>
+          </a:lstStyle>
+          <a:p>
+            <a:r>
+              <a:rPr lang="lv-LV" sz="2800" dirty="0"/>
+              <a:t>Uguņošanas stadija – Paslēpta uguņošanas sekojumu logs</a:t>
+            </a:r>
+          </a:p>
+        </p:txBody>
+      </p:sp>
+      <p:pic>
+        <p:nvPicPr>
+          <p:cNvPr id="4" name="Attēls 3">
+            <a:extLst>
+              <a:ext uri="{FF2B5EF4-FFF2-40B4-BE49-F238E27FC236}">
+                <a16:creationId xmlns:a16="http://schemas.microsoft.com/office/drawing/2014/main" id="{EDD6F7B5-CBE9-7ED0-736F-E4A6E2B02D15}"/>
+              </a:ext>
+            </a:extLst>
+          </p:cNvPr>
+          <p:cNvPicPr>
+            <a:picLocks noChangeAspect="1"/>
+          </p:cNvPicPr>
+          <p:nvPr/>
+        </p:nvPicPr>
+        <p:blipFill>
+          <a:blip r:embed="rId2"/>
+          <a:stretch>
+            <a:fillRect/>
+          </a:stretch>
+        </p:blipFill>
+        <p:spPr>
+          <a:xfrm>
+            <a:off x="5087455" y="0"/>
+            <a:ext cx="6709860" cy="6858000"/>
+          </a:xfrm>
+          <a:prstGeom prst="rect">
+            <a:avLst/>
+          </a:prstGeom>
+        </p:spPr>
+      </p:pic>
+    </p:spTree>
+    <p:extLst>
+      <p:ext uri="{BB962C8B-B14F-4D97-AF65-F5344CB8AC3E}">
+        <p14:creationId xmlns:p14="http://schemas.microsoft.com/office/powerpoint/2010/main" val="4165358915"/>
+      </p:ext>
+    </p:extLst>
+  </p:cSld>
+  <p:clrMapOvr>
+    <a:masterClrMapping/>
+  </p:clrMapOvr>
+</p:sld>
+</file>
+
+<file path=ppt/slides/slide22.xml><?xml version="1.0" encoding="utf-8"?>
+<p:sld xmlns:a="http://schemas.openxmlformats.org/drawingml/2006/main" xmlns:r="http://schemas.openxmlformats.org/officeDocument/2006/relationships" xmlns:p="http://schemas.openxmlformats.org/presentationml/2006/main">
+  <p:cSld>
+    <p:spTree>
+      <p:nvGrpSpPr>
+        <p:cNvPr id="1" name="">
+          <a:extLst>
+            <a:ext uri="{FF2B5EF4-FFF2-40B4-BE49-F238E27FC236}">
+              <a16:creationId xmlns:a16="http://schemas.microsoft.com/office/drawing/2014/main" id="{45ABC413-87E1-B84A-A043-0D70D40B4142}"/>
+            </a:ext>
+          </a:extLst>
+        </p:cNvPr>
+        <p:cNvGrpSpPr/>
+        <p:nvPr/>
+      </p:nvGrpSpPr>
+      <p:grpSpPr>
+        <a:xfrm>
+          <a:off x="0" y="0"/>
+          <a:ext cx="0" cy="0"/>
+          <a:chOff x="0" y="0"/>
+          <a:chExt cx="0" cy="0"/>
+        </a:xfrm>
+      </p:grpSpPr>
+      <p:sp>
+        <p:nvSpPr>
+          <p:cNvPr id="2" name="Virsraksts 1">
+            <a:extLst>
+              <a:ext uri="{FF2B5EF4-FFF2-40B4-BE49-F238E27FC236}">
+                <a16:creationId xmlns:a16="http://schemas.microsoft.com/office/drawing/2014/main" id="{D48EA2F5-DF18-C699-AC97-DA3675531826}"/>
+              </a:ext>
+            </a:extLst>
+          </p:cNvPr>
+          <p:cNvSpPr>
+            <a:spLocks noGrp="1"/>
+          </p:cNvSpPr>
+          <p:nvPr>
+            <p:ph type="title"/>
+          </p:nvPr>
+        </p:nvSpPr>
+        <p:spPr/>
+        <p:txBody>
+          <a:bodyPr/>
+          <a:lstStyle/>
+          <a:p>
+            <a:r>
+              <a:rPr lang="lv-LV" dirty="0"/>
+              <a:t>Ainas – Spēles laukums</a:t>
+            </a:r>
+          </a:p>
+        </p:txBody>
+      </p:sp>
+      <p:sp>
+        <p:nvSpPr>
+          <p:cNvPr id="7" name="Teksta vietturis 15">
+            <a:extLst>
+              <a:ext uri="{FF2B5EF4-FFF2-40B4-BE49-F238E27FC236}">
+                <a16:creationId xmlns:a16="http://schemas.microsoft.com/office/drawing/2014/main" id="{14D0075D-025C-65CC-73A3-08A336D6CB3E}"/>
+              </a:ext>
+            </a:extLst>
+          </p:cNvPr>
+          <p:cNvSpPr txBox="1">
+            <a:spLocks/>
+          </p:cNvSpPr>
+          <p:nvPr/>
+        </p:nvSpPr>
+        <p:spPr>
+          <a:xfrm>
+            <a:off x="838199" y="3871737"/>
+            <a:ext cx="3716548" cy="844707"/>
+          </a:xfrm>
+          <a:prstGeom prst="rect">
+            <a:avLst/>
+          </a:prstGeom>
+        </p:spPr>
+        <p:txBody>
+          <a:bodyPr vert="horz" lIns="91440" tIns="45720" rIns="91440" bIns="45720" rtlCol="0" anchor="t">
+            <a:noAutofit/>
+          </a:bodyPr>
+          <a:lstStyle>
+            <a:lvl1pPr marL="0" indent="0" algn="l" defTabSz="914400" rtl="0" eaLnBrk="1" latinLnBrk="0" hangingPunct="1">
+              <a:lnSpc>
+                <a:spcPct val="100000"/>
+              </a:lnSpc>
+              <a:spcBef>
+                <a:spcPts val="1000"/>
+              </a:spcBef>
+              <a:buFont typeface="Arial" panose="020B0604020202020204" pitchFamily="34" charset="0"/>
+              <a:buNone/>
+              <a:defRPr sz="1200" kern="1200">
+                <a:solidFill>
+                  <a:schemeClr val="bg1"/>
+                </a:solidFill>
+                <a:latin typeface="Calibri" panose="020F0502020204030204" pitchFamily="34" charset="0"/>
+                <a:ea typeface="+mn-ea"/>
+                <a:cs typeface="Calibri" panose="020F0502020204030204" pitchFamily="34" charset="0"/>
+              </a:defRPr>
+            </a:lvl1pPr>
+            <a:lvl2pPr marL="685800" indent="-228600" algn="l" defTabSz="914400" rtl="0" eaLnBrk="1" latinLnBrk="0" hangingPunct="1">
+              <a:lnSpc>
+                <a:spcPct val="90000"/>
+              </a:lnSpc>
+              <a:spcBef>
+                <a:spcPts val="500"/>
+              </a:spcBef>
+              <a:buFont typeface="Arial" panose="020B0604020202020204" pitchFamily="34" charset="0"/>
+              <a:buChar char="•"/>
+              <a:defRPr sz="2400" kern="1200">
+                <a:solidFill>
+                  <a:schemeClr val="tx1"/>
+                </a:solidFill>
+                <a:latin typeface="Calibri" panose="020F0502020204030204" pitchFamily="34" charset="0"/>
+                <a:ea typeface="+mn-ea"/>
+                <a:cs typeface="Calibri" panose="020F0502020204030204" pitchFamily="34" charset="0"/>
+              </a:defRPr>
+            </a:lvl2pPr>
+            <a:lvl3pPr marL="1143000" indent="-228600" algn="l" defTabSz="914400" rtl="0" eaLnBrk="1" latinLnBrk="0" hangingPunct="1">
+              <a:lnSpc>
+                <a:spcPct val="90000"/>
+              </a:lnSpc>
+              <a:spcBef>
+                <a:spcPts val="500"/>
+              </a:spcBef>
+              <a:buFont typeface="Arial" panose="020B0604020202020204" pitchFamily="34" charset="0"/>
+              <a:buChar char="•"/>
+              <a:defRPr sz="2000" kern="1200">
+                <a:solidFill>
+                  <a:schemeClr val="tx1"/>
+                </a:solidFill>
+                <a:latin typeface="Calibri" panose="020F0502020204030204" pitchFamily="34" charset="0"/>
+                <a:ea typeface="+mn-ea"/>
+                <a:cs typeface="Calibri" panose="020F0502020204030204" pitchFamily="34" charset="0"/>
+              </a:defRPr>
+            </a:lvl3pPr>
+            <a:lvl4pPr marL="1600200" indent="-228600" algn="l" defTabSz="914400" rtl="0" eaLnBrk="1" latinLnBrk="0" hangingPunct="1">
+              <a:lnSpc>
+                <a:spcPct val="90000"/>
+              </a:lnSpc>
+              <a:spcBef>
+                <a:spcPts val="500"/>
+              </a:spcBef>
+              <a:buFont typeface="Arial" panose="020B0604020202020204" pitchFamily="34" charset="0"/>
+              <a:buChar char="•"/>
+              <a:defRPr sz="1800" kern="1200">
+                <a:solidFill>
+                  <a:schemeClr val="tx1"/>
+                </a:solidFill>
+                <a:latin typeface="Calibri" panose="020F0502020204030204" pitchFamily="34" charset="0"/>
+                <a:ea typeface="+mn-ea"/>
+                <a:cs typeface="Calibri" panose="020F0502020204030204" pitchFamily="34" charset="0"/>
+              </a:defRPr>
+            </a:lvl4pPr>
+            <a:lvl5pPr marL="2057400" indent="-228600" algn="l" defTabSz="914400" rtl="0" eaLnBrk="1" latinLnBrk="0" hangingPunct="1">
+              <a:lnSpc>
+                <a:spcPct val="90000"/>
+              </a:lnSpc>
+              <a:spcBef>
+                <a:spcPts val="500"/>
+              </a:spcBef>
+              <a:buFont typeface="Arial" panose="020B0604020202020204" pitchFamily="34" charset="0"/>
+              <a:buChar char="•"/>
+              <a:defRPr sz="1800" kern="1200">
+                <a:solidFill>
+                  <a:schemeClr val="tx1"/>
+                </a:solidFill>
+                <a:latin typeface="Calibri" panose="020F0502020204030204" pitchFamily="34" charset="0"/>
+                <a:ea typeface="+mn-ea"/>
+                <a:cs typeface="Calibri" panose="020F0502020204030204" pitchFamily="34" charset="0"/>
+              </a:defRPr>
+            </a:lvl5pPr>
+            <a:lvl6pPr marL="2514600" indent="-228600" algn="l" defTabSz="914400" rtl="0" eaLnBrk="1" latinLnBrk="0" hangingPunct="1">
+              <a:lnSpc>
+                <a:spcPct val="90000"/>
+              </a:lnSpc>
+              <a:spcBef>
+                <a:spcPts val="500"/>
+              </a:spcBef>
+              <a:buFont typeface="Arial" panose="020B0604020202020204" pitchFamily="34" charset="0"/>
+              <a:buChar char="•"/>
+              <a:defRPr sz="1800" kern="1200">
+                <a:solidFill>
+                  <a:schemeClr val="tx1"/>
+                </a:solidFill>
+                <a:latin typeface="+mn-lt"/>
+                <a:ea typeface="+mn-ea"/>
+                <a:cs typeface="+mn-cs"/>
+              </a:defRPr>
+            </a:lvl6pPr>
+            <a:lvl7pPr marL="2971800" indent="-228600" algn="l" defTabSz="914400" rtl="0" eaLnBrk="1" latinLnBrk="0" hangingPunct="1">
+              <a:lnSpc>
+                <a:spcPct val="90000"/>
+              </a:lnSpc>
+              <a:spcBef>
+                <a:spcPts val="500"/>
+              </a:spcBef>
+              <a:buFont typeface="Arial" panose="020B0604020202020204" pitchFamily="34" charset="0"/>
+              <a:buChar char="•"/>
+              <a:defRPr sz="1800" kern="1200">
+                <a:solidFill>
+                  <a:schemeClr val="tx1"/>
+                </a:solidFill>
+                <a:latin typeface="+mn-lt"/>
+                <a:ea typeface="+mn-ea"/>
+                <a:cs typeface="+mn-cs"/>
+              </a:defRPr>
+            </a:lvl7pPr>
+            <a:lvl8pPr marL="3429000" indent="-228600" algn="l" defTabSz="914400" rtl="0" eaLnBrk="1" latinLnBrk="0" hangingPunct="1">
+              <a:lnSpc>
+                <a:spcPct val="90000"/>
+              </a:lnSpc>
+              <a:spcBef>
+                <a:spcPts val="500"/>
+              </a:spcBef>
+              <a:buFont typeface="Arial" panose="020B0604020202020204" pitchFamily="34" charset="0"/>
+              <a:buChar char="•"/>
+              <a:defRPr sz="1800" kern="1200">
+                <a:solidFill>
+                  <a:schemeClr val="tx1"/>
+                </a:solidFill>
+                <a:latin typeface="+mn-lt"/>
+                <a:ea typeface="+mn-ea"/>
+                <a:cs typeface="+mn-cs"/>
+              </a:defRPr>
+            </a:lvl8pPr>
+            <a:lvl9pPr marL="3886200" indent="-228600" algn="l" defTabSz="914400" rtl="0" eaLnBrk="1" latinLnBrk="0" hangingPunct="1">
+              <a:lnSpc>
+                <a:spcPct val="90000"/>
+              </a:lnSpc>
+              <a:spcBef>
+                <a:spcPts val="500"/>
+              </a:spcBef>
+              <a:buFont typeface="Arial" panose="020B0604020202020204" pitchFamily="34" charset="0"/>
+              <a:buChar char="•"/>
+              <a:defRPr sz="1800" kern="1200">
+                <a:solidFill>
+                  <a:schemeClr val="tx1"/>
+                </a:solidFill>
+                <a:latin typeface="+mn-lt"/>
+                <a:ea typeface="+mn-ea"/>
+                <a:cs typeface="+mn-cs"/>
+              </a:defRPr>
+            </a:lvl9pPr>
+          </a:lstStyle>
+          <a:p>
+            <a:r>
+              <a:rPr lang="lv-LV" sz="2800" dirty="0"/>
+              <a:t>Koriģēšanas stadija – pēc uguņošanas iznīcinātie mērķi (vēl viens mērķis citā laukuma vietā)</a:t>
+            </a:r>
+          </a:p>
+        </p:txBody>
+      </p:sp>
+      <p:pic>
+        <p:nvPicPr>
+          <p:cNvPr id="5" name="Attēls 4">
+            <a:extLst>
+              <a:ext uri="{FF2B5EF4-FFF2-40B4-BE49-F238E27FC236}">
+                <a16:creationId xmlns:a16="http://schemas.microsoft.com/office/drawing/2014/main" id="{634E425D-BB8C-1BA7-39B6-CA455247604E}"/>
+              </a:ext>
+            </a:extLst>
+          </p:cNvPr>
+          <p:cNvPicPr>
+            <a:picLocks noChangeAspect="1"/>
+          </p:cNvPicPr>
+          <p:nvPr/>
+        </p:nvPicPr>
+        <p:blipFill>
+          <a:blip r:embed="rId2"/>
+          <a:stretch>
+            <a:fillRect/>
+          </a:stretch>
+        </p:blipFill>
+        <p:spPr>
+          <a:xfrm>
+            <a:off x="5087455" y="0"/>
+            <a:ext cx="6709860" cy="6858000"/>
+          </a:xfrm>
+          <a:prstGeom prst="rect">
+            <a:avLst/>
+          </a:prstGeom>
+        </p:spPr>
+      </p:pic>
+    </p:spTree>
+    <p:extLst>
+      <p:ext uri="{BB962C8B-B14F-4D97-AF65-F5344CB8AC3E}">
+        <p14:creationId xmlns:p14="http://schemas.microsoft.com/office/powerpoint/2010/main" val="3860045149"/>
+      </p:ext>
+    </p:extLst>
+  </p:cSld>
+  <p:clrMapOvr>
+    <a:masterClrMapping/>
+  </p:clrMapOvr>
+</p:sld>
+</file>
+
+<file path=ppt/slides/slide23.xml><?xml version="1.0" encoding="utf-8"?>
+<p:sld xmlns:a="http://schemas.openxmlformats.org/drawingml/2006/main" xmlns:r="http://schemas.openxmlformats.org/officeDocument/2006/relationships" xmlns:p="http://schemas.openxmlformats.org/presentationml/2006/main">
+  <p:cSld>
+    <p:spTree>
+      <p:nvGrpSpPr>
+        <p:cNvPr id="1" name="">
+          <a:extLst>
+            <a:ext uri="{FF2B5EF4-FFF2-40B4-BE49-F238E27FC236}">
+              <a16:creationId xmlns:a16="http://schemas.microsoft.com/office/drawing/2014/main" id="{E54BAC7B-B956-591C-EE19-249101337C8B}"/>
+            </a:ext>
+          </a:extLst>
+        </p:cNvPr>
+        <p:cNvGrpSpPr/>
+        <p:nvPr/>
+      </p:nvGrpSpPr>
+      <p:grpSpPr>
+        <a:xfrm>
+          <a:off x="0" y="0"/>
+          <a:ext cx="0" cy="0"/>
+          <a:chOff x="0" y="0"/>
+          <a:chExt cx="0" cy="0"/>
+        </a:xfrm>
+      </p:grpSpPr>
+      <p:sp>
+        <p:nvSpPr>
+          <p:cNvPr id="2" name="Virsraksts 1">
+            <a:extLst>
+              <a:ext uri="{FF2B5EF4-FFF2-40B4-BE49-F238E27FC236}">
+                <a16:creationId xmlns:a16="http://schemas.microsoft.com/office/drawing/2014/main" id="{EB5B7F87-F067-BF9C-FB15-12DBAC51986E}"/>
+              </a:ext>
+            </a:extLst>
+          </p:cNvPr>
+          <p:cNvSpPr>
+            <a:spLocks noGrp="1"/>
+          </p:cNvSpPr>
+          <p:nvPr>
+            <p:ph type="title"/>
+          </p:nvPr>
+        </p:nvSpPr>
+        <p:spPr/>
+        <p:txBody>
+          <a:bodyPr/>
+          <a:lstStyle/>
+          <a:p>
+            <a:r>
+              <a:rPr lang="lv-LV" dirty="0"/>
+              <a:t>Ainas – Spēles laukums</a:t>
+            </a:r>
+          </a:p>
+        </p:txBody>
+      </p:sp>
+      <p:sp>
+        <p:nvSpPr>
+          <p:cNvPr id="7" name="Teksta vietturis 15">
+            <a:extLst>
+              <a:ext uri="{FF2B5EF4-FFF2-40B4-BE49-F238E27FC236}">
+                <a16:creationId xmlns:a16="http://schemas.microsoft.com/office/drawing/2014/main" id="{EB350DC5-AC20-A840-6F86-F7BC6D1D84B7}"/>
+              </a:ext>
+            </a:extLst>
+          </p:cNvPr>
+          <p:cNvSpPr txBox="1">
+            <a:spLocks/>
+          </p:cNvSpPr>
+          <p:nvPr/>
+        </p:nvSpPr>
+        <p:spPr>
+          <a:xfrm>
+            <a:off x="838199" y="3871737"/>
+            <a:ext cx="3716548" cy="844707"/>
+          </a:xfrm>
+          <a:prstGeom prst="rect">
+            <a:avLst/>
+          </a:prstGeom>
+        </p:spPr>
+        <p:txBody>
+          <a:bodyPr vert="horz" lIns="91440" tIns="45720" rIns="91440" bIns="45720" rtlCol="0" anchor="t">
+            <a:noAutofit/>
+          </a:bodyPr>
+          <a:lstStyle>
+            <a:lvl1pPr marL="0" indent="0" algn="l" defTabSz="914400" rtl="0" eaLnBrk="1" latinLnBrk="0" hangingPunct="1">
+              <a:lnSpc>
+                <a:spcPct val="100000"/>
+              </a:lnSpc>
+              <a:spcBef>
+                <a:spcPts val="1000"/>
+              </a:spcBef>
+              <a:buFont typeface="Arial" panose="020B0604020202020204" pitchFamily="34" charset="0"/>
+              <a:buNone/>
+              <a:defRPr sz="1200" kern="1200">
+                <a:solidFill>
+                  <a:schemeClr val="bg1"/>
+                </a:solidFill>
+                <a:latin typeface="Calibri" panose="020F0502020204030204" pitchFamily="34" charset="0"/>
+                <a:ea typeface="+mn-ea"/>
+                <a:cs typeface="Calibri" panose="020F0502020204030204" pitchFamily="34" charset="0"/>
+              </a:defRPr>
+            </a:lvl1pPr>
+            <a:lvl2pPr marL="685800" indent="-228600" algn="l" defTabSz="914400" rtl="0" eaLnBrk="1" latinLnBrk="0" hangingPunct="1">
+              <a:lnSpc>
+                <a:spcPct val="90000"/>
+              </a:lnSpc>
+              <a:spcBef>
+                <a:spcPts val="500"/>
+              </a:spcBef>
+              <a:buFont typeface="Arial" panose="020B0604020202020204" pitchFamily="34" charset="0"/>
+              <a:buChar char="•"/>
+              <a:defRPr sz="2400" kern="1200">
+                <a:solidFill>
+                  <a:schemeClr val="tx1"/>
+                </a:solidFill>
+                <a:latin typeface="Calibri" panose="020F0502020204030204" pitchFamily="34" charset="0"/>
+                <a:ea typeface="+mn-ea"/>
+                <a:cs typeface="Calibri" panose="020F0502020204030204" pitchFamily="34" charset="0"/>
+              </a:defRPr>
+            </a:lvl2pPr>
+            <a:lvl3pPr marL="1143000" indent="-228600" algn="l" defTabSz="914400" rtl="0" eaLnBrk="1" latinLnBrk="0" hangingPunct="1">
+              <a:lnSpc>
+                <a:spcPct val="90000"/>
+              </a:lnSpc>
+              <a:spcBef>
+                <a:spcPts val="500"/>
+              </a:spcBef>
+              <a:buFont typeface="Arial" panose="020B0604020202020204" pitchFamily="34" charset="0"/>
+              <a:buChar char="•"/>
+              <a:defRPr sz="2000" kern="1200">
+                <a:solidFill>
+                  <a:schemeClr val="tx1"/>
+                </a:solidFill>
+                <a:latin typeface="Calibri" panose="020F0502020204030204" pitchFamily="34" charset="0"/>
+                <a:ea typeface="+mn-ea"/>
+                <a:cs typeface="Calibri" panose="020F0502020204030204" pitchFamily="34" charset="0"/>
+              </a:defRPr>
+            </a:lvl3pPr>
+            <a:lvl4pPr marL="1600200" indent="-228600" algn="l" defTabSz="914400" rtl="0" eaLnBrk="1" latinLnBrk="0" hangingPunct="1">
+              <a:lnSpc>
+                <a:spcPct val="90000"/>
+              </a:lnSpc>
+              <a:spcBef>
+                <a:spcPts val="500"/>
+              </a:spcBef>
+              <a:buFont typeface="Arial" panose="020B0604020202020204" pitchFamily="34" charset="0"/>
+              <a:buChar char="•"/>
+              <a:defRPr sz="1800" kern="1200">
+                <a:solidFill>
+                  <a:schemeClr val="tx1"/>
+                </a:solidFill>
+                <a:latin typeface="Calibri" panose="020F0502020204030204" pitchFamily="34" charset="0"/>
+                <a:ea typeface="+mn-ea"/>
+                <a:cs typeface="Calibri" panose="020F0502020204030204" pitchFamily="34" charset="0"/>
+              </a:defRPr>
+            </a:lvl4pPr>
+            <a:lvl5pPr marL="2057400" indent="-228600" algn="l" defTabSz="914400" rtl="0" eaLnBrk="1" latinLnBrk="0" hangingPunct="1">
+              <a:lnSpc>
+                <a:spcPct val="90000"/>
+              </a:lnSpc>
+              <a:spcBef>
+                <a:spcPts val="500"/>
+              </a:spcBef>
+              <a:buFont typeface="Arial" panose="020B0604020202020204" pitchFamily="34" charset="0"/>
+              <a:buChar char="•"/>
+              <a:defRPr sz="1800" kern="1200">
+                <a:solidFill>
+                  <a:schemeClr val="tx1"/>
+                </a:solidFill>
+                <a:latin typeface="Calibri" panose="020F0502020204030204" pitchFamily="34" charset="0"/>
+                <a:ea typeface="+mn-ea"/>
+                <a:cs typeface="Calibri" panose="020F0502020204030204" pitchFamily="34" charset="0"/>
+              </a:defRPr>
+            </a:lvl5pPr>
+            <a:lvl6pPr marL="2514600" indent="-228600" algn="l" defTabSz="914400" rtl="0" eaLnBrk="1" latinLnBrk="0" hangingPunct="1">
+              <a:lnSpc>
+                <a:spcPct val="90000"/>
+              </a:lnSpc>
+              <a:spcBef>
+                <a:spcPts val="500"/>
+              </a:spcBef>
+              <a:buFont typeface="Arial" panose="020B0604020202020204" pitchFamily="34" charset="0"/>
+              <a:buChar char="•"/>
+              <a:defRPr sz="1800" kern="1200">
+                <a:solidFill>
+                  <a:schemeClr val="tx1"/>
+                </a:solidFill>
+                <a:latin typeface="+mn-lt"/>
+                <a:ea typeface="+mn-ea"/>
+                <a:cs typeface="+mn-cs"/>
+              </a:defRPr>
+            </a:lvl6pPr>
+            <a:lvl7pPr marL="2971800" indent="-228600" algn="l" defTabSz="914400" rtl="0" eaLnBrk="1" latinLnBrk="0" hangingPunct="1">
+              <a:lnSpc>
+                <a:spcPct val="90000"/>
+              </a:lnSpc>
+              <a:spcBef>
+                <a:spcPts val="500"/>
+              </a:spcBef>
+              <a:buFont typeface="Arial" panose="020B0604020202020204" pitchFamily="34" charset="0"/>
+              <a:buChar char="•"/>
+              <a:defRPr sz="1800" kern="1200">
+                <a:solidFill>
+                  <a:schemeClr val="tx1"/>
+                </a:solidFill>
+                <a:latin typeface="+mn-lt"/>
+                <a:ea typeface="+mn-ea"/>
+                <a:cs typeface="+mn-cs"/>
+              </a:defRPr>
+            </a:lvl7pPr>
+            <a:lvl8pPr marL="3429000" indent="-228600" algn="l" defTabSz="914400" rtl="0" eaLnBrk="1" latinLnBrk="0" hangingPunct="1">
+              <a:lnSpc>
+                <a:spcPct val="90000"/>
+              </a:lnSpc>
+              <a:spcBef>
+                <a:spcPts val="500"/>
+              </a:spcBef>
+              <a:buFont typeface="Arial" panose="020B0604020202020204" pitchFamily="34" charset="0"/>
+              <a:buChar char="•"/>
+              <a:defRPr sz="1800" kern="1200">
+                <a:solidFill>
+                  <a:schemeClr val="tx1"/>
+                </a:solidFill>
+                <a:latin typeface="+mn-lt"/>
+                <a:ea typeface="+mn-ea"/>
+                <a:cs typeface="+mn-cs"/>
+              </a:defRPr>
+            </a:lvl8pPr>
+            <a:lvl9pPr marL="3886200" indent="-228600" algn="l" defTabSz="914400" rtl="0" eaLnBrk="1" latinLnBrk="0" hangingPunct="1">
+              <a:lnSpc>
+                <a:spcPct val="90000"/>
+              </a:lnSpc>
+              <a:spcBef>
+                <a:spcPts val="500"/>
+              </a:spcBef>
+              <a:buFont typeface="Arial" panose="020B0604020202020204" pitchFamily="34" charset="0"/>
+              <a:buChar char="•"/>
+              <a:defRPr sz="1800" kern="1200">
+                <a:solidFill>
+                  <a:schemeClr val="tx1"/>
+                </a:solidFill>
+                <a:latin typeface="+mn-lt"/>
+                <a:ea typeface="+mn-ea"/>
+                <a:cs typeface="+mn-cs"/>
+              </a:defRPr>
+            </a:lvl9pPr>
+          </a:lstStyle>
+          <a:p>
+            <a:r>
+              <a:rPr lang="lv-LV" sz="2800" dirty="0"/>
+              <a:t>Rezultātu stadija – uzvara pēc visu mērķu iznīcināšanu</a:t>
+            </a:r>
+          </a:p>
+        </p:txBody>
+      </p:sp>
+      <p:pic>
+        <p:nvPicPr>
+          <p:cNvPr id="4" name="Attēls 3">
+            <a:extLst>
+              <a:ext uri="{FF2B5EF4-FFF2-40B4-BE49-F238E27FC236}">
+                <a16:creationId xmlns:a16="http://schemas.microsoft.com/office/drawing/2014/main" id="{A2959F44-8596-C0DE-BCCF-C69BB25D6DF3}"/>
+              </a:ext>
+            </a:extLst>
+          </p:cNvPr>
+          <p:cNvPicPr>
+            <a:picLocks noChangeAspect="1"/>
+          </p:cNvPicPr>
+          <p:nvPr/>
+        </p:nvPicPr>
+        <p:blipFill>
+          <a:blip r:embed="rId2"/>
+          <a:stretch>
+            <a:fillRect/>
+          </a:stretch>
+        </p:blipFill>
+        <p:spPr>
+          <a:xfrm>
+            <a:off x="5070202" y="0"/>
+            <a:ext cx="6709860" cy="6858000"/>
+          </a:xfrm>
+          <a:prstGeom prst="rect">
+            <a:avLst/>
+          </a:prstGeom>
+        </p:spPr>
+      </p:pic>
+    </p:spTree>
+    <p:extLst>
+      <p:ext uri="{BB962C8B-B14F-4D97-AF65-F5344CB8AC3E}">
+        <p14:creationId xmlns:p14="http://schemas.microsoft.com/office/powerpoint/2010/main" val="287257016"/>
+      </p:ext>
+    </p:extLst>
+  </p:cSld>
+  <p:clrMapOvr>
+    <a:masterClrMapping/>
+  </p:clrMapOvr>
+</p:sld>
+</file>
+
+<file path=ppt/slides/slide24.xml><?xml version="1.0" encoding="utf-8"?>
+<p:sld xmlns:a="http://schemas.openxmlformats.org/drawingml/2006/main" xmlns:r="http://schemas.openxmlformats.org/officeDocument/2006/relationships" xmlns:p="http://schemas.openxmlformats.org/presentationml/2006/main">
+  <p:cSld>
+    <p:spTree>
+      <p:nvGrpSpPr>
+        <p:cNvPr id="1" name="">
+          <a:extLst>
+            <a:ext uri="{FF2B5EF4-FFF2-40B4-BE49-F238E27FC236}">
+              <a16:creationId xmlns:a16="http://schemas.microsoft.com/office/drawing/2014/main" id="{C89FFA2F-1EFB-D88F-617E-9023239DDAC9}"/>
+            </a:ext>
+          </a:extLst>
+        </p:cNvPr>
+        <p:cNvGrpSpPr/>
+        <p:nvPr/>
+      </p:nvGrpSpPr>
+      <p:grpSpPr>
+        <a:xfrm>
+          <a:off x="0" y="0"/>
+          <a:ext cx="0" cy="0"/>
+          <a:chOff x="0" y="0"/>
+          <a:chExt cx="0" cy="0"/>
+        </a:xfrm>
+      </p:grpSpPr>
+      <p:sp>
+        <p:nvSpPr>
+          <p:cNvPr id="2" name="Virsraksts 1">
+            <a:extLst>
+              <a:ext uri="{FF2B5EF4-FFF2-40B4-BE49-F238E27FC236}">
+                <a16:creationId xmlns:a16="http://schemas.microsoft.com/office/drawing/2014/main" id="{BB9FB7C5-CC90-4B37-BCDA-D6D4702AEDC3}"/>
+              </a:ext>
+            </a:extLst>
+          </p:cNvPr>
+          <p:cNvSpPr>
+            <a:spLocks noGrp="1"/>
+          </p:cNvSpPr>
+          <p:nvPr>
+            <p:ph type="title"/>
+          </p:nvPr>
+        </p:nvSpPr>
+        <p:spPr/>
+        <p:txBody>
+          <a:bodyPr/>
+          <a:lstStyle/>
+          <a:p>
+            <a:r>
+              <a:rPr lang="lv-LV" dirty="0"/>
+              <a:t>Ainas – Spēles laukums</a:t>
+            </a:r>
+          </a:p>
+        </p:txBody>
+      </p:sp>
+      <p:sp>
+        <p:nvSpPr>
+          <p:cNvPr id="7" name="Teksta vietturis 15">
+            <a:extLst>
+              <a:ext uri="{FF2B5EF4-FFF2-40B4-BE49-F238E27FC236}">
+                <a16:creationId xmlns:a16="http://schemas.microsoft.com/office/drawing/2014/main" id="{55F50E4E-2B40-462F-C417-DC8D50AD6AF0}"/>
+              </a:ext>
+            </a:extLst>
+          </p:cNvPr>
+          <p:cNvSpPr txBox="1">
+            <a:spLocks/>
+          </p:cNvSpPr>
+          <p:nvPr/>
+        </p:nvSpPr>
+        <p:spPr>
+          <a:xfrm>
+            <a:off x="838199" y="3871737"/>
+            <a:ext cx="3716548" cy="844707"/>
+          </a:xfrm>
+          <a:prstGeom prst="rect">
+            <a:avLst/>
+          </a:prstGeom>
+        </p:spPr>
+        <p:txBody>
+          <a:bodyPr vert="horz" lIns="91440" tIns="45720" rIns="91440" bIns="45720" rtlCol="0" anchor="t">
+            <a:noAutofit/>
+          </a:bodyPr>
+          <a:lstStyle>
+            <a:lvl1pPr marL="0" indent="0" algn="l" defTabSz="914400" rtl="0" eaLnBrk="1" latinLnBrk="0" hangingPunct="1">
+              <a:lnSpc>
+                <a:spcPct val="100000"/>
+              </a:lnSpc>
+              <a:spcBef>
+                <a:spcPts val="1000"/>
+              </a:spcBef>
+              <a:buFont typeface="Arial" panose="020B0604020202020204" pitchFamily="34" charset="0"/>
+              <a:buNone/>
+              <a:defRPr sz="1200" kern="1200">
+                <a:solidFill>
+                  <a:schemeClr val="bg1"/>
+                </a:solidFill>
+                <a:latin typeface="Calibri" panose="020F0502020204030204" pitchFamily="34" charset="0"/>
+                <a:ea typeface="+mn-ea"/>
+                <a:cs typeface="Calibri" panose="020F0502020204030204" pitchFamily="34" charset="0"/>
+              </a:defRPr>
+            </a:lvl1pPr>
+            <a:lvl2pPr marL="685800" indent="-228600" algn="l" defTabSz="914400" rtl="0" eaLnBrk="1" latinLnBrk="0" hangingPunct="1">
+              <a:lnSpc>
+                <a:spcPct val="90000"/>
+              </a:lnSpc>
+              <a:spcBef>
+                <a:spcPts val="500"/>
+              </a:spcBef>
+              <a:buFont typeface="Arial" panose="020B0604020202020204" pitchFamily="34" charset="0"/>
+              <a:buChar char="•"/>
+              <a:defRPr sz="2400" kern="1200">
+                <a:solidFill>
+                  <a:schemeClr val="tx1"/>
+                </a:solidFill>
+                <a:latin typeface="Calibri" panose="020F0502020204030204" pitchFamily="34" charset="0"/>
+                <a:ea typeface="+mn-ea"/>
+                <a:cs typeface="Calibri" panose="020F0502020204030204" pitchFamily="34" charset="0"/>
+              </a:defRPr>
+            </a:lvl2pPr>
+            <a:lvl3pPr marL="1143000" indent="-228600" algn="l" defTabSz="914400" rtl="0" eaLnBrk="1" latinLnBrk="0" hangingPunct="1">
+              <a:lnSpc>
+                <a:spcPct val="90000"/>
+              </a:lnSpc>
+              <a:spcBef>
+                <a:spcPts val="500"/>
+              </a:spcBef>
+              <a:buFont typeface="Arial" panose="020B0604020202020204" pitchFamily="34" charset="0"/>
+              <a:buChar char="•"/>
+              <a:defRPr sz="2000" kern="1200">
+                <a:solidFill>
+                  <a:schemeClr val="tx1"/>
+                </a:solidFill>
+                <a:latin typeface="Calibri" panose="020F0502020204030204" pitchFamily="34" charset="0"/>
+                <a:ea typeface="+mn-ea"/>
+                <a:cs typeface="Calibri" panose="020F0502020204030204" pitchFamily="34" charset="0"/>
+              </a:defRPr>
+            </a:lvl3pPr>
+            <a:lvl4pPr marL="1600200" indent="-228600" algn="l" defTabSz="914400" rtl="0" eaLnBrk="1" latinLnBrk="0" hangingPunct="1">
+              <a:lnSpc>
+                <a:spcPct val="90000"/>
+              </a:lnSpc>
+              <a:spcBef>
+                <a:spcPts val="500"/>
+              </a:spcBef>
+              <a:buFont typeface="Arial" panose="020B0604020202020204" pitchFamily="34" charset="0"/>
+              <a:buChar char="•"/>
+              <a:defRPr sz="1800" kern="1200">
+                <a:solidFill>
+                  <a:schemeClr val="tx1"/>
+                </a:solidFill>
+                <a:latin typeface="Calibri" panose="020F0502020204030204" pitchFamily="34" charset="0"/>
+                <a:ea typeface="+mn-ea"/>
+                <a:cs typeface="Calibri" panose="020F0502020204030204" pitchFamily="34" charset="0"/>
+              </a:defRPr>
+            </a:lvl4pPr>
+            <a:lvl5pPr marL="2057400" indent="-228600" algn="l" defTabSz="914400" rtl="0" eaLnBrk="1" latinLnBrk="0" hangingPunct="1">
+              <a:lnSpc>
+                <a:spcPct val="90000"/>
+              </a:lnSpc>
+              <a:spcBef>
+                <a:spcPts val="500"/>
+              </a:spcBef>
+              <a:buFont typeface="Arial" panose="020B0604020202020204" pitchFamily="34" charset="0"/>
+              <a:buChar char="•"/>
+              <a:defRPr sz="1800" kern="1200">
+                <a:solidFill>
+                  <a:schemeClr val="tx1"/>
+                </a:solidFill>
+                <a:latin typeface="Calibri" panose="020F0502020204030204" pitchFamily="34" charset="0"/>
+                <a:ea typeface="+mn-ea"/>
+                <a:cs typeface="Calibri" panose="020F0502020204030204" pitchFamily="34" charset="0"/>
+              </a:defRPr>
+            </a:lvl5pPr>
+            <a:lvl6pPr marL="2514600" indent="-228600" algn="l" defTabSz="914400" rtl="0" eaLnBrk="1" latinLnBrk="0" hangingPunct="1">
+              <a:lnSpc>
+                <a:spcPct val="90000"/>
+              </a:lnSpc>
+              <a:spcBef>
+                <a:spcPts val="500"/>
+              </a:spcBef>
+              <a:buFont typeface="Arial" panose="020B0604020202020204" pitchFamily="34" charset="0"/>
+              <a:buChar char="•"/>
+              <a:defRPr sz="1800" kern="1200">
+                <a:solidFill>
+                  <a:schemeClr val="tx1"/>
+                </a:solidFill>
+                <a:latin typeface="+mn-lt"/>
+                <a:ea typeface="+mn-ea"/>
+                <a:cs typeface="+mn-cs"/>
+              </a:defRPr>
+            </a:lvl6pPr>
+            <a:lvl7pPr marL="2971800" indent="-228600" algn="l" defTabSz="914400" rtl="0" eaLnBrk="1" latinLnBrk="0" hangingPunct="1">
+              <a:lnSpc>
+                <a:spcPct val="90000"/>
+              </a:lnSpc>
+              <a:spcBef>
+                <a:spcPts val="500"/>
+              </a:spcBef>
+              <a:buFont typeface="Arial" panose="020B0604020202020204" pitchFamily="34" charset="0"/>
+              <a:buChar char="•"/>
+              <a:defRPr sz="1800" kern="1200">
+                <a:solidFill>
+                  <a:schemeClr val="tx1"/>
+                </a:solidFill>
+                <a:latin typeface="+mn-lt"/>
+                <a:ea typeface="+mn-ea"/>
+                <a:cs typeface="+mn-cs"/>
+              </a:defRPr>
+            </a:lvl7pPr>
+            <a:lvl8pPr marL="3429000" indent="-228600" algn="l" defTabSz="914400" rtl="0" eaLnBrk="1" latinLnBrk="0" hangingPunct="1">
+              <a:lnSpc>
+                <a:spcPct val="90000"/>
+              </a:lnSpc>
+              <a:spcBef>
+                <a:spcPts val="500"/>
+              </a:spcBef>
+              <a:buFont typeface="Arial" panose="020B0604020202020204" pitchFamily="34" charset="0"/>
+              <a:buChar char="•"/>
+              <a:defRPr sz="1800" kern="1200">
+                <a:solidFill>
+                  <a:schemeClr val="tx1"/>
+                </a:solidFill>
+                <a:latin typeface="+mn-lt"/>
+                <a:ea typeface="+mn-ea"/>
+                <a:cs typeface="+mn-cs"/>
+              </a:defRPr>
+            </a:lvl8pPr>
+            <a:lvl9pPr marL="3886200" indent="-228600" algn="l" defTabSz="914400" rtl="0" eaLnBrk="1" latinLnBrk="0" hangingPunct="1">
+              <a:lnSpc>
+                <a:spcPct val="90000"/>
+              </a:lnSpc>
+              <a:spcBef>
+                <a:spcPts val="500"/>
+              </a:spcBef>
+              <a:buFont typeface="Arial" panose="020B0604020202020204" pitchFamily="34" charset="0"/>
+              <a:buChar char="•"/>
+              <a:defRPr sz="1800" kern="1200">
+                <a:solidFill>
+                  <a:schemeClr val="tx1"/>
+                </a:solidFill>
+                <a:latin typeface="+mn-lt"/>
+                <a:ea typeface="+mn-ea"/>
+                <a:cs typeface="+mn-cs"/>
+              </a:defRPr>
+            </a:lvl9pPr>
+          </a:lstStyle>
+          <a:p>
+            <a:r>
+              <a:rPr lang="lv-LV" sz="2800" dirty="0"/>
+              <a:t>3. līmenī atrodas aizsegti laukumi</a:t>
+            </a:r>
+          </a:p>
+        </p:txBody>
+      </p:sp>
+      <p:pic>
+        <p:nvPicPr>
+          <p:cNvPr id="5" name="Attēls 4">
+            <a:extLst>
+              <a:ext uri="{FF2B5EF4-FFF2-40B4-BE49-F238E27FC236}">
+                <a16:creationId xmlns:a16="http://schemas.microsoft.com/office/drawing/2014/main" id="{97C32BDA-2CFD-6126-E7CC-FE20DA99F100}"/>
+              </a:ext>
+            </a:extLst>
+          </p:cNvPr>
+          <p:cNvPicPr>
+            <a:picLocks noChangeAspect="1"/>
+          </p:cNvPicPr>
+          <p:nvPr/>
+        </p:nvPicPr>
+        <p:blipFill>
+          <a:blip r:embed="rId2"/>
+          <a:stretch>
+            <a:fillRect/>
+          </a:stretch>
+        </p:blipFill>
+        <p:spPr>
+          <a:xfrm>
+            <a:off x="5130587" y="60385"/>
+            <a:ext cx="6709860" cy="6858000"/>
+          </a:xfrm>
+          <a:prstGeom prst="rect">
+            <a:avLst/>
+          </a:prstGeom>
+        </p:spPr>
+      </p:pic>
+    </p:spTree>
+    <p:extLst>
+      <p:ext uri="{BB962C8B-B14F-4D97-AF65-F5344CB8AC3E}">
+        <p14:creationId xmlns:p14="http://schemas.microsoft.com/office/powerpoint/2010/main" val="2616358136"/>
+      </p:ext>
+    </p:extLst>
+  </p:cSld>
+  <p:clrMapOvr>
+    <a:masterClrMapping/>
+  </p:clrMapOvr>
+</p:sld>
+</file>
+
+<file path=ppt/slides/slide25.xml><?xml version="1.0" encoding="utf-8"?>
+<p:sld xmlns:a="http://schemas.openxmlformats.org/drawingml/2006/main" xmlns:r="http://schemas.openxmlformats.org/officeDocument/2006/relationships" xmlns:p="http://schemas.openxmlformats.org/presentationml/2006/main">
+  <p:cSld>
+    <p:spTree>
+      <p:nvGrpSpPr>
+        <p:cNvPr id="1" name="">
+          <a:extLst>
+            <a:ext uri="{FF2B5EF4-FFF2-40B4-BE49-F238E27FC236}">
+              <a16:creationId xmlns:a16="http://schemas.microsoft.com/office/drawing/2014/main" id="{AAC159A6-093D-C083-0631-90595C38798E}"/>
+            </a:ext>
+          </a:extLst>
+        </p:cNvPr>
+        <p:cNvGrpSpPr/>
+        <p:nvPr/>
+      </p:nvGrpSpPr>
+      <p:grpSpPr>
+        <a:xfrm>
+          <a:off x="0" y="0"/>
+          <a:ext cx="0" cy="0"/>
+          <a:chOff x="0" y="0"/>
+          <a:chExt cx="0" cy="0"/>
+        </a:xfrm>
+      </p:grpSpPr>
+      <p:sp>
+        <p:nvSpPr>
+          <p:cNvPr id="2" name="Virsraksts 1">
+            <a:extLst>
+              <a:ext uri="{FF2B5EF4-FFF2-40B4-BE49-F238E27FC236}">
+                <a16:creationId xmlns:a16="http://schemas.microsoft.com/office/drawing/2014/main" id="{BDF3B7EA-ECB7-21F3-E94F-48C9F21DE935}"/>
+              </a:ext>
+            </a:extLst>
+          </p:cNvPr>
+          <p:cNvSpPr>
+            <a:spLocks noGrp="1"/>
+          </p:cNvSpPr>
+          <p:nvPr>
+            <p:ph type="title"/>
+          </p:nvPr>
+        </p:nvSpPr>
+        <p:spPr/>
+        <p:txBody>
+          <a:bodyPr/>
+          <a:lstStyle/>
+          <a:p>
+            <a:r>
+              <a:rPr lang="lv-LV" dirty="0"/>
+              <a:t>Ainas – Spēles laukums</a:t>
+            </a:r>
+          </a:p>
+        </p:txBody>
+      </p:sp>
+      <p:sp>
+        <p:nvSpPr>
+          <p:cNvPr id="7" name="Teksta vietturis 15">
+            <a:extLst>
+              <a:ext uri="{FF2B5EF4-FFF2-40B4-BE49-F238E27FC236}">
+                <a16:creationId xmlns:a16="http://schemas.microsoft.com/office/drawing/2014/main" id="{5C3DD07A-6532-DDA3-FA4B-D378896294C9}"/>
+              </a:ext>
+            </a:extLst>
+          </p:cNvPr>
+          <p:cNvSpPr txBox="1">
+            <a:spLocks/>
+          </p:cNvSpPr>
+          <p:nvPr/>
+        </p:nvSpPr>
+        <p:spPr>
+          <a:xfrm>
+            <a:off x="838199" y="3871737"/>
+            <a:ext cx="3716548" cy="844707"/>
+          </a:xfrm>
+          <a:prstGeom prst="rect">
+            <a:avLst/>
+          </a:prstGeom>
+        </p:spPr>
+        <p:txBody>
+          <a:bodyPr vert="horz" lIns="91440" tIns="45720" rIns="91440" bIns="45720" rtlCol="0" anchor="t">
+            <a:noAutofit/>
+          </a:bodyPr>
+          <a:lstStyle>
+            <a:lvl1pPr marL="0" indent="0" algn="l" defTabSz="914400" rtl="0" eaLnBrk="1" latinLnBrk="0" hangingPunct="1">
+              <a:lnSpc>
+                <a:spcPct val="100000"/>
+              </a:lnSpc>
+              <a:spcBef>
+                <a:spcPts val="1000"/>
+              </a:spcBef>
+              <a:buFont typeface="Arial" panose="020B0604020202020204" pitchFamily="34" charset="0"/>
+              <a:buNone/>
+              <a:defRPr sz="1200" kern="1200">
+                <a:solidFill>
+                  <a:schemeClr val="bg1"/>
+                </a:solidFill>
+                <a:latin typeface="Calibri" panose="020F0502020204030204" pitchFamily="34" charset="0"/>
+                <a:ea typeface="+mn-ea"/>
+                <a:cs typeface="Calibri" panose="020F0502020204030204" pitchFamily="34" charset="0"/>
+              </a:defRPr>
+            </a:lvl1pPr>
+            <a:lvl2pPr marL="685800" indent="-228600" algn="l" defTabSz="914400" rtl="0" eaLnBrk="1" latinLnBrk="0" hangingPunct="1">
+              <a:lnSpc>
+                <a:spcPct val="90000"/>
+              </a:lnSpc>
+              <a:spcBef>
+                <a:spcPts val="500"/>
+              </a:spcBef>
+              <a:buFont typeface="Arial" panose="020B0604020202020204" pitchFamily="34" charset="0"/>
+              <a:buChar char="•"/>
+              <a:defRPr sz="2400" kern="1200">
+                <a:solidFill>
+                  <a:schemeClr val="tx1"/>
+                </a:solidFill>
+                <a:latin typeface="Calibri" panose="020F0502020204030204" pitchFamily="34" charset="0"/>
+                <a:ea typeface="+mn-ea"/>
+                <a:cs typeface="Calibri" panose="020F0502020204030204" pitchFamily="34" charset="0"/>
+              </a:defRPr>
+            </a:lvl2pPr>
+            <a:lvl3pPr marL="1143000" indent="-228600" algn="l" defTabSz="914400" rtl="0" eaLnBrk="1" latinLnBrk="0" hangingPunct="1">
+              <a:lnSpc>
+                <a:spcPct val="90000"/>
+              </a:lnSpc>
+              <a:spcBef>
+                <a:spcPts val="500"/>
+              </a:spcBef>
+              <a:buFont typeface="Arial" panose="020B0604020202020204" pitchFamily="34" charset="0"/>
+              <a:buChar char="•"/>
+              <a:defRPr sz="2000" kern="1200">
+                <a:solidFill>
+                  <a:schemeClr val="tx1"/>
+                </a:solidFill>
+                <a:latin typeface="Calibri" panose="020F0502020204030204" pitchFamily="34" charset="0"/>
+                <a:ea typeface="+mn-ea"/>
+                <a:cs typeface="Calibri" panose="020F0502020204030204" pitchFamily="34" charset="0"/>
+              </a:defRPr>
+            </a:lvl3pPr>
+            <a:lvl4pPr marL="1600200" indent="-228600" algn="l" defTabSz="914400" rtl="0" eaLnBrk="1" latinLnBrk="0" hangingPunct="1">
+              <a:lnSpc>
+                <a:spcPct val="90000"/>
+              </a:lnSpc>
+              <a:spcBef>
+                <a:spcPts val="500"/>
+              </a:spcBef>
+              <a:buFont typeface="Arial" panose="020B0604020202020204" pitchFamily="34" charset="0"/>
+              <a:buChar char="•"/>
+              <a:defRPr sz="1800" kern="1200">
+                <a:solidFill>
+                  <a:schemeClr val="tx1"/>
+                </a:solidFill>
+                <a:latin typeface="Calibri" panose="020F0502020204030204" pitchFamily="34" charset="0"/>
+                <a:ea typeface="+mn-ea"/>
+                <a:cs typeface="Calibri" panose="020F0502020204030204" pitchFamily="34" charset="0"/>
+              </a:defRPr>
+            </a:lvl4pPr>
+            <a:lvl5pPr marL="2057400" indent="-228600" algn="l" defTabSz="914400" rtl="0" eaLnBrk="1" latinLnBrk="0" hangingPunct="1">
+              <a:lnSpc>
+                <a:spcPct val="90000"/>
+              </a:lnSpc>
+              <a:spcBef>
+                <a:spcPts val="500"/>
+              </a:spcBef>
+              <a:buFont typeface="Arial" panose="020B0604020202020204" pitchFamily="34" charset="0"/>
+              <a:buChar char="•"/>
+              <a:defRPr sz="1800" kern="1200">
+                <a:solidFill>
+                  <a:schemeClr val="tx1"/>
+                </a:solidFill>
+                <a:latin typeface="Calibri" panose="020F0502020204030204" pitchFamily="34" charset="0"/>
+                <a:ea typeface="+mn-ea"/>
+                <a:cs typeface="Calibri" panose="020F0502020204030204" pitchFamily="34" charset="0"/>
+              </a:defRPr>
+            </a:lvl5pPr>
+            <a:lvl6pPr marL="2514600" indent="-228600" algn="l" defTabSz="914400" rtl="0" eaLnBrk="1" latinLnBrk="0" hangingPunct="1">
+              <a:lnSpc>
+                <a:spcPct val="90000"/>
+              </a:lnSpc>
+              <a:spcBef>
+                <a:spcPts val="500"/>
+              </a:spcBef>
+              <a:buFont typeface="Arial" panose="020B0604020202020204" pitchFamily="34" charset="0"/>
+              <a:buChar char="•"/>
+              <a:defRPr sz="1800" kern="1200">
+                <a:solidFill>
+                  <a:schemeClr val="tx1"/>
+                </a:solidFill>
+                <a:latin typeface="+mn-lt"/>
+                <a:ea typeface="+mn-ea"/>
+                <a:cs typeface="+mn-cs"/>
+              </a:defRPr>
+            </a:lvl6pPr>
+            <a:lvl7pPr marL="2971800" indent="-228600" algn="l" defTabSz="914400" rtl="0" eaLnBrk="1" latinLnBrk="0" hangingPunct="1">
+              <a:lnSpc>
+                <a:spcPct val="90000"/>
+              </a:lnSpc>
+              <a:spcBef>
+                <a:spcPts val="500"/>
+              </a:spcBef>
+              <a:buFont typeface="Arial" panose="020B0604020202020204" pitchFamily="34" charset="0"/>
+              <a:buChar char="•"/>
+              <a:defRPr sz="1800" kern="1200">
+                <a:solidFill>
+                  <a:schemeClr val="tx1"/>
+                </a:solidFill>
+                <a:latin typeface="+mn-lt"/>
+                <a:ea typeface="+mn-ea"/>
+                <a:cs typeface="+mn-cs"/>
+              </a:defRPr>
+            </a:lvl7pPr>
+            <a:lvl8pPr marL="3429000" indent="-228600" algn="l" defTabSz="914400" rtl="0" eaLnBrk="1" latinLnBrk="0" hangingPunct="1">
+              <a:lnSpc>
+                <a:spcPct val="90000"/>
+              </a:lnSpc>
+              <a:spcBef>
+                <a:spcPts val="500"/>
+              </a:spcBef>
+              <a:buFont typeface="Arial" panose="020B0604020202020204" pitchFamily="34" charset="0"/>
+              <a:buChar char="•"/>
+              <a:defRPr sz="1800" kern="1200">
+                <a:solidFill>
+                  <a:schemeClr val="tx1"/>
+                </a:solidFill>
+                <a:latin typeface="+mn-lt"/>
+                <a:ea typeface="+mn-ea"/>
+                <a:cs typeface="+mn-cs"/>
+              </a:defRPr>
+            </a:lvl8pPr>
+            <a:lvl9pPr marL="3886200" indent="-228600" algn="l" defTabSz="914400" rtl="0" eaLnBrk="1" latinLnBrk="0" hangingPunct="1">
+              <a:lnSpc>
+                <a:spcPct val="90000"/>
+              </a:lnSpc>
+              <a:spcBef>
+                <a:spcPts val="500"/>
+              </a:spcBef>
+              <a:buFont typeface="Arial" panose="020B0604020202020204" pitchFamily="34" charset="0"/>
+              <a:buChar char="•"/>
+              <a:defRPr sz="1800" kern="1200">
+                <a:solidFill>
+                  <a:schemeClr val="tx1"/>
+                </a:solidFill>
+                <a:latin typeface="+mn-lt"/>
+                <a:ea typeface="+mn-ea"/>
+                <a:cs typeface="+mn-cs"/>
+              </a:defRPr>
+            </a:lvl9pPr>
+          </a:lstStyle>
+          <a:p>
+            <a:r>
+              <a:rPr lang="lv-LV" sz="2800" dirty="0"/>
+              <a:t>Izlūku izsaukšanas piedāvājums pēc nejaušības (1/6 iespēja </a:t>
+            </a:r>
+            <a:r>
+              <a:rPr lang="lv-LV" sz="2800" dirty="0" err="1"/>
+              <a:t>aizseguma</a:t>
+            </a:r>
+            <a:r>
+              <a:rPr lang="lv-LV" sz="2800" dirty="0"/>
+              <a:t> noņemšana netiek veikta)</a:t>
+            </a:r>
+          </a:p>
+        </p:txBody>
+      </p:sp>
+      <p:pic>
+        <p:nvPicPr>
+          <p:cNvPr id="4" name="Attēls 3">
+            <a:extLst>
+              <a:ext uri="{FF2B5EF4-FFF2-40B4-BE49-F238E27FC236}">
+                <a16:creationId xmlns:a16="http://schemas.microsoft.com/office/drawing/2014/main" id="{CF28FEF3-9CD1-289F-388C-AC3591CAE083}"/>
+              </a:ext>
+            </a:extLst>
+          </p:cNvPr>
+          <p:cNvPicPr>
+            <a:picLocks noChangeAspect="1"/>
+          </p:cNvPicPr>
+          <p:nvPr/>
+        </p:nvPicPr>
+        <p:blipFill>
+          <a:blip r:embed="rId2"/>
+          <a:stretch>
+            <a:fillRect/>
+          </a:stretch>
+        </p:blipFill>
+        <p:spPr>
+          <a:xfrm>
+            <a:off x="5121961" y="0"/>
+            <a:ext cx="6709860" cy="6858000"/>
+          </a:xfrm>
+          <a:prstGeom prst="rect">
+            <a:avLst/>
+          </a:prstGeom>
+        </p:spPr>
+      </p:pic>
+    </p:spTree>
+    <p:extLst>
+      <p:ext uri="{BB962C8B-B14F-4D97-AF65-F5344CB8AC3E}">
+        <p14:creationId xmlns:p14="http://schemas.microsoft.com/office/powerpoint/2010/main" val="1683076906"/>
+      </p:ext>
+    </p:extLst>
+  </p:cSld>
+  <p:clrMapOvr>
+    <a:masterClrMapping/>
+  </p:clrMapOvr>
+</p:sld>
+</file>
+
+<file path=ppt/slides/slide26.xml><?xml version="1.0" encoding="utf-8"?>
+<p:sld xmlns:a="http://schemas.openxmlformats.org/drawingml/2006/main" xmlns:r="http://schemas.openxmlformats.org/officeDocument/2006/relationships" xmlns:p="http://schemas.openxmlformats.org/presentationml/2006/main">
+  <p:cSld>
+    <p:spTree>
+      <p:nvGrpSpPr>
+        <p:cNvPr id="1" name="">
+          <a:extLst>
+            <a:ext uri="{FF2B5EF4-FFF2-40B4-BE49-F238E27FC236}">
+              <a16:creationId xmlns:a16="http://schemas.microsoft.com/office/drawing/2014/main" id="{687F4B6D-649F-C9F2-8FC4-64968B6E3475}"/>
+            </a:ext>
+          </a:extLst>
+        </p:cNvPr>
+        <p:cNvGrpSpPr/>
+        <p:nvPr/>
+      </p:nvGrpSpPr>
+      <p:grpSpPr>
+        <a:xfrm>
+          <a:off x="0" y="0"/>
+          <a:ext cx="0" cy="0"/>
+          <a:chOff x="0" y="0"/>
+          <a:chExt cx="0" cy="0"/>
+        </a:xfrm>
+      </p:grpSpPr>
+      <p:sp>
+        <p:nvSpPr>
+          <p:cNvPr id="2" name="Virsraksts 1">
+            <a:extLst>
+              <a:ext uri="{FF2B5EF4-FFF2-40B4-BE49-F238E27FC236}">
+                <a16:creationId xmlns:a16="http://schemas.microsoft.com/office/drawing/2014/main" id="{130E3A23-5713-F627-074D-5995FC4B484F}"/>
+              </a:ext>
+            </a:extLst>
+          </p:cNvPr>
+          <p:cNvSpPr>
+            <a:spLocks noGrp="1"/>
+          </p:cNvSpPr>
+          <p:nvPr>
+            <p:ph type="title"/>
+          </p:nvPr>
+        </p:nvSpPr>
+        <p:spPr/>
+        <p:txBody>
+          <a:bodyPr/>
+          <a:lstStyle/>
+          <a:p>
+            <a:r>
+              <a:rPr lang="lv-LV" dirty="0"/>
+              <a:t>Ainas – Spēles laukums</a:t>
+            </a:r>
+          </a:p>
+        </p:txBody>
+      </p:sp>
+      <p:sp>
+        <p:nvSpPr>
+          <p:cNvPr id="7" name="Teksta vietturis 15">
+            <a:extLst>
+              <a:ext uri="{FF2B5EF4-FFF2-40B4-BE49-F238E27FC236}">
+                <a16:creationId xmlns:a16="http://schemas.microsoft.com/office/drawing/2014/main" id="{51564D8B-3759-6050-6004-9172C88D4F1A}"/>
+              </a:ext>
+            </a:extLst>
+          </p:cNvPr>
+          <p:cNvSpPr txBox="1">
+            <a:spLocks/>
+          </p:cNvSpPr>
+          <p:nvPr/>
+        </p:nvSpPr>
+        <p:spPr>
+          <a:xfrm>
+            <a:off x="838199" y="3871737"/>
+            <a:ext cx="3716548" cy="844707"/>
+          </a:xfrm>
+          <a:prstGeom prst="rect">
+            <a:avLst/>
+          </a:prstGeom>
+        </p:spPr>
+        <p:txBody>
+          <a:bodyPr vert="horz" lIns="91440" tIns="45720" rIns="91440" bIns="45720" rtlCol="0" anchor="t">
+            <a:noAutofit/>
+          </a:bodyPr>
+          <a:lstStyle>
+            <a:lvl1pPr marL="0" indent="0" algn="l" defTabSz="914400" rtl="0" eaLnBrk="1" latinLnBrk="0" hangingPunct="1">
+              <a:lnSpc>
+                <a:spcPct val="100000"/>
+              </a:lnSpc>
+              <a:spcBef>
+                <a:spcPts val="1000"/>
+              </a:spcBef>
+              <a:buFont typeface="Arial" panose="020B0604020202020204" pitchFamily="34" charset="0"/>
+              <a:buNone/>
+              <a:defRPr sz="1200" kern="1200">
+                <a:solidFill>
+                  <a:schemeClr val="bg1"/>
+                </a:solidFill>
+                <a:latin typeface="Calibri" panose="020F0502020204030204" pitchFamily="34" charset="0"/>
+                <a:ea typeface="+mn-ea"/>
+                <a:cs typeface="Calibri" panose="020F0502020204030204" pitchFamily="34" charset="0"/>
+              </a:defRPr>
+            </a:lvl1pPr>
+            <a:lvl2pPr marL="685800" indent="-228600" algn="l" defTabSz="914400" rtl="0" eaLnBrk="1" latinLnBrk="0" hangingPunct="1">
+              <a:lnSpc>
+                <a:spcPct val="90000"/>
+              </a:lnSpc>
+              <a:spcBef>
+                <a:spcPts val="500"/>
+              </a:spcBef>
+              <a:buFont typeface="Arial" panose="020B0604020202020204" pitchFamily="34" charset="0"/>
+              <a:buChar char="•"/>
+              <a:defRPr sz="2400" kern="1200">
+                <a:solidFill>
+                  <a:schemeClr val="tx1"/>
+                </a:solidFill>
+                <a:latin typeface="Calibri" panose="020F0502020204030204" pitchFamily="34" charset="0"/>
+                <a:ea typeface="+mn-ea"/>
+                <a:cs typeface="Calibri" panose="020F0502020204030204" pitchFamily="34" charset="0"/>
+              </a:defRPr>
+            </a:lvl2pPr>
+            <a:lvl3pPr marL="1143000" indent="-228600" algn="l" defTabSz="914400" rtl="0" eaLnBrk="1" latinLnBrk="0" hangingPunct="1">
+              <a:lnSpc>
+                <a:spcPct val="90000"/>
+              </a:lnSpc>
+              <a:spcBef>
+                <a:spcPts val="500"/>
+              </a:spcBef>
+              <a:buFont typeface="Arial" panose="020B0604020202020204" pitchFamily="34" charset="0"/>
+              <a:buChar char="•"/>
+              <a:defRPr sz="2000" kern="1200">
+                <a:solidFill>
+                  <a:schemeClr val="tx1"/>
+                </a:solidFill>
+                <a:latin typeface="Calibri" panose="020F0502020204030204" pitchFamily="34" charset="0"/>
+                <a:ea typeface="+mn-ea"/>
+                <a:cs typeface="Calibri" panose="020F0502020204030204" pitchFamily="34" charset="0"/>
+              </a:defRPr>
+            </a:lvl3pPr>
+            <a:lvl4pPr marL="1600200" indent="-228600" algn="l" defTabSz="914400" rtl="0" eaLnBrk="1" latinLnBrk="0" hangingPunct="1">
+              <a:lnSpc>
+                <a:spcPct val="90000"/>
+              </a:lnSpc>
+              <a:spcBef>
+                <a:spcPts val="500"/>
+              </a:spcBef>
+              <a:buFont typeface="Arial" panose="020B0604020202020204" pitchFamily="34" charset="0"/>
+              <a:buChar char="•"/>
+              <a:defRPr sz="1800" kern="1200">
+                <a:solidFill>
+                  <a:schemeClr val="tx1"/>
+                </a:solidFill>
+                <a:latin typeface="Calibri" panose="020F0502020204030204" pitchFamily="34" charset="0"/>
+                <a:ea typeface="+mn-ea"/>
+                <a:cs typeface="Calibri" panose="020F0502020204030204" pitchFamily="34" charset="0"/>
+              </a:defRPr>
+            </a:lvl4pPr>
+            <a:lvl5pPr marL="2057400" indent="-228600" algn="l" defTabSz="914400" rtl="0" eaLnBrk="1" latinLnBrk="0" hangingPunct="1">
+              <a:lnSpc>
+                <a:spcPct val="90000"/>
+              </a:lnSpc>
+              <a:spcBef>
+                <a:spcPts val="500"/>
+              </a:spcBef>
+              <a:buFont typeface="Arial" panose="020B0604020202020204" pitchFamily="34" charset="0"/>
+              <a:buChar char="•"/>
+              <a:defRPr sz="1800" kern="1200">
+                <a:solidFill>
+                  <a:schemeClr val="tx1"/>
+                </a:solidFill>
+                <a:latin typeface="Calibri" panose="020F0502020204030204" pitchFamily="34" charset="0"/>
+                <a:ea typeface="+mn-ea"/>
+                <a:cs typeface="Calibri" panose="020F0502020204030204" pitchFamily="34" charset="0"/>
+              </a:defRPr>
+            </a:lvl5pPr>
+            <a:lvl6pPr marL="2514600" indent="-228600" algn="l" defTabSz="914400" rtl="0" eaLnBrk="1" latinLnBrk="0" hangingPunct="1">
+              <a:lnSpc>
+                <a:spcPct val="90000"/>
+              </a:lnSpc>
+              <a:spcBef>
+                <a:spcPts val="500"/>
+              </a:spcBef>
+              <a:buFont typeface="Arial" panose="020B0604020202020204" pitchFamily="34" charset="0"/>
+              <a:buChar char="•"/>
+              <a:defRPr sz="1800" kern="1200">
+                <a:solidFill>
+                  <a:schemeClr val="tx1"/>
+                </a:solidFill>
+                <a:latin typeface="+mn-lt"/>
+                <a:ea typeface="+mn-ea"/>
+                <a:cs typeface="+mn-cs"/>
+              </a:defRPr>
+            </a:lvl6pPr>
+            <a:lvl7pPr marL="2971800" indent="-228600" algn="l" defTabSz="914400" rtl="0" eaLnBrk="1" latinLnBrk="0" hangingPunct="1">
+              <a:lnSpc>
+                <a:spcPct val="90000"/>
+              </a:lnSpc>
+              <a:spcBef>
+                <a:spcPts val="500"/>
+              </a:spcBef>
+              <a:buFont typeface="Arial" panose="020B0604020202020204" pitchFamily="34" charset="0"/>
+              <a:buChar char="•"/>
+              <a:defRPr sz="1800" kern="1200">
+                <a:solidFill>
+                  <a:schemeClr val="tx1"/>
+                </a:solidFill>
+                <a:latin typeface="+mn-lt"/>
+                <a:ea typeface="+mn-ea"/>
+                <a:cs typeface="+mn-cs"/>
+              </a:defRPr>
+            </a:lvl7pPr>
+            <a:lvl8pPr marL="3429000" indent="-228600" algn="l" defTabSz="914400" rtl="0" eaLnBrk="1" latinLnBrk="0" hangingPunct="1">
+              <a:lnSpc>
+                <a:spcPct val="90000"/>
+              </a:lnSpc>
+              <a:spcBef>
+                <a:spcPts val="500"/>
+              </a:spcBef>
+              <a:buFont typeface="Arial" panose="020B0604020202020204" pitchFamily="34" charset="0"/>
+              <a:buChar char="•"/>
+              <a:defRPr sz="1800" kern="1200">
+                <a:solidFill>
+                  <a:schemeClr val="tx1"/>
+                </a:solidFill>
+                <a:latin typeface="+mn-lt"/>
+                <a:ea typeface="+mn-ea"/>
+                <a:cs typeface="+mn-cs"/>
+              </a:defRPr>
+            </a:lvl8pPr>
+            <a:lvl9pPr marL="3886200" indent="-228600" algn="l" defTabSz="914400" rtl="0" eaLnBrk="1" latinLnBrk="0" hangingPunct="1">
+              <a:lnSpc>
+                <a:spcPct val="90000"/>
+              </a:lnSpc>
+              <a:spcBef>
+                <a:spcPts val="500"/>
+              </a:spcBef>
+              <a:buFont typeface="Arial" panose="020B0604020202020204" pitchFamily="34" charset="0"/>
+              <a:buChar char="•"/>
+              <a:defRPr sz="1800" kern="1200">
+                <a:solidFill>
+                  <a:schemeClr val="tx1"/>
+                </a:solidFill>
+                <a:latin typeface="+mn-lt"/>
+                <a:ea typeface="+mn-ea"/>
+                <a:cs typeface="+mn-cs"/>
+              </a:defRPr>
+            </a:lvl9pPr>
+          </a:lstStyle>
+          <a:p>
+            <a:r>
+              <a:rPr lang="lv-LV" sz="2800" dirty="0" err="1"/>
+              <a:t>Aizseguma</a:t>
+            </a:r>
+            <a:r>
+              <a:rPr lang="lv-LV" sz="2800" dirty="0"/>
+              <a:t> noņemšanas rezultāts – mērķi parādīti, taču uguns pret spēlētāju</a:t>
+            </a:r>
+          </a:p>
+        </p:txBody>
+      </p:sp>
+      <p:pic>
+        <p:nvPicPr>
+          <p:cNvPr id="5" name="Attēls 4">
+            <a:extLst>
+              <a:ext uri="{FF2B5EF4-FFF2-40B4-BE49-F238E27FC236}">
+                <a16:creationId xmlns:a16="http://schemas.microsoft.com/office/drawing/2014/main" id="{6711FBBD-C177-7C75-E27A-0CCFD1D31EDE}"/>
+              </a:ext>
+            </a:extLst>
+          </p:cNvPr>
+          <p:cNvPicPr>
+            <a:picLocks noChangeAspect="1"/>
+          </p:cNvPicPr>
+          <p:nvPr/>
+        </p:nvPicPr>
+        <p:blipFill>
+          <a:blip r:embed="rId2"/>
+          <a:stretch>
+            <a:fillRect/>
+          </a:stretch>
+        </p:blipFill>
+        <p:spPr>
+          <a:xfrm>
+            <a:off x="5113334" y="0"/>
+            <a:ext cx="6709860" cy="6858000"/>
+          </a:xfrm>
+          <a:prstGeom prst="rect">
+            <a:avLst/>
+          </a:prstGeom>
+        </p:spPr>
+      </p:pic>
+    </p:spTree>
+    <p:extLst>
+      <p:ext uri="{BB962C8B-B14F-4D97-AF65-F5344CB8AC3E}">
+        <p14:creationId xmlns:p14="http://schemas.microsoft.com/office/powerpoint/2010/main" val="2786925872"/>
+      </p:ext>
+    </p:extLst>
+  </p:cSld>
+  <p:clrMapOvr>
+    <a:masterClrMapping/>
+  </p:clrMapOvr>
+</p:sld>
+</file>
+
+<file path=ppt/slides/slide27.xml><?xml version="1.0" encoding="utf-8"?>
+<p:sld xmlns:a="http://schemas.openxmlformats.org/drawingml/2006/main" xmlns:r="http://schemas.openxmlformats.org/officeDocument/2006/relationships" xmlns:p="http://schemas.openxmlformats.org/presentationml/2006/main">
+  <p:cSld>
+    <p:spTree>
+      <p:nvGrpSpPr>
+        <p:cNvPr id="1" name="">
+          <a:extLst>
+            <a:ext uri="{FF2B5EF4-FFF2-40B4-BE49-F238E27FC236}">
+              <a16:creationId xmlns:a16="http://schemas.microsoft.com/office/drawing/2014/main" id="{A7034AB3-8EE9-BB21-7139-3BC696A9D868}"/>
+            </a:ext>
+          </a:extLst>
+        </p:cNvPr>
+        <p:cNvGrpSpPr/>
+        <p:nvPr/>
+      </p:nvGrpSpPr>
+      <p:grpSpPr>
+        <a:xfrm>
+          <a:off x="0" y="0"/>
+          <a:ext cx="0" cy="0"/>
+          <a:chOff x="0" y="0"/>
+          <a:chExt cx="0" cy="0"/>
+        </a:xfrm>
+      </p:grpSpPr>
+      <p:sp>
+        <p:nvSpPr>
+          <p:cNvPr id="2" name="Virsraksts 1">
+            <a:extLst>
+              <a:ext uri="{FF2B5EF4-FFF2-40B4-BE49-F238E27FC236}">
+                <a16:creationId xmlns:a16="http://schemas.microsoft.com/office/drawing/2014/main" id="{A4CBF28C-94C9-F19B-C34A-A11210C2F829}"/>
+              </a:ext>
+            </a:extLst>
+          </p:cNvPr>
+          <p:cNvSpPr>
+            <a:spLocks noGrp="1"/>
+          </p:cNvSpPr>
+          <p:nvPr>
+            <p:ph type="title"/>
+          </p:nvPr>
+        </p:nvSpPr>
+        <p:spPr/>
+        <p:txBody>
+          <a:bodyPr/>
+          <a:lstStyle/>
+          <a:p>
+            <a:r>
+              <a:rPr lang="lv-LV" dirty="0"/>
+              <a:t>Ainas – Spēles laukums</a:t>
+            </a:r>
+          </a:p>
+        </p:txBody>
+      </p:sp>
+      <p:sp>
+        <p:nvSpPr>
+          <p:cNvPr id="7" name="Teksta vietturis 15">
+            <a:extLst>
+              <a:ext uri="{FF2B5EF4-FFF2-40B4-BE49-F238E27FC236}">
+                <a16:creationId xmlns:a16="http://schemas.microsoft.com/office/drawing/2014/main" id="{23439E47-AE2D-14ED-5130-3BA293697979}"/>
+              </a:ext>
+            </a:extLst>
+          </p:cNvPr>
+          <p:cNvSpPr txBox="1">
+            <a:spLocks/>
+          </p:cNvSpPr>
+          <p:nvPr/>
+        </p:nvSpPr>
+        <p:spPr>
+          <a:xfrm>
+            <a:off x="838199" y="3871737"/>
+            <a:ext cx="3716548" cy="844707"/>
+          </a:xfrm>
+          <a:prstGeom prst="rect">
+            <a:avLst/>
+          </a:prstGeom>
+        </p:spPr>
+        <p:txBody>
+          <a:bodyPr vert="horz" lIns="91440" tIns="45720" rIns="91440" bIns="45720" rtlCol="0" anchor="t">
+            <a:noAutofit/>
+          </a:bodyPr>
+          <a:lstStyle>
+            <a:lvl1pPr marL="0" indent="0" algn="l" defTabSz="914400" rtl="0" eaLnBrk="1" latinLnBrk="0" hangingPunct="1">
+              <a:lnSpc>
+                <a:spcPct val="100000"/>
+              </a:lnSpc>
+              <a:spcBef>
+                <a:spcPts val="1000"/>
+              </a:spcBef>
+              <a:buFont typeface="Arial" panose="020B0604020202020204" pitchFamily="34" charset="0"/>
+              <a:buNone/>
+              <a:defRPr sz="1200" kern="1200">
+                <a:solidFill>
+                  <a:schemeClr val="bg1"/>
+                </a:solidFill>
+                <a:latin typeface="Calibri" panose="020F0502020204030204" pitchFamily="34" charset="0"/>
+                <a:ea typeface="+mn-ea"/>
+                <a:cs typeface="Calibri" panose="020F0502020204030204" pitchFamily="34" charset="0"/>
+              </a:defRPr>
+            </a:lvl1pPr>
+            <a:lvl2pPr marL="685800" indent="-228600" algn="l" defTabSz="914400" rtl="0" eaLnBrk="1" latinLnBrk="0" hangingPunct="1">
+              <a:lnSpc>
+                <a:spcPct val="90000"/>
+              </a:lnSpc>
+              <a:spcBef>
+                <a:spcPts val="500"/>
+              </a:spcBef>
+              <a:buFont typeface="Arial" panose="020B0604020202020204" pitchFamily="34" charset="0"/>
+              <a:buChar char="•"/>
+              <a:defRPr sz="2400" kern="1200">
+                <a:solidFill>
+                  <a:schemeClr val="tx1"/>
+                </a:solidFill>
+                <a:latin typeface="Calibri" panose="020F0502020204030204" pitchFamily="34" charset="0"/>
+                <a:ea typeface="+mn-ea"/>
+                <a:cs typeface="Calibri" panose="020F0502020204030204" pitchFamily="34" charset="0"/>
+              </a:defRPr>
+            </a:lvl2pPr>
+            <a:lvl3pPr marL="1143000" indent="-228600" algn="l" defTabSz="914400" rtl="0" eaLnBrk="1" latinLnBrk="0" hangingPunct="1">
+              <a:lnSpc>
+                <a:spcPct val="90000"/>
+              </a:lnSpc>
+              <a:spcBef>
+                <a:spcPts val="500"/>
+              </a:spcBef>
+              <a:buFont typeface="Arial" panose="020B0604020202020204" pitchFamily="34" charset="0"/>
+              <a:buChar char="•"/>
+              <a:defRPr sz="2000" kern="1200">
+                <a:solidFill>
+                  <a:schemeClr val="tx1"/>
+                </a:solidFill>
+                <a:latin typeface="Calibri" panose="020F0502020204030204" pitchFamily="34" charset="0"/>
+                <a:ea typeface="+mn-ea"/>
+                <a:cs typeface="Calibri" panose="020F0502020204030204" pitchFamily="34" charset="0"/>
+              </a:defRPr>
+            </a:lvl3pPr>
+            <a:lvl4pPr marL="1600200" indent="-228600" algn="l" defTabSz="914400" rtl="0" eaLnBrk="1" latinLnBrk="0" hangingPunct="1">
+              <a:lnSpc>
+                <a:spcPct val="90000"/>
+              </a:lnSpc>
+              <a:spcBef>
+                <a:spcPts val="500"/>
+              </a:spcBef>
+              <a:buFont typeface="Arial" panose="020B0604020202020204" pitchFamily="34" charset="0"/>
+              <a:buChar char="•"/>
+              <a:defRPr sz="1800" kern="1200">
+                <a:solidFill>
+                  <a:schemeClr val="tx1"/>
+                </a:solidFill>
+                <a:latin typeface="Calibri" panose="020F0502020204030204" pitchFamily="34" charset="0"/>
+                <a:ea typeface="+mn-ea"/>
+                <a:cs typeface="Calibri" panose="020F0502020204030204" pitchFamily="34" charset="0"/>
+              </a:defRPr>
+            </a:lvl4pPr>
+            <a:lvl5pPr marL="2057400" indent="-228600" algn="l" defTabSz="914400" rtl="0" eaLnBrk="1" latinLnBrk="0" hangingPunct="1">
+              <a:lnSpc>
+                <a:spcPct val="90000"/>
+              </a:lnSpc>
+              <a:spcBef>
+                <a:spcPts val="500"/>
+              </a:spcBef>
+              <a:buFont typeface="Arial" panose="020B0604020202020204" pitchFamily="34" charset="0"/>
+              <a:buChar char="•"/>
+              <a:defRPr sz="1800" kern="1200">
+                <a:solidFill>
+                  <a:schemeClr val="tx1"/>
+                </a:solidFill>
+                <a:latin typeface="Calibri" panose="020F0502020204030204" pitchFamily="34" charset="0"/>
+                <a:ea typeface="+mn-ea"/>
+                <a:cs typeface="Calibri" panose="020F0502020204030204" pitchFamily="34" charset="0"/>
+              </a:defRPr>
+            </a:lvl5pPr>
+            <a:lvl6pPr marL="2514600" indent="-228600" algn="l" defTabSz="914400" rtl="0" eaLnBrk="1" latinLnBrk="0" hangingPunct="1">
+              <a:lnSpc>
+                <a:spcPct val="90000"/>
+              </a:lnSpc>
+              <a:spcBef>
+                <a:spcPts val="500"/>
+              </a:spcBef>
+              <a:buFont typeface="Arial" panose="020B0604020202020204" pitchFamily="34" charset="0"/>
+              <a:buChar char="•"/>
+              <a:defRPr sz="1800" kern="1200">
+                <a:solidFill>
+                  <a:schemeClr val="tx1"/>
+                </a:solidFill>
+                <a:latin typeface="+mn-lt"/>
+                <a:ea typeface="+mn-ea"/>
+                <a:cs typeface="+mn-cs"/>
+              </a:defRPr>
+            </a:lvl6pPr>
+            <a:lvl7pPr marL="2971800" indent="-228600" algn="l" defTabSz="914400" rtl="0" eaLnBrk="1" latinLnBrk="0" hangingPunct="1">
+              <a:lnSpc>
+                <a:spcPct val="90000"/>
+              </a:lnSpc>
+              <a:spcBef>
+                <a:spcPts val="500"/>
+              </a:spcBef>
+              <a:buFont typeface="Arial" panose="020B0604020202020204" pitchFamily="34" charset="0"/>
+              <a:buChar char="•"/>
+              <a:defRPr sz="1800" kern="1200">
+                <a:solidFill>
+                  <a:schemeClr val="tx1"/>
+                </a:solidFill>
+                <a:latin typeface="+mn-lt"/>
+                <a:ea typeface="+mn-ea"/>
+                <a:cs typeface="+mn-cs"/>
+              </a:defRPr>
+            </a:lvl7pPr>
+            <a:lvl8pPr marL="3429000" indent="-228600" algn="l" defTabSz="914400" rtl="0" eaLnBrk="1" latinLnBrk="0" hangingPunct="1">
+              <a:lnSpc>
+                <a:spcPct val="90000"/>
+              </a:lnSpc>
+              <a:spcBef>
+                <a:spcPts val="500"/>
+              </a:spcBef>
+              <a:buFont typeface="Arial" panose="020B0604020202020204" pitchFamily="34" charset="0"/>
+              <a:buChar char="•"/>
+              <a:defRPr sz="1800" kern="1200">
+                <a:solidFill>
+                  <a:schemeClr val="tx1"/>
+                </a:solidFill>
+                <a:latin typeface="+mn-lt"/>
+                <a:ea typeface="+mn-ea"/>
+                <a:cs typeface="+mn-cs"/>
+              </a:defRPr>
+            </a:lvl8pPr>
+            <a:lvl9pPr marL="3886200" indent="-228600" algn="l" defTabSz="914400" rtl="0" eaLnBrk="1" latinLnBrk="0" hangingPunct="1">
+              <a:lnSpc>
+                <a:spcPct val="90000"/>
+              </a:lnSpc>
+              <a:spcBef>
+                <a:spcPts val="500"/>
+              </a:spcBef>
+              <a:buFont typeface="Arial" panose="020B0604020202020204" pitchFamily="34" charset="0"/>
+              <a:buChar char="•"/>
+              <a:defRPr sz="1800" kern="1200">
+                <a:solidFill>
+                  <a:schemeClr val="tx1"/>
+                </a:solidFill>
+                <a:latin typeface="+mn-lt"/>
+                <a:ea typeface="+mn-ea"/>
+                <a:cs typeface="+mn-cs"/>
+              </a:defRPr>
+            </a:lvl9pPr>
+          </a:lstStyle>
+          <a:p>
+            <a:r>
+              <a:rPr lang="lv-LV" sz="2800" dirty="0"/>
+              <a:t>Zaudēta spēle – visas spēlētāja ierīces tika iznīcinātas</a:t>
+            </a:r>
+          </a:p>
+        </p:txBody>
+      </p:sp>
+      <p:pic>
+        <p:nvPicPr>
+          <p:cNvPr id="4" name="Attēls 3">
+            <a:extLst>
+              <a:ext uri="{FF2B5EF4-FFF2-40B4-BE49-F238E27FC236}">
+                <a16:creationId xmlns:a16="http://schemas.microsoft.com/office/drawing/2014/main" id="{75812010-23A3-CD4D-D31E-34EE3AA6B01A}"/>
+              </a:ext>
+            </a:extLst>
+          </p:cNvPr>
+          <p:cNvPicPr>
+            <a:picLocks noChangeAspect="1"/>
+          </p:cNvPicPr>
+          <p:nvPr/>
+        </p:nvPicPr>
+        <p:blipFill>
+          <a:blip r:embed="rId2"/>
+          <a:stretch>
+            <a:fillRect/>
+          </a:stretch>
+        </p:blipFill>
+        <p:spPr>
+          <a:xfrm>
+            <a:off x="5133493" y="0"/>
+            <a:ext cx="6709860" cy="6858000"/>
+          </a:xfrm>
+          <a:prstGeom prst="rect">
+            <a:avLst/>
+          </a:prstGeom>
+        </p:spPr>
+      </p:pic>
+    </p:spTree>
+    <p:extLst>
+      <p:ext uri="{BB962C8B-B14F-4D97-AF65-F5344CB8AC3E}">
+        <p14:creationId xmlns:p14="http://schemas.microsoft.com/office/powerpoint/2010/main" val="3058275912"/>
+      </p:ext>
+    </p:extLst>
+  </p:cSld>
+  <p:clrMapOvr>
+    <a:masterClrMapping/>
+  </p:clrMapOvr>
+</p:sld>
+</file>
+
+<file path=ppt/slides/slide28.xml><?xml version="1.0" encoding="utf-8"?>
+<p:sld xmlns:a="http://schemas.openxmlformats.org/drawingml/2006/main" xmlns:r="http://schemas.openxmlformats.org/officeDocument/2006/relationships" xmlns:p="http://schemas.openxmlformats.org/presentationml/2006/main">
+  <p:cSld>
+    <p:spTree>
+      <p:nvGrpSpPr>
+        <p:cNvPr id="1" name="">
+          <a:extLst>
+            <a:ext uri="{FF2B5EF4-FFF2-40B4-BE49-F238E27FC236}">
+              <a16:creationId xmlns:a16="http://schemas.microsoft.com/office/drawing/2014/main" id="{D0A2CE91-88E1-B476-57CD-CB11F282F654}"/>
+            </a:ext>
+          </a:extLst>
+        </p:cNvPr>
+        <p:cNvGrpSpPr/>
+        <p:nvPr/>
+      </p:nvGrpSpPr>
+      <p:grpSpPr>
+        <a:xfrm>
+          <a:off x="0" y="0"/>
+          <a:ext cx="0" cy="0"/>
+          <a:chOff x="0" y="0"/>
+          <a:chExt cx="0" cy="0"/>
+        </a:xfrm>
+      </p:grpSpPr>
+      <p:sp>
+        <p:nvSpPr>
+          <p:cNvPr id="2" name="Virsraksts 1">
+            <a:extLst>
+              <a:ext uri="{FF2B5EF4-FFF2-40B4-BE49-F238E27FC236}">
+                <a16:creationId xmlns:a16="http://schemas.microsoft.com/office/drawing/2014/main" id="{AD462EDF-9AF7-FEA1-D172-7BE5DB701BB4}"/>
+              </a:ext>
+            </a:extLst>
+          </p:cNvPr>
+          <p:cNvSpPr>
+            <a:spLocks noGrp="1"/>
+          </p:cNvSpPr>
+          <p:nvPr>
+            <p:ph type="title"/>
+          </p:nvPr>
+        </p:nvSpPr>
+        <p:spPr/>
+        <p:txBody>
+          <a:bodyPr/>
+          <a:lstStyle/>
+          <a:p>
+            <a:r>
+              <a:rPr lang="lv-LV" dirty="0"/>
+              <a:t>Ainas – Spēles laukums</a:t>
+            </a:r>
+          </a:p>
+        </p:txBody>
+      </p:sp>
+      <p:sp>
+        <p:nvSpPr>
+          <p:cNvPr id="7" name="Teksta vietturis 15">
+            <a:extLst>
+              <a:ext uri="{FF2B5EF4-FFF2-40B4-BE49-F238E27FC236}">
+                <a16:creationId xmlns:a16="http://schemas.microsoft.com/office/drawing/2014/main" id="{D8EA441F-5649-1B47-8F20-052424204D9C}"/>
+              </a:ext>
+            </a:extLst>
+          </p:cNvPr>
+          <p:cNvSpPr txBox="1">
+            <a:spLocks/>
+          </p:cNvSpPr>
+          <p:nvPr/>
+        </p:nvSpPr>
+        <p:spPr>
+          <a:xfrm>
+            <a:off x="838199" y="3871737"/>
+            <a:ext cx="3716548" cy="844707"/>
+          </a:xfrm>
+          <a:prstGeom prst="rect">
+            <a:avLst/>
+          </a:prstGeom>
+        </p:spPr>
+        <p:txBody>
+          <a:bodyPr vert="horz" lIns="91440" tIns="45720" rIns="91440" bIns="45720" rtlCol="0" anchor="t">
+            <a:noAutofit/>
+          </a:bodyPr>
+          <a:lstStyle>
+            <a:lvl1pPr marL="0" indent="0" algn="l" defTabSz="914400" rtl="0" eaLnBrk="1" latinLnBrk="0" hangingPunct="1">
+              <a:lnSpc>
+                <a:spcPct val="100000"/>
+              </a:lnSpc>
+              <a:spcBef>
+                <a:spcPts val="1000"/>
+              </a:spcBef>
+              <a:buFont typeface="Arial" panose="020B0604020202020204" pitchFamily="34" charset="0"/>
+              <a:buNone/>
+              <a:defRPr sz="1200" kern="1200">
+                <a:solidFill>
+                  <a:schemeClr val="bg1"/>
+                </a:solidFill>
+                <a:latin typeface="Calibri" panose="020F0502020204030204" pitchFamily="34" charset="0"/>
+                <a:ea typeface="+mn-ea"/>
+                <a:cs typeface="Calibri" panose="020F0502020204030204" pitchFamily="34" charset="0"/>
+              </a:defRPr>
+            </a:lvl1pPr>
+            <a:lvl2pPr marL="685800" indent="-228600" algn="l" defTabSz="914400" rtl="0" eaLnBrk="1" latinLnBrk="0" hangingPunct="1">
+              <a:lnSpc>
+                <a:spcPct val="90000"/>
+              </a:lnSpc>
+              <a:spcBef>
+                <a:spcPts val="500"/>
+              </a:spcBef>
+              <a:buFont typeface="Arial" panose="020B0604020202020204" pitchFamily="34" charset="0"/>
+              <a:buChar char="•"/>
+              <a:defRPr sz="2400" kern="1200">
+                <a:solidFill>
+                  <a:schemeClr val="tx1"/>
+                </a:solidFill>
+                <a:latin typeface="Calibri" panose="020F0502020204030204" pitchFamily="34" charset="0"/>
+                <a:ea typeface="+mn-ea"/>
+                <a:cs typeface="Calibri" panose="020F0502020204030204" pitchFamily="34" charset="0"/>
+              </a:defRPr>
+            </a:lvl2pPr>
+            <a:lvl3pPr marL="1143000" indent="-228600" algn="l" defTabSz="914400" rtl="0" eaLnBrk="1" latinLnBrk="0" hangingPunct="1">
+              <a:lnSpc>
+                <a:spcPct val="90000"/>
+              </a:lnSpc>
+              <a:spcBef>
+                <a:spcPts val="500"/>
+              </a:spcBef>
+              <a:buFont typeface="Arial" panose="020B0604020202020204" pitchFamily="34" charset="0"/>
+              <a:buChar char="•"/>
+              <a:defRPr sz="2000" kern="1200">
+                <a:solidFill>
+                  <a:schemeClr val="tx1"/>
+                </a:solidFill>
+                <a:latin typeface="Calibri" panose="020F0502020204030204" pitchFamily="34" charset="0"/>
+                <a:ea typeface="+mn-ea"/>
+                <a:cs typeface="Calibri" panose="020F0502020204030204" pitchFamily="34" charset="0"/>
+              </a:defRPr>
+            </a:lvl3pPr>
+            <a:lvl4pPr marL="1600200" indent="-228600" algn="l" defTabSz="914400" rtl="0" eaLnBrk="1" latinLnBrk="0" hangingPunct="1">
+              <a:lnSpc>
+                <a:spcPct val="90000"/>
+              </a:lnSpc>
+              <a:spcBef>
+                <a:spcPts val="500"/>
+              </a:spcBef>
+              <a:buFont typeface="Arial" panose="020B0604020202020204" pitchFamily="34" charset="0"/>
+              <a:buChar char="•"/>
+              <a:defRPr sz="1800" kern="1200">
+                <a:solidFill>
+                  <a:schemeClr val="tx1"/>
+                </a:solidFill>
+                <a:latin typeface="Calibri" panose="020F0502020204030204" pitchFamily="34" charset="0"/>
+                <a:ea typeface="+mn-ea"/>
+                <a:cs typeface="Calibri" panose="020F0502020204030204" pitchFamily="34" charset="0"/>
+              </a:defRPr>
+            </a:lvl4pPr>
+            <a:lvl5pPr marL="2057400" indent="-228600" algn="l" defTabSz="914400" rtl="0" eaLnBrk="1" latinLnBrk="0" hangingPunct="1">
+              <a:lnSpc>
+                <a:spcPct val="90000"/>
+              </a:lnSpc>
+              <a:spcBef>
+                <a:spcPts val="500"/>
+              </a:spcBef>
+              <a:buFont typeface="Arial" panose="020B0604020202020204" pitchFamily="34" charset="0"/>
+              <a:buChar char="•"/>
+              <a:defRPr sz="1800" kern="1200">
+                <a:solidFill>
+                  <a:schemeClr val="tx1"/>
+                </a:solidFill>
+                <a:latin typeface="Calibri" panose="020F0502020204030204" pitchFamily="34" charset="0"/>
+                <a:ea typeface="+mn-ea"/>
+                <a:cs typeface="Calibri" panose="020F0502020204030204" pitchFamily="34" charset="0"/>
+              </a:defRPr>
+            </a:lvl5pPr>
+            <a:lvl6pPr marL="2514600" indent="-228600" algn="l" defTabSz="914400" rtl="0" eaLnBrk="1" latinLnBrk="0" hangingPunct="1">
+              <a:lnSpc>
+                <a:spcPct val="90000"/>
+              </a:lnSpc>
+              <a:spcBef>
+                <a:spcPts val="500"/>
+              </a:spcBef>
+              <a:buFont typeface="Arial" panose="020B0604020202020204" pitchFamily="34" charset="0"/>
+              <a:buChar char="•"/>
+              <a:defRPr sz="1800" kern="1200">
+                <a:solidFill>
+                  <a:schemeClr val="tx1"/>
+                </a:solidFill>
+                <a:latin typeface="+mn-lt"/>
+                <a:ea typeface="+mn-ea"/>
+                <a:cs typeface="+mn-cs"/>
+              </a:defRPr>
+            </a:lvl6pPr>
+            <a:lvl7pPr marL="2971800" indent="-228600" algn="l" defTabSz="914400" rtl="0" eaLnBrk="1" latinLnBrk="0" hangingPunct="1">
+              <a:lnSpc>
+                <a:spcPct val="90000"/>
+              </a:lnSpc>
+              <a:spcBef>
+                <a:spcPts val="500"/>
+              </a:spcBef>
+              <a:buFont typeface="Arial" panose="020B0604020202020204" pitchFamily="34" charset="0"/>
+              <a:buChar char="•"/>
+              <a:defRPr sz="1800" kern="1200">
+                <a:solidFill>
+                  <a:schemeClr val="tx1"/>
+                </a:solidFill>
+                <a:latin typeface="+mn-lt"/>
+                <a:ea typeface="+mn-ea"/>
+                <a:cs typeface="+mn-cs"/>
+              </a:defRPr>
+            </a:lvl7pPr>
+            <a:lvl8pPr marL="3429000" indent="-228600" algn="l" defTabSz="914400" rtl="0" eaLnBrk="1" latinLnBrk="0" hangingPunct="1">
+              <a:lnSpc>
+                <a:spcPct val="90000"/>
+              </a:lnSpc>
+              <a:spcBef>
+                <a:spcPts val="500"/>
+              </a:spcBef>
+              <a:buFont typeface="Arial" panose="020B0604020202020204" pitchFamily="34" charset="0"/>
+              <a:buChar char="•"/>
+              <a:defRPr sz="1800" kern="1200">
+                <a:solidFill>
+                  <a:schemeClr val="tx1"/>
+                </a:solidFill>
+                <a:latin typeface="+mn-lt"/>
+                <a:ea typeface="+mn-ea"/>
+                <a:cs typeface="+mn-cs"/>
+              </a:defRPr>
+            </a:lvl8pPr>
+            <a:lvl9pPr marL="3886200" indent="-228600" algn="l" defTabSz="914400" rtl="0" eaLnBrk="1" latinLnBrk="0" hangingPunct="1">
+              <a:lnSpc>
+                <a:spcPct val="90000"/>
+              </a:lnSpc>
+              <a:spcBef>
+                <a:spcPts val="500"/>
+              </a:spcBef>
+              <a:buFont typeface="Arial" panose="020B0604020202020204" pitchFamily="34" charset="0"/>
+              <a:buChar char="•"/>
+              <a:defRPr sz="1800" kern="1200">
+                <a:solidFill>
+                  <a:schemeClr val="tx1"/>
+                </a:solidFill>
+                <a:latin typeface="+mn-lt"/>
+                <a:ea typeface="+mn-ea"/>
+                <a:cs typeface="+mn-cs"/>
+              </a:defRPr>
+            </a:lvl9pPr>
+          </a:lstStyle>
+          <a:p>
+            <a:r>
+              <a:rPr lang="lv-LV" sz="2800" dirty="0"/>
+              <a:t>Pauzes izvēlne</a:t>
+            </a:r>
+          </a:p>
+        </p:txBody>
+      </p:sp>
+      <p:pic>
+        <p:nvPicPr>
+          <p:cNvPr id="5" name="Attēls 4">
+            <a:extLst>
+              <a:ext uri="{FF2B5EF4-FFF2-40B4-BE49-F238E27FC236}">
+                <a16:creationId xmlns:a16="http://schemas.microsoft.com/office/drawing/2014/main" id="{FC044AA0-27C1-33A7-BF9E-E48FB1185A05}"/>
+              </a:ext>
+            </a:extLst>
+          </p:cNvPr>
+          <p:cNvPicPr>
+            <a:picLocks noChangeAspect="1"/>
+          </p:cNvPicPr>
+          <p:nvPr/>
+        </p:nvPicPr>
+        <p:blipFill>
+          <a:blip r:embed="rId2"/>
+          <a:stretch>
+            <a:fillRect/>
+          </a:stretch>
+        </p:blipFill>
+        <p:spPr>
+          <a:xfrm>
+            <a:off x="5147840" y="0"/>
+            <a:ext cx="6709860" cy="6858000"/>
+          </a:xfrm>
+          <a:prstGeom prst="rect">
+            <a:avLst/>
+          </a:prstGeom>
+        </p:spPr>
+      </p:pic>
+    </p:spTree>
+    <p:extLst>
+      <p:ext uri="{BB962C8B-B14F-4D97-AF65-F5344CB8AC3E}">
+        <p14:creationId xmlns:p14="http://schemas.microsoft.com/office/powerpoint/2010/main" val="1064497388"/>
+      </p:ext>
+    </p:extLst>
+  </p:cSld>
+  <p:clrMapOvr>
+    <a:masterClrMapping/>
+  </p:clrMapOvr>
+</p:sld>
+</file>
+
+<file path=ppt/slides/slide29.xml><?xml version="1.0" encoding="utf-8"?>
+<p:sld xmlns:a="http://schemas.openxmlformats.org/drawingml/2006/main" xmlns:r="http://schemas.openxmlformats.org/officeDocument/2006/relationships" xmlns:p="http://schemas.openxmlformats.org/presentationml/2006/main">
+  <p:cSld>
+    <p:spTree>
+      <p:nvGrpSpPr>
+        <p:cNvPr id="1" name="">
+          <a:extLst>
+            <a:ext uri="{FF2B5EF4-FFF2-40B4-BE49-F238E27FC236}">
+              <a16:creationId xmlns:a16="http://schemas.microsoft.com/office/drawing/2014/main" id="{3C9D6F9B-4024-27C7-5177-DDC434C5DC0C}"/>
+            </a:ext>
+          </a:extLst>
+        </p:cNvPr>
+        <p:cNvGrpSpPr/>
+        <p:nvPr/>
+      </p:nvGrpSpPr>
+      <p:grpSpPr>
+        <a:xfrm>
+          <a:off x="0" y="0"/>
+          <a:ext cx="0" cy="0"/>
+          <a:chOff x="0" y="0"/>
+          <a:chExt cx="0" cy="0"/>
+        </a:xfrm>
+      </p:grpSpPr>
+      <p:sp>
+        <p:nvSpPr>
+          <p:cNvPr id="2" name="Virsraksts 1">
+            <a:extLst>
+              <a:ext uri="{FF2B5EF4-FFF2-40B4-BE49-F238E27FC236}">
+                <a16:creationId xmlns:a16="http://schemas.microsoft.com/office/drawing/2014/main" id="{0A182AFA-EBE6-23EA-1A9D-98D8133EF242}"/>
+              </a:ext>
+            </a:extLst>
+          </p:cNvPr>
+          <p:cNvSpPr>
+            <a:spLocks noGrp="1"/>
+          </p:cNvSpPr>
+          <p:nvPr>
+            <p:ph type="title"/>
+          </p:nvPr>
+        </p:nvSpPr>
+        <p:spPr/>
+        <p:txBody>
+          <a:bodyPr/>
+          <a:lstStyle/>
+          <a:p>
+            <a:r>
+              <a:rPr lang="lv-LV" dirty="0"/>
+              <a:t>Ainas – Spēles laukums</a:t>
+            </a:r>
+          </a:p>
+        </p:txBody>
+      </p:sp>
+      <p:sp>
+        <p:nvSpPr>
+          <p:cNvPr id="7" name="Teksta vietturis 15">
+            <a:extLst>
+              <a:ext uri="{FF2B5EF4-FFF2-40B4-BE49-F238E27FC236}">
+                <a16:creationId xmlns:a16="http://schemas.microsoft.com/office/drawing/2014/main" id="{CF0F1B49-96E6-BE98-25A6-4D369DFA3A1C}"/>
+              </a:ext>
+            </a:extLst>
+          </p:cNvPr>
+          <p:cNvSpPr txBox="1">
+            <a:spLocks/>
+          </p:cNvSpPr>
+          <p:nvPr/>
+        </p:nvSpPr>
+        <p:spPr>
+          <a:xfrm>
+            <a:off x="838199" y="3871737"/>
+            <a:ext cx="3716548" cy="844707"/>
+          </a:xfrm>
+          <a:prstGeom prst="rect">
+            <a:avLst/>
+          </a:prstGeom>
+        </p:spPr>
+        <p:txBody>
+          <a:bodyPr vert="horz" lIns="91440" tIns="45720" rIns="91440" bIns="45720" rtlCol="0" anchor="t">
+            <a:noAutofit/>
+          </a:bodyPr>
+          <a:lstStyle>
+            <a:lvl1pPr marL="0" indent="0" algn="l" defTabSz="914400" rtl="0" eaLnBrk="1" latinLnBrk="0" hangingPunct="1">
+              <a:lnSpc>
+                <a:spcPct val="100000"/>
+              </a:lnSpc>
+              <a:spcBef>
+                <a:spcPts val="1000"/>
+              </a:spcBef>
+              <a:buFont typeface="Arial" panose="020B0604020202020204" pitchFamily="34" charset="0"/>
+              <a:buNone/>
+              <a:defRPr sz="1200" kern="1200">
+                <a:solidFill>
+                  <a:schemeClr val="bg1"/>
+                </a:solidFill>
+                <a:latin typeface="Calibri" panose="020F0502020204030204" pitchFamily="34" charset="0"/>
+                <a:ea typeface="+mn-ea"/>
+                <a:cs typeface="Calibri" panose="020F0502020204030204" pitchFamily="34" charset="0"/>
+              </a:defRPr>
+            </a:lvl1pPr>
+            <a:lvl2pPr marL="685800" indent="-228600" algn="l" defTabSz="914400" rtl="0" eaLnBrk="1" latinLnBrk="0" hangingPunct="1">
+              <a:lnSpc>
+                <a:spcPct val="90000"/>
+              </a:lnSpc>
+              <a:spcBef>
+                <a:spcPts val="500"/>
+              </a:spcBef>
+              <a:buFont typeface="Arial" panose="020B0604020202020204" pitchFamily="34" charset="0"/>
+              <a:buChar char="•"/>
+              <a:defRPr sz="2400" kern="1200">
+                <a:solidFill>
+                  <a:schemeClr val="tx1"/>
+                </a:solidFill>
+                <a:latin typeface="Calibri" panose="020F0502020204030204" pitchFamily="34" charset="0"/>
+                <a:ea typeface="+mn-ea"/>
+                <a:cs typeface="Calibri" panose="020F0502020204030204" pitchFamily="34" charset="0"/>
+              </a:defRPr>
+            </a:lvl2pPr>
+            <a:lvl3pPr marL="1143000" indent="-228600" algn="l" defTabSz="914400" rtl="0" eaLnBrk="1" latinLnBrk="0" hangingPunct="1">
+              <a:lnSpc>
+                <a:spcPct val="90000"/>
+              </a:lnSpc>
+              <a:spcBef>
+                <a:spcPts val="500"/>
+              </a:spcBef>
+              <a:buFont typeface="Arial" panose="020B0604020202020204" pitchFamily="34" charset="0"/>
+              <a:buChar char="•"/>
+              <a:defRPr sz="2000" kern="1200">
+                <a:solidFill>
+                  <a:schemeClr val="tx1"/>
+                </a:solidFill>
+                <a:latin typeface="Calibri" panose="020F0502020204030204" pitchFamily="34" charset="0"/>
+                <a:ea typeface="+mn-ea"/>
+                <a:cs typeface="Calibri" panose="020F0502020204030204" pitchFamily="34" charset="0"/>
+              </a:defRPr>
+            </a:lvl3pPr>
+            <a:lvl4pPr marL="1600200" indent="-228600" algn="l" defTabSz="914400" rtl="0" eaLnBrk="1" latinLnBrk="0" hangingPunct="1">
+              <a:lnSpc>
+                <a:spcPct val="90000"/>
+              </a:lnSpc>
+              <a:spcBef>
+                <a:spcPts val="500"/>
+              </a:spcBef>
+              <a:buFont typeface="Arial" panose="020B0604020202020204" pitchFamily="34" charset="0"/>
+              <a:buChar char="•"/>
+              <a:defRPr sz="1800" kern="1200">
+                <a:solidFill>
+                  <a:schemeClr val="tx1"/>
+                </a:solidFill>
+                <a:latin typeface="Calibri" panose="020F0502020204030204" pitchFamily="34" charset="0"/>
+                <a:ea typeface="+mn-ea"/>
+                <a:cs typeface="Calibri" panose="020F0502020204030204" pitchFamily="34" charset="0"/>
+              </a:defRPr>
+            </a:lvl4pPr>
+            <a:lvl5pPr marL="2057400" indent="-228600" algn="l" defTabSz="914400" rtl="0" eaLnBrk="1" latinLnBrk="0" hangingPunct="1">
+              <a:lnSpc>
+                <a:spcPct val="90000"/>
+              </a:lnSpc>
+              <a:spcBef>
+                <a:spcPts val="500"/>
+              </a:spcBef>
+              <a:buFont typeface="Arial" panose="020B0604020202020204" pitchFamily="34" charset="0"/>
+              <a:buChar char="•"/>
+              <a:defRPr sz="1800" kern="1200">
+                <a:solidFill>
+                  <a:schemeClr val="tx1"/>
+                </a:solidFill>
+                <a:latin typeface="Calibri" panose="020F0502020204030204" pitchFamily="34" charset="0"/>
+                <a:ea typeface="+mn-ea"/>
+                <a:cs typeface="Calibri" panose="020F0502020204030204" pitchFamily="34" charset="0"/>
+              </a:defRPr>
+            </a:lvl5pPr>
+            <a:lvl6pPr marL="2514600" indent="-228600" algn="l" defTabSz="914400" rtl="0" eaLnBrk="1" latinLnBrk="0" hangingPunct="1">
+              <a:lnSpc>
+                <a:spcPct val="90000"/>
+              </a:lnSpc>
+              <a:spcBef>
+                <a:spcPts val="500"/>
+              </a:spcBef>
+              <a:buFont typeface="Arial" panose="020B0604020202020204" pitchFamily="34" charset="0"/>
+              <a:buChar char="•"/>
+              <a:defRPr sz="1800" kern="1200">
+                <a:solidFill>
+                  <a:schemeClr val="tx1"/>
+                </a:solidFill>
+                <a:latin typeface="+mn-lt"/>
+                <a:ea typeface="+mn-ea"/>
+                <a:cs typeface="+mn-cs"/>
+              </a:defRPr>
+            </a:lvl6pPr>
+            <a:lvl7pPr marL="2971800" indent="-228600" algn="l" defTabSz="914400" rtl="0" eaLnBrk="1" latinLnBrk="0" hangingPunct="1">
+              <a:lnSpc>
+                <a:spcPct val="90000"/>
+              </a:lnSpc>
+              <a:spcBef>
+                <a:spcPts val="500"/>
+              </a:spcBef>
+              <a:buFont typeface="Arial" panose="020B0604020202020204" pitchFamily="34" charset="0"/>
+              <a:buChar char="•"/>
+              <a:defRPr sz="1800" kern="1200">
+                <a:solidFill>
+                  <a:schemeClr val="tx1"/>
+                </a:solidFill>
+                <a:latin typeface="+mn-lt"/>
+                <a:ea typeface="+mn-ea"/>
+                <a:cs typeface="+mn-cs"/>
+              </a:defRPr>
+            </a:lvl7pPr>
+            <a:lvl8pPr marL="3429000" indent="-228600" algn="l" defTabSz="914400" rtl="0" eaLnBrk="1" latinLnBrk="0" hangingPunct="1">
+              <a:lnSpc>
+                <a:spcPct val="90000"/>
+              </a:lnSpc>
+              <a:spcBef>
+                <a:spcPts val="500"/>
+              </a:spcBef>
+              <a:buFont typeface="Arial" panose="020B0604020202020204" pitchFamily="34" charset="0"/>
+              <a:buChar char="•"/>
+              <a:defRPr sz="1800" kern="1200">
+                <a:solidFill>
+                  <a:schemeClr val="tx1"/>
+                </a:solidFill>
+                <a:latin typeface="+mn-lt"/>
+                <a:ea typeface="+mn-ea"/>
+                <a:cs typeface="+mn-cs"/>
+              </a:defRPr>
+            </a:lvl8pPr>
+            <a:lvl9pPr marL="3886200" indent="-228600" algn="l" defTabSz="914400" rtl="0" eaLnBrk="1" latinLnBrk="0" hangingPunct="1">
+              <a:lnSpc>
+                <a:spcPct val="90000"/>
+              </a:lnSpc>
+              <a:spcBef>
+                <a:spcPts val="500"/>
+              </a:spcBef>
+              <a:buFont typeface="Arial" panose="020B0604020202020204" pitchFamily="34" charset="0"/>
+              <a:buChar char="•"/>
+              <a:defRPr sz="1800" kern="1200">
+                <a:solidFill>
+                  <a:schemeClr val="tx1"/>
+                </a:solidFill>
+                <a:latin typeface="+mn-lt"/>
+                <a:ea typeface="+mn-ea"/>
+                <a:cs typeface="+mn-cs"/>
+              </a:defRPr>
+            </a:lvl9pPr>
+          </a:lstStyle>
+          <a:p>
+            <a:r>
+              <a:rPr lang="lv-LV" sz="2800" dirty="0"/>
+              <a:t>Pauzes izvēlnes iestatījumi</a:t>
+            </a:r>
+          </a:p>
+        </p:txBody>
+      </p:sp>
+      <p:pic>
+        <p:nvPicPr>
+          <p:cNvPr id="4" name="Attēls 3">
+            <a:extLst>
+              <a:ext uri="{FF2B5EF4-FFF2-40B4-BE49-F238E27FC236}">
+                <a16:creationId xmlns:a16="http://schemas.microsoft.com/office/drawing/2014/main" id="{D94AF844-55BB-18E1-BA39-19C3D4BE7769}"/>
+              </a:ext>
+            </a:extLst>
+          </p:cNvPr>
+          <p:cNvPicPr>
+            <a:picLocks noChangeAspect="1"/>
+          </p:cNvPicPr>
+          <p:nvPr/>
+        </p:nvPicPr>
+        <p:blipFill>
+          <a:blip r:embed="rId2"/>
+          <a:stretch>
+            <a:fillRect/>
+          </a:stretch>
+        </p:blipFill>
+        <p:spPr>
+          <a:xfrm>
+            <a:off x="5121961" y="0"/>
+            <a:ext cx="6709860" cy="6858000"/>
+          </a:xfrm>
+          <a:prstGeom prst="rect">
+            <a:avLst/>
+          </a:prstGeom>
+        </p:spPr>
+      </p:pic>
+    </p:spTree>
+    <p:extLst>
+      <p:ext uri="{BB962C8B-B14F-4D97-AF65-F5344CB8AC3E}">
+        <p14:creationId xmlns:p14="http://schemas.microsoft.com/office/powerpoint/2010/main" val="3509346751"/>
       </p:ext>
     </p:extLst>
   </p:cSld>
@@ -9091,44 +14946,6 @@
           <a:lstStyle/>
           <a:p>
             <a:endParaRPr lang="lv-LV" sz="2000" dirty="0"/>
-          </a:p>
-        </p:txBody>
-      </p:sp>
-      <p:sp>
-        <p:nvSpPr>
-          <p:cNvPr id="19" name="Slaida numura vietturis 18">
-            <a:extLst>
-              <a:ext uri="{FF2B5EF4-FFF2-40B4-BE49-F238E27FC236}">
-                <a16:creationId xmlns:a16="http://schemas.microsoft.com/office/drawing/2014/main" id="{3ECFBE4E-41D6-5965-A9E2-EECAE1D50282}"/>
-              </a:ext>
-            </a:extLst>
-          </p:cNvPr>
-          <p:cNvSpPr>
-            <a:spLocks noGrp="1"/>
-          </p:cNvSpPr>
-          <p:nvPr>
-            <p:ph type="sldNum" sz="quarter" idx="4294967295"/>
-          </p:nvPr>
-        </p:nvSpPr>
-        <p:spPr>
-          <a:xfrm>
-            <a:off x="8610600" y="6356350"/>
-            <a:ext cx="2743200" cy="365125"/>
-          </a:xfrm>
-          <a:prstGeom prst="rect">
-            <a:avLst/>
-          </a:prstGeom>
-        </p:spPr>
-        <p:txBody>
-          <a:bodyPr/>
-          <a:lstStyle/>
-          <a:p>
-            <a:fld id="{B5CEABB6-07DC-46E8-9B57-56EC44A396E5}" type="slidenum">
-              <a:rPr lang="lv-LV" noProof="0" smtClean="0"/>
-              <a:pPr/>
-              <a:t>3</a:t>
-            </a:fld>
-            <a:endParaRPr lang="lv-LV" noProof="0"/>
           </a:p>
         </p:txBody>
       </p:sp>
@@ -9353,45 +15170,11 @@
           </a:bodyPr>
           <a:lstStyle/>
           <a:p>
+            <a:r>
+              <a:rPr lang="lv-LV" sz="2000"/>
+              <a:t>aaaa</a:t>
+            </a:r>
             <a:endParaRPr lang="lv-LV" sz="2000" dirty="0"/>
-          </a:p>
-        </p:txBody>
-      </p:sp>
-      <p:sp>
-        <p:nvSpPr>
-          <p:cNvPr id="19" name="Slaida numura vietturis 18">
-            <a:extLst>
-              <a:ext uri="{FF2B5EF4-FFF2-40B4-BE49-F238E27FC236}">
-                <a16:creationId xmlns:a16="http://schemas.microsoft.com/office/drawing/2014/main" id="{E5FDA097-BB2F-78D1-3F4E-D3BE14683279}"/>
-              </a:ext>
-            </a:extLst>
-          </p:cNvPr>
-          <p:cNvSpPr>
-            <a:spLocks noGrp="1"/>
-          </p:cNvSpPr>
-          <p:nvPr>
-            <p:ph type="sldNum" sz="quarter" idx="4294967295"/>
-          </p:nvPr>
-        </p:nvSpPr>
-        <p:spPr>
-          <a:xfrm>
-            <a:off x="8610600" y="6356350"/>
-            <a:ext cx="2743200" cy="365125"/>
-          </a:xfrm>
-          <a:prstGeom prst="rect">
-            <a:avLst/>
-          </a:prstGeom>
-        </p:spPr>
-        <p:txBody>
-          <a:bodyPr/>
-          <a:lstStyle/>
-          <a:p>
-            <a:fld id="{B5CEABB6-07DC-46E8-9B57-56EC44A396E5}" type="slidenum">
-              <a:rPr lang="lv-LV" noProof="0" smtClean="0"/>
-              <a:pPr/>
-              <a:t>4</a:t>
-            </a:fld>
-            <a:endParaRPr lang="lv-LV" noProof="0"/>
           </a:p>
         </p:txBody>
       </p:sp>
@@ -9459,47 +15242,9 @@
           </a:p>
         </p:txBody>
       </p:sp>
-      <p:sp>
-        <p:nvSpPr>
-          <p:cNvPr id="19" name="Slaida numura vietturis 18">
-            <a:extLst>
-              <a:ext uri="{FF2B5EF4-FFF2-40B4-BE49-F238E27FC236}">
-                <a16:creationId xmlns:a16="http://schemas.microsoft.com/office/drawing/2014/main" id="{BEC85D28-766D-FC3C-4109-461C3BCA8DB5}"/>
-              </a:ext>
-            </a:extLst>
-          </p:cNvPr>
-          <p:cNvSpPr>
-            <a:spLocks noGrp="1"/>
-          </p:cNvSpPr>
-          <p:nvPr>
-            <p:ph type="sldNum" sz="quarter" idx="4294967295"/>
-          </p:nvPr>
-        </p:nvSpPr>
-        <p:spPr>
-          <a:xfrm>
-            <a:off x="8610600" y="6356350"/>
-            <a:ext cx="2743200" cy="365125"/>
-          </a:xfrm>
-          <a:prstGeom prst="rect">
-            <a:avLst/>
-          </a:prstGeom>
-        </p:spPr>
-        <p:txBody>
-          <a:bodyPr/>
-          <a:lstStyle/>
-          <a:p>
-            <a:fld id="{B5CEABB6-07DC-46E8-9B57-56EC44A396E5}" type="slidenum">
-              <a:rPr lang="lv-LV" noProof="0" smtClean="0"/>
-              <a:pPr/>
-              <a:t>5</a:t>
-            </a:fld>
-            <a:endParaRPr lang="lv-LV" noProof="0"/>
-          </a:p>
-        </p:txBody>
-      </p:sp>
       <p:pic>
         <p:nvPicPr>
-          <p:cNvPr id="8" name="Attēls 7">
+          <p:cNvPr id="9" name="Attēls 8">
             <a:extLst>
               <a:ext uri="{FF2B5EF4-FFF2-40B4-BE49-F238E27FC236}">
                 <a16:creationId xmlns:a16="http://schemas.microsoft.com/office/drawing/2014/main" id="{0D3D0DE5-AEE1-422D-7607-653DDF0849A2}"/>
@@ -9527,6 +15272,205 @@
           </a:prstGeom>
         </p:spPr>
       </p:pic>
+      <p:sp>
+        <p:nvSpPr>
+          <p:cNvPr id="10" name="Teksta vietturis 15">
+            <a:extLst>
+              <a:ext uri="{FF2B5EF4-FFF2-40B4-BE49-F238E27FC236}">
+                <a16:creationId xmlns:a16="http://schemas.microsoft.com/office/drawing/2014/main" id="{9E65E292-F36E-5613-DC98-20013B98DFE5}"/>
+              </a:ext>
+            </a:extLst>
+          </p:cNvPr>
+          <p:cNvSpPr txBox="1">
+            <a:spLocks/>
+          </p:cNvSpPr>
+          <p:nvPr/>
+        </p:nvSpPr>
+        <p:spPr>
+          <a:xfrm>
+            <a:off x="838199" y="3871737"/>
+            <a:ext cx="3716548" cy="844707"/>
+          </a:xfrm>
+          <a:prstGeom prst="rect">
+            <a:avLst/>
+          </a:prstGeom>
+        </p:spPr>
+        <p:txBody>
+          <a:bodyPr vert="horz" lIns="91440" tIns="45720" rIns="91440" bIns="45720" rtlCol="0" anchor="t">
+            <a:noAutofit/>
+          </a:bodyPr>
+          <a:lstStyle>
+            <a:lvl1pPr marL="0" indent="0" algn="l" defTabSz="914400" rtl="0" eaLnBrk="1" latinLnBrk="0" hangingPunct="1">
+              <a:lnSpc>
+                <a:spcPct val="100000"/>
+              </a:lnSpc>
+              <a:spcBef>
+                <a:spcPts val="1000"/>
+              </a:spcBef>
+              <a:buFont typeface="Arial" panose="020B0604020202020204" pitchFamily="34" charset="0"/>
+              <a:buNone/>
+              <a:defRPr sz="1200" kern="1200">
+                <a:solidFill>
+                  <a:schemeClr val="bg1"/>
+                </a:solidFill>
+                <a:latin typeface="Calibri" panose="020F0502020204030204" pitchFamily="34" charset="0"/>
+                <a:ea typeface="+mn-ea"/>
+                <a:cs typeface="Calibri" panose="020F0502020204030204" pitchFamily="34" charset="0"/>
+              </a:defRPr>
+            </a:lvl1pPr>
+            <a:lvl2pPr marL="685800" indent="-228600" algn="l" defTabSz="914400" rtl="0" eaLnBrk="1" latinLnBrk="0" hangingPunct="1">
+              <a:lnSpc>
+                <a:spcPct val="90000"/>
+              </a:lnSpc>
+              <a:spcBef>
+                <a:spcPts val="500"/>
+              </a:spcBef>
+              <a:buFont typeface="Arial" panose="020B0604020202020204" pitchFamily="34" charset="0"/>
+              <a:buChar char="•"/>
+              <a:defRPr sz="2400" kern="1200">
+                <a:solidFill>
+                  <a:schemeClr val="tx1"/>
+                </a:solidFill>
+                <a:latin typeface="Calibri" panose="020F0502020204030204" pitchFamily="34" charset="0"/>
+                <a:ea typeface="+mn-ea"/>
+                <a:cs typeface="Calibri" panose="020F0502020204030204" pitchFamily="34" charset="0"/>
+              </a:defRPr>
+            </a:lvl2pPr>
+            <a:lvl3pPr marL="1143000" indent="-228600" algn="l" defTabSz="914400" rtl="0" eaLnBrk="1" latinLnBrk="0" hangingPunct="1">
+              <a:lnSpc>
+                <a:spcPct val="90000"/>
+              </a:lnSpc>
+              <a:spcBef>
+                <a:spcPts val="500"/>
+              </a:spcBef>
+              <a:buFont typeface="Arial" panose="020B0604020202020204" pitchFamily="34" charset="0"/>
+              <a:buChar char="•"/>
+              <a:defRPr sz="2000" kern="1200">
+                <a:solidFill>
+                  <a:schemeClr val="tx1"/>
+                </a:solidFill>
+                <a:latin typeface="Calibri" panose="020F0502020204030204" pitchFamily="34" charset="0"/>
+                <a:ea typeface="+mn-ea"/>
+                <a:cs typeface="Calibri" panose="020F0502020204030204" pitchFamily="34" charset="0"/>
+              </a:defRPr>
+            </a:lvl3pPr>
+            <a:lvl4pPr marL="1600200" indent="-228600" algn="l" defTabSz="914400" rtl="0" eaLnBrk="1" latinLnBrk="0" hangingPunct="1">
+              <a:lnSpc>
+                <a:spcPct val="90000"/>
+              </a:lnSpc>
+              <a:spcBef>
+                <a:spcPts val="500"/>
+              </a:spcBef>
+              <a:buFont typeface="Arial" panose="020B0604020202020204" pitchFamily="34" charset="0"/>
+              <a:buChar char="•"/>
+              <a:defRPr sz="1800" kern="1200">
+                <a:solidFill>
+                  <a:schemeClr val="tx1"/>
+                </a:solidFill>
+                <a:latin typeface="Calibri" panose="020F0502020204030204" pitchFamily="34" charset="0"/>
+                <a:ea typeface="+mn-ea"/>
+                <a:cs typeface="Calibri" panose="020F0502020204030204" pitchFamily="34" charset="0"/>
+              </a:defRPr>
+            </a:lvl4pPr>
+            <a:lvl5pPr marL="2057400" indent="-228600" algn="l" defTabSz="914400" rtl="0" eaLnBrk="1" latinLnBrk="0" hangingPunct="1">
+              <a:lnSpc>
+                <a:spcPct val="90000"/>
+              </a:lnSpc>
+              <a:spcBef>
+                <a:spcPts val="500"/>
+              </a:spcBef>
+              <a:buFont typeface="Arial" panose="020B0604020202020204" pitchFamily="34" charset="0"/>
+              <a:buChar char="•"/>
+              <a:defRPr sz="1800" kern="1200">
+                <a:solidFill>
+                  <a:schemeClr val="tx1"/>
+                </a:solidFill>
+                <a:latin typeface="Calibri" panose="020F0502020204030204" pitchFamily="34" charset="0"/>
+                <a:ea typeface="+mn-ea"/>
+                <a:cs typeface="Calibri" panose="020F0502020204030204" pitchFamily="34" charset="0"/>
+              </a:defRPr>
+            </a:lvl5pPr>
+            <a:lvl6pPr marL="2514600" indent="-228600" algn="l" defTabSz="914400" rtl="0" eaLnBrk="1" latinLnBrk="0" hangingPunct="1">
+              <a:lnSpc>
+                <a:spcPct val="90000"/>
+              </a:lnSpc>
+              <a:spcBef>
+                <a:spcPts val="500"/>
+              </a:spcBef>
+              <a:buFont typeface="Arial" panose="020B0604020202020204" pitchFamily="34" charset="0"/>
+              <a:buChar char="•"/>
+              <a:defRPr sz="1800" kern="1200">
+                <a:solidFill>
+                  <a:schemeClr val="tx1"/>
+                </a:solidFill>
+                <a:latin typeface="+mn-lt"/>
+                <a:ea typeface="+mn-ea"/>
+                <a:cs typeface="+mn-cs"/>
+              </a:defRPr>
+            </a:lvl6pPr>
+            <a:lvl7pPr marL="2971800" indent="-228600" algn="l" defTabSz="914400" rtl="0" eaLnBrk="1" latinLnBrk="0" hangingPunct="1">
+              <a:lnSpc>
+                <a:spcPct val="90000"/>
+              </a:lnSpc>
+              <a:spcBef>
+                <a:spcPts val="500"/>
+              </a:spcBef>
+              <a:buFont typeface="Arial" panose="020B0604020202020204" pitchFamily="34" charset="0"/>
+              <a:buChar char="•"/>
+              <a:defRPr sz="1800" kern="1200">
+                <a:solidFill>
+                  <a:schemeClr val="tx1"/>
+                </a:solidFill>
+                <a:latin typeface="+mn-lt"/>
+                <a:ea typeface="+mn-ea"/>
+                <a:cs typeface="+mn-cs"/>
+              </a:defRPr>
+            </a:lvl7pPr>
+            <a:lvl8pPr marL="3429000" indent="-228600" algn="l" defTabSz="914400" rtl="0" eaLnBrk="1" latinLnBrk="0" hangingPunct="1">
+              <a:lnSpc>
+                <a:spcPct val="90000"/>
+              </a:lnSpc>
+              <a:spcBef>
+                <a:spcPts val="500"/>
+              </a:spcBef>
+              <a:buFont typeface="Arial" panose="020B0604020202020204" pitchFamily="34" charset="0"/>
+              <a:buChar char="•"/>
+              <a:defRPr sz="1800" kern="1200">
+                <a:solidFill>
+                  <a:schemeClr val="tx1"/>
+                </a:solidFill>
+                <a:latin typeface="+mn-lt"/>
+                <a:ea typeface="+mn-ea"/>
+                <a:cs typeface="+mn-cs"/>
+              </a:defRPr>
+            </a:lvl8pPr>
+            <a:lvl9pPr marL="3886200" indent="-228600" algn="l" defTabSz="914400" rtl="0" eaLnBrk="1" latinLnBrk="0" hangingPunct="1">
+              <a:lnSpc>
+                <a:spcPct val="90000"/>
+              </a:lnSpc>
+              <a:spcBef>
+                <a:spcPts val="500"/>
+              </a:spcBef>
+              <a:buFont typeface="Arial" panose="020B0604020202020204" pitchFamily="34" charset="0"/>
+              <a:buChar char="•"/>
+              <a:defRPr sz="1800" kern="1200">
+                <a:solidFill>
+                  <a:schemeClr val="tx1"/>
+                </a:solidFill>
+                <a:latin typeface="+mn-lt"/>
+                <a:ea typeface="+mn-ea"/>
+                <a:cs typeface="+mn-cs"/>
+              </a:defRPr>
+            </a:lvl9pPr>
+          </a:lstStyle>
+          <a:p>
+            <a:r>
+              <a:rPr lang="lv-LV" sz="2800" dirty="0"/>
+              <a:t>Tikko atverot datorspēli</a:t>
+            </a:r>
+          </a:p>
+        </p:txBody>
+      </p:sp>
     </p:spTree>
     <p:extLst>
       <p:ext uri="{BB962C8B-B14F-4D97-AF65-F5344CB8AC3E}">
@@ -9591,47 +15535,9 @@
           </a:p>
         </p:txBody>
       </p:sp>
-      <p:sp>
-        <p:nvSpPr>
-          <p:cNvPr id="19" name="Slaida numura vietturis 18">
-            <a:extLst>
-              <a:ext uri="{FF2B5EF4-FFF2-40B4-BE49-F238E27FC236}">
-                <a16:creationId xmlns:a16="http://schemas.microsoft.com/office/drawing/2014/main" id="{C6414E21-39A9-E77A-520D-9FB20309CAA3}"/>
-              </a:ext>
-            </a:extLst>
-          </p:cNvPr>
-          <p:cNvSpPr>
-            <a:spLocks noGrp="1"/>
-          </p:cNvSpPr>
-          <p:nvPr>
-            <p:ph type="sldNum" sz="quarter" idx="4294967295"/>
-          </p:nvPr>
-        </p:nvSpPr>
-        <p:spPr>
-          <a:xfrm>
-            <a:off x="8610600" y="6356350"/>
-            <a:ext cx="2743200" cy="365125"/>
-          </a:xfrm>
-          <a:prstGeom prst="rect">
-            <a:avLst/>
-          </a:prstGeom>
-        </p:spPr>
-        <p:txBody>
-          <a:bodyPr/>
-          <a:lstStyle/>
-          <a:p>
-            <a:fld id="{B5CEABB6-07DC-46E8-9B57-56EC44A396E5}" type="slidenum">
-              <a:rPr lang="lv-LV" noProof="0" smtClean="0"/>
-              <a:pPr/>
-              <a:t>6</a:t>
-            </a:fld>
-            <a:endParaRPr lang="lv-LV" noProof="0"/>
-          </a:p>
-        </p:txBody>
-      </p:sp>
       <p:pic>
         <p:nvPicPr>
-          <p:cNvPr id="4" name="Attēls 3">
+          <p:cNvPr id="5" name="Attēls 4">
             <a:extLst>
               <a:ext uri="{FF2B5EF4-FFF2-40B4-BE49-F238E27FC236}">
                 <a16:creationId xmlns:a16="http://schemas.microsoft.com/office/drawing/2014/main" id="{E8F7EBAE-EB24-0FCA-974E-1B305E8581A7}"/>
@@ -9659,6 +15565,205 @@
           </a:prstGeom>
         </p:spPr>
       </p:pic>
+      <p:sp>
+        <p:nvSpPr>
+          <p:cNvPr id="6" name="Teksta vietturis 15">
+            <a:extLst>
+              <a:ext uri="{FF2B5EF4-FFF2-40B4-BE49-F238E27FC236}">
+                <a16:creationId xmlns:a16="http://schemas.microsoft.com/office/drawing/2014/main" id="{3EAC2F0B-9337-0A4B-F489-92FB898D77C3}"/>
+              </a:ext>
+            </a:extLst>
+          </p:cNvPr>
+          <p:cNvSpPr txBox="1">
+            <a:spLocks/>
+          </p:cNvSpPr>
+          <p:nvPr/>
+        </p:nvSpPr>
+        <p:spPr>
+          <a:xfrm>
+            <a:off x="838199" y="3871737"/>
+            <a:ext cx="3716548" cy="844707"/>
+          </a:xfrm>
+          <a:prstGeom prst="rect">
+            <a:avLst/>
+          </a:prstGeom>
+        </p:spPr>
+        <p:txBody>
+          <a:bodyPr vert="horz" lIns="91440" tIns="45720" rIns="91440" bIns="45720" rtlCol="0" anchor="t">
+            <a:noAutofit/>
+          </a:bodyPr>
+          <a:lstStyle>
+            <a:lvl1pPr marL="0" indent="0" algn="l" defTabSz="914400" rtl="0" eaLnBrk="1" latinLnBrk="0" hangingPunct="1">
+              <a:lnSpc>
+                <a:spcPct val="100000"/>
+              </a:lnSpc>
+              <a:spcBef>
+                <a:spcPts val="1000"/>
+              </a:spcBef>
+              <a:buFont typeface="Arial" panose="020B0604020202020204" pitchFamily="34" charset="0"/>
+              <a:buNone/>
+              <a:defRPr sz="1200" kern="1200">
+                <a:solidFill>
+                  <a:schemeClr val="bg1"/>
+                </a:solidFill>
+                <a:latin typeface="Calibri" panose="020F0502020204030204" pitchFamily="34" charset="0"/>
+                <a:ea typeface="+mn-ea"/>
+                <a:cs typeface="Calibri" panose="020F0502020204030204" pitchFamily="34" charset="0"/>
+              </a:defRPr>
+            </a:lvl1pPr>
+            <a:lvl2pPr marL="685800" indent="-228600" algn="l" defTabSz="914400" rtl="0" eaLnBrk="1" latinLnBrk="0" hangingPunct="1">
+              <a:lnSpc>
+                <a:spcPct val="90000"/>
+              </a:lnSpc>
+              <a:spcBef>
+                <a:spcPts val="500"/>
+              </a:spcBef>
+              <a:buFont typeface="Arial" panose="020B0604020202020204" pitchFamily="34" charset="0"/>
+              <a:buChar char="•"/>
+              <a:defRPr sz="2400" kern="1200">
+                <a:solidFill>
+                  <a:schemeClr val="tx1"/>
+                </a:solidFill>
+                <a:latin typeface="Calibri" panose="020F0502020204030204" pitchFamily="34" charset="0"/>
+                <a:ea typeface="+mn-ea"/>
+                <a:cs typeface="Calibri" panose="020F0502020204030204" pitchFamily="34" charset="0"/>
+              </a:defRPr>
+            </a:lvl2pPr>
+            <a:lvl3pPr marL="1143000" indent="-228600" algn="l" defTabSz="914400" rtl="0" eaLnBrk="1" latinLnBrk="0" hangingPunct="1">
+              <a:lnSpc>
+                <a:spcPct val="90000"/>
+              </a:lnSpc>
+              <a:spcBef>
+                <a:spcPts val="500"/>
+              </a:spcBef>
+              <a:buFont typeface="Arial" panose="020B0604020202020204" pitchFamily="34" charset="0"/>
+              <a:buChar char="•"/>
+              <a:defRPr sz="2000" kern="1200">
+                <a:solidFill>
+                  <a:schemeClr val="tx1"/>
+                </a:solidFill>
+                <a:latin typeface="Calibri" panose="020F0502020204030204" pitchFamily="34" charset="0"/>
+                <a:ea typeface="+mn-ea"/>
+                <a:cs typeface="Calibri" panose="020F0502020204030204" pitchFamily="34" charset="0"/>
+              </a:defRPr>
+            </a:lvl3pPr>
+            <a:lvl4pPr marL="1600200" indent="-228600" algn="l" defTabSz="914400" rtl="0" eaLnBrk="1" latinLnBrk="0" hangingPunct="1">
+              <a:lnSpc>
+                <a:spcPct val="90000"/>
+              </a:lnSpc>
+              <a:spcBef>
+                <a:spcPts val="500"/>
+              </a:spcBef>
+              <a:buFont typeface="Arial" panose="020B0604020202020204" pitchFamily="34" charset="0"/>
+              <a:buChar char="•"/>
+              <a:defRPr sz="1800" kern="1200">
+                <a:solidFill>
+                  <a:schemeClr val="tx1"/>
+                </a:solidFill>
+                <a:latin typeface="Calibri" panose="020F0502020204030204" pitchFamily="34" charset="0"/>
+                <a:ea typeface="+mn-ea"/>
+                <a:cs typeface="Calibri" panose="020F0502020204030204" pitchFamily="34" charset="0"/>
+              </a:defRPr>
+            </a:lvl4pPr>
+            <a:lvl5pPr marL="2057400" indent="-228600" algn="l" defTabSz="914400" rtl="0" eaLnBrk="1" latinLnBrk="0" hangingPunct="1">
+              <a:lnSpc>
+                <a:spcPct val="90000"/>
+              </a:lnSpc>
+              <a:spcBef>
+                <a:spcPts val="500"/>
+              </a:spcBef>
+              <a:buFont typeface="Arial" panose="020B0604020202020204" pitchFamily="34" charset="0"/>
+              <a:buChar char="•"/>
+              <a:defRPr sz="1800" kern="1200">
+                <a:solidFill>
+                  <a:schemeClr val="tx1"/>
+                </a:solidFill>
+                <a:latin typeface="Calibri" panose="020F0502020204030204" pitchFamily="34" charset="0"/>
+                <a:ea typeface="+mn-ea"/>
+                <a:cs typeface="Calibri" panose="020F0502020204030204" pitchFamily="34" charset="0"/>
+              </a:defRPr>
+            </a:lvl5pPr>
+            <a:lvl6pPr marL="2514600" indent="-228600" algn="l" defTabSz="914400" rtl="0" eaLnBrk="1" latinLnBrk="0" hangingPunct="1">
+              <a:lnSpc>
+                <a:spcPct val="90000"/>
+              </a:lnSpc>
+              <a:spcBef>
+                <a:spcPts val="500"/>
+              </a:spcBef>
+              <a:buFont typeface="Arial" panose="020B0604020202020204" pitchFamily="34" charset="0"/>
+              <a:buChar char="•"/>
+              <a:defRPr sz="1800" kern="1200">
+                <a:solidFill>
+                  <a:schemeClr val="tx1"/>
+                </a:solidFill>
+                <a:latin typeface="+mn-lt"/>
+                <a:ea typeface="+mn-ea"/>
+                <a:cs typeface="+mn-cs"/>
+              </a:defRPr>
+            </a:lvl6pPr>
+            <a:lvl7pPr marL="2971800" indent="-228600" algn="l" defTabSz="914400" rtl="0" eaLnBrk="1" latinLnBrk="0" hangingPunct="1">
+              <a:lnSpc>
+                <a:spcPct val="90000"/>
+              </a:lnSpc>
+              <a:spcBef>
+                <a:spcPts val="500"/>
+              </a:spcBef>
+              <a:buFont typeface="Arial" panose="020B0604020202020204" pitchFamily="34" charset="0"/>
+              <a:buChar char="•"/>
+              <a:defRPr sz="1800" kern="1200">
+                <a:solidFill>
+                  <a:schemeClr val="tx1"/>
+                </a:solidFill>
+                <a:latin typeface="+mn-lt"/>
+                <a:ea typeface="+mn-ea"/>
+                <a:cs typeface="+mn-cs"/>
+              </a:defRPr>
+            </a:lvl7pPr>
+            <a:lvl8pPr marL="3429000" indent="-228600" algn="l" defTabSz="914400" rtl="0" eaLnBrk="1" latinLnBrk="0" hangingPunct="1">
+              <a:lnSpc>
+                <a:spcPct val="90000"/>
+              </a:lnSpc>
+              <a:spcBef>
+                <a:spcPts val="500"/>
+              </a:spcBef>
+              <a:buFont typeface="Arial" panose="020B0604020202020204" pitchFamily="34" charset="0"/>
+              <a:buChar char="•"/>
+              <a:defRPr sz="1800" kern="1200">
+                <a:solidFill>
+                  <a:schemeClr val="tx1"/>
+                </a:solidFill>
+                <a:latin typeface="+mn-lt"/>
+                <a:ea typeface="+mn-ea"/>
+                <a:cs typeface="+mn-cs"/>
+              </a:defRPr>
+            </a:lvl8pPr>
+            <a:lvl9pPr marL="3886200" indent="-228600" algn="l" defTabSz="914400" rtl="0" eaLnBrk="1" latinLnBrk="0" hangingPunct="1">
+              <a:lnSpc>
+                <a:spcPct val="90000"/>
+              </a:lnSpc>
+              <a:spcBef>
+                <a:spcPts val="500"/>
+              </a:spcBef>
+              <a:buFont typeface="Arial" panose="020B0604020202020204" pitchFamily="34" charset="0"/>
+              <a:buChar char="•"/>
+              <a:defRPr sz="1800" kern="1200">
+                <a:solidFill>
+                  <a:schemeClr val="tx1"/>
+                </a:solidFill>
+                <a:latin typeface="+mn-lt"/>
+                <a:ea typeface="+mn-ea"/>
+                <a:cs typeface="+mn-cs"/>
+              </a:defRPr>
+            </a:lvl9pPr>
+          </a:lstStyle>
+          <a:p>
+            <a:r>
+              <a:rPr lang="lv-LV" sz="2800" dirty="0"/>
+              <a:t>Ierīču anotācijas</a:t>
+            </a:r>
+          </a:p>
+        </p:txBody>
+      </p:sp>
     </p:spTree>
     <p:extLst>
       <p:ext uri="{BB962C8B-B14F-4D97-AF65-F5344CB8AC3E}">
@@ -9723,47 +15828,9 @@
           </a:p>
         </p:txBody>
       </p:sp>
-      <p:sp>
-        <p:nvSpPr>
-          <p:cNvPr id="19" name="Slaida numura vietturis 18">
-            <a:extLst>
-              <a:ext uri="{FF2B5EF4-FFF2-40B4-BE49-F238E27FC236}">
-                <a16:creationId xmlns:a16="http://schemas.microsoft.com/office/drawing/2014/main" id="{F69006FE-74BB-EBDE-F2BB-E3E559A0965A}"/>
-              </a:ext>
-            </a:extLst>
-          </p:cNvPr>
-          <p:cNvSpPr>
-            <a:spLocks noGrp="1"/>
-          </p:cNvSpPr>
-          <p:nvPr>
-            <p:ph type="sldNum" sz="quarter" idx="4294967295"/>
-          </p:nvPr>
-        </p:nvSpPr>
-        <p:spPr>
-          <a:xfrm>
-            <a:off x="8610600" y="6356350"/>
-            <a:ext cx="2743200" cy="365125"/>
-          </a:xfrm>
-          <a:prstGeom prst="rect">
-            <a:avLst/>
-          </a:prstGeom>
-        </p:spPr>
-        <p:txBody>
-          <a:bodyPr/>
-          <a:lstStyle/>
-          <a:p>
-            <a:fld id="{B5CEABB6-07DC-46E8-9B57-56EC44A396E5}" type="slidenum">
-              <a:rPr lang="lv-LV" noProof="0" smtClean="0"/>
-              <a:pPr/>
-              <a:t>7</a:t>
-            </a:fld>
-            <a:endParaRPr lang="lv-LV" noProof="0"/>
-          </a:p>
-        </p:txBody>
-      </p:sp>
       <p:pic>
         <p:nvPicPr>
-          <p:cNvPr id="5" name="Attēls 4">
+          <p:cNvPr id="6" name="Attēls 5">
             <a:extLst>
               <a:ext uri="{FF2B5EF4-FFF2-40B4-BE49-F238E27FC236}">
                 <a16:creationId xmlns:a16="http://schemas.microsoft.com/office/drawing/2014/main" id="{7E19D00C-2F20-3EF9-7490-2563BA7F7EA0}"/>
@@ -9791,6 +15858,205 @@
           </a:prstGeom>
         </p:spPr>
       </p:pic>
+      <p:sp>
+        <p:nvSpPr>
+          <p:cNvPr id="7" name="Teksta vietturis 15">
+            <a:extLst>
+              <a:ext uri="{FF2B5EF4-FFF2-40B4-BE49-F238E27FC236}">
+                <a16:creationId xmlns:a16="http://schemas.microsoft.com/office/drawing/2014/main" id="{081B1E93-BDAB-86AD-8B86-C987E5A07514}"/>
+              </a:ext>
+            </a:extLst>
+          </p:cNvPr>
+          <p:cNvSpPr txBox="1">
+            <a:spLocks/>
+          </p:cNvSpPr>
+          <p:nvPr/>
+        </p:nvSpPr>
+        <p:spPr>
+          <a:xfrm>
+            <a:off x="838199" y="3871737"/>
+            <a:ext cx="3716548" cy="844707"/>
+          </a:xfrm>
+          <a:prstGeom prst="rect">
+            <a:avLst/>
+          </a:prstGeom>
+        </p:spPr>
+        <p:txBody>
+          <a:bodyPr vert="horz" lIns="91440" tIns="45720" rIns="91440" bIns="45720" rtlCol="0" anchor="t">
+            <a:noAutofit/>
+          </a:bodyPr>
+          <a:lstStyle>
+            <a:lvl1pPr marL="0" indent="0" algn="l" defTabSz="914400" rtl="0" eaLnBrk="1" latinLnBrk="0" hangingPunct="1">
+              <a:lnSpc>
+                <a:spcPct val="100000"/>
+              </a:lnSpc>
+              <a:spcBef>
+                <a:spcPts val="1000"/>
+              </a:spcBef>
+              <a:buFont typeface="Arial" panose="020B0604020202020204" pitchFamily="34" charset="0"/>
+              <a:buNone/>
+              <a:defRPr sz="1200" kern="1200">
+                <a:solidFill>
+                  <a:schemeClr val="bg1"/>
+                </a:solidFill>
+                <a:latin typeface="Calibri" panose="020F0502020204030204" pitchFamily="34" charset="0"/>
+                <a:ea typeface="+mn-ea"/>
+                <a:cs typeface="Calibri" panose="020F0502020204030204" pitchFamily="34" charset="0"/>
+              </a:defRPr>
+            </a:lvl1pPr>
+            <a:lvl2pPr marL="685800" indent="-228600" algn="l" defTabSz="914400" rtl="0" eaLnBrk="1" latinLnBrk="0" hangingPunct="1">
+              <a:lnSpc>
+                <a:spcPct val="90000"/>
+              </a:lnSpc>
+              <a:spcBef>
+                <a:spcPts val="500"/>
+              </a:spcBef>
+              <a:buFont typeface="Arial" panose="020B0604020202020204" pitchFamily="34" charset="0"/>
+              <a:buChar char="•"/>
+              <a:defRPr sz="2400" kern="1200">
+                <a:solidFill>
+                  <a:schemeClr val="tx1"/>
+                </a:solidFill>
+                <a:latin typeface="Calibri" panose="020F0502020204030204" pitchFamily="34" charset="0"/>
+                <a:ea typeface="+mn-ea"/>
+                <a:cs typeface="Calibri" panose="020F0502020204030204" pitchFamily="34" charset="0"/>
+              </a:defRPr>
+            </a:lvl2pPr>
+            <a:lvl3pPr marL="1143000" indent="-228600" algn="l" defTabSz="914400" rtl="0" eaLnBrk="1" latinLnBrk="0" hangingPunct="1">
+              <a:lnSpc>
+                <a:spcPct val="90000"/>
+              </a:lnSpc>
+              <a:spcBef>
+                <a:spcPts val="500"/>
+              </a:spcBef>
+              <a:buFont typeface="Arial" panose="020B0604020202020204" pitchFamily="34" charset="0"/>
+              <a:buChar char="•"/>
+              <a:defRPr sz="2000" kern="1200">
+                <a:solidFill>
+                  <a:schemeClr val="tx1"/>
+                </a:solidFill>
+                <a:latin typeface="Calibri" panose="020F0502020204030204" pitchFamily="34" charset="0"/>
+                <a:ea typeface="+mn-ea"/>
+                <a:cs typeface="Calibri" panose="020F0502020204030204" pitchFamily="34" charset="0"/>
+              </a:defRPr>
+            </a:lvl3pPr>
+            <a:lvl4pPr marL="1600200" indent="-228600" algn="l" defTabSz="914400" rtl="0" eaLnBrk="1" latinLnBrk="0" hangingPunct="1">
+              <a:lnSpc>
+                <a:spcPct val="90000"/>
+              </a:lnSpc>
+              <a:spcBef>
+                <a:spcPts val="500"/>
+              </a:spcBef>
+              <a:buFont typeface="Arial" panose="020B0604020202020204" pitchFamily="34" charset="0"/>
+              <a:buChar char="•"/>
+              <a:defRPr sz="1800" kern="1200">
+                <a:solidFill>
+                  <a:schemeClr val="tx1"/>
+                </a:solidFill>
+                <a:latin typeface="Calibri" panose="020F0502020204030204" pitchFamily="34" charset="0"/>
+                <a:ea typeface="+mn-ea"/>
+                <a:cs typeface="Calibri" panose="020F0502020204030204" pitchFamily="34" charset="0"/>
+              </a:defRPr>
+            </a:lvl4pPr>
+            <a:lvl5pPr marL="2057400" indent="-228600" algn="l" defTabSz="914400" rtl="0" eaLnBrk="1" latinLnBrk="0" hangingPunct="1">
+              <a:lnSpc>
+                <a:spcPct val="90000"/>
+              </a:lnSpc>
+              <a:spcBef>
+                <a:spcPts val="500"/>
+              </a:spcBef>
+              <a:buFont typeface="Arial" panose="020B0604020202020204" pitchFamily="34" charset="0"/>
+              <a:buChar char="•"/>
+              <a:defRPr sz="1800" kern="1200">
+                <a:solidFill>
+                  <a:schemeClr val="tx1"/>
+                </a:solidFill>
+                <a:latin typeface="Calibri" panose="020F0502020204030204" pitchFamily="34" charset="0"/>
+                <a:ea typeface="+mn-ea"/>
+                <a:cs typeface="Calibri" panose="020F0502020204030204" pitchFamily="34" charset="0"/>
+              </a:defRPr>
+            </a:lvl5pPr>
+            <a:lvl6pPr marL="2514600" indent="-228600" algn="l" defTabSz="914400" rtl="0" eaLnBrk="1" latinLnBrk="0" hangingPunct="1">
+              <a:lnSpc>
+                <a:spcPct val="90000"/>
+              </a:lnSpc>
+              <a:spcBef>
+                <a:spcPts val="500"/>
+              </a:spcBef>
+              <a:buFont typeface="Arial" panose="020B0604020202020204" pitchFamily="34" charset="0"/>
+              <a:buChar char="•"/>
+              <a:defRPr sz="1800" kern="1200">
+                <a:solidFill>
+                  <a:schemeClr val="tx1"/>
+                </a:solidFill>
+                <a:latin typeface="+mn-lt"/>
+                <a:ea typeface="+mn-ea"/>
+                <a:cs typeface="+mn-cs"/>
+              </a:defRPr>
+            </a:lvl6pPr>
+            <a:lvl7pPr marL="2971800" indent="-228600" algn="l" defTabSz="914400" rtl="0" eaLnBrk="1" latinLnBrk="0" hangingPunct="1">
+              <a:lnSpc>
+                <a:spcPct val="90000"/>
+              </a:lnSpc>
+              <a:spcBef>
+                <a:spcPts val="500"/>
+              </a:spcBef>
+              <a:buFont typeface="Arial" panose="020B0604020202020204" pitchFamily="34" charset="0"/>
+              <a:buChar char="•"/>
+              <a:defRPr sz="1800" kern="1200">
+                <a:solidFill>
+                  <a:schemeClr val="tx1"/>
+                </a:solidFill>
+                <a:latin typeface="+mn-lt"/>
+                <a:ea typeface="+mn-ea"/>
+                <a:cs typeface="+mn-cs"/>
+              </a:defRPr>
+            </a:lvl7pPr>
+            <a:lvl8pPr marL="3429000" indent="-228600" algn="l" defTabSz="914400" rtl="0" eaLnBrk="1" latinLnBrk="0" hangingPunct="1">
+              <a:lnSpc>
+                <a:spcPct val="90000"/>
+              </a:lnSpc>
+              <a:spcBef>
+                <a:spcPts val="500"/>
+              </a:spcBef>
+              <a:buFont typeface="Arial" panose="020B0604020202020204" pitchFamily="34" charset="0"/>
+              <a:buChar char="•"/>
+              <a:defRPr sz="1800" kern="1200">
+                <a:solidFill>
+                  <a:schemeClr val="tx1"/>
+                </a:solidFill>
+                <a:latin typeface="+mn-lt"/>
+                <a:ea typeface="+mn-ea"/>
+                <a:cs typeface="+mn-cs"/>
+              </a:defRPr>
+            </a:lvl8pPr>
+            <a:lvl9pPr marL="3886200" indent="-228600" algn="l" defTabSz="914400" rtl="0" eaLnBrk="1" latinLnBrk="0" hangingPunct="1">
+              <a:lnSpc>
+                <a:spcPct val="90000"/>
+              </a:lnSpc>
+              <a:spcBef>
+                <a:spcPts val="500"/>
+              </a:spcBef>
+              <a:buFont typeface="Arial" panose="020B0604020202020204" pitchFamily="34" charset="0"/>
+              <a:buChar char="•"/>
+              <a:defRPr sz="1800" kern="1200">
+                <a:solidFill>
+                  <a:schemeClr val="tx1"/>
+                </a:solidFill>
+                <a:latin typeface="+mn-lt"/>
+                <a:ea typeface="+mn-ea"/>
+                <a:cs typeface="+mn-cs"/>
+              </a:defRPr>
+            </a:lvl9pPr>
+          </a:lstStyle>
+          <a:p>
+            <a:r>
+              <a:rPr lang="lv-LV" sz="2800" dirty="0"/>
+              <a:t>Iestatījumu logs</a:t>
+            </a:r>
+          </a:p>
+        </p:txBody>
+      </p:sp>
     </p:spTree>
     <p:extLst>
       <p:ext uri="{BB962C8B-B14F-4D97-AF65-F5344CB8AC3E}">
@@ -9855,50 +16121,12 @@
           </a:p>
         </p:txBody>
       </p:sp>
-      <p:sp>
-        <p:nvSpPr>
-          <p:cNvPr id="19" name="Slaida numura vietturis 18">
-            <a:extLst>
-              <a:ext uri="{FF2B5EF4-FFF2-40B4-BE49-F238E27FC236}">
-                <a16:creationId xmlns:a16="http://schemas.microsoft.com/office/drawing/2014/main" id="{DC592A00-CDE2-E9F9-E915-13DBFA3B0495}"/>
-              </a:ext>
-            </a:extLst>
-          </p:cNvPr>
-          <p:cNvSpPr>
-            <a:spLocks noGrp="1"/>
-          </p:cNvSpPr>
-          <p:nvPr>
-            <p:ph type="sldNum" sz="quarter" idx="4294967295"/>
-          </p:nvPr>
-        </p:nvSpPr>
-        <p:spPr>
-          <a:xfrm>
-            <a:off x="8610600" y="6356350"/>
-            <a:ext cx="2743200" cy="365125"/>
-          </a:xfrm>
-          <a:prstGeom prst="rect">
-            <a:avLst/>
-          </a:prstGeom>
-        </p:spPr>
-        <p:txBody>
-          <a:bodyPr/>
-          <a:lstStyle/>
-          <a:p>
-            <a:fld id="{B5CEABB6-07DC-46E8-9B57-56EC44A396E5}" type="slidenum">
-              <a:rPr lang="lv-LV" noProof="0" smtClean="0"/>
-              <a:pPr/>
-              <a:t>8</a:t>
-            </a:fld>
-            <a:endParaRPr lang="lv-LV" noProof="0"/>
-          </a:p>
-        </p:txBody>
-      </p:sp>
       <p:pic>
         <p:nvPicPr>
-          <p:cNvPr id="5" name="Attēls 4">
-            <a:extLst>
-              <a:ext uri="{FF2B5EF4-FFF2-40B4-BE49-F238E27FC236}">
-                <a16:creationId xmlns:a16="http://schemas.microsoft.com/office/drawing/2014/main" id="{685F543C-8962-A424-D493-A2F35CD301E3}"/>
+          <p:cNvPr id="6" name="Attēls 5">
+            <a:extLst>
+              <a:ext uri="{FF2B5EF4-FFF2-40B4-BE49-F238E27FC236}">
+                <a16:creationId xmlns:a16="http://schemas.microsoft.com/office/drawing/2014/main" id="{592651C6-5F53-16E9-FB32-63FB0100318D}"/>
               </a:ext>
             </a:extLst>
           </p:cNvPr>
@@ -9915,7 +16143,499 @@
         </p:blipFill>
         <p:spPr>
           <a:xfrm>
-            <a:off x="5255670" y="0"/>
+            <a:off x="5216852" y="0"/>
+            <a:ext cx="6709860" cy="6858000"/>
+          </a:xfrm>
+          <a:prstGeom prst="rect">
+            <a:avLst/>
+          </a:prstGeom>
+        </p:spPr>
+      </p:pic>
+      <p:sp>
+        <p:nvSpPr>
+          <p:cNvPr id="7" name="Teksta vietturis 15">
+            <a:extLst>
+              <a:ext uri="{FF2B5EF4-FFF2-40B4-BE49-F238E27FC236}">
+                <a16:creationId xmlns:a16="http://schemas.microsoft.com/office/drawing/2014/main" id="{20982153-8642-6652-6134-965F865F211A}"/>
+              </a:ext>
+            </a:extLst>
+          </p:cNvPr>
+          <p:cNvSpPr txBox="1">
+            <a:spLocks/>
+          </p:cNvSpPr>
+          <p:nvPr/>
+        </p:nvSpPr>
+        <p:spPr>
+          <a:xfrm>
+            <a:off x="838199" y="3871737"/>
+            <a:ext cx="3716548" cy="844707"/>
+          </a:xfrm>
+          <a:prstGeom prst="rect">
+            <a:avLst/>
+          </a:prstGeom>
+        </p:spPr>
+        <p:txBody>
+          <a:bodyPr vert="horz" lIns="91440" tIns="45720" rIns="91440" bIns="45720" rtlCol="0" anchor="t">
+            <a:noAutofit/>
+          </a:bodyPr>
+          <a:lstStyle>
+            <a:lvl1pPr marL="0" indent="0" algn="l" defTabSz="914400" rtl="0" eaLnBrk="1" latinLnBrk="0" hangingPunct="1">
+              <a:lnSpc>
+                <a:spcPct val="100000"/>
+              </a:lnSpc>
+              <a:spcBef>
+                <a:spcPts val="1000"/>
+              </a:spcBef>
+              <a:buFont typeface="Arial" panose="020B0604020202020204" pitchFamily="34" charset="0"/>
+              <a:buNone/>
+              <a:defRPr sz="1200" kern="1200">
+                <a:solidFill>
+                  <a:schemeClr val="bg1"/>
+                </a:solidFill>
+                <a:latin typeface="Calibri" panose="020F0502020204030204" pitchFamily="34" charset="0"/>
+                <a:ea typeface="+mn-ea"/>
+                <a:cs typeface="Calibri" panose="020F0502020204030204" pitchFamily="34" charset="0"/>
+              </a:defRPr>
+            </a:lvl1pPr>
+            <a:lvl2pPr marL="685800" indent="-228600" algn="l" defTabSz="914400" rtl="0" eaLnBrk="1" latinLnBrk="0" hangingPunct="1">
+              <a:lnSpc>
+                <a:spcPct val="90000"/>
+              </a:lnSpc>
+              <a:spcBef>
+                <a:spcPts val="500"/>
+              </a:spcBef>
+              <a:buFont typeface="Arial" panose="020B0604020202020204" pitchFamily="34" charset="0"/>
+              <a:buChar char="•"/>
+              <a:defRPr sz="2400" kern="1200">
+                <a:solidFill>
+                  <a:schemeClr val="tx1"/>
+                </a:solidFill>
+                <a:latin typeface="Calibri" panose="020F0502020204030204" pitchFamily="34" charset="0"/>
+                <a:ea typeface="+mn-ea"/>
+                <a:cs typeface="Calibri" panose="020F0502020204030204" pitchFamily="34" charset="0"/>
+              </a:defRPr>
+            </a:lvl2pPr>
+            <a:lvl3pPr marL="1143000" indent="-228600" algn="l" defTabSz="914400" rtl="0" eaLnBrk="1" latinLnBrk="0" hangingPunct="1">
+              <a:lnSpc>
+                <a:spcPct val="90000"/>
+              </a:lnSpc>
+              <a:spcBef>
+                <a:spcPts val="500"/>
+              </a:spcBef>
+              <a:buFont typeface="Arial" panose="020B0604020202020204" pitchFamily="34" charset="0"/>
+              <a:buChar char="•"/>
+              <a:defRPr sz="2000" kern="1200">
+                <a:solidFill>
+                  <a:schemeClr val="tx1"/>
+                </a:solidFill>
+                <a:latin typeface="Calibri" panose="020F0502020204030204" pitchFamily="34" charset="0"/>
+                <a:ea typeface="+mn-ea"/>
+                <a:cs typeface="Calibri" panose="020F0502020204030204" pitchFamily="34" charset="0"/>
+              </a:defRPr>
+            </a:lvl3pPr>
+            <a:lvl4pPr marL="1600200" indent="-228600" algn="l" defTabSz="914400" rtl="0" eaLnBrk="1" latinLnBrk="0" hangingPunct="1">
+              <a:lnSpc>
+                <a:spcPct val="90000"/>
+              </a:lnSpc>
+              <a:spcBef>
+                <a:spcPts val="500"/>
+              </a:spcBef>
+              <a:buFont typeface="Arial" panose="020B0604020202020204" pitchFamily="34" charset="0"/>
+              <a:buChar char="•"/>
+              <a:defRPr sz="1800" kern="1200">
+                <a:solidFill>
+                  <a:schemeClr val="tx1"/>
+                </a:solidFill>
+                <a:latin typeface="Calibri" panose="020F0502020204030204" pitchFamily="34" charset="0"/>
+                <a:ea typeface="+mn-ea"/>
+                <a:cs typeface="Calibri" panose="020F0502020204030204" pitchFamily="34" charset="0"/>
+              </a:defRPr>
+            </a:lvl4pPr>
+            <a:lvl5pPr marL="2057400" indent="-228600" algn="l" defTabSz="914400" rtl="0" eaLnBrk="1" latinLnBrk="0" hangingPunct="1">
+              <a:lnSpc>
+                <a:spcPct val="90000"/>
+              </a:lnSpc>
+              <a:spcBef>
+                <a:spcPts val="500"/>
+              </a:spcBef>
+              <a:buFont typeface="Arial" panose="020B0604020202020204" pitchFamily="34" charset="0"/>
+              <a:buChar char="•"/>
+              <a:defRPr sz="1800" kern="1200">
+                <a:solidFill>
+                  <a:schemeClr val="tx1"/>
+                </a:solidFill>
+                <a:latin typeface="Calibri" panose="020F0502020204030204" pitchFamily="34" charset="0"/>
+                <a:ea typeface="+mn-ea"/>
+                <a:cs typeface="Calibri" panose="020F0502020204030204" pitchFamily="34" charset="0"/>
+              </a:defRPr>
+            </a:lvl5pPr>
+            <a:lvl6pPr marL="2514600" indent="-228600" algn="l" defTabSz="914400" rtl="0" eaLnBrk="1" latinLnBrk="0" hangingPunct="1">
+              <a:lnSpc>
+                <a:spcPct val="90000"/>
+              </a:lnSpc>
+              <a:spcBef>
+                <a:spcPts val="500"/>
+              </a:spcBef>
+              <a:buFont typeface="Arial" panose="020B0604020202020204" pitchFamily="34" charset="0"/>
+              <a:buChar char="•"/>
+              <a:defRPr sz="1800" kern="1200">
+                <a:solidFill>
+                  <a:schemeClr val="tx1"/>
+                </a:solidFill>
+                <a:latin typeface="+mn-lt"/>
+                <a:ea typeface="+mn-ea"/>
+                <a:cs typeface="+mn-cs"/>
+              </a:defRPr>
+            </a:lvl6pPr>
+            <a:lvl7pPr marL="2971800" indent="-228600" algn="l" defTabSz="914400" rtl="0" eaLnBrk="1" latinLnBrk="0" hangingPunct="1">
+              <a:lnSpc>
+                <a:spcPct val="90000"/>
+              </a:lnSpc>
+              <a:spcBef>
+                <a:spcPts val="500"/>
+              </a:spcBef>
+              <a:buFont typeface="Arial" panose="020B0604020202020204" pitchFamily="34" charset="0"/>
+              <a:buChar char="•"/>
+              <a:defRPr sz="1800" kern="1200">
+                <a:solidFill>
+                  <a:schemeClr val="tx1"/>
+                </a:solidFill>
+                <a:latin typeface="+mn-lt"/>
+                <a:ea typeface="+mn-ea"/>
+                <a:cs typeface="+mn-cs"/>
+              </a:defRPr>
+            </a:lvl7pPr>
+            <a:lvl8pPr marL="3429000" indent="-228600" algn="l" defTabSz="914400" rtl="0" eaLnBrk="1" latinLnBrk="0" hangingPunct="1">
+              <a:lnSpc>
+                <a:spcPct val="90000"/>
+              </a:lnSpc>
+              <a:spcBef>
+                <a:spcPts val="500"/>
+              </a:spcBef>
+              <a:buFont typeface="Arial" panose="020B0604020202020204" pitchFamily="34" charset="0"/>
+              <a:buChar char="•"/>
+              <a:defRPr sz="1800" kern="1200">
+                <a:solidFill>
+                  <a:schemeClr val="tx1"/>
+                </a:solidFill>
+                <a:latin typeface="+mn-lt"/>
+                <a:ea typeface="+mn-ea"/>
+                <a:cs typeface="+mn-cs"/>
+              </a:defRPr>
+            </a:lvl8pPr>
+            <a:lvl9pPr marL="3886200" indent="-228600" algn="l" defTabSz="914400" rtl="0" eaLnBrk="1" latinLnBrk="0" hangingPunct="1">
+              <a:lnSpc>
+                <a:spcPct val="90000"/>
+              </a:lnSpc>
+              <a:spcBef>
+                <a:spcPts val="500"/>
+              </a:spcBef>
+              <a:buFont typeface="Arial" panose="020B0604020202020204" pitchFamily="34" charset="0"/>
+              <a:buChar char="•"/>
+              <a:defRPr sz="1800" kern="1200">
+                <a:solidFill>
+                  <a:schemeClr val="tx1"/>
+                </a:solidFill>
+                <a:latin typeface="+mn-lt"/>
+                <a:ea typeface="+mn-ea"/>
+                <a:cs typeface="+mn-cs"/>
+              </a:defRPr>
+            </a:lvl9pPr>
+          </a:lstStyle>
+          <a:p>
+            <a:r>
+              <a:rPr lang="lv-LV" sz="2800" dirty="0"/>
+              <a:t>Anotācija</a:t>
+            </a:r>
+          </a:p>
+        </p:txBody>
+      </p:sp>
+    </p:spTree>
+    <p:extLst>
+      <p:ext uri="{BB962C8B-B14F-4D97-AF65-F5344CB8AC3E}">
+        <p14:creationId xmlns:p14="http://schemas.microsoft.com/office/powerpoint/2010/main" val="2000448290"/>
+      </p:ext>
+    </p:extLst>
+  </p:cSld>
+  <p:clrMapOvr>
+    <a:masterClrMapping/>
+  </p:clrMapOvr>
+</p:sld>
+</file>
+
+<file path=ppt/slides/slide9.xml><?xml version="1.0" encoding="utf-8"?>
+<p:sld xmlns:a="http://schemas.openxmlformats.org/drawingml/2006/main" xmlns:r="http://schemas.openxmlformats.org/officeDocument/2006/relationships" xmlns:p="http://schemas.openxmlformats.org/presentationml/2006/main">
+  <p:cSld>
+    <p:spTree>
+      <p:nvGrpSpPr>
+        <p:cNvPr id="1" name="">
+          <a:extLst>
+            <a:ext uri="{FF2B5EF4-FFF2-40B4-BE49-F238E27FC236}">
+              <a16:creationId xmlns:a16="http://schemas.microsoft.com/office/drawing/2014/main" id="{735FF4E0-D2FC-1A1C-EC43-0AE75520B773}"/>
+            </a:ext>
+          </a:extLst>
+        </p:cNvPr>
+        <p:cNvGrpSpPr/>
+        <p:nvPr/>
+      </p:nvGrpSpPr>
+      <p:grpSpPr>
+        <a:xfrm>
+          <a:off x="0" y="0"/>
+          <a:ext cx="0" cy="0"/>
+          <a:chOff x="0" y="0"/>
+          <a:chExt cx="0" cy="0"/>
+        </a:xfrm>
+      </p:grpSpPr>
+      <p:sp>
+        <p:nvSpPr>
+          <p:cNvPr id="2" name="Virsraksts 1">
+            <a:extLst>
+              <a:ext uri="{FF2B5EF4-FFF2-40B4-BE49-F238E27FC236}">
+                <a16:creationId xmlns:a16="http://schemas.microsoft.com/office/drawing/2014/main" id="{1841233A-D097-A297-C3EC-CA7E13CF1F05}"/>
+              </a:ext>
+            </a:extLst>
+          </p:cNvPr>
+          <p:cNvSpPr>
+            <a:spLocks noGrp="1"/>
+          </p:cNvSpPr>
+          <p:nvPr>
+            <p:ph type="title"/>
+          </p:nvPr>
+        </p:nvSpPr>
+        <p:spPr/>
+        <p:txBody>
+          <a:bodyPr/>
+          <a:lstStyle/>
+          <a:p>
+            <a:r>
+              <a:rPr lang="lv-LV" dirty="0"/>
+              <a:t>Ainas – Sākuma aina</a:t>
+            </a:r>
+          </a:p>
+        </p:txBody>
+      </p:sp>
+      <p:sp>
+        <p:nvSpPr>
+          <p:cNvPr id="7" name="Teksta vietturis 15">
+            <a:extLst>
+              <a:ext uri="{FF2B5EF4-FFF2-40B4-BE49-F238E27FC236}">
+                <a16:creationId xmlns:a16="http://schemas.microsoft.com/office/drawing/2014/main" id="{A44C5005-1E13-95C1-CCEF-59EE2E74B16F}"/>
+              </a:ext>
+            </a:extLst>
+          </p:cNvPr>
+          <p:cNvSpPr txBox="1">
+            <a:spLocks/>
+          </p:cNvSpPr>
+          <p:nvPr/>
+        </p:nvSpPr>
+        <p:spPr>
+          <a:xfrm>
+            <a:off x="838199" y="3871737"/>
+            <a:ext cx="3716548" cy="844707"/>
+          </a:xfrm>
+          <a:prstGeom prst="rect">
+            <a:avLst/>
+          </a:prstGeom>
+        </p:spPr>
+        <p:txBody>
+          <a:bodyPr vert="horz" lIns="91440" tIns="45720" rIns="91440" bIns="45720" rtlCol="0" anchor="t">
+            <a:noAutofit/>
+          </a:bodyPr>
+          <a:lstStyle>
+            <a:lvl1pPr marL="0" indent="0" algn="l" defTabSz="914400" rtl="0" eaLnBrk="1" latinLnBrk="0" hangingPunct="1">
+              <a:lnSpc>
+                <a:spcPct val="100000"/>
+              </a:lnSpc>
+              <a:spcBef>
+                <a:spcPts val="1000"/>
+              </a:spcBef>
+              <a:buFont typeface="Arial" panose="020B0604020202020204" pitchFamily="34" charset="0"/>
+              <a:buNone/>
+              <a:defRPr sz="1200" kern="1200">
+                <a:solidFill>
+                  <a:schemeClr val="bg1"/>
+                </a:solidFill>
+                <a:latin typeface="Calibri" panose="020F0502020204030204" pitchFamily="34" charset="0"/>
+                <a:ea typeface="+mn-ea"/>
+                <a:cs typeface="Calibri" panose="020F0502020204030204" pitchFamily="34" charset="0"/>
+              </a:defRPr>
+            </a:lvl1pPr>
+            <a:lvl2pPr marL="685800" indent="-228600" algn="l" defTabSz="914400" rtl="0" eaLnBrk="1" latinLnBrk="0" hangingPunct="1">
+              <a:lnSpc>
+                <a:spcPct val="90000"/>
+              </a:lnSpc>
+              <a:spcBef>
+                <a:spcPts val="500"/>
+              </a:spcBef>
+              <a:buFont typeface="Arial" panose="020B0604020202020204" pitchFamily="34" charset="0"/>
+              <a:buChar char="•"/>
+              <a:defRPr sz="2400" kern="1200">
+                <a:solidFill>
+                  <a:schemeClr val="tx1"/>
+                </a:solidFill>
+                <a:latin typeface="Calibri" panose="020F0502020204030204" pitchFamily="34" charset="0"/>
+                <a:ea typeface="+mn-ea"/>
+                <a:cs typeface="Calibri" panose="020F0502020204030204" pitchFamily="34" charset="0"/>
+              </a:defRPr>
+            </a:lvl2pPr>
+            <a:lvl3pPr marL="1143000" indent="-228600" algn="l" defTabSz="914400" rtl="0" eaLnBrk="1" latinLnBrk="0" hangingPunct="1">
+              <a:lnSpc>
+                <a:spcPct val="90000"/>
+              </a:lnSpc>
+              <a:spcBef>
+                <a:spcPts val="500"/>
+              </a:spcBef>
+              <a:buFont typeface="Arial" panose="020B0604020202020204" pitchFamily="34" charset="0"/>
+              <a:buChar char="•"/>
+              <a:defRPr sz="2000" kern="1200">
+                <a:solidFill>
+                  <a:schemeClr val="tx1"/>
+                </a:solidFill>
+                <a:latin typeface="Calibri" panose="020F0502020204030204" pitchFamily="34" charset="0"/>
+                <a:ea typeface="+mn-ea"/>
+                <a:cs typeface="Calibri" panose="020F0502020204030204" pitchFamily="34" charset="0"/>
+              </a:defRPr>
+            </a:lvl3pPr>
+            <a:lvl4pPr marL="1600200" indent="-228600" algn="l" defTabSz="914400" rtl="0" eaLnBrk="1" latinLnBrk="0" hangingPunct="1">
+              <a:lnSpc>
+                <a:spcPct val="90000"/>
+              </a:lnSpc>
+              <a:spcBef>
+                <a:spcPts val="500"/>
+              </a:spcBef>
+              <a:buFont typeface="Arial" panose="020B0604020202020204" pitchFamily="34" charset="0"/>
+              <a:buChar char="•"/>
+              <a:defRPr sz="1800" kern="1200">
+                <a:solidFill>
+                  <a:schemeClr val="tx1"/>
+                </a:solidFill>
+                <a:latin typeface="Calibri" panose="020F0502020204030204" pitchFamily="34" charset="0"/>
+                <a:ea typeface="+mn-ea"/>
+                <a:cs typeface="Calibri" panose="020F0502020204030204" pitchFamily="34" charset="0"/>
+              </a:defRPr>
+            </a:lvl4pPr>
+            <a:lvl5pPr marL="2057400" indent="-228600" algn="l" defTabSz="914400" rtl="0" eaLnBrk="1" latinLnBrk="0" hangingPunct="1">
+              <a:lnSpc>
+                <a:spcPct val="90000"/>
+              </a:lnSpc>
+              <a:spcBef>
+                <a:spcPts val="500"/>
+              </a:spcBef>
+              <a:buFont typeface="Arial" panose="020B0604020202020204" pitchFamily="34" charset="0"/>
+              <a:buChar char="•"/>
+              <a:defRPr sz="1800" kern="1200">
+                <a:solidFill>
+                  <a:schemeClr val="tx1"/>
+                </a:solidFill>
+                <a:latin typeface="Calibri" panose="020F0502020204030204" pitchFamily="34" charset="0"/>
+                <a:ea typeface="+mn-ea"/>
+                <a:cs typeface="Calibri" panose="020F0502020204030204" pitchFamily="34" charset="0"/>
+              </a:defRPr>
+            </a:lvl5pPr>
+            <a:lvl6pPr marL="2514600" indent="-228600" algn="l" defTabSz="914400" rtl="0" eaLnBrk="1" latinLnBrk="0" hangingPunct="1">
+              <a:lnSpc>
+                <a:spcPct val="90000"/>
+              </a:lnSpc>
+              <a:spcBef>
+                <a:spcPts val="500"/>
+              </a:spcBef>
+              <a:buFont typeface="Arial" panose="020B0604020202020204" pitchFamily="34" charset="0"/>
+              <a:buChar char="•"/>
+              <a:defRPr sz="1800" kern="1200">
+                <a:solidFill>
+                  <a:schemeClr val="tx1"/>
+                </a:solidFill>
+                <a:latin typeface="+mn-lt"/>
+                <a:ea typeface="+mn-ea"/>
+                <a:cs typeface="+mn-cs"/>
+              </a:defRPr>
+            </a:lvl6pPr>
+            <a:lvl7pPr marL="2971800" indent="-228600" algn="l" defTabSz="914400" rtl="0" eaLnBrk="1" latinLnBrk="0" hangingPunct="1">
+              <a:lnSpc>
+                <a:spcPct val="90000"/>
+              </a:lnSpc>
+              <a:spcBef>
+                <a:spcPts val="500"/>
+              </a:spcBef>
+              <a:buFont typeface="Arial" panose="020B0604020202020204" pitchFamily="34" charset="0"/>
+              <a:buChar char="•"/>
+              <a:defRPr sz="1800" kern="1200">
+                <a:solidFill>
+                  <a:schemeClr val="tx1"/>
+                </a:solidFill>
+                <a:latin typeface="+mn-lt"/>
+                <a:ea typeface="+mn-ea"/>
+                <a:cs typeface="+mn-cs"/>
+              </a:defRPr>
+            </a:lvl7pPr>
+            <a:lvl8pPr marL="3429000" indent="-228600" algn="l" defTabSz="914400" rtl="0" eaLnBrk="1" latinLnBrk="0" hangingPunct="1">
+              <a:lnSpc>
+                <a:spcPct val="90000"/>
+              </a:lnSpc>
+              <a:spcBef>
+                <a:spcPts val="500"/>
+              </a:spcBef>
+              <a:buFont typeface="Arial" panose="020B0604020202020204" pitchFamily="34" charset="0"/>
+              <a:buChar char="•"/>
+              <a:defRPr sz="1800" kern="1200">
+                <a:solidFill>
+                  <a:schemeClr val="tx1"/>
+                </a:solidFill>
+                <a:latin typeface="+mn-lt"/>
+                <a:ea typeface="+mn-ea"/>
+                <a:cs typeface="+mn-cs"/>
+              </a:defRPr>
+            </a:lvl8pPr>
+            <a:lvl9pPr marL="3886200" indent="-228600" algn="l" defTabSz="914400" rtl="0" eaLnBrk="1" latinLnBrk="0" hangingPunct="1">
+              <a:lnSpc>
+                <a:spcPct val="90000"/>
+              </a:lnSpc>
+              <a:spcBef>
+                <a:spcPts val="500"/>
+              </a:spcBef>
+              <a:buFont typeface="Arial" panose="020B0604020202020204" pitchFamily="34" charset="0"/>
+              <a:buChar char="•"/>
+              <a:defRPr sz="1800" kern="1200">
+                <a:solidFill>
+                  <a:schemeClr val="tx1"/>
+                </a:solidFill>
+                <a:latin typeface="+mn-lt"/>
+                <a:ea typeface="+mn-ea"/>
+                <a:cs typeface="+mn-cs"/>
+              </a:defRPr>
+            </a:lvl9pPr>
+          </a:lstStyle>
+          <a:p>
+            <a:r>
+              <a:rPr lang="lv-LV" sz="2800" dirty="0"/>
+              <a:t>Izejas dialogs</a:t>
+            </a:r>
+          </a:p>
+        </p:txBody>
+      </p:sp>
+      <p:pic>
+        <p:nvPicPr>
+          <p:cNvPr id="4" name="Attēls 3">
+            <a:extLst>
+              <a:ext uri="{FF2B5EF4-FFF2-40B4-BE49-F238E27FC236}">
+                <a16:creationId xmlns:a16="http://schemas.microsoft.com/office/drawing/2014/main" id="{A990602B-7236-E340-C0BB-404F1257FC34}"/>
+              </a:ext>
+            </a:extLst>
+          </p:cNvPr>
+          <p:cNvPicPr>
+            <a:picLocks noChangeAspect="1"/>
+          </p:cNvPicPr>
+          <p:nvPr/>
+        </p:nvPicPr>
+        <p:blipFill>
+          <a:blip r:embed="rId2"/>
+          <a:stretch>
+            <a:fillRect/>
+          </a:stretch>
+        </p:blipFill>
+        <p:spPr>
+          <a:xfrm>
+            <a:off x="5208225" y="0"/>
             <a:ext cx="6709860" cy="6858000"/>
           </a:xfrm>
           <a:prstGeom prst="rect">
@@ -9926,7 +16646,7 @@
     </p:spTree>
     <p:extLst>
       <p:ext uri="{BB962C8B-B14F-4D97-AF65-F5344CB8AC3E}">
-        <p14:creationId xmlns:p14="http://schemas.microsoft.com/office/powerpoint/2010/main" val="2000448290"/>
+        <p14:creationId xmlns:p14="http://schemas.microsoft.com/office/powerpoint/2010/main" val="700774404"/>
       </p:ext>
     </p:extLst>
   </p:cSld>
